--- a/Reporting/Claude Presents/Deck6_Assistant/Railway_Guide_Lessons_and_Build_Menu_Explained.pptx
+++ b/Reporting/Claude Presents/Deck6_Assistant/Railway_Guide_Lessons_and_Build_Menu_Explained.pptx
@@ -21,6 +21,13 @@
     <p:sldId id="269" r:id="rId20"/>
     <p:sldId id="270" r:id="rId21"/>
     <p:sldId id="271" r:id="rId22"/>
+    <p:sldId id="272" r:id="rId23"/>
+    <p:sldId id="273" r:id="rId24"/>
+    <p:sldId id="274" r:id="rId25"/>
+    <p:sldId id="275" r:id="rId26"/>
+    <p:sldId id="276" r:id="rId27"/>
+    <p:sldId id="277" r:id="rId28"/>
+    <p:sldId id="278" r:id="rId29"/>
   </p:sldIdLst>
   <p:sldSz cx="12192000" cy="6858000" type="screen4x3"/>
   <p:notesSz cx="6858000" cy="9144000"/>
@@ -12469,6 +12476,3847 @@
 </p:sld>
 </file>
 
+<file path=ppt/slides/slide17.xml><?xml version="1.0" encoding="utf-8"?>
+<p:sld xmlns:a="http://schemas.openxmlformats.org/drawingml/2006/main" xmlns:p="http://schemas.openxmlformats.org/presentationml/2006/main" xmlns:r="http://schemas.openxmlformats.org/officeDocument/2006/relationships">
+  <p:cSld>
+    <p:bg>
+      <p:bgPr>
+        <a:solidFill>
+          <a:srgbClr val="1E2126"/>
+        </a:solidFill>
+        <a:effectLst/>
+      </p:bgPr>
+    </p:bg>
+    <p:spTree>
+      <p:nvGrpSpPr>
+        <p:cNvPr id="1" name=""/>
+        <p:cNvGrpSpPr/>
+        <p:nvPr/>
+      </p:nvGrpSpPr>
+      <p:grpSpPr/>
+      <p:sp>
+        <p:nvSpPr>
+          <p:cNvPr id="2" name="TITLE"/>
+          <p:cNvSpPr>
+            <a:spLocks noGrp="1"/>
+          </p:cNvSpPr>
+          <p:nvPr>
+            <p:ph type="title"/>
+          </p:nvPr>
+        </p:nvSpPr>
+        <p:spPr>
+          <a:xfrm>
+            <a:off x="548640" y="365760"/>
+            <a:ext cx="9326880" cy="731520"/>
+          </a:xfrm>
+        </p:spPr>
+        <p:txBody>
+          <a:bodyPr wrap="square" anchor="ctr" lIns="0" rIns="0" tIns="0" bIns="0">
+            <a:noAutofit/>
+          </a:bodyPr>
+          <a:lstStyle/>
+          <a:p>
+            <a:pPr algn="l"/>
+            <a:r>
+              <a:rPr sz="3600" b="1" i="0" lang="en-GB">
+                <a:solidFill>
+                  <a:srgbClr val="F2F2F2"/>
+                </a:solidFill>
+                <a:latin typeface="Arial"/>
+              </a:rPr>
+              <a:t>A home for rail</a:t>
+            </a:r>
+          </a:p>
+        </p:txBody>
+      </p:sp>
+      <p:sp>
+        <p:nvSpPr>
+          <p:cNvPr id="3" name="CHIP"/>
+          <p:cNvSpPr/>
+          <p:nvPr/>
+        </p:nvSpPr>
+        <p:spPr>
+          <a:xfrm>
+            <a:off x="10088575" y="530352"/>
+            <a:ext cx="1554480" cy="365760"/>
+          </a:xfrm>
+          <a:prstGeom prst="roundRect">
+            <a:avLst>
+              <a:gd name="adj" fmla="val 30000"/>
+            </a:avLst>
+          </a:prstGeom>
+          <a:solidFill>
+            <a:srgbClr val="B084F5"/>
+          </a:solidFill>
+          <a:ln>
+            <a:noFill/>
+          </a:ln>
+        </p:spPr>
+        <p:txBody>
+          <a:bodyPr rtlCol="0" anchor="ctr" wrap="square" lIns="54864" tIns="0" rIns="54864" bIns="0">
+            <a:noAutofit/>
+          </a:bodyPr>
+          <a:lstStyle/>
+          <a:p>
+            <a:pPr algn="ctr"/>
+            <a:r>
+              <a:rPr sz="1400" b="1" i="0" lang="en-GB">
+                <a:solidFill>
+                  <a:srgbClr val="101418"/>
+                </a:solidFill>
+                <a:latin typeface="Arial"/>
+              </a:rPr>
+              <a:t>PROPOSED</a:t>
+            </a:r>
+          </a:p>
+        </p:txBody>
+      </p:sp>
+      <p:grpSp>
+        <p:nvGrpSpPr>
+          <p:cNvPr id="4" name="Mock build menu tab strip" descr="A mock build menu. A strip of grey tabs includes the vanilla Transport tab. Beside it is a highlighted extra tab with a train icon, labelled: Rail tab, name undecided. Below the strip is an empty grid of build items."/>
+          <p:cNvGrpSpPr/>
+          <p:nvPr/>
+        </p:nvGrpSpPr>
+        <p:grpSpPr>
+          <a:xfrm>
+            <a:off x="822960" y="1508760"/>
+            <a:ext cx="10543032" cy="3429000"/>
+            <a:chOff x="822960" y="1508760"/>
+            <a:chExt cx="10543032" cy="3429000"/>
+          </a:xfrm>
+        </p:grpSpPr>
+        <p:sp>
+          <p:nvSpPr>
+            <p:cNvPr id="5" name="build menu panel"/>
+            <p:cNvSpPr/>
+            <p:nvPr/>
+          </p:nvSpPr>
+          <p:spPr>
+            <a:xfrm>
+              <a:off x="822960" y="1508760"/>
+              <a:ext cx="10543032" cy="3429000"/>
+            </a:xfrm>
+            <a:prstGeom prst="roundRect">
+              <a:avLst>
+                <a:gd name="adj" fmla="val 2666"/>
+              </a:avLst>
+            </a:prstGeom>
+            <a:solidFill>
+              <a:srgbClr val="2B2F36"/>
+            </a:solidFill>
+            <a:ln w="25400">
+              <a:solidFill>
+                <a:srgbClr val="4A515B"/>
+              </a:solidFill>
+            </a:ln>
+          </p:spPr>
+          <p:txBody>
+            <a:bodyPr rtlCol="0" anchor="ctr"/>
+            <a:lstStyle/>
+            <a:p>
+              <a:pPr algn="ctr"/>
+            </a:p>
+          </p:txBody>
+        </p:sp>
+        <p:sp>
+          <p:nvSpPr>
+            <p:cNvPr id="6" name="other tab"/>
+            <p:cNvSpPr/>
+            <p:nvPr/>
+          </p:nvSpPr>
+          <p:spPr>
+            <a:xfrm>
+              <a:off x="1097280" y="1691640"/>
+              <a:ext cx="1051560" cy="777240"/>
+            </a:xfrm>
+            <a:prstGeom prst="round2SameRect">
+              <a:avLst>
+                <a:gd name="adj1" fmla="val 22000"/>
+                <a:gd name="adj2" fmla="val 0"/>
+              </a:avLst>
+            </a:prstGeom>
+            <a:solidFill>
+              <a:srgbClr val="343A43"/>
+            </a:solidFill>
+            <a:ln w="19050">
+              <a:solidFill>
+                <a:srgbClr val="4A515B"/>
+              </a:solidFill>
+            </a:ln>
+          </p:spPr>
+          <p:txBody>
+            <a:bodyPr rtlCol="0" anchor="ctr"/>
+            <a:lstStyle/>
+            <a:p>
+              <a:pPr algn="ctr"/>
+            </a:p>
+          </p:txBody>
+        </p:sp>
+        <p:sp>
+          <p:nvSpPr>
+            <p:cNvPr id="7" name="other tab icon"/>
+            <p:cNvSpPr/>
+            <p:nvPr/>
+          </p:nvSpPr>
+          <p:spPr>
+            <a:xfrm>
+              <a:off x="1371600" y="1965960"/>
+              <a:ext cx="502920" cy="201168"/>
+            </a:xfrm>
+            <a:prstGeom prst="roundRect">
+              <a:avLst>
+                <a:gd name="adj" fmla="val 22727"/>
+              </a:avLst>
+            </a:prstGeom>
+            <a:solidFill>
+              <a:srgbClr val="4A515B"/>
+            </a:solidFill>
+            <a:ln>
+              <a:noFill/>
+            </a:ln>
+          </p:spPr>
+          <p:txBody>
+            <a:bodyPr rtlCol="0" anchor="ctr"/>
+            <a:lstStyle/>
+            <a:p>
+              <a:pPr algn="ctr"/>
+            </a:p>
+          </p:txBody>
+        </p:sp>
+        <p:sp>
+          <p:nvSpPr>
+            <p:cNvPr id="8" name="other tab"/>
+            <p:cNvSpPr/>
+            <p:nvPr/>
+          </p:nvSpPr>
+          <p:spPr>
+            <a:xfrm>
+              <a:off x="2258568" y="1691640"/>
+              <a:ext cx="1051560" cy="777240"/>
+            </a:xfrm>
+            <a:prstGeom prst="round2SameRect">
+              <a:avLst>
+                <a:gd name="adj1" fmla="val 22000"/>
+                <a:gd name="adj2" fmla="val 0"/>
+              </a:avLst>
+            </a:prstGeom>
+            <a:solidFill>
+              <a:srgbClr val="343A43"/>
+            </a:solidFill>
+            <a:ln w="19050">
+              <a:solidFill>
+                <a:srgbClr val="4A515B"/>
+              </a:solidFill>
+            </a:ln>
+          </p:spPr>
+          <p:txBody>
+            <a:bodyPr rtlCol="0" anchor="ctr"/>
+            <a:lstStyle/>
+            <a:p>
+              <a:pPr algn="ctr"/>
+            </a:p>
+          </p:txBody>
+        </p:sp>
+        <p:sp>
+          <p:nvSpPr>
+            <p:cNvPr id="9" name="other tab icon"/>
+            <p:cNvSpPr/>
+            <p:nvPr/>
+          </p:nvSpPr>
+          <p:spPr>
+            <a:xfrm>
+              <a:off x="2532887" y="1965960"/>
+              <a:ext cx="502920" cy="201168"/>
+            </a:xfrm>
+            <a:prstGeom prst="roundRect">
+              <a:avLst>
+                <a:gd name="adj" fmla="val 22727"/>
+              </a:avLst>
+            </a:prstGeom>
+            <a:solidFill>
+              <a:srgbClr val="4A515B"/>
+            </a:solidFill>
+            <a:ln>
+              <a:noFill/>
+            </a:ln>
+          </p:spPr>
+          <p:txBody>
+            <a:bodyPr rtlCol="0" anchor="ctr"/>
+            <a:lstStyle/>
+            <a:p>
+              <a:pPr algn="ctr"/>
+            </a:p>
+          </p:txBody>
+        </p:sp>
+        <p:sp>
+          <p:nvSpPr>
+            <p:cNvPr id="10" name="other tab"/>
+            <p:cNvSpPr/>
+            <p:nvPr/>
+          </p:nvSpPr>
+          <p:spPr>
+            <a:xfrm>
+              <a:off x="3419856" y="1691640"/>
+              <a:ext cx="1051560" cy="777240"/>
+            </a:xfrm>
+            <a:prstGeom prst="round2SameRect">
+              <a:avLst>
+                <a:gd name="adj1" fmla="val 22000"/>
+                <a:gd name="adj2" fmla="val 0"/>
+              </a:avLst>
+            </a:prstGeom>
+            <a:solidFill>
+              <a:srgbClr val="343A43"/>
+            </a:solidFill>
+            <a:ln w="19050">
+              <a:solidFill>
+                <a:srgbClr val="4A515B"/>
+              </a:solidFill>
+            </a:ln>
+          </p:spPr>
+          <p:txBody>
+            <a:bodyPr rtlCol="0" anchor="ctr"/>
+            <a:lstStyle/>
+            <a:p>
+              <a:pPr algn="ctr"/>
+            </a:p>
+          </p:txBody>
+        </p:sp>
+        <p:sp>
+          <p:nvSpPr>
+            <p:cNvPr id="11" name="other tab icon"/>
+            <p:cNvSpPr/>
+            <p:nvPr/>
+          </p:nvSpPr>
+          <p:spPr>
+            <a:xfrm>
+              <a:off x="3694176" y="1965960"/>
+              <a:ext cx="502920" cy="201168"/>
+            </a:xfrm>
+            <a:prstGeom prst="roundRect">
+              <a:avLst>
+                <a:gd name="adj" fmla="val 22727"/>
+              </a:avLst>
+            </a:prstGeom>
+            <a:solidFill>
+              <a:srgbClr val="4A515B"/>
+            </a:solidFill>
+            <a:ln>
+              <a:noFill/>
+            </a:ln>
+          </p:spPr>
+          <p:txBody>
+            <a:bodyPr rtlCol="0" anchor="ctr"/>
+            <a:lstStyle/>
+            <a:p>
+              <a:pPr algn="ctr"/>
+            </a:p>
+          </p:txBody>
+        </p:sp>
+        <p:sp>
+          <p:nvSpPr>
+            <p:cNvPr id="12" name="Transport tab"/>
+            <p:cNvSpPr/>
+            <p:nvPr/>
+          </p:nvSpPr>
+          <p:spPr>
+            <a:xfrm>
+              <a:off x="4581144" y="1691640"/>
+              <a:ext cx="1920240" cy="777240"/>
+            </a:xfrm>
+            <a:prstGeom prst="round2SameRect">
+              <a:avLst>
+                <a:gd name="adj1" fmla="val 22000"/>
+                <a:gd name="adj2" fmla="val 0"/>
+              </a:avLst>
+            </a:prstGeom>
+            <a:solidFill>
+              <a:srgbClr val="4A515B"/>
+            </a:solidFill>
+            <a:ln w="19050">
+              <a:solidFill>
+                <a:srgbClr val="9AA0A6"/>
+              </a:solidFill>
+            </a:ln>
+          </p:spPr>
+          <p:txBody>
+            <a:bodyPr rtlCol="0" anchor="ctr"/>
+            <a:lstStyle/>
+            <a:p>
+              <a:pPr algn="ctr"/>
+            </a:p>
+          </p:txBody>
+        </p:sp>
+        <p:sp>
+          <p:nvSpPr>
+            <p:cNvPr id="13" name="tab label"/>
+            <p:cNvSpPr txBox="1"/>
+            <p:nvPr/>
+          </p:nvSpPr>
+          <p:spPr>
+            <a:xfrm>
+              <a:off x="4581144" y="1691640"/>
+              <a:ext cx="1920240" cy="777240"/>
+            </a:xfrm>
+            <a:prstGeom prst="rect">
+              <a:avLst/>
+            </a:prstGeom>
+            <a:noFill/>
+          </p:spPr>
+          <p:txBody>
+            <a:bodyPr wrap="square" anchor="ctr" lIns="18288" tIns="9144" rIns="18288" bIns="9144">
+              <a:noAutofit/>
+            </a:bodyPr>
+            <a:lstStyle/>
+            <a:p>
+              <a:pPr algn="ctr"/>
+              <a:r>
+                <a:rPr sz="2000" b="1" i="0" lang="en-GB">
+                  <a:solidFill>
+                    <a:srgbClr val="F2F2F2"/>
+                  </a:solidFill>
+                  <a:latin typeface="Arial"/>
+                </a:rPr>
+                <a:t>Transport</a:t>
+              </a:r>
+            </a:p>
+          </p:txBody>
+        </p:sp>
+        <p:sp>
+          <p:nvSpPr>
+            <p:cNvPr id="14" name="Rail tab"/>
+            <p:cNvSpPr/>
+            <p:nvPr/>
+          </p:nvSpPr>
+          <p:spPr>
+            <a:xfrm>
+              <a:off x="6684264" y="1600200"/>
+              <a:ext cx="4434840" cy="868680"/>
+            </a:xfrm>
+            <a:prstGeom prst="round2SameRect">
+              <a:avLst>
+                <a:gd name="adj1" fmla="val 22000"/>
+                <a:gd name="adj2" fmla="val 0"/>
+              </a:avLst>
+            </a:prstGeom>
+            <a:solidFill>
+              <a:srgbClr val="F28C28"/>
+            </a:solidFill>
+            <a:ln>
+              <a:noFill/>
+            </a:ln>
+          </p:spPr>
+          <p:txBody>
+            <a:bodyPr rtlCol="0" anchor="ctr"/>
+            <a:lstStyle/>
+            <a:p>
+              <a:pPr algn="ctr"/>
+            </a:p>
+          </p:txBody>
+        </p:sp>
+        <p:sp>
+          <p:nvSpPr>
+            <p:cNvPr id="15" name="tab train cab"/>
+            <p:cNvSpPr/>
+            <p:nvPr/>
+          </p:nvSpPr>
+          <p:spPr>
+            <a:xfrm>
+              <a:off x="6912864" y="1959559"/>
+              <a:ext cx="260604" cy="225856"/>
+            </a:xfrm>
+            <a:prstGeom prst="roundRect">
+              <a:avLst>
+                <a:gd name="adj" fmla="val 11538"/>
+              </a:avLst>
+            </a:prstGeom>
+            <a:solidFill>
+              <a:srgbClr val="101418"/>
+            </a:solidFill>
+            <a:ln>
+              <a:noFill/>
+            </a:ln>
+          </p:spPr>
+          <p:txBody>
+            <a:bodyPr rtlCol="0" anchor="ctr"/>
+            <a:lstStyle/>
+            <a:p>
+              <a:pPr algn="ctr"/>
+            </a:p>
+          </p:txBody>
+        </p:sp>
+        <p:sp>
+          <p:nvSpPr>
+            <p:cNvPr id="16" name="tab train boiler"/>
+            <p:cNvSpPr/>
+            <p:nvPr/>
+          </p:nvSpPr>
+          <p:spPr>
+            <a:xfrm>
+              <a:off x="7156094" y="2029053"/>
+              <a:ext cx="486460" cy="156362"/>
+            </a:xfrm>
+            <a:prstGeom prst="roundRect">
+              <a:avLst>
+                <a:gd name="adj" fmla="val 44444"/>
+              </a:avLst>
+            </a:prstGeom>
+            <a:solidFill>
+              <a:srgbClr val="101418"/>
+            </a:solidFill>
+            <a:ln>
+              <a:noFill/>
+            </a:ln>
+          </p:spPr>
+          <p:txBody>
+            <a:bodyPr rtlCol="0" anchor="ctr"/>
+            <a:lstStyle/>
+            <a:p>
+              <a:pPr algn="ctr"/>
+            </a:p>
+          </p:txBody>
+        </p:sp>
+        <p:sp>
+          <p:nvSpPr>
+            <p:cNvPr id="17" name="tab train chimney"/>
+            <p:cNvSpPr/>
+            <p:nvPr/>
+          </p:nvSpPr>
+          <p:spPr>
+            <a:xfrm>
+              <a:off x="7520940" y="1890064"/>
+              <a:ext cx="78181" cy="147675"/>
+            </a:xfrm>
+            <a:prstGeom prst="rect">
+              <a:avLst/>
+            </a:prstGeom>
+            <a:solidFill>
+              <a:srgbClr val="3A3F47"/>
+            </a:solidFill>
+            <a:ln w="9525">
+              <a:solidFill>
+                <a:srgbClr val="9AA0A6"/>
+              </a:solidFill>
+            </a:ln>
+          </p:spPr>
+          <p:txBody>
+            <a:bodyPr rtlCol="0" anchor="ctr"/>
+            <a:lstStyle/>
+            <a:p>
+              <a:pPr algn="ctr"/>
+            </a:p>
+          </p:txBody>
+        </p:sp>
+        <p:sp>
+          <p:nvSpPr>
+            <p:cNvPr id="18" name="tab train frame"/>
+            <p:cNvSpPr/>
+            <p:nvPr/>
+          </p:nvSpPr>
+          <p:spPr>
+            <a:xfrm>
+              <a:off x="6912864" y="2185416"/>
+              <a:ext cx="729691" cy="34747"/>
+            </a:xfrm>
+            <a:prstGeom prst="rect">
+              <a:avLst/>
+            </a:prstGeom>
+            <a:solidFill>
+              <a:srgbClr val="3A3F47"/>
+            </a:solidFill>
+            <a:ln w="9525">
+              <a:solidFill>
+                <a:srgbClr val="9AA0A6"/>
+              </a:solidFill>
+            </a:ln>
+          </p:spPr>
+          <p:txBody>
+            <a:bodyPr rtlCol="0" anchor="ctr"/>
+            <a:lstStyle/>
+            <a:p>
+              <a:pPr algn="ctr"/>
+            </a:p>
+          </p:txBody>
+        </p:sp>
+        <p:sp>
+          <p:nvSpPr>
+            <p:cNvPr id="19" name="tab train wheel"/>
+            <p:cNvSpPr/>
+            <p:nvPr/>
+          </p:nvSpPr>
+          <p:spPr>
+            <a:xfrm>
+              <a:off x="6982358" y="2176729"/>
+              <a:ext cx="121615" cy="121615"/>
+            </a:xfrm>
+            <a:prstGeom prst="ellipse">
+              <a:avLst/>
+            </a:prstGeom>
+            <a:solidFill>
+              <a:srgbClr val="1B1D21"/>
+            </a:solidFill>
+            <a:ln w="15875">
+              <a:solidFill>
+                <a:srgbClr val="9AA0A6"/>
+              </a:solidFill>
+            </a:ln>
+          </p:spPr>
+          <p:txBody>
+            <a:bodyPr rtlCol="0" anchor="ctr"/>
+            <a:lstStyle/>
+            <a:p>
+              <a:pPr algn="ctr"/>
+            </a:p>
+          </p:txBody>
+        </p:sp>
+        <p:sp>
+          <p:nvSpPr>
+            <p:cNvPr id="20" name="tab train wheel"/>
+            <p:cNvSpPr/>
+            <p:nvPr/>
+          </p:nvSpPr>
+          <p:spPr>
+            <a:xfrm>
+              <a:off x="7164781" y="2176729"/>
+              <a:ext cx="121615" cy="121615"/>
+            </a:xfrm>
+            <a:prstGeom prst="ellipse">
+              <a:avLst/>
+            </a:prstGeom>
+            <a:solidFill>
+              <a:srgbClr val="1B1D21"/>
+            </a:solidFill>
+            <a:ln w="15875">
+              <a:solidFill>
+                <a:srgbClr val="9AA0A6"/>
+              </a:solidFill>
+            </a:ln>
+          </p:spPr>
+          <p:txBody>
+            <a:bodyPr rtlCol="0" anchor="ctr"/>
+            <a:lstStyle/>
+            <a:p>
+              <a:pPr algn="ctr"/>
+            </a:p>
+          </p:txBody>
+        </p:sp>
+        <p:sp>
+          <p:nvSpPr>
+            <p:cNvPr id="21" name="tab train wheel"/>
+            <p:cNvSpPr/>
+            <p:nvPr/>
+          </p:nvSpPr>
+          <p:spPr>
+            <a:xfrm>
+              <a:off x="7347204" y="2176729"/>
+              <a:ext cx="121615" cy="121615"/>
+            </a:xfrm>
+            <a:prstGeom prst="ellipse">
+              <a:avLst/>
+            </a:prstGeom>
+            <a:solidFill>
+              <a:srgbClr val="1B1D21"/>
+            </a:solidFill>
+            <a:ln w="15875">
+              <a:solidFill>
+                <a:srgbClr val="9AA0A6"/>
+              </a:solidFill>
+            </a:ln>
+          </p:spPr>
+          <p:txBody>
+            <a:bodyPr rtlCol="0" anchor="ctr"/>
+            <a:lstStyle/>
+            <a:p>
+              <a:pPr algn="ctr"/>
+            </a:p>
+          </p:txBody>
+        </p:sp>
+        <p:sp>
+          <p:nvSpPr>
+            <p:cNvPr id="22" name="tab train wheel"/>
+            <p:cNvSpPr/>
+            <p:nvPr/>
+          </p:nvSpPr>
+          <p:spPr>
+            <a:xfrm>
+              <a:off x="7503566" y="2176729"/>
+              <a:ext cx="121615" cy="121615"/>
+            </a:xfrm>
+            <a:prstGeom prst="ellipse">
+              <a:avLst/>
+            </a:prstGeom>
+            <a:solidFill>
+              <a:srgbClr val="1B1D21"/>
+            </a:solidFill>
+            <a:ln w="15875">
+              <a:solidFill>
+                <a:srgbClr val="9AA0A6"/>
+              </a:solidFill>
+            </a:ln>
+          </p:spPr>
+          <p:txBody>
+            <a:bodyPr rtlCol="0" anchor="ctr"/>
+            <a:lstStyle/>
+            <a:p>
+              <a:pPr algn="ctr"/>
+            </a:p>
+          </p:txBody>
+        </p:sp>
+        <p:sp>
+          <p:nvSpPr>
+            <p:cNvPr id="23" name="tab label"/>
+            <p:cNvSpPr txBox="1"/>
+            <p:nvPr/>
+          </p:nvSpPr>
+          <p:spPr>
+            <a:xfrm>
+              <a:off x="7918704" y="1600200"/>
+              <a:ext cx="3108960" cy="868680"/>
+            </a:xfrm>
+            <a:prstGeom prst="rect">
+              <a:avLst/>
+            </a:prstGeom>
+            <a:noFill/>
+          </p:spPr>
+          <p:txBody>
+            <a:bodyPr wrap="square" anchor="ctr" lIns="18288" tIns="9144" rIns="18288" bIns="9144">
+              <a:noAutofit/>
+            </a:bodyPr>
+            <a:lstStyle/>
+            <a:p>
+              <a:pPr algn="l"/>
+              <a:r>
+                <a:rPr sz="1800" b="1" i="0" lang="en-GB">
+                  <a:solidFill>
+                    <a:srgbClr val="101418"/>
+                  </a:solidFill>
+                  <a:latin typeface="Arial"/>
+                </a:rPr>
+                <a:t>Rail tab: name undecided</a:t>
+              </a:r>
+            </a:p>
+          </p:txBody>
+        </p:sp>
+        <p:sp>
+          <p:nvSpPr>
+            <p:cNvPr id="24" name="strip rule"/>
+            <p:cNvSpPr/>
+            <p:nvPr/>
+          </p:nvSpPr>
+          <p:spPr>
+            <a:xfrm>
+              <a:off x="1097280" y="2468880"/>
+              <a:ext cx="5586983" cy="54864"/>
+            </a:xfrm>
+            <a:prstGeom prst="rect">
+              <a:avLst/>
+            </a:prstGeom>
+            <a:solidFill>
+              <a:srgbClr val="4A515B"/>
+            </a:solidFill>
+            <a:ln>
+              <a:noFill/>
+            </a:ln>
+          </p:spPr>
+          <p:txBody>
+            <a:bodyPr rtlCol="0" anchor="ctr"/>
+            <a:lstStyle/>
+            <a:p>
+              <a:pPr algn="ctr"/>
+            </a:p>
+          </p:txBody>
+        </p:sp>
+        <p:sp>
+          <p:nvSpPr>
+            <p:cNvPr id="25" name="active rule"/>
+            <p:cNvSpPr/>
+            <p:nvPr/>
+          </p:nvSpPr>
+          <p:spPr>
+            <a:xfrm>
+              <a:off x="6684264" y="2468880"/>
+              <a:ext cx="4434840" cy="54864"/>
+            </a:xfrm>
+            <a:prstGeom prst="rect">
+              <a:avLst/>
+            </a:prstGeom>
+            <a:solidFill>
+              <a:srgbClr val="F28C28"/>
+            </a:solidFill>
+            <a:ln>
+              <a:noFill/>
+            </a:ln>
+          </p:spPr>
+          <p:txBody>
+            <a:bodyPr rtlCol="0" anchor="ctr"/>
+            <a:lstStyle/>
+            <a:p>
+              <a:pPr algn="ctr"/>
+            </a:p>
+          </p:txBody>
+        </p:sp>
+        <p:sp>
+          <p:nvSpPr>
+            <p:cNvPr id="26" name="item slot"/>
+            <p:cNvSpPr/>
+            <p:nvPr/>
+          </p:nvSpPr>
+          <p:spPr>
+            <a:xfrm>
+              <a:off x="1097280" y="3017520"/>
+              <a:ext cx="987552" cy="731520"/>
+            </a:xfrm>
+            <a:prstGeom prst="roundRect">
+              <a:avLst>
+                <a:gd name="adj" fmla="val 7500"/>
+              </a:avLst>
+            </a:prstGeom>
+            <a:solidFill>
+              <a:srgbClr val="343A43"/>
+            </a:solidFill>
+            <a:ln w="12700">
+              <a:solidFill>
+                <a:srgbClr val="4A515B"/>
+              </a:solidFill>
+            </a:ln>
+          </p:spPr>
+          <p:txBody>
+            <a:bodyPr rtlCol="0" anchor="ctr"/>
+            <a:lstStyle/>
+            <a:p>
+              <a:pPr algn="ctr"/>
+            </a:p>
+          </p:txBody>
+        </p:sp>
+        <p:sp>
+          <p:nvSpPr>
+            <p:cNvPr id="27" name="item slot"/>
+            <p:cNvSpPr/>
+            <p:nvPr/>
+          </p:nvSpPr>
+          <p:spPr>
+            <a:xfrm>
+              <a:off x="2226564" y="3017520"/>
+              <a:ext cx="987552" cy="731520"/>
+            </a:xfrm>
+            <a:prstGeom prst="roundRect">
+              <a:avLst>
+                <a:gd name="adj" fmla="val 7500"/>
+              </a:avLst>
+            </a:prstGeom>
+            <a:solidFill>
+              <a:srgbClr val="343A43"/>
+            </a:solidFill>
+            <a:ln w="12700">
+              <a:solidFill>
+                <a:srgbClr val="4A515B"/>
+              </a:solidFill>
+            </a:ln>
+          </p:spPr>
+          <p:txBody>
+            <a:bodyPr rtlCol="0" anchor="ctr"/>
+            <a:lstStyle/>
+            <a:p>
+              <a:pPr algn="ctr"/>
+            </a:p>
+          </p:txBody>
+        </p:sp>
+        <p:sp>
+          <p:nvSpPr>
+            <p:cNvPr id="28" name="item slot"/>
+            <p:cNvSpPr/>
+            <p:nvPr/>
+          </p:nvSpPr>
+          <p:spPr>
+            <a:xfrm>
+              <a:off x="3355848" y="3017520"/>
+              <a:ext cx="987552" cy="731520"/>
+            </a:xfrm>
+            <a:prstGeom prst="roundRect">
+              <a:avLst>
+                <a:gd name="adj" fmla="val 7500"/>
+              </a:avLst>
+            </a:prstGeom>
+            <a:solidFill>
+              <a:srgbClr val="343A43"/>
+            </a:solidFill>
+            <a:ln w="12700">
+              <a:solidFill>
+                <a:srgbClr val="4A515B"/>
+              </a:solidFill>
+            </a:ln>
+          </p:spPr>
+          <p:txBody>
+            <a:bodyPr rtlCol="0" anchor="ctr"/>
+            <a:lstStyle/>
+            <a:p>
+              <a:pPr algn="ctr"/>
+            </a:p>
+          </p:txBody>
+        </p:sp>
+        <p:sp>
+          <p:nvSpPr>
+            <p:cNvPr id="29" name="item slot"/>
+            <p:cNvSpPr/>
+            <p:nvPr/>
+          </p:nvSpPr>
+          <p:spPr>
+            <a:xfrm>
+              <a:off x="4485132" y="3017520"/>
+              <a:ext cx="987552" cy="731520"/>
+            </a:xfrm>
+            <a:prstGeom prst="roundRect">
+              <a:avLst>
+                <a:gd name="adj" fmla="val 7500"/>
+              </a:avLst>
+            </a:prstGeom>
+            <a:solidFill>
+              <a:srgbClr val="343A43"/>
+            </a:solidFill>
+            <a:ln w="12700">
+              <a:solidFill>
+                <a:srgbClr val="4A515B"/>
+              </a:solidFill>
+            </a:ln>
+          </p:spPr>
+          <p:txBody>
+            <a:bodyPr rtlCol="0" anchor="ctr"/>
+            <a:lstStyle/>
+            <a:p>
+              <a:pPr algn="ctr"/>
+            </a:p>
+          </p:txBody>
+        </p:sp>
+        <p:sp>
+          <p:nvSpPr>
+            <p:cNvPr id="30" name="item slot"/>
+            <p:cNvSpPr/>
+            <p:nvPr/>
+          </p:nvSpPr>
+          <p:spPr>
+            <a:xfrm>
+              <a:off x="5614416" y="3017520"/>
+              <a:ext cx="987552" cy="731520"/>
+            </a:xfrm>
+            <a:prstGeom prst="roundRect">
+              <a:avLst>
+                <a:gd name="adj" fmla="val 7500"/>
+              </a:avLst>
+            </a:prstGeom>
+            <a:solidFill>
+              <a:srgbClr val="343A43"/>
+            </a:solidFill>
+            <a:ln w="12700">
+              <a:solidFill>
+                <a:srgbClr val="4A515B"/>
+              </a:solidFill>
+            </a:ln>
+          </p:spPr>
+          <p:txBody>
+            <a:bodyPr rtlCol="0" anchor="ctr"/>
+            <a:lstStyle/>
+            <a:p>
+              <a:pPr algn="ctr"/>
+            </a:p>
+          </p:txBody>
+        </p:sp>
+        <p:sp>
+          <p:nvSpPr>
+            <p:cNvPr id="31" name="item slot"/>
+            <p:cNvSpPr/>
+            <p:nvPr/>
+          </p:nvSpPr>
+          <p:spPr>
+            <a:xfrm>
+              <a:off x="6743700" y="3017520"/>
+              <a:ext cx="987552" cy="731520"/>
+            </a:xfrm>
+            <a:prstGeom prst="roundRect">
+              <a:avLst>
+                <a:gd name="adj" fmla="val 7500"/>
+              </a:avLst>
+            </a:prstGeom>
+            <a:solidFill>
+              <a:srgbClr val="343A43"/>
+            </a:solidFill>
+            <a:ln w="12700">
+              <a:solidFill>
+                <a:srgbClr val="4A515B"/>
+              </a:solidFill>
+            </a:ln>
+          </p:spPr>
+          <p:txBody>
+            <a:bodyPr rtlCol="0" anchor="ctr"/>
+            <a:lstStyle/>
+            <a:p>
+              <a:pPr algn="ctr"/>
+            </a:p>
+          </p:txBody>
+        </p:sp>
+        <p:sp>
+          <p:nvSpPr>
+            <p:cNvPr id="32" name="item slot"/>
+            <p:cNvSpPr/>
+            <p:nvPr/>
+          </p:nvSpPr>
+          <p:spPr>
+            <a:xfrm>
+              <a:off x="7872983" y="3017520"/>
+              <a:ext cx="987552" cy="731520"/>
+            </a:xfrm>
+            <a:prstGeom prst="roundRect">
+              <a:avLst>
+                <a:gd name="adj" fmla="val 7500"/>
+              </a:avLst>
+            </a:prstGeom>
+            <a:solidFill>
+              <a:srgbClr val="343A43"/>
+            </a:solidFill>
+            <a:ln w="12700">
+              <a:solidFill>
+                <a:srgbClr val="4A515B"/>
+              </a:solidFill>
+            </a:ln>
+          </p:spPr>
+          <p:txBody>
+            <a:bodyPr rtlCol="0" anchor="ctr"/>
+            <a:lstStyle/>
+            <a:p>
+              <a:pPr algn="ctr"/>
+            </a:p>
+          </p:txBody>
+        </p:sp>
+        <p:sp>
+          <p:nvSpPr>
+            <p:cNvPr id="33" name="item slot"/>
+            <p:cNvSpPr/>
+            <p:nvPr/>
+          </p:nvSpPr>
+          <p:spPr>
+            <a:xfrm>
+              <a:off x="9002268" y="3017520"/>
+              <a:ext cx="987552" cy="731520"/>
+            </a:xfrm>
+            <a:prstGeom prst="roundRect">
+              <a:avLst>
+                <a:gd name="adj" fmla="val 7500"/>
+              </a:avLst>
+            </a:prstGeom>
+            <a:solidFill>
+              <a:srgbClr val="343A43"/>
+            </a:solidFill>
+            <a:ln w="12700">
+              <a:solidFill>
+                <a:srgbClr val="4A515B"/>
+              </a:solidFill>
+            </a:ln>
+          </p:spPr>
+          <p:txBody>
+            <a:bodyPr rtlCol="0" anchor="ctr"/>
+            <a:lstStyle/>
+            <a:p>
+              <a:pPr algn="ctr"/>
+            </a:p>
+          </p:txBody>
+        </p:sp>
+        <p:sp>
+          <p:nvSpPr>
+            <p:cNvPr id="34" name="item slot"/>
+            <p:cNvSpPr/>
+            <p:nvPr/>
+          </p:nvSpPr>
+          <p:spPr>
+            <a:xfrm>
+              <a:off x="10131552" y="3017520"/>
+              <a:ext cx="987552" cy="731520"/>
+            </a:xfrm>
+            <a:prstGeom prst="roundRect">
+              <a:avLst>
+                <a:gd name="adj" fmla="val 7500"/>
+              </a:avLst>
+            </a:prstGeom>
+            <a:solidFill>
+              <a:srgbClr val="343A43"/>
+            </a:solidFill>
+            <a:ln w="12700">
+              <a:solidFill>
+                <a:srgbClr val="4A515B"/>
+              </a:solidFill>
+            </a:ln>
+          </p:spPr>
+          <p:txBody>
+            <a:bodyPr rtlCol="0" anchor="ctr"/>
+            <a:lstStyle/>
+            <a:p>
+              <a:pPr algn="ctr"/>
+            </a:p>
+          </p:txBody>
+        </p:sp>
+        <p:sp>
+          <p:nvSpPr>
+            <p:cNvPr id="35" name="item slot"/>
+            <p:cNvSpPr/>
+            <p:nvPr/>
+          </p:nvSpPr>
+          <p:spPr>
+            <a:xfrm>
+              <a:off x="1097280" y="3931920"/>
+              <a:ext cx="987552" cy="731520"/>
+            </a:xfrm>
+            <a:prstGeom prst="roundRect">
+              <a:avLst>
+                <a:gd name="adj" fmla="val 7500"/>
+              </a:avLst>
+            </a:prstGeom>
+            <a:solidFill>
+              <a:srgbClr val="343A43"/>
+            </a:solidFill>
+            <a:ln w="12700">
+              <a:solidFill>
+                <a:srgbClr val="4A515B"/>
+              </a:solidFill>
+            </a:ln>
+          </p:spPr>
+          <p:txBody>
+            <a:bodyPr rtlCol="0" anchor="ctr"/>
+            <a:lstStyle/>
+            <a:p>
+              <a:pPr algn="ctr"/>
+            </a:p>
+          </p:txBody>
+        </p:sp>
+        <p:sp>
+          <p:nvSpPr>
+            <p:cNvPr id="36" name="item slot"/>
+            <p:cNvSpPr/>
+            <p:nvPr/>
+          </p:nvSpPr>
+          <p:spPr>
+            <a:xfrm>
+              <a:off x="2226564" y="3931920"/>
+              <a:ext cx="987552" cy="731520"/>
+            </a:xfrm>
+            <a:prstGeom prst="roundRect">
+              <a:avLst>
+                <a:gd name="adj" fmla="val 7500"/>
+              </a:avLst>
+            </a:prstGeom>
+            <a:solidFill>
+              <a:srgbClr val="343A43"/>
+            </a:solidFill>
+            <a:ln w="12700">
+              <a:solidFill>
+                <a:srgbClr val="4A515B"/>
+              </a:solidFill>
+            </a:ln>
+          </p:spPr>
+          <p:txBody>
+            <a:bodyPr rtlCol="0" anchor="ctr"/>
+            <a:lstStyle/>
+            <a:p>
+              <a:pPr algn="ctr"/>
+            </a:p>
+          </p:txBody>
+        </p:sp>
+        <p:sp>
+          <p:nvSpPr>
+            <p:cNvPr id="37" name="item slot"/>
+            <p:cNvSpPr/>
+            <p:nvPr/>
+          </p:nvSpPr>
+          <p:spPr>
+            <a:xfrm>
+              <a:off x="3355848" y="3931920"/>
+              <a:ext cx="987552" cy="731520"/>
+            </a:xfrm>
+            <a:prstGeom prst="roundRect">
+              <a:avLst>
+                <a:gd name="adj" fmla="val 7500"/>
+              </a:avLst>
+            </a:prstGeom>
+            <a:solidFill>
+              <a:srgbClr val="343A43"/>
+            </a:solidFill>
+            <a:ln w="12700">
+              <a:solidFill>
+                <a:srgbClr val="4A515B"/>
+              </a:solidFill>
+            </a:ln>
+          </p:spPr>
+          <p:txBody>
+            <a:bodyPr rtlCol="0" anchor="ctr"/>
+            <a:lstStyle/>
+            <a:p>
+              <a:pPr algn="ctr"/>
+            </a:p>
+          </p:txBody>
+        </p:sp>
+        <p:sp>
+          <p:nvSpPr>
+            <p:cNvPr id="38" name="item slot"/>
+            <p:cNvSpPr/>
+            <p:nvPr/>
+          </p:nvSpPr>
+          <p:spPr>
+            <a:xfrm>
+              <a:off x="4485132" y="3931920"/>
+              <a:ext cx="987552" cy="731520"/>
+            </a:xfrm>
+            <a:prstGeom prst="roundRect">
+              <a:avLst>
+                <a:gd name="adj" fmla="val 7500"/>
+              </a:avLst>
+            </a:prstGeom>
+            <a:solidFill>
+              <a:srgbClr val="343A43"/>
+            </a:solidFill>
+            <a:ln w="12700">
+              <a:solidFill>
+                <a:srgbClr val="4A515B"/>
+              </a:solidFill>
+            </a:ln>
+          </p:spPr>
+          <p:txBody>
+            <a:bodyPr rtlCol="0" anchor="ctr"/>
+            <a:lstStyle/>
+            <a:p>
+              <a:pPr algn="ctr"/>
+            </a:p>
+          </p:txBody>
+        </p:sp>
+        <p:sp>
+          <p:nvSpPr>
+            <p:cNvPr id="39" name="item slot"/>
+            <p:cNvSpPr/>
+            <p:nvPr/>
+          </p:nvSpPr>
+          <p:spPr>
+            <a:xfrm>
+              <a:off x="5614416" y="3931920"/>
+              <a:ext cx="987552" cy="731520"/>
+            </a:xfrm>
+            <a:prstGeom prst="roundRect">
+              <a:avLst>
+                <a:gd name="adj" fmla="val 7500"/>
+              </a:avLst>
+            </a:prstGeom>
+            <a:solidFill>
+              <a:srgbClr val="343A43"/>
+            </a:solidFill>
+            <a:ln w="12700">
+              <a:solidFill>
+                <a:srgbClr val="4A515B"/>
+              </a:solidFill>
+            </a:ln>
+          </p:spPr>
+          <p:txBody>
+            <a:bodyPr rtlCol="0" anchor="ctr"/>
+            <a:lstStyle/>
+            <a:p>
+              <a:pPr algn="ctr"/>
+            </a:p>
+          </p:txBody>
+        </p:sp>
+        <p:sp>
+          <p:nvSpPr>
+            <p:cNvPr id="40" name="item slot"/>
+            <p:cNvSpPr/>
+            <p:nvPr/>
+          </p:nvSpPr>
+          <p:spPr>
+            <a:xfrm>
+              <a:off x="6743700" y="3931920"/>
+              <a:ext cx="987552" cy="731520"/>
+            </a:xfrm>
+            <a:prstGeom prst="roundRect">
+              <a:avLst>
+                <a:gd name="adj" fmla="val 7500"/>
+              </a:avLst>
+            </a:prstGeom>
+            <a:solidFill>
+              <a:srgbClr val="343A43"/>
+            </a:solidFill>
+            <a:ln w="12700">
+              <a:solidFill>
+                <a:srgbClr val="4A515B"/>
+              </a:solidFill>
+            </a:ln>
+          </p:spPr>
+          <p:txBody>
+            <a:bodyPr rtlCol="0" anchor="ctr"/>
+            <a:lstStyle/>
+            <a:p>
+              <a:pPr algn="ctr"/>
+            </a:p>
+          </p:txBody>
+        </p:sp>
+        <p:sp>
+          <p:nvSpPr>
+            <p:cNvPr id="41" name="item slot"/>
+            <p:cNvSpPr/>
+            <p:nvPr/>
+          </p:nvSpPr>
+          <p:spPr>
+            <a:xfrm>
+              <a:off x="7872983" y="3931920"/>
+              <a:ext cx="987552" cy="731520"/>
+            </a:xfrm>
+            <a:prstGeom prst="roundRect">
+              <a:avLst>
+                <a:gd name="adj" fmla="val 7500"/>
+              </a:avLst>
+            </a:prstGeom>
+            <a:solidFill>
+              <a:srgbClr val="343A43"/>
+            </a:solidFill>
+            <a:ln w="12700">
+              <a:solidFill>
+                <a:srgbClr val="4A515B"/>
+              </a:solidFill>
+            </a:ln>
+          </p:spPr>
+          <p:txBody>
+            <a:bodyPr rtlCol="0" anchor="ctr"/>
+            <a:lstStyle/>
+            <a:p>
+              <a:pPr algn="ctr"/>
+            </a:p>
+          </p:txBody>
+        </p:sp>
+        <p:sp>
+          <p:nvSpPr>
+            <p:cNvPr id="42" name="item slot"/>
+            <p:cNvSpPr/>
+            <p:nvPr/>
+          </p:nvSpPr>
+          <p:spPr>
+            <a:xfrm>
+              <a:off x="9002268" y="3931920"/>
+              <a:ext cx="987552" cy="731520"/>
+            </a:xfrm>
+            <a:prstGeom prst="roundRect">
+              <a:avLst>
+                <a:gd name="adj" fmla="val 7500"/>
+              </a:avLst>
+            </a:prstGeom>
+            <a:solidFill>
+              <a:srgbClr val="343A43"/>
+            </a:solidFill>
+            <a:ln w="12700">
+              <a:solidFill>
+                <a:srgbClr val="4A515B"/>
+              </a:solidFill>
+            </a:ln>
+          </p:spPr>
+          <p:txBody>
+            <a:bodyPr rtlCol="0" anchor="ctr"/>
+            <a:lstStyle/>
+            <a:p>
+              <a:pPr algn="ctr"/>
+            </a:p>
+          </p:txBody>
+        </p:sp>
+        <p:sp>
+          <p:nvSpPr>
+            <p:cNvPr id="43" name="item slot"/>
+            <p:cNvSpPr/>
+            <p:nvPr/>
+          </p:nvSpPr>
+          <p:spPr>
+            <a:xfrm>
+              <a:off x="10131552" y="3931920"/>
+              <a:ext cx="987552" cy="731520"/>
+            </a:xfrm>
+            <a:prstGeom prst="roundRect">
+              <a:avLst>
+                <a:gd name="adj" fmla="val 7500"/>
+              </a:avLst>
+            </a:prstGeom>
+            <a:solidFill>
+              <a:srgbClr val="343A43"/>
+            </a:solidFill>
+            <a:ln w="12700">
+              <a:solidFill>
+                <a:srgbClr val="4A515B"/>
+              </a:solidFill>
+            </a:ln>
+          </p:spPr>
+          <p:txBody>
+            <a:bodyPr rtlCol="0" anchor="ctr"/>
+            <a:lstStyle/>
+            <a:p>
+              <a:pPr algn="ctr"/>
+            </a:p>
+          </p:txBody>
+        </p:sp>
+        <p:sp>
+          <p:nvSpPr>
+            <p:cNvPr id="44" name="vanilla note"/>
+            <p:cNvSpPr txBox="1"/>
+            <p:nvPr/>
+          </p:nvSpPr>
+          <p:spPr>
+            <a:xfrm>
+              <a:off x="4581144" y="2560320"/>
+              <a:ext cx="1920240" cy="274320"/>
+            </a:xfrm>
+            <a:prstGeom prst="rect">
+              <a:avLst/>
+            </a:prstGeom>
+            <a:noFill/>
+          </p:spPr>
+          <p:txBody>
+            <a:bodyPr wrap="square" anchor="ctr" lIns="18288" tIns="9144" rIns="18288" bIns="9144">
+              <a:noAutofit/>
+            </a:bodyPr>
+            <a:lstStyle/>
+            <a:p>
+              <a:pPr algn="ctr"/>
+              <a:r>
+                <a:rPr sz="1400" b="0" i="0" lang="en-GB">
+                  <a:solidFill>
+                    <a:srgbClr val="A9B0B8"/>
+                  </a:solidFill>
+                  <a:latin typeface="Arial"/>
+                </a:rPr>
+                <a:t>The game's own tab</a:t>
+              </a:r>
+            </a:p>
+          </p:txBody>
+        </p:sp>
+      </p:grpSp>
+      <p:sp>
+        <p:nvSpPr>
+          <p:cNvPr id="45" name="ICHIP"/>
+          <p:cNvSpPr/>
+          <p:nvPr/>
+        </p:nvSpPr>
+        <p:spPr>
+          <a:xfrm>
+            <a:off x="822960" y="5120640"/>
+            <a:ext cx="2998287" cy="310896"/>
+          </a:xfrm>
+          <a:prstGeom prst="roundRect">
+            <a:avLst>
+              <a:gd name="adj" fmla="val 35294"/>
+            </a:avLst>
+          </a:prstGeom>
+          <a:noFill/>
+          <a:ln w="25400">
+            <a:solidFill>
+              <a:srgbClr val="A9B0B8"/>
+            </a:solidFill>
+          </a:ln>
+        </p:spPr>
+        <p:txBody>
+          <a:bodyPr rtlCol="0" anchor="ctr" wrap="square" lIns="54864" tIns="0" rIns="54864" bIns="0">
+            <a:noAutofit/>
+          </a:bodyPr>
+          <a:lstStyle/>
+          <a:p>
+            <a:pPr algn="ctr"/>
+            <a:r>
+              <a:rPr sz="1400" b="1" i="0" lang="en-GB">
+                <a:solidFill>
+                  <a:srgbClr val="F2F2F2"/>
+                </a:solidFill>
+                <a:latin typeface="Arial"/>
+              </a:rPr>
+              <a:t>Exact layout: undecided (OQ19)</a:t>
+            </a:r>
+          </a:p>
+        </p:txBody>
+      </p:sp>
+      <p:sp>
+        <p:nvSpPr>
+          <p:cNvPr id="46" name="CAPTION BAR"/>
+          <p:cNvSpPr/>
+          <p:nvPr/>
+        </p:nvSpPr>
+        <p:spPr>
+          <a:xfrm>
+            <a:off x="548640" y="5760720"/>
+            <a:ext cx="11091672" cy="731520"/>
+          </a:xfrm>
+          <a:prstGeom prst="roundRect">
+            <a:avLst>
+              <a:gd name="adj" fmla="val 10000"/>
+            </a:avLst>
+          </a:prstGeom>
+          <a:solidFill>
+            <a:srgbClr val="2B2F36"/>
+          </a:solidFill>
+          <a:ln>
+            <a:noFill/>
+          </a:ln>
+        </p:spPr>
+        <p:txBody>
+          <a:bodyPr rtlCol="0" anchor="ctr"/>
+          <a:lstStyle/>
+          <a:p>
+            <a:pPr algn="ctr"/>
+          </a:p>
+        </p:txBody>
+      </p:sp>
+      <p:sp>
+        <p:nvSpPr>
+          <p:cNvPr id="47" name="CAPTION RULE"/>
+          <p:cNvSpPr/>
+          <p:nvPr/>
+        </p:nvSpPr>
+        <p:spPr>
+          <a:xfrm>
+            <a:off x="548640" y="5815583"/>
+            <a:ext cx="73152" cy="621792"/>
+          </a:xfrm>
+          <a:prstGeom prst="rect">
+            <a:avLst/>
+          </a:prstGeom>
+          <a:solidFill>
+            <a:srgbClr val="F28C28"/>
+          </a:solidFill>
+          <a:ln>
+            <a:noFill/>
+          </a:ln>
+        </p:spPr>
+        <p:txBody>
+          <a:bodyPr rtlCol="0" anchor="ctr"/>
+          <a:lstStyle/>
+          <a:p>
+            <a:pPr algn="ctr"/>
+          </a:p>
+        </p:txBody>
+      </p:sp>
+      <p:sp>
+        <p:nvSpPr>
+          <p:cNvPr id="48" name="CAPTION"/>
+          <p:cNvSpPr txBox="1"/>
+          <p:nvPr/>
+        </p:nvSpPr>
+        <p:spPr>
+          <a:xfrm>
+            <a:off x="777240" y="5760720"/>
+            <a:ext cx="10744200" cy="731520"/>
+          </a:xfrm>
+          <a:prstGeom prst="rect">
+            <a:avLst/>
+          </a:prstGeom>
+          <a:noFill/>
+        </p:spPr>
+        <p:txBody>
+          <a:bodyPr wrap="square" anchor="ctr" lIns="18288" tIns="9144" rIns="18288" bIns="9144">
+            <a:noAutofit/>
+          </a:bodyPr>
+          <a:lstStyle/>
+          <a:p>
+            <a:pPr algn="l"/>
+            <a:r>
+              <a:rPr sz="2000" b="0" i="0" lang="en-GB">
+                <a:solidFill>
+                  <a:srgbClr val="F2F2F2"/>
+                </a:solidFill>
+                <a:latin typeface="Arial"/>
+              </a:rPr>
+              <a:t>Rail could get its own build menu tab instead of hiding in Transport.</a:t>
+            </a:r>
+          </a:p>
+        </p:txBody>
+      </p:sp>
+      <p:sp>
+        <p:nvSpPr>
+          <p:cNvPr id="49" name="NUM"/>
+          <p:cNvSpPr txBox="1"/>
+          <p:nvPr/>
+        </p:nvSpPr>
+        <p:spPr>
+          <a:xfrm>
+            <a:off x="10725912" y="6528816"/>
+            <a:ext cx="914400" cy="274320"/>
+          </a:xfrm>
+          <a:prstGeom prst="rect">
+            <a:avLst/>
+          </a:prstGeom>
+          <a:noFill/>
+        </p:spPr>
+        <p:txBody>
+          <a:bodyPr wrap="square" anchor="ctr" lIns="18288" tIns="9144" rIns="18288" bIns="9144">
+            <a:noAutofit/>
+          </a:bodyPr>
+          <a:lstStyle/>
+          <a:p>
+            <a:pPr algn="r"/>
+            <a:r>
+              <a:rPr sz="1400" b="0" i="0" lang="en-GB">
+                <a:solidFill>
+                  <a:srgbClr val="A9B0B8"/>
+                </a:solidFill>
+                <a:latin typeface="Arial"/>
+              </a:rPr>
+              <a:t>17</a:t>
+            </a:r>
+          </a:p>
+        </p:txBody>
+      </p:sp>
+    </p:spTree>
+  </p:cSld>
+  <p:clrMapOvr>
+    <a:masterClrMapping/>
+  </p:clrMapOvr>
+</p:sld>
+</file>
+
+<file path=ppt/slides/slide18.xml><?xml version="1.0" encoding="utf-8"?>
+<p:sld xmlns:a="http://schemas.openxmlformats.org/drawingml/2006/main" xmlns:p="http://schemas.openxmlformats.org/presentationml/2006/main" xmlns:r="http://schemas.openxmlformats.org/officeDocument/2006/relationships">
+  <p:cSld>
+    <p:bg>
+      <p:bgPr>
+        <a:solidFill>
+          <a:srgbClr val="1E2126"/>
+        </a:solidFill>
+        <a:effectLst/>
+      </p:bgPr>
+    </p:bg>
+    <p:spTree>
+      <p:nvGrpSpPr>
+        <p:cNvPr id="1" name=""/>
+        <p:cNvGrpSpPr/>
+        <p:nvPr/>
+      </p:nvGrpSpPr>
+      <p:grpSpPr/>
+      <p:sp>
+        <p:nvSpPr>
+          <p:cNvPr id="2" name="TITLE"/>
+          <p:cNvSpPr>
+            <a:spLocks noGrp="1"/>
+          </p:cNvSpPr>
+          <p:nvPr>
+            <p:ph type="title"/>
+          </p:nvPr>
+        </p:nvSpPr>
+        <p:spPr>
+          <a:xfrm>
+            <a:off x="548640" y="365760"/>
+            <a:ext cx="9326880" cy="731520"/>
+          </a:xfrm>
+        </p:spPr>
+        <p:txBody>
+          <a:bodyPr wrap="square" anchor="ctr" lIns="0" rIns="0" tIns="0" bIns="0">
+            <a:noAutofit/>
+          </a:bodyPr>
+          <a:lstStyle/>
+          <a:p>
+            <a:pPr algn="l"/>
+            <a:r>
+              <a:rPr sz="3600" b="1" i="0" lang="en-GB">
+                <a:solidFill>
+                  <a:srgbClr val="F2F2F2"/>
+                </a:solidFill>
+                <a:latin typeface="Arial"/>
+              </a:rPr>
+              <a:t>Four groups?</a:t>
+            </a:r>
+          </a:p>
+        </p:txBody>
+      </p:sp>
+      <p:sp>
+        <p:nvSpPr>
+          <p:cNvPr id="3" name="CHIP"/>
+          <p:cNvSpPr/>
+          <p:nvPr/>
+        </p:nvSpPr>
+        <p:spPr>
+          <a:xfrm>
+            <a:off x="10088575" y="530352"/>
+            <a:ext cx="1554480" cy="365760"/>
+          </a:xfrm>
+          <a:prstGeom prst="roundRect">
+            <a:avLst>
+              <a:gd name="adj" fmla="val 30000"/>
+            </a:avLst>
+          </a:prstGeom>
+          <a:solidFill>
+            <a:srgbClr val="B084F5"/>
+          </a:solidFill>
+          <a:ln>
+            <a:noFill/>
+          </a:ln>
+        </p:spPr>
+        <p:txBody>
+          <a:bodyPr rtlCol="0" anchor="ctr" wrap="square" lIns="54864" tIns="0" rIns="54864" bIns="0">
+            <a:noAutofit/>
+          </a:bodyPr>
+          <a:lstStyle/>
+          <a:p>
+            <a:pPr algn="ctr"/>
+            <a:r>
+              <a:rPr sz="1400" b="1" i="0" lang="en-GB">
+                <a:solidFill>
+                  <a:srgbClr val="101418"/>
+                </a:solidFill>
+                <a:latin typeface="Arial"/>
+              </a:rPr>
+              <a:t>PROPOSED</a:t>
+            </a:r>
+          </a:p>
+        </p:txBody>
+      </p:sp>
+      <p:grpSp>
+        <p:nvGrpSpPr>
+          <p:cNvPr id="4" name="Four proposed group cards" descr="Four proposed group cards with simple icons: Railway Infrastructure, Stations and Servicing, Signalling and Rolling Stock."/>
+          <p:cNvGrpSpPr/>
+          <p:nvPr/>
+        </p:nvGrpSpPr>
+        <p:grpSpPr>
+          <a:xfrm>
+            <a:off x="548640" y="1463040"/>
+            <a:ext cx="11091672" cy="3749039"/>
+            <a:chOff x="548640" y="1463040"/>
+            <a:chExt cx="11091672" cy="3749039"/>
+          </a:xfrm>
+        </p:grpSpPr>
+        <p:sp>
+          <p:nvSpPr>
+            <p:cNvPr id="5" name="proposed card"/>
+            <p:cNvSpPr/>
+            <p:nvPr/>
+          </p:nvSpPr>
+          <p:spPr>
+            <a:xfrm>
+              <a:off x="548640" y="1463040"/>
+              <a:ext cx="2560320" cy="3749039"/>
+            </a:xfrm>
+            <a:prstGeom prst="roundRect">
+              <a:avLst>
+                <a:gd name="adj" fmla="val 3571"/>
+              </a:avLst>
+            </a:prstGeom>
+            <a:solidFill>
+              <a:srgbClr val="2B2F36"/>
+            </a:solidFill>
+            <a:ln w="31750">
+              <a:solidFill>
+                <a:srgbClr val="B084F5"/>
+              </a:solidFill>
+              <a:prstDash val="dash"/>
+            </a:ln>
+          </p:spPr>
+          <p:txBody>
+            <a:bodyPr rtlCol="0" anchor="ctr"/>
+            <a:lstStyle/>
+            <a:p>
+              <a:pPr algn="ctr"/>
+            </a:p>
+          </p:txBody>
+        </p:sp>
+        <p:sp>
+          <p:nvSpPr>
+            <p:cNvPr id="6" name="icon panel"/>
+            <p:cNvSpPr/>
+            <p:nvPr/>
+          </p:nvSpPr>
+          <p:spPr>
+            <a:xfrm>
+              <a:off x="777240" y="1737360"/>
+              <a:ext cx="2103120" cy="2194560"/>
+            </a:xfrm>
+            <a:prstGeom prst="roundRect">
+              <a:avLst>
+                <a:gd name="adj" fmla="val 3478"/>
+              </a:avLst>
+            </a:prstGeom>
+            <a:solidFill>
+              <a:srgbClr val="343A43"/>
+            </a:solidFill>
+            <a:ln>
+              <a:noFill/>
+            </a:ln>
+          </p:spPr>
+          <p:txBody>
+            <a:bodyPr rtlCol="0" anchor="ctr"/>
+            <a:lstStyle/>
+            <a:p>
+              <a:pPr algn="ctr"/>
+            </a:p>
+          </p:txBody>
+        </p:sp>
+        <p:sp>
+          <p:nvSpPr>
+            <p:cNvPr id="7" name="sleeper"/>
+            <p:cNvSpPr/>
+            <p:nvPr/>
+          </p:nvSpPr>
+          <p:spPr>
+            <a:xfrm>
+              <a:off x="1005840" y="2514600"/>
+              <a:ext cx="91440" cy="822960"/>
+            </a:xfrm>
+            <a:prstGeom prst="rect">
+              <a:avLst/>
+            </a:prstGeom>
+            <a:solidFill>
+              <a:srgbClr val="6B5B4B"/>
+            </a:solidFill>
+            <a:ln>
+              <a:noFill/>
+            </a:ln>
+          </p:spPr>
+          <p:txBody>
+            <a:bodyPr rtlCol="0" anchor="ctr"/>
+            <a:lstStyle/>
+            <a:p>
+              <a:pPr algn="ctr"/>
+            </a:p>
+          </p:txBody>
+        </p:sp>
+        <p:sp>
+          <p:nvSpPr>
+            <p:cNvPr id="8" name="sleeper"/>
+            <p:cNvSpPr/>
+            <p:nvPr/>
+          </p:nvSpPr>
+          <p:spPr>
+            <a:xfrm>
+              <a:off x="1280160" y="2514600"/>
+              <a:ext cx="91440" cy="822960"/>
+            </a:xfrm>
+            <a:prstGeom prst="rect">
+              <a:avLst/>
+            </a:prstGeom>
+            <a:solidFill>
+              <a:srgbClr val="6B5B4B"/>
+            </a:solidFill>
+            <a:ln>
+              <a:noFill/>
+            </a:ln>
+          </p:spPr>
+          <p:txBody>
+            <a:bodyPr rtlCol="0" anchor="ctr"/>
+            <a:lstStyle/>
+            <a:p>
+              <a:pPr algn="ctr"/>
+            </a:p>
+          </p:txBody>
+        </p:sp>
+        <p:sp>
+          <p:nvSpPr>
+            <p:cNvPr id="9" name="sleeper"/>
+            <p:cNvSpPr/>
+            <p:nvPr/>
+          </p:nvSpPr>
+          <p:spPr>
+            <a:xfrm>
+              <a:off x="1554480" y="2514600"/>
+              <a:ext cx="91440" cy="822960"/>
+            </a:xfrm>
+            <a:prstGeom prst="rect">
+              <a:avLst/>
+            </a:prstGeom>
+            <a:solidFill>
+              <a:srgbClr val="6B5B4B"/>
+            </a:solidFill>
+            <a:ln>
+              <a:noFill/>
+            </a:ln>
+          </p:spPr>
+          <p:txBody>
+            <a:bodyPr rtlCol="0" anchor="ctr"/>
+            <a:lstStyle/>
+            <a:p>
+              <a:pPr algn="ctr"/>
+            </a:p>
+          </p:txBody>
+        </p:sp>
+        <p:sp>
+          <p:nvSpPr>
+            <p:cNvPr id="10" name="sleeper"/>
+            <p:cNvSpPr/>
+            <p:nvPr/>
+          </p:nvSpPr>
+          <p:spPr>
+            <a:xfrm>
+              <a:off x="1828800" y="2514600"/>
+              <a:ext cx="91440" cy="822960"/>
+            </a:xfrm>
+            <a:prstGeom prst="rect">
+              <a:avLst/>
+            </a:prstGeom>
+            <a:solidFill>
+              <a:srgbClr val="6B5B4B"/>
+            </a:solidFill>
+            <a:ln>
+              <a:noFill/>
+            </a:ln>
+          </p:spPr>
+          <p:txBody>
+            <a:bodyPr rtlCol="0" anchor="ctr"/>
+            <a:lstStyle/>
+            <a:p>
+              <a:pPr algn="ctr"/>
+            </a:p>
+          </p:txBody>
+        </p:sp>
+        <p:sp>
+          <p:nvSpPr>
+            <p:cNvPr id="11" name="sleeper"/>
+            <p:cNvSpPr/>
+            <p:nvPr/>
+          </p:nvSpPr>
+          <p:spPr>
+            <a:xfrm>
+              <a:off x="2103120" y="2514600"/>
+              <a:ext cx="91440" cy="822960"/>
+            </a:xfrm>
+            <a:prstGeom prst="rect">
+              <a:avLst/>
+            </a:prstGeom>
+            <a:solidFill>
+              <a:srgbClr val="6B5B4B"/>
+            </a:solidFill>
+            <a:ln>
+              <a:noFill/>
+            </a:ln>
+          </p:spPr>
+          <p:txBody>
+            <a:bodyPr rtlCol="0" anchor="ctr"/>
+            <a:lstStyle/>
+            <a:p>
+              <a:pPr algn="ctr"/>
+            </a:p>
+          </p:txBody>
+        </p:sp>
+        <p:sp>
+          <p:nvSpPr>
+            <p:cNvPr id="12" name="sleeper"/>
+            <p:cNvSpPr/>
+            <p:nvPr/>
+          </p:nvSpPr>
+          <p:spPr>
+            <a:xfrm>
+              <a:off x="2377440" y="2514600"/>
+              <a:ext cx="91440" cy="822960"/>
+            </a:xfrm>
+            <a:prstGeom prst="rect">
+              <a:avLst/>
+            </a:prstGeom>
+            <a:solidFill>
+              <a:srgbClr val="6B5B4B"/>
+            </a:solidFill>
+            <a:ln>
+              <a:noFill/>
+            </a:ln>
+          </p:spPr>
+          <p:txBody>
+            <a:bodyPr rtlCol="0" anchor="ctr"/>
+            <a:lstStyle/>
+            <a:p>
+              <a:pPr algn="ctr"/>
+            </a:p>
+          </p:txBody>
+        </p:sp>
+        <p:sp>
+          <p:nvSpPr>
+            <p:cNvPr id="13" name="sleeper"/>
+            <p:cNvSpPr/>
+            <p:nvPr/>
+          </p:nvSpPr>
+          <p:spPr>
+            <a:xfrm>
+              <a:off x="2651760" y="2514600"/>
+              <a:ext cx="91440" cy="822960"/>
+            </a:xfrm>
+            <a:prstGeom prst="rect">
+              <a:avLst/>
+            </a:prstGeom>
+            <a:solidFill>
+              <a:srgbClr val="6B5B4B"/>
+            </a:solidFill>
+            <a:ln>
+              <a:noFill/>
+            </a:ln>
+          </p:spPr>
+          <p:txBody>
+            <a:bodyPr rtlCol="0" anchor="ctr"/>
+            <a:lstStyle/>
+            <a:p>
+              <a:pPr algn="ctr"/>
+            </a:p>
+          </p:txBody>
+        </p:sp>
+        <p:sp>
+          <p:nvSpPr>
+            <p:cNvPr id="14" name="rail"/>
+            <p:cNvSpPr/>
+            <p:nvPr/>
+          </p:nvSpPr>
+          <p:spPr>
+            <a:xfrm>
+              <a:off x="914400" y="2697480"/>
+              <a:ext cx="1828800" cy="73152"/>
+            </a:xfrm>
+            <a:prstGeom prst="rect">
+              <a:avLst/>
+            </a:prstGeom>
+            <a:solidFill>
+              <a:srgbClr val="9AA0A6"/>
+            </a:solidFill>
+            <a:ln>
+              <a:noFill/>
+            </a:ln>
+          </p:spPr>
+          <p:txBody>
+            <a:bodyPr rtlCol="0" anchor="ctr"/>
+            <a:lstStyle/>
+            <a:p>
+              <a:pPr algn="ctr"/>
+            </a:p>
+          </p:txBody>
+        </p:sp>
+        <p:sp>
+          <p:nvSpPr>
+            <p:cNvPr id="15" name="rail"/>
+            <p:cNvSpPr/>
+            <p:nvPr/>
+          </p:nvSpPr>
+          <p:spPr>
+            <a:xfrm>
+              <a:off x="914400" y="3063240"/>
+              <a:ext cx="1828800" cy="73152"/>
+            </a:xfrm>
+            <a:prstGeom prst="rect">
+              <a:avLst/>
+            </a:prstGeom>
+            <a:solidFill>
+              <a:srgbClr val="9AA0A6"/>
+            </a:solidFill>
+            <a:ln>
+              <a:noFill/>
+            </a:ln>
+          </p:spPr>
+          <p:txBody>
+            <a:bodyPr rtlCol="0" anchor="ctr"/>
+            <a:lstStyle/>
+            <a:p>
+              <a:pPr algn="ctr"/>
+            </a:p>
+          </p:txBody>
+        </p:sp>
+        <p:sp>
+          <p:nvSpPr>
+            <p:cNvPr id="16" name="card label"/>
+            <p:cNvSpPr txBox="1"/>
+            <p:nvPr/>
+          </p:nvSpPr>
+          <p:spPr>
+            <a:xfrm>
+              <a:off x="685800" y="4114800"/>
+              <a:ext cx="2286000" cy="914400"/>
+            </a:xfrm>
+            <a:prstGeom prst="rect">
+              <a:avLst/>
+            </a:prstGeom>
+            <a:noFill/>
+          </p:spPr>
+          <p:txBody>
+            <a:bodyPr wrap="square" anchor="ctr" lIns="18288" tIns="9144" rIns="18288" bIns="9144">
+              <a:noAutofit/>
+            </a:bodyPr>
+            <a:lstStyle/>
+            <a:p>
+              <a:pPr algn="ctr"/>
+              <a:r>
+                <a:rPr sz="2200" b="1" i="0" lang="en-GB">
+                  <a:solidFill>
+                    <a:srgbClr val="F2F2F2"/>
+                  </a:solidFill>
+                  <a:latin typeface="Arial"/>
+                </a:rPr>
+                <a:t>Railway Infrastructure</a:t>
+              </a:r>
+            </a:p>
+          </p:txBody>
+        </p:sp>
+        <p:sp>
+          <p:nvSpPr>
+            <p:cNvPr id="17" name="proposed card"/>
+            <p:cNvSpPr/>
+            <p:nvPr/>
+          </p:nvSpPr>
+          <p:spPr>
+            <a:xfrm>
+              <a:off x="3392424" y="1463040"/>
+              <a:ext cx="2560320" cy="3749039"/>
+            </a:xfrm>
+            <a:prstGeom prst="roundRect">
+              <a:avLst>
+                <a:gd name="adj" fmla="val 3571"/>
+              </a:avLst>
+            </a:prstGeom>
+            <a:solidFill>
+              <a:srgbClr val="2B2F36"/>
+            </a:solidFill>
+            <a:ln w="31750">
+              <a:solidFill>
+                <a:srgbClr val="B084F5"/>
+              </a:solidFill>
+              <a:prstDash val="dash"/>
+            </a:ln>
+          </p:spPr>
+          <p:txBody>
+            <a:bodyPr rtlCol="0" anchor="ctr"/>
+            <a:lstStyle/>
+            <a:p>
+              <a:pPr algn="ctr"/>
+            </a:p>
+          </p:txBody>
+        </p:sp>
+        <p:sp>
+          <p:nvSpPr>
+            <p:cNvPr id="18" name="icon panel"/>
+            <p:cNvSpPr/>
+            <p:nvPr/>
+          </p:nvSpPr>
+          <p:spPr>
+            <a:xfrm>
+              <a:off x="3621024" y="1737360"/>
+              <a:ext cx="2103120" cy="2194560"/>
+            </a:xfrm>
+            <a:prstGeom prst="roundRect">
+              <a:avLst>
+                <a:gd name="adj" fmla="val 3478"/>
+              </a:avLst>
+            </a:prstGeom>
+            <a:solidFill>
+              <a:srgbClr val="343A43"/>
+            </a:solidFill>
+            <a:ln>
+              <a:noFill/>
+            </a:ln>
+          </p:spPr>
+          <p:txBody>
+            <a:bodyPr rtlCol="0" anchor="ctr"/>
+            <a:lstStyle/>
+            <a:p>
+              <a:pPr algn="ctr"/>
+            </a:p>
+          </p:txBody>
+        </p:sp>
+        <p:sp>
+          <p:nvSpPr>
+            <p:cNvPr id="19" name="station body"/>
+            <p:cNvSpPr/>
+            <p:nvPr/>
+          </p:nvSpPr>
+          <p:spPr>
+            <a:xfrm>
+              <a:off x="3803903" y="2610612"/>
+              <a:ext cx="1005840" cy="544068"/>
+            </a:xfrm>
+            <a:prstGeom prst="rect">
+              <a:avLst/>
+            </a:prstGeom>
+            <a:solidFill>
+              <a:srgbClr val="C9CED3"/>
+            </a:solidFill>
+            <a:ln w="9525">
+              <a:solidFill>
+                <a:srgbClr val="6B7078"/>
+              </a:solidFill>
+            </a:ln>
+          </p:spPr>
+          <p:txBody>
+            <a:bodyPr rtlCol="0" anchor="ctr"/>
+            <a:lstStyle/>
+            <a:p>
+              <a:pPr algn="ctr"/>
+            </a:p>
+          </p:txBody>
+        </p:sp>
+        <p:sp>
+          <p:nvSpPr>
+            <p:cNvPr id="20" name="station roof"/>
+            <p:cNvSpPr/>
+            <p:nvPr/>
+          </p:nvSpPr>
+          <p:spPr>
+            <a:xfrm>
+              <a:off x="3743553" y="2377440"/>
+              <a:ext cx="1126541" cy="233172"/>
+            </a:xfrm>
+            <a:custGeom>
+              <a:avLst/>
+              <a:gdLst/>
+              <a:ahLst/>
+              <a:cxnLst/>
+              <a:rect l="l" t="t" r="r" b="b"/>
+              <a:pathLst>
+                <a:path w="1126541" h="233172">
+                  <a:moveTo>
+                    <a:pt x="0" y="233172"/>
+                  </a:moveTo>
+                  <a:lnTo>
+                    <a:pt x="563270" y="0"/>
+                  </a:lnTo>
+                  <a:lnTo>
+                    <a:pt x="1126541" y="233172"/>
+                  </a:lnTo>
+                  <a:close/>
+                </a:path>
+              </a:pathLst>
+            </a:custGeom>
+            <a:solidFill>
+              <a:srgbClr val="6B7078"/>
+            </a:solidFill>
+            <a:ln>
+              <a:noFill/>
+            </a:ln>
+          </p:spPr>
+          <p:txBody>
+            <a:bodyPr rtlCol="0" anchor="ctr"/>
+            <a:lstStyle/>
+            <a:p>
+              <a:pPr algn="ctr"/>
+            </a:p>
+          </p:txBody>
+        </p:sp>
+        <p:sp>
+          <p:nvSpPr>
+            <p:cNvPr id="21" name="station window"/>
+            <p:cNvSpPr/>
+            <p:nvPr/>
+          </p:nvSpPr>
+          <p:spPr>
+            <a:xfrm>
+              <a:off x="3904487" y="2766060"/>
+              <a:ext cx="201168" cy="217627"/>
+            </a:xfrm>
+            <a:prstGeom prst="rect">
+              <a:avLst/>
+            </a:prstGeom>
+            <a:solidFill>
+              <a:srgbClr val="4DA3FF">
+                <a:alpha val="75000"/>
+              </a:srgbClr>
+            </a:solidFill>
+            <a:ln>
+              <a:noFill/>
+            </a:ln>
+          </p:spPr>
+          <p:txBody>
+            <a:bodyPr rtlCol="0" anchor="ctr"/>
+            <a:lstStyle/>
+            <a:p>
+              <a:pPr algn="ctr"/>
+            </a:p>
+          </p:txBody>
+        </p:sp>
+        <p:sp>
+          <p:nvSpPr>
+            <p:cNvPr id="22" name="station window"/>
+            <p:cNvSpPr/>
+            <p:nvPr/>
+          </p:nvSpPr>
+          <p:spPr>
+            <a:xfrm>
+              <a:off x="4206240" y="2766060"/>
+              <a:ext cx="201168" cy="217627"/>
+            </a:xfrm>
+            <a:prstGeom prst="rect">
+              <a:avLst/>
+            </a:prstGeom>
+            <a:solidFill>
+              <a:srgbClr val="4DA3FF">
+                <a:alpha val="75000"/>
+              </a:srgbClr>
+            </a:solidFill>
+            <a:ln>
+              <a:noFill/>
+            </a:ln>
+          </p:spPr>
+          <p:txBody>
+            <a:bodyPr rtlCol="0" anchor="ctr"/>
+            <a:lstStyle/>
+            <a:p>
+              <a:pPr algn="ctr"/>
+            </a:p>
+          </p:txBody>
+        </p:sp>
+        <p:sp>
+          <p:nvSpPr>
+            <p:cNvPr id="23" name="station window"/>
+            <p:cNvSpPr/>
+            <p:nvPr/>
+          </p:nvSpPr>
+          <p:spPr>
+            <a:xfrm>
+              <a:off x="4507992" y="2766060"/>
+              <a:ext cx="201168" cy="217627"/>
+            </a:xfrm>
+            <a:prstGeom prst="rect">
+              <a:avLst/>
+            </a:prstGeom>
+            <a:solidFill>
+              <a:srgbClr val="4DA3FF">
+                <a:alpha val="75000"/>
+              </a:srgbClr>
+            </a:solidFill>
+            <a:ln>
+              <a:noFill/>
+            </a:ln>
+          </p:spPr>
+          <p:txBody>
+            <a:bodyPr rtlCol="0" anchor="ctr"/>
+            <a:lstStyle/>
+            <a:p>
+              <a:pPr algn="ctr"/>
+            </a:p>
+          </p:txBody>
+        </p:sp>
+        <p:sp>
+          <p:nvSpPr>
+            <p:cNvPr id="24" name="platform"/>
+            <p:cNvSpPr/>
+            <p:nvPr/>
+          </p:nvSpPr>
+          <p:spPr>
+            <a:xfrm>
+              <a:off x="3712463" y="3154680"/>
+              <a:ext cx="1188720" cy="128016"/>
+            </a:xfrm>
+            <a:prstGeom prst="rect">
+              <a:avLst/>
+            </a:prstGeom>
+            <a:solidFill>
+              <a:srgbClr val="D5D9DE"/>
+            </a:solidFill>
+            <a:ln>
+              <a:noFill/>
+            </a:ln>
+          </p:spPr>
+          <p:txBody>
+            <a:bodyPr rtlCol="0" anchor="ctr"/>
+            <a:lstStyle/>
+            <a:p>
+              <a:pPr algn="ctr"/>
+            </a:p>
+          </p:txBody>
+        </p:sp>
+        <p:sp>
+          <p:nvSpPr>
+            <p:cNvPr id="25" name="drop point"/>
+            <p:cNvSpPr/>
+            <p:nvPr/>
+          </p:nvSpPr>
+          <p:spPr>
+            <a:xfrm>
+              <a:off x="5038344" y="2514600"/>
+              <a:ext cx="457200" cy="365760"/>
+            </a:xfrm>
+            <a:custGeom>
+              <a:avLst/>
+              <a:gdLst/>
+              <a:ahLst/>
+              <a:cxnLst/>
+              <a:rect l="l" t="t" r="r" b="b"/>
+              <a:pathLst>
+                <a:path w="457200" h="365760">
+                  <a:moveTo>
+                    <a:pt x="228600" y="0"/>
+                  </a:moveTo>
+                  <a:lnTo>
+                    <a:pt x="457200" y="365760"/>
+                  </a:lnTo>
+                  <a:lnTo>
+                    <a:pt x="0" y="365760"/>
+                  </a:lnTo>
+                  <a:close/>
+                </a:path>
+              </a:pathLst>
+            </a:custGeom>
+            <a:solidFill>
+              <a:srgbClr val="4DA3FF"/>
+            </a:solidFill>
+            <a:ln>
+              <a:noFill/>
+            </a:ln>
+          </p:spPr>
+          <p:txBody>
+            <a:bodyPr rtlCol="0" anchor="ctr"/>
+            <a:lstStyle/>
+            <a:p>
+              <a:pPr algn="ctr"/>
+            </a:p>
+          </p:txBody>
+        </p:sp>
+        <p:sp>
+          <p:nvSpPr>
+            <p:cNvPr id="26" name="drop body"/>
+            <p:cNvSpPr/>
+            <p:nvPr/>
+          </p:nvSpPr>
+          <p:spPr>
+            <a:xfrm>
+              <a:off x="5038344" y="2724912"/>
+              <a:ext cx="457200" cy="457200"/>
+            </a:xfrm>
+            <a:prstGeom prst="ellipse">
+              <a:avLst/>
+            </a:prstGeom>
+            <a:solidFill>
+              <a:srgbClr val="4DA3FF"/>
+            </a:solidFill>
+            <a:ln>
+              <a:noFill/>
+            </a:ln>
+          </p:spPr>
+          <p:txBody>
+            <a:bodyPr rtlCol="0" anchor="ctr"/>
+            <a:lstStyle/>
+            <a:p>
+              <a:pPr algn="ctr"/>
+            </a:p>
+          </p:txBody>
+        </p:sp>
+        <p:sp>
+          <p:nvSpPr>
+            <p:cNvPr id="27" name="card label"/>
+            <p:cNvSpPr txBox="1"/>
+            <p:nvPr/>
+          </p:nvSpPr>
+          <p:spPr>
+            <a:xfrm>
+              <a:off x="3529584" y="4114800"/>
+              <a:ext cx="2286000" cy="914400"/>
+            </a:xfrm>
+            <a:prstGeom prst="rect">
+              <a:avLst/>
+            </a:prstGeom>
+            <a:noFill/>
+          </p:spPr>
+          <p:txBody>
+            <a:bodyPr wrap="square" anchor="ctr" lIns="18288" tIns="9144" rIns="18288" bIns="9144">
+              <a:noAutofit/>
+            </a:bodyPr>
+            <a:lstStyle/>
+            <a:p>
+              <a:pPr algn="ctr"/>
+              <a:r>
+                <a:rPr sz="2200" b="1" i="0" lang="en-GB">
+                  <a:solidFill>
+                    <a:srgbClr val="F2F2F2"/>
+                  </a:solidFill>
+                  <a:latin typeface="Arial"/>
+                </a:rPr>
+                <a:t>Stations and Servicing</a:t>
+              </a:r>
+            </a:p>
+          </p:txBody>
+        </p:sp>
+        <p:sp>
+          <p:nvSpPr>
+            <p:cNvPr id="28" name="proposed card"/>
+            <p:cNvSpPr/>
+            <p:nvPr/>
+          </p:nvSpPr>
+          <p:spPr>
+            <a:xfrm>
+              <a:off x="6236207" y="1463040"/>
+              <a:ext cx="2560320" cy="3749039"/>
+            </a:xfrm>
+            <a:prstGeom prst="roundRect">
+              <a:avLst>
+                <a:gd name="adj" fmla="val 3571"/>
+              </a:avLst>
+            </a:prstGeom>
+            <a:solidFill>
+              <a:srgbClr val="2B2F36"/>
+            </a:solidFill>
+            <a:ln w="31750">
+              <a:solidFill>
+                <a:srgbClr val="B084F5"/>
+              </a:solidFill>
+              <a:prstDash val="dash"/>
+            </a:ln>
+          </p:spPr>
+          <p:txBody>
+            <a:bodyPr rtlCol="0" anchor="ctr"/>
+            <a:lstStyle/>
+            <a:p>
+              <a:pPr algn="ctr"/>
+            </a:p>
+          </p:txBody>
+        </p:sp>
+        <p:sp>
+          <p:nvSpPr>
+            <p:cNvPr id="29" name="icon panel"/>
+            <p:cNvSpPr/>
+            <p:nvPr/>
+          </p:nvSpPr>
+          <p:spPr>
+            <a:xfrm>
+              <a:off x="6464807" y="1737360"/>
+              <a:ext cx="2103120" cy="2194560"/>
+            </a:xfrm>
+            <a:prstGeom prst="roundRect">
+              <a:avLst>
+                <a:gd name="adj" fmla="val 3478"/>
+              </a:avLst>
+            </a:prstGeom>
+            <a:solidFill>
+              <a:srgbClr val="343A43"/>
+            </a:solidFill>
+            <a:ln>
+              <a:noFill/>
+            </a:ln>
+          </p:spPr>
+          <p:txBody>
+            <a:bodyPr rtlCol="0" anchor="ctr"/>
+            <a:lstStyle/>
+            <a:p>
+              <a:pPr algn="ctr"/>
+            </a:p>
+          </p:txBody>
+        </p:sp>
+        <p:sp>
+          <p:nvSpPr>
+            <p:cNvPr id="30" name="icon semaphore post"/>
+            <p:cNvSpPr/>
+            <p:nvPr/>
+          </p:nvSpPr>
+          <p:spPr>
+            <a:xfrm>
+              <a:off x="7271766" y="2331720"/>
+              <a:ext cx="123444" cy="1234440"/>
+            </a:xfrm>
+            <a:prstGeom prst="rect">
+              <a:avLst/>
+            </a:prstGeom>
+            <a:solidFill>
+              <a:srgbClr val="E8E8E8"/>
+            </a:solidFill>
+            <a:ln w="9525">
+              <a:solidFill>
+                <a:srgbClr val="6B7078"/>
+              </a:solidFill>
+            </a:ln>
+          </p:spPr>
+          <p:txBody>
+            <a:bodyPr rtlCol="0" anchor="ctr"/>
+            <a:lstStyle/>
+            <a:p>
+              <a:pPr algn="ctr"/>
+            </a:p>
+          </p:txBody>
+        </p:sp>
+        <p:sp>
+          <p:nvSpPr>
+            <p:cNvPr id="31" name="icon semaphore foot"/>
+            <p:cNvSpPr/>
+            <p:nvPr/>
+          </p:nvSpPr>
+          <p:spPr>
+            <a:xfrm>
+              <a:off x="7061911" y="3492093"/>
+              <a:ext cx="543153" cy="74066"/>
+            </a:xfrm>
+            <a:prstGeom prst="rect">
+              <a:avLst/>
+            </a:prstGeom>
+            <a:solidFill>
+              <a:srgbClr val="3A3F47"/>
+            </a:solidFill>
+            <a:ln>
+              <a:noFill/>
+            </a:ln>
+          </p:spPr>
+          <p:txBody>
+            <a:bodyPr rtlCol="0" anchor="ctr"/>
+            <a:lstStyle/>
+            <a:p>
+              <a:pPr algn="ctr"/>
+            </a:p>
+          </p:txBody>
+        </p:sp>
+        <p:sp>
+          <p:nvSpPr>
+            <p:cNvPr id="32" name="icon semaphore arm"/>
+            <p:cNvSpPr/>
+            <p:nvPr/>
+          </p:nvSpPr>
+          <p:spPr>
+            <a:xfrm>
+              <a:off x="7342837" y="1886293"/>
+              <a:ext cx="645932" cy="645932"/>
+            </a:xfrm>
+            <a:custGeom>
+              <a:avLst/>
+              <a:gdLst/>
+              <a:ahLst/>
+              <a:cxnLst/>
+              <a:rect l="l" t="t" r="r" b="b"/>
+              <a:pathLst>
+                <a:path w="645932" h="645932">
+                  <a:moveTo>
+                    <a:pt x="0" y="541186"/>
+                  </a:moveTo>
+                  <a:lnTo>
+                    <a:pt x="541186" y="0"/>
+                  </a:lnTo>
+                  <a:lnTo>
+                    <a:pt x="645932" y="104746"/>
+                  </a:lnTo>
+                  <a:lnTo>
+                    <a:pt x="104745" y="645932"/>
+                  </a:lnTo>
+                  <a:close/>
+                </a:path>
+              </a:pathLst>
+            </a:custGeom>
+            <a:solidFill>
+              <a:srgbClr val="E5484D"/>
+            </a:solidFill>
+            <a:ln>
+              <a:noFill/>
+            </a:ln>
+          </p:spPr>
+          <p:txBody>
+            <a:bodyPr rtlCol="0" anchor="ctr"/>
+            <a:lstStyle/>
+            <a:p>
+              <a:pPr algn="ctr"/>
+            </a:p>
+          </p:txBody>
+        </p:sp>
+        <p:sp>
+          <p:nvSpPr>
+            <p:cNvPr id="33" name="icon semaphore lamp"/>
+            <p:cNvSpPr/>
+            <p:nvPr/>
+          </p:nvSpPr>
+          <p:spPr>
+            <a:xfrm>
+              <a:off x="7210044" y="2307031"/>
+              <a:ext cx="246888" cy="246888"/>
+            </a:xfrm>
+            <a:prstGeom prst="ellipse">
+              <a:avLst/>
+            </a:prstGeom>
+            <a:solidFill>
+              <a:srgbClr val="3FB950"/>
+            </a:solidFill>
+            <a:ln w="12700">
+              <a:solidFill>
+                <a:srgbClr val="2B2F36"/>
+              </a:solidFill>
+            </a:ln>
+          </p:spPr>
+          <p:txBody>
+            <a:bodyPr rtlCol="0" anchor="ctr"/>
+            <a:lstStyle/>
+            <a:p>
+              <a:pPr algn="ctr"/>
+            </a:p>
+          </p:txBody>
+        </p:sp>
+        <p:sp>
+          <p:nvSpPr>
+            <p:cNvPr id="34" name="icon semaphore pivot"/>
+            <p:cNvSpPr/>
+            <p:nvPr/>
+          </p:nvSpPr>
+          <p:spPr>
+            <a:xfrm>
+              <a:off x="7345832" y="2430475"/>
+              <a:ext cx="98755" cy="98755"/>
+            </a:xfrm>
+            <a:prstGeom prst="ellipse">
+              <a:avLst/>
+            </a:prstGeom>
+            <a:solidFill>
+              <a:srgbClr val="3A3F47"/>
+            </a:solidFill>
+            <a:ln>
+              <a:noFill/>
+            </a:ln>
+          </p:spPr>
+          <p:txBody>
+            <a:bodyPr rtlCol="0" anchor="ctr"/>
+            <a:lstStyle/>
+            <a:p>
+              <a:pPr algn="ctr"/>
+            </a:p>
+          </p:txBody>
+        </p:sp>
+        <p:sp>
+          <p:nvSpPr>
+            <p:cNvPr id="35" name="card label"/>
+            <p:cNvSpPr txBox="1"/>
+            <p:nvPr/>
+          </p:nvSpPr>
+          <p:spPr>
+            <a:xfrm>
+              <a:off x="6373368" y="4114800"/>
+              <a:ext cx="2286000" cy="914400"/>
+            </a:xfrm>
+            <a:prstGeom prst="rect">
+              <a:avLst/>
+            </a:prstGeom>
+            <a:noFill/>
+          </p:spPr>
+          <p:txBody>
+            <a:bodyPr wrap="square" anchor="ctr" lIns="18288" tIns="9144" rIns="18288" bIns="9144">
+              <a:noAutofit/>
+            </a:bodyPr>
+            <a:lstStyle/>
+            <a:p>
+              <a:pPr algn="ctr"/>
+              <a:r>
+                <a:rPr sz="2200" b="1" i="0" lang="en-GB">
+                  <a:solidFill>
+                    <a:srgbClr val="F2F2F2"/>
+                  </a:solidFill>
+                  <a:latin typeface="Arial"/>
+                </a:rPr>
+                <a:t>Signalling</a:t>
+              </a:r>
+            </a:p>
+          </p:txBody>
+        </p:sp>
+        <p:sp>
+          <p:nvSpPr>
+            <p:cNvPr id="36" name="proposed card"/>
+            <p:cNvSpPr/>
+            <p:nvPr/>
+          </p:nvSpPr>
+          <p:spPr>
+            <a:xfrm>
+              <a:off x="9079992" y="1463040"/>
+              <a:ext cx="2560320" cy="3749039"/>
+            </a:xfrm>
+            <a:prstGeom prst="roundRect">
+              <a:avLst>
+                <a:gd name="adj" fmla="val 3571"/>
+              </a:avLst>
+            </a:prstGeom>
+            <a:solidFill>
+              <a:srgbClr val="2B2F36"/>
+            </a:solidFill>
+            <a:ln w="31750">
+              <a:solidFill>
+                <a:srgbClr val="B084F5"/>
+              </a:solidFill>
+              <a:prstDash val="dash"/>
+            </a:ln>
+          </p:spPr>
+          <p:txBody>
+            <a:bodyPr rtlCol="0" anchor="ctr"/>
+            <a:lstStyle/>
+            <a:p>
+              <a:pPr algn="ctr"/>
+            </a:p>
+          </p:txBody>
+        </p:sp>
+        <p:sp>
+          <p:nvSpPr>
+            <p:cNvPr id="37" name="icon panel"/>
+            <p:cNvSpPr/>
+            <p:nvPr/>
+          </p:nvSpPr>
+          <p:spPr>
+            <a:xfrm>
+              <a:off x="9308592" y="1737360"/>
+              <a:ext cx="2103120" cy="2194560"/>
+            </a:xfrm>
+            <a:prstGeom prst="roundRect">
+              <a:avLst>
+                <a:gd name="adj" fmla="val 3478"/>
+              </a:avLst>
+            </a:prstGeom>
+            <a:solidFill>
+              <a:srgbClr val="343A43"/>
+            </a:solidFill>
+            <a:ln>
+              <a:noFill/>
+            </a:ln>
+          </p:spPr>
+          <p:txBody>
+            <a:bodyPr rtlCol="0" anchor="ctr"/>
+            <a:lstStyle/>
+            <a:p>
+              <a:pPr algn="ctr"/>
+            </a:p>
+          </p:txBody>
+        </p:sp>
+        <p:sp>
+          <p:nvSpPr>
+            <p:cNvPr id="38" name="train icon engine"/>
+            <p:cNvSpPr/>
+            <p:nvPr/>
+          </p:nvSpPr>
+          <p:spPr>
+            <a:xfrm>
+              <a:off x="9445752" y="2670048"/>
+              <a:ext cx="621792" cy="402336"/>
+            </a:xfrm>
+            <a:prstGeom prst="roundRect">
+              <a:avLst>
+                <a:gd name="adj" fmla="val 18181"/>
+              </a:avLst>
+            </a:prstGeom>
+            <a:solidFill>
+              <a:srgbClr val="F28C28"/>
+            </a:solidFill>
+            <a:ln>
+              <a:noFill/>
+            </a:ln>
+          </p:spPr>
+          <p:txBody>
+            <a:bodyPr rtlCol="0" anchor="ctr"/>
+            <a:lstStyle/>
+            <a:p>
+              <a:pPr algn="ctr"/>
+            </a:p>
+          </p:txBody>
+        </p:sp>
+        <p:sp>
+          <p:nvSpPr>
+            <p:cNvPr id="39" name="train icon chimney"/>
+            <p:cNvSpPr/>
+            <p:nvPr/>
+          </p:nvSpPr>
+          <p:spPr>
+            <a:xfrm>
+              <a:off x="9902952" y="2560320"/>
+              <a:ext cx="128015" cy="182880"/>
+            </a:xfrm>
+            <a:prstGeom prst="rect">
+              <a:avLst/>
+            </a:prstGeom>
+            <a:solidFill>
+              <a:srgbClr val="3A3F47"/>
+            </a:solidFill>
+            <a:ln>
+              <a:noFill/>
+            </a:ln>
+          </p:spPr>
+          <p:txBody>
+            <a:bodyPr rtlCol="0" anchor="ctr"/>
+            <a:lstStyle/>
+            <a:p>
+              <a:pPr algn="ctr"/>
+            </a:p>
+          </p:txBody>
+        </p:sp>
+        <p:sp>
+          <p:nvSpPr>
+            <p:cNvPr id="40" name="train icon frame"/>
+            <p:cNvSpPr/>
+            <p:nvPr/>
+          </p:nvSpPr>
+          <p:spPr>
+            <a:xfrm>
+              <a:off x="9445752" y="2926080"/>
+              <a:ext cx="621792" cy="146304"/>
+            </a:xfrm>
+            <a:prstGeom prst="rect">
+              <a:avLst/>
+            </a:prstGeom>
+            <a:solidFill>
+              <a:srgbClr val="1B1D21"/>
+            </a:solidFill>
+            <a:ln>
+              <a:noFill/>
+            </a:ln>
+          </p:spPr>
+          <p:txBody>
+            <a:bodyPr rtlCol="0" anchor="ctr"/>
+            <a:lstStyle/>
+            <a:p>
+              <a:pPr algn="ctr"/>
+            </a:p>
+          </p:txBody>
+        </p:sp>
+        <p:sp>
+          <p:nvSpPr>
+            <p:cNvPr id="41" name="train icon wagon"/>
+            <p:cNvSpPr/>
+            <p:nvPr/>
+          </p:nvSpPr>
+          <p:spPr>
+            <a:xfrm>
+              <a:off x="10104120" y="2724912"/>
+              <a:ext cx="548640" cy="347472"/>
+            </a:xfrm>
+            <a:prstGeom prst="roundRect">
+              <a:avLst>
+                <a:gd name="adj" fmla="val 10526"/>
+              </a:avLst>
+            </a:prstGeom>
+            <a:solidFill>
+              <a:srgbClr val="6C7480"/>
+            </a:solidFill>
+            <a:ln w="9525">
+              <a:solidFill>
+                <a:srgbClr val="4A515B"/>
+              </a:solidFill>
+            </a:ln>
+          </p:spPr>
+          <p:txBody>
+            <a:bodyPr rtlCol="0" anchor="ctr"/>
+            <a:lstStyle/>
+            <a:p>
+              <a:pPr algn="ctr"/>
+            </a:p>
+          </p:txBody>
+        </p:sp>
+        <p:sp>
+          <p:nvSpPr>
+            <p:cNvPr id="42" name="train icon wagon"/>
+            <p:cNvSpPr/>
+            <p:nvPr/>
+          </p:nvSpPr>
+          <p:spPr>
+            <a:xfrm>
+              <a:off x="10689336" y="2724912"/>
+              <a:ext cx="548640" cy="347472"/>
+            </a:xfrm>
+            <a:prstGeom prst="roundRect">
+              <a:avLst>
+                <a:gd name="adj" fmla="val 10526"/>
+              </a:avLst>
+            </a:prstGeom>
+            <a:solidFill>
+              <a:srgbClr val="6C7480"/>
+            </a:solidFill>
+            <a:ln w="9525">
+              <a:solidFill>
+                <a:srgbClr val="4A515B"/>
+              </a:solidFill>
+            </a:ln>
+          </p:spPr>
+          <p:txBody>
+            <a:bodyPr rtlCol="0" anchor="ctr"/>
+            <a:lstStyle/>
+            <a:p>
+              <a:pPr algn="ctr"/>
+            </a:p>
+          </p:txBody>
+        </p:sp>
+        <p:sp>
+          <p:nvSpPr>
+            <p:cNvPr id="43" name="train icon wheel"/>
+            <p:cNvSpPr/>
+            <p:nvPr/>
+          </p:nvSpPr>
+          <p:spPr>
+            <a:xfrm>
+              <a:off x="9540849" y="3002889"/>
+              <a:ext cx="138988" cy="138988"/>
+            </a:xfrm>
+            <a:prstGeom prst="ellipse">
+              <a:avLst/>
+            </a:prstGeom>
+            <a:solidFill>
+              <a:srgbClr val="1B1D21"/>
+            </a:solidFill>
+            <a:ln w="9525">
+              <a:solidFill>
+                <a:srgbClr val="9AA0A6"/>
+              </a:solidFill>
+            </a:ln>
+          </p:spPr>
+          <p:txBody>
+            <a:bodyPr rtlCol="0" anchor="ctr"/>
+            <a:lstStyle/>
+            <a:p>
+              <a:pPr algn="ctr"/>
+            </a:p>
+          </p:txBody>
+        </p:sp>
+        <p:sp>
+          <p:nvSpPr>
+            <p:cNvPr id="44" name="train icon wheel"/>
+            <p:cNvSpPr/>
+            <p:nvPr/>
+          </p:nvSpPr>
+          <p:spPr>
+            <a:xfrm>
+              <a:off x="9833457" y="3002889"/>
+              <a:ext cx="138988" cy="138988"/>
+            </a:xfrm>
+            <a:prstGeom prst="ellipse">
+              <a:avLst/>
+            </a:prstGeom>
+            <a:solidFill>
+              <a:srgbClr val="1B1D21"/>
+            </a:solidFill>
+            <a:ln w="9525">
+              <a:solidFill>
+                <a:srgbClr val="9AA0A6"/>
+              </a:solidFill>
+            </a:ln>
+          </p:spPr>
+          <p:txBody>
+            <a:bodyPr rtlCol="0" anchor="ctr"/>
+            <a:lstStyle/>
+            <a:p>
+              <a:pPr algn="ctr"/>
+            </a:p>
+          </p:txBody>
+        </p:sp>
+        <p:sp>
+          <p:nvSpPr>
+            <p:cNvPr id="45" name="train icon wheel"/>
+            <p:cNvSpPr/>
+            <p:nvPr/>
+          </p:nvSpPr>
+          <p:spPr>
+            <a:xfrm>
+              <a:off x="10180929" y="3002889"/>
+              <a:ext cx="138988" cy="138988"/>
+            </a:xfrm>
+            <a:prstGeom prst="ellipse">
+              <a:avLst/>
+            </a:prstGeom>
+            <a:solidFill>
+              <a:srgbClr val="1B1D21"/>
+            </a:solidFill>
+            <a:ln w="9525">
+              <a:solidFill>
+                <a:srgbClr val="9AA0A6"/>
+              </a:solidFill>
+            </a:ln>
+          </p:spPr>
+          <p:txBody>
+            <a:bodyPr rtlCol="0" anchor="ctr"/>
+            <a:lstStyle/>
+            <a:p>
+              <a:pPr algn="ctr"/>
+            </a:p>
+          </p:txBody>
+        </p:sp>
+        <p:sp>
+          <p:nvSpPr>
+            <p:cNvPr id="46" name="train icon wheel"/>
+            <p:cNvSpPr/>
+            <p:nvPr/>
+          </p:nvSpPr>
+          <p:spPr>
+            <a:xfrm>
+              <a:off x="10473537" y="3002889"/>
+              <a:ext cx="138988" cy="138988"/>
+            </a:xfrm>
+            <a:prstGeom prst="ellipse">
+              <a:avLst/>
+            </a:prstGeom>
+            <a:solidFill>
+              <a:srgbClr val="1B1D21"/>
+            </a:solidFill>
+            <a:ln w="9525">
+              <a:solidFill>
+                <a:srgbClr val="9AA0A6"/>
+              </a:solidFill>
+            </a:ln>
+          </p:spPr>
+          <p:txBody>
+            <a:bodyPr rtlCol="0" anchor="ctr"/>
+            <a:lstStyle/>
+            <a:p>
+              <a:pPr algn="ctr"/>
+            </a:p>
+          </p:txBody>
+        </p:sp>
+        <p:sp>
+          <p:nvSpPr>
+            <p:cNvPr id="47" name="train icon wheel"/>
+            <p:cNvSpPr/>
+            <p:nvPr/>
+          </p:nvSpPr>
+          <p:spPr>
+            <a:xfrm>
+              <a:off x="10766145" y="3002889"/>
+              <a:ext cx="138988" cy="138988"/>
+            </a:xfrm>
+            <a:prstGeom prst="ellipse">
+              <a:avLst/>
+            </a:prstGeom>
+            <a:solidFill>
+              <a:srgbClr val="1B1D21"/>
+            </a:solidFill>
+            <a:ln w="9525">
+              <a:solidFill>
+                <a:srgbClr val="9AA0A6"/>
+              </a:solidFill>
+            </a:ln>
+          </p:spPr>
+          <p:txBody>
+            <a:bodyPr rtlCol="0" anchor="ctr"/>
+            <a:lstStyle/>
+            <a:p>
+              <a:pPr algn="ctr"/>
+            </a:p>
+          </p:txBody>
+        </p:sp>
+        <p:sp>
+          <p:nvSpPr>
+            <p:cNvPr id="48" name="train icon wheel"/>
+            <p:cNvSpPr/>
+            <p:nvPr/>
+          </p:nvSpPr>
+          <p:spPr>
+            <a:xfrm>
+              <a:off x="11058753" y="3002889"/>
+              <a:ext cx="138988" cy="138988"/>
+            </a:xfrm>
+            <a:prstGeom prst="ellipse">
+              <a:avLst/>
+            </a:prstGeom>
+            <a:solidFill>
+              <a:srgbClr val="1B1D21"/>
+            </a:solidFill>
+            <a:ln w="9525">
+              <a:solidFill>
+                <a:srgbClr val="9AA0A6"/>
+              </a:solidFill>
+            </a:ln>
+          </p:spPr>
+          <p:txBody>
+            <a:bodyPr rtlCol="0" anchor="ctr"/>
+            <a:lstStyle/>
+            <a:p>
+              <a:pPr algn="ctr"/>
+            </a:p>
+          </p:txBody>
+        </p:sp>
+        <p:sp>
+          <p:nvSpPr>
+            <p:cNvPr id="49" name="rail"/>
+            <p:cNvSpPr/>
+            <p:nvPr/>
+          </p:nvSpPr>
+          <p:spPr>
+            <a:xfrm>
+              <a:off x="9354312" y="3182112"/>
+              <a:ext cx="2011680" cy="54864"/>
+            </a:xfrm>
+            <a:prstGeom prst="rect">
+              <a:avLst/>
+            </a:prstGeom>
+            <a:solidFill>
+              <a:srgbClr val="9AA0A6"/>
+            </a:solidFill>
+            <a:ln>
+              <a:noFill/>
+            </a:ln>
+          </p:spPr>
+          <p:txBody>
+            <a:bodyPr rtlCol="0" anchor="ctr"/>
+            <a:lstStyle/>
+            <a:p>
+              <a:pPr algn="ctr"/>
+            </a:p>
+          </p:txBody>
+        </p:sp>
+        <p:sp>
+          <p:nvSpPr>
+            <p:cNvPr id="50" name="card label"/>
+            <p:cNvSpPr txBox="1"/>
+            <p:nvPr/>
+          </p:nvSpPr>
+          <p:spPr>
+            <a:xfrm>
+              <a:off x="9217152" y="4114800"/>
+              <a:ext cx="2286000" cy="914400"/>
+            </a:xfrm>
+            <a:prstGeom prst="rect">
+              <a:avLst/>
+            </a:prstGeom>
+            <a:noFill/>
+          </p:spPr>
+          <p:txBody>
+            <a:bodyPr wrap="square" anchor="ctr" lIns="18288" tIns="9144" rIns="18288" bIns="9144">
+              <a:noAutofit/>
+            </a:bodyPr>
+            <a:lstStyle/>
+            <a:p>
+              <a:pPr algn="ctr"/>
+              <a:r>
+                <a:rPr sz="2200" b="1" i="0" lang="en-GB">
+                  <a:solidFill>
+                    <a:srgbClr val="F2F2F2"/>
+                  </a:solidFill>
+                  <a:latin typeface="Arial"/>
+                </a:rPr>
+                <a:t>Rolling Stock</a:t>
+              </a:r>
+            </a:p>
+          </p:txBody>
+        </p:sp>
+      </p:grpSp>
+      <p:sp>
+        <p:nvSpPr>
+          <p:cNvPr id="51" name="CAPTION BAR"/>
+          <p:cNvSpPr/>
+          <p:nvPr/>
+        </p:nvSpPr>
+        <p:spPr>
+          <a:xfrm>
+            <a:off x="548640" y="5760720"/>
+            <a:ext cx="11091672" cy="731520"/>
+          </a:xfrm>
+          <a:prstGeom prst="roundRect">
+            <a:avLst>
+              <a:gd name="adj" fmla="val 10000"/>
+            </a:avLst>
+          </a:prstGeom>
+          <a:solidFill>
+            <a:srgbClr val="2B2F36"/>
+          </a:solidFill>
+          <a:ln>
+            <a:noFill/>
+          </a:ln>
+        </p:spPr>
+        <p:txBody>
+          <a:bodyPr rtlCol="0" anchor="ctr"/>
+          <a:lstStyle/>
+          <a:p>
+            <a:pPr algn="ctr"/>
+          </a:p>
+        </p:txBody>
+      </p:sp>
+      <p:sp>
+        <p:nvSpPr>
+          <p:cNvPr id="52" name="CAPTION RULE"/>
+          <p:cNvSpPr/>
+          <p:nvPr/>
+        </p:nvSpPr>
+        <p:spPr>
+          <a:xfrm>
+            <a:off x="548640" y="5815583"/>
+            <a:ext cx="73152" cy="621792"/>
+          </a:xfrm>
+          <a:prstGeom prst="rect">
+            <a:avLst/>
+          </a:prstGeom>
+          <a:solidFill>
+            <a:srgbClr val="F28C28"/>
+          </a:solidFill>
+          <a:ln>
+            <a:noFill/>
+          </a:ln>
+        </p:spPr>
+        <p:txBody>
+          <a:bodyPr rtlCol="0" anchor="ctr"/>
+          <a:lstStyle/>
+          <a:p>
+            <a:pPr algn="ctr"/>
+          </a:p>
+        </p:txBody>
+      </p:sp>
+      <p:sp>
+        <p:nvSpPr>
+          <p:cNvPr id="53" name="CAPTION"/>
+          <p:cNvSpPr txBox="1"/>
+          <p:nvPr/>
+        </p:nvSpPr>
+        <p:spPr>
+          <a:xfrm>
+            <a:off x="777240" y="5760720"/>
+            <a:ext cx="10744200" cy="731520"/>
+          </a:xfrm>
+          <a:prstGeom prst="rect">
+            <a:avLst/>
+          </a:prstGeom>
+          <a:noFill/>
+        </p:spPr>
+        <p:txBody>
+          <a:bodyPr wrap="square" anchor="ctr" lIns="18288" tIns="9144" rIns="18288" bIns="9144">
+            <a:noAutofit/>
+          </a:bodyPr>
+          <a:lstStyle/>
+          <a:p>
+            <a:pPr algn="l"/>
+            <a:r>
+              <a:rPr sz="2000" b="0" i="0" lang="en-GB">
+                <a:solidFill>
+                  <a:srgbClr val="F2F2F2"/>
+                </a:solidFill>
+                <a:latin typeface="Arial"/>
+              </a:rPr>
+              <a:t>Parts could sit in four groups: track, stations, signals and trains.</a:t>
+            </a:r>
+          </a:p>
+        </p:txBody>
+      </p:sp>
+      <p:sp>
+        <p:nvSpPr>
+          <p:cNvPr id="54" name="NUM"/>
+          <p:cNvSpPr txBox="1"/>
+          <p:nvPr/>
+        </p:nvSpPr>
+        <p:spPr>
+          <a:xfrm>
+            <a:off x="10725912" y="6528816"/>
+            <a:ext cx="914400" cy="274320"/>
+          </a:xfrm>
+          <a:prstGeom prst="rect">
+            <a:avLst/>
+          </a:prstGeom>
+          <a:noFill/>
+        </p:spPr>
+        <p:txBody>
+          <a:bodyPr wrap="square" anchor="ctr" lIns="18288" tIns="9144" rIns="18288" bIns="9144">
+            <a:noAutofit/>
+          </a:bodyPr>
+          <a:lstStyle/>
+          <a:p>
+            <a:pPr algn="r"/>
+            <a:r>
+              <a:rPr sz="1400" b="0" i="0" lang="en-GB">
+                <a:solidFill>
+                  <a:srgbClr val="A9B0B8"/>
+                </a:solidFill>
+                <a:latin typeface="Arial"/>
+              </a:rPr>
+              <a:t>18</a:t>
+            </a:r>
+          </a:p>
+        </p:txBody>
+      </p:sp>
+    </p:spTree>
+  </p:cSld>
+  <p:clrMapOvr>
+    <a:masterClrMapping/>
+  </p:clrMapOvr>
+</p:sld>
+</file>
+
+<file path=ppt/slides/slide19.xml><?xml version="1.0" encoding="utf-8"?>
+<p:sld xmlns:a="http://schemas.openxmlformats.org/drawingml/2006/main" xmlns:p="http://schemas.openxmlformats.org/presentationml/2006/main" xmlns:r="http://schemas.openxmlformats.org/officeDocument/2006/relationships">
+  <p:cSld>
+    <p:bg>
+      <p:bgPr>
+        <a:solidFill>
+          <a:srgbClr val="1E2126"/>
+        </a:solidFill>
+        <a:effectLst/>
+      </p:bgPr>
+    </p:bg>
+    <p:spTree>
+      <p:nvGrpSpPr>
+        <p:cNvPr id="1" name=""/>
+        <p:cNvGrpSpPr/>
+        <p:nvPr/>
+      </p:nvGrpSpPr>
+      <p:grpSpPr/>
+      <p:sp>
+        <p:nvSpPr>
+          <p:cNvPr id="2" name="TITLE"/>
+          <p:cNvSpPr>
+            <a:spLocks noGrp="1"/>
+          </p:cNvSpPr>
+          <p:nvPr>
+            <p:ph type="title"/>
+          </p:nvPr>
+        </p:nvSpPr>
+        <p:spPr>
+          <a:xfrm>
+            <a:off x="548640" y="365760"/>
+            <a:ext cx="9326880" cy="731520"/>
+          </a:xfrm>
+        </p:spPr>
+        <p:txBody>
+          <a:bodyPr wrap="square" anchor="ctr" lIns="0" rIns="0" tIns="0" bIns="0">
+            <a:noAutofit/>
+          </a:bodyPr>
+          <a:lstStyle/>
+          <a:p>
+            <a:pPr algn="l"/>
+            <a:r>
+              <a:rPr sz="3600" b="1" i="0" lang="en-GB">
+                <a:solidFill>
+                  <a:srgbClr val="F2F2F2"/>
+                </a:solidFill>
+                <a:latin typeface="Arial"/>
+              </a:rPr>
+              <a:t>Can the game do it?</a:t>
+            </a:r>
+          </a:p>
+        </p:txBody>
+      </p:sp>
+      <p:sp>
+        <p:nvSpPr>
+          <p:cNvPr id="3" name="CHIP"/>
+          <p:cNvSpPr/>
+          <p:nvPr/>
+        </p:nvSpPr>
+        <p:spPr>
+          <a:xfrm>
+            <a:off x="10088575" y="530352"/>
+            <a:ext cx="1554480" cy="365760"/>
+          </a:xfrm>
+          <a:prstGeom prst="roundRect">
+            <a:avLst>
+              <a:gd name="adj" fmla="val 30000"/>
+            </a:avLst>
+          </a:prstGeom>
+          <a:noFill/>
+          <a:ln w="25400">
+            <a:solidFill>
+              <a:srgbClr val="A9B0B8"/>
+            </a:solidFill>
+          </a:ln>
+        </p:spPr>
+        <p:txBody>
+          <a:bodyPr rtlCol="0" anchor="ctr" wrap="square" lIns="54864" tIns="0" rIns="54864" bIns="0">
+            <a:noAutofit/>
+          </a:bodyPr>
+          <a:lstStyle/>
+          <a:p>
+            <a:pPr algn="ctr"/>
+            <a:r>
+              <a:rPr sz="1400" b="1" i="0" lang="en-GB">
+                <a:solidFill>
+                  <a:srgbClr val="F2F2F2"/>
+                </a:solidFill>
+                <a:latin typeface="Arial"/>
+              </a:rPr>
+              <a:t>UNDECIDED</a:t>
+            </a:r>
+          </a:p>
+        </p:txBody>
+      </p:sp>
+      <p:grpSp>
+        <p:nvGrpSpPr>
+          <p:cNvPr id="4" name="Question card" descr="A question card with a big question mark: does the game allow a new top-level tab? Not yet checked."/>
+          <p:cNvGrpSpPr/>
+          <p:nvPr/>
+        </p:nvGrpSpPr>
+        <p:grpSpPr>
+          <a:xfrm>
+            <a:off x="1280160" y="1600200"/>
+            <a:ext cx="9628632" cy="3246120"/>
+            <a:chOff x="1280160" y="1600200"/>
+            <a:chExt cx="9628632" cy="3246120"/>
+          </a:xfrm>
+        </p:grpSpPr>
+        <p:sp>
+          <p:nvSpPr>
+            <p:cNvPr id="5" name="question card"/>
+            <p:cNvSpPr/>
+            <p:nvPr/>
+          </p:nvSpPr>
+          <p:spPr>
+            <a:xfrm>
+              <a:off x="1280160" y="1600200"/>
+              <a:ext cx="9628632" cy="3246120"/>
+            </a:xfrm>
+            <a:prstGeom prst="roundRect">
+              <a:avLst>
+                <a:gd name="adj" fmla="val 3380"/>
+              </a:avLst>
+            </a:prstGeom>
+            <a:solidFill>
+              <a:srgbClr val="2B2F36"/>
+            </a:solidFill>
+            <a:ln w="31750">
+              <a:solidFill>
+                <a:srgbClr val="A9B0B8"/>
+              </a:solidFill>
+              <a:prstDash val="dash"/>
+            </a:ln>
+          </p:spPr>
+          <p:txBody>
+            <a:bodyPr rtlCol="0" anchor="ctr"/>
+            <a:lstStyle/>
+            <a:p>
+              <a:pPr algn="ctr"/>
+            </a:p>
+          </p:txBody>
+        </p:sp>
+        <p:sp>
+          <p:nvSpPr>
+            <p:cNvPr id="6" name="ghost tab"/>
+            <p:cNvSpPr/>
+            <p:nvPr/>
+          </p:nvSpPr>
+          <p:spPr>
+            <a:xfrm>
+              <a:off x="1645920" y="1920240"/>
+              <a:ext cx="914400" cy="502920"/>
+            </a:xfrm>
+            <a:prstGeom prst="round2SameRect">
+              <a:avLst>
+                <a:gd name="adj1" fmla="val 22000"/>
+                <a:gd name="adj2" fmla="val 0"/>
+              </a:avLst>
+            </a:prstGeom>
+            <a:solidFill>
+              <a:srgbClr val="343A43"/>
+            </a:solidFill>
+            <a:ln w="19050">
+              <a:solidFill>
+                <a:srgbClr val="4A515B"/>
+              </a:solidFill>
+            </a:ln>
+          </p:spPr>
+          <p:txBody>
+            <a:bodyPr rtlCol="0" anchor="ctr"/>
+            <a:lstStyle/>
+            <a:p>
+              <a:pPr algn="ctr"/>
+            </a:p>
+          </p:txBody>
+        </p:sp>
+        <p:sp>
+          <p:nvSpPr>
+            <p:cNvPr id="7" name="ghost tab"/>
+            <p:cNvSpPr/>
+            <p:nvPr/>
+          </p:nvSpPr>
+          <p:spPr>
+            <a:xfrm>
+              <a:off x="2651760" y="1920240"/>
+              <a:ext cx="914400" cy="502920"/>
+            </a:xfrm>
+            <a:prstGeom prst="round2SameRect">
+              <a:avLst>
+                <a:gd name="adj1" fmla="val 22000"/>
+                <a:gd name="adj2" fmla="val 0"/>
+              </a:avLst>
+            </a:prstGeom>
+            <a:solidFill>
+              <a:srgbClr val="343A43"/>
+            </a:solidFill>
+            <a:ln w="19050">
+              <a:solidFill>
+                <a:srgbClr val="4A515B"/>
+              </a:solidFill>
+            </a:ln>
+          </p:spPr>
+          <p:txBody>
+            <a:bodyPr rtlCol="0" anchor="ctr"/>
+            <a:lstStyle/>
+            <a:p>
+              <a:pPr algn="ctr"/>
+            </a:p>
+          </p:txBody>
+        </p:sp>
+        <p:sp>
+          <p:nvSpPr>
+            <p:cNvPr id="8" name="ghost tab"/>
+            <p:cNvSpPr/>
+            <p:nvPr/>
+          </p:nvSpPr>
+          <p:spPr>
+            <a:xfrm>
+              <a:off x="3657600" y="1920240"/>
+              <a:ext cx="914400" cy="502920"/>
+            </a:xfrm>
+            <a:prstGeom prst="round2SameRect">
+              <a:avLst>
+                <a:gd name="adj1" fmla="val 22000"/>
+                <a:gd name="adj2" fmla="val 0"/>
+              </a:avLst>
+            </a:prstGeom>
+            <a:solidFill>
+              <a:srgbClr val="343A43"/>
+            </a:solidFill>
+            <a:ln w="19050">
+              <a:solidFill>
+                <a:srgbClr val="4A515B"/>
+              </a:solidFill>
+            </a:ln>
+          </p:spPr>
+          <p:txBody>
+            <a:bodyPr rtlCol="0" anchor="ctr"/>
+            <a:lstStyle/>
+            <a:p>
+              <a:pPr algn="ctr"/>
+            </a:p>
+          </p:txBody>
+        </p:sp>
+        <p:sp>
+          <p:nvSpPr>
+            <p:cNvPr id="9" name="dashed new tab"/>
+            <p:cNvSpPr/>
+            <p:nvPr/>
+          </p:nvSpPr>
+          <p:spPr>
+            <a:xfrm>
+              <a:off x="4663440" y="1828800"/>
+              <a:ext cx="1371600" cy="594360"/>
+            </a:xfrm>
+            <a:prstGeom prst="round2SameRect">
+              <a:avLst>
+                <a:gd name="adj1" fmla="val 22000"/>
+                <a:gd name="adj2" fmla="val 0"/>
+              </a:avLst>
+            </a:prstGeom>
+            <a:noFill/>
+            <a:ln w="31750">
+              <a:solidFill>
+                <a:srgbClr val="A9B0B8"/>
+              </a:solidFill>
+              <a:prstDash val="dash"/>
+            </a:ln>
+          </p:spPr>
+          <p:txBody>
+            <a:bodyPr rtlCol="0" anchor="ctr"/>
+            <a:lstStyle/>
+            <a:p>
+              <a:pPr algn="ctr"/>
+            </a:p>
+          </p:txBody>
+        </p:sp>
+        <p:sp>
+          <p:nvSpPr>
+            <p:cNvPr id="10" name="QUESTION"/>
+            <p:cNvSpPr txBox="1"/>
+            <p:nvPr/>
+          </p:nvSpPr>
+          <p:spPr>
+            <a:xfrm>
+              <a:off x="1645920" y="2834640"/>
+              <a:ext cx="6126480" cy="1554480"/>
+            </a:xfrm>
+            <a:prstGeom prst="rect">
+              <a:avLst/>
+            </a:prstGeom>
+            <a:noFill/>
+          </p:spPr>
+          <p:txBody>
+            <a:bodyPr wrap="square" anchor="ctr" lIns="18288" tIns="9144" rIns="18288" bIns="9144">
+              <a:noAutofit/>
+            </a:bodyPr>
+            <a:lstStyle/>
+            <a:p>
+              <a:pPr algn="l"/>
+              <a:r>
+                <a:rPr sz="3400" b="1" i="0" lang="en-GB">
+                  <a:solidFill>
+                    <a:srgbClr val="F2F2F2"/>
+                  </a:solidFill>
+                  <a:latin typeface="Arial"/>
+                </a:rPr>
+                <a:t>Does the game allow a new top-level tab?</a:t>
+              </a:r>
+            </a:p>
+          </p:txBody>
+        </p:sp>
+        <p:sp>
+          <p:nvSpPr>
+            <p:cNvPr id="11" name="question disc"/>
+            <p:cNvSpPr/>
+            <p:nvPr/>
+          </p:nvSpPr>
+          <p:spPr>
+            <a:xfrm>
+              <a:off x="8138160" y="2057400"/>
+              <a:ext cx="2194560" cy="2194560"/>
+            </a:xfrm>
+            <a:prstGeom prst="ellipse">
+              <a:avLst/>
+            </a:prstGeom>
+            <a:noFill/>
+            <a:ln w="50800">
+              <a:solidFill>
+                <a:srgbClr val="A9B0B8"/>
+              </a:solidFill>
+            </a:ln>
+          </p:spPr>
+          <p:txBody>
+            <a:bodyPr rtlCol="0" anchor="ctr" wrap="square" lIns="0" tIns="0" rIns="0" bIns="0">
+              <a:noAutofit/>
+            </a:bodyPr>
+            <a:lstStyle/>
+            <a:p>
+              <a:pPr algn="ctr"/>
+              <a:r>
+                <a:rPr sz="9600" b="1" i="0" lang="en-GB">
+                  <a:solidFill>
+                    <a:srgbClr val="F2F2F2"/>
+                  </a:solidFill>
+                  <a:latin typeface="Arial"/>
+                </a:rPr>
+                <a:t>?</a:t>
+              </a:r>
+            </a:p>
+          </p:txBody>
+        </p:sp>
+      </p:grpSp>
+      <p:sp>
+        <p:nvSpPr>
+          <p:cNvPr id="12" name="FOOTER"/>
+          <p:cNvSpPr txBox="1"/>
+          <p:nvPr/>
+        </p:nvSpPr>
+        <p:spPr>
+          <a:xfrm>
+            <a:off x="1280160" y="5029200"/>
+            <a:ext cx="1828800" cy="365760"/>
+          </a:xfrm>
+          <a:prstGeom prst="rect">
+            <a:avLst/>
+          </a:prstGeom>
+          <a:noFill/>
+        </p:spPr>
+        <p:txBody>
+          <a:bodyPr wrap="square" anchor="ctr" lIns="18288" tIns="9144" rIns="18288" bIns="9144">
+            <a:noAutofit/>
+          </a:bodyPr>
+          <a:lstStyle/>
+          <a:p>
+            <a:pPr algn="l"/>
+            <a:r>
+              <a:rPr sz="1800" b="1" i="0" lang="en-GB">
+                <a:solidFill>
+                  <a:srgbClr val="A9B0B8"/>
+                </a:solidFill>
+                <a:latin typeface="Arial"/>
+              </a:rPr>
+              <a:t>OQ19</a:t>
+            </a:r>
+          </a:p>
+        </p:txBody>
+      </p:sp>
+      <p:sp>
+        <p:nvSpPr>
+          <p:cNvPr id="13" name="CAPTION BAR"/>
+          <p:cNvSpPr/>
+          <p:nvPr/>
+        </p:nvSpPr>
+        <p:spPr>
+          <a:xfrm>
+            <a:off x="548640" y="5760720"/>
+            <a:ext cx="11091672" cy="731520"/>
+          </a:xfrm>
+          <a:prstGeom prst="roundRect">
+            <a:avLst>
+              <a:gd name="adj" fmla="val 10000"/>
+            </a:avLst>
+          </a:prstGeom>
+          <a:solidFill>
+            <a:srgbClr val="2B2F36"/>
+          </a:solidFill>
+          <a:ln>
+            <a:noFill/>
+          </a:ln>
+        </p:spPr>
+        <p:txBody>
+          <a:bodyPr rtlCol="0" anchor="ctr"/>
+          <a:lstStyle/>
+          <a:p>
+            <a:pPr algn="ctr"/>
+          </a:p>
+        </p:txBody>
+      </p:sp>
+      <p:sp>
+        <p:nvSpPr>
+          <p:cNvPr id="14" name="CAPTION RULE"/>
+          <p:cNvSpPr/>
+          <p:nvPr/>
+        </p:nvSpPr>
+        <p:spPr>
+          <a:xfrm>
+            <a:off x="548640" y="5815583"/>
+            <a:ext cx="73152" cy="621792"/>
+          </a:xfrm>
+          <a:prstGeom prst="rect">
+            <a:avLst/>
+          </a:prstGeom>
+          <a:solidFill>
+            <a:srgbClr val="F28C28"/>
+          </a:solidFill>
+          <a:ln>
+            <a:noFill/>
+          </a:ln>
+        </p:spPr>
+        <p:txBody>
+          <a:bodyPr rtlCol="0" anchor="ctr"/>
+          <a:lstStyle/>
+          <a:p>
+            <a:pPr algn="ctr"/>
+          </a:p>
+        </p:txBody>
+      </p:sp>
+      <p:sp>
+        <p:nvSpPr>
+          <p:cNvPr id="15" name="CAPTION"/>
+          <p:cNvSpPr txBox="1"/>
+          <p:nvPr/>
+        </p:nvSpPr>
+        <p:spPr>
+          <a:xfrm>
+            <a:off x="777240" y="5760720"/>
+            <a:ext cx="10744200" cy="731520"/>
+          </a:xfrm>
+          <a:prstGeom prst="rect">
+            <a:avLst/>
+          </a:prstGeom>
+          <a:noFill/>
+        </p:spPr>
+        <p:txBody>
+          <a:bodyPr wrap="square" anchor="ctr" lIns="18288" tIns="9144" rIns="18288" bIns="9144">
+            <a:noAutofit/>
+          </a:bodyPr>
+          <a:lstStyle/>
+          <a:p>
+            <a:pPr algn="l"/>
+            <a:r>
+              <a:rPr sz="2000" b="0" i="0" lang="en-GB">
+                <a:solidFill>
+                  <a:srgbClr val="F2F2F2"/>
+                </a:solidFill>
+                <a:latin typeface="Arial"/>
+              </a:rPr>
+              <a:t>Whether the game allows a new tab is not yet checked.</a:t>
+            </a:r>
+          </a:p>
+        </p:txBody>
+      </p:sp>
+      <p:sp>
+        <p:nvSpPr>
+          <p:cNvPr id="16" name="NUM"/>
+          <p:cNvSpPr txBox="1"/>
+          <p:nvPr/>
+        </p:nvSpPr>
+        <p:spPr>
+          <a:xfrm>
+            <a:off x="10725912" y="6528816"/>
+            <a:ext cx="914400" cy="274320"/>
+          </a:xfrm>
+          <a:prstGeom prst="rect">
+            <a:avLst/>
+          </a:prstGeom>
+          <a:noFill/>
+        </p:spPr>
+        <p:txBody>
+          <a:bodyPr wrap="square" anchor="ctr" lIns="18288" tIns="9144" rIns="18288" bIns="9144">
+            <a:noAutofit/>
+          </a:bodyPr>
+          <a:lstStyle/>
+          <a:p>
+            <a:pPr algn="r"/>
+            <a:r>
+              <a:rPr sz="1400" b="0" i="0" lang="en-GB">
+                <a:solidFill>
+                  <a:srgbClr val="A9B0B8"/>
+                </a:solidFill>
+                <a:latin typeface="Arial"/>
+              </a:rPr>
+              <a:t>19</a:t>
+            </a:r>
+          </a:p>
+        </p:txBody>
+      </p:sp>
+    </p:spTree>
+  </p:cSld>
+  <p:clrMapOvr>
+    <a:masterClrMapping/>
+  </p:clrMapOvr>
+</p:sld>
+</file>
+
 <file path=ppt/slides/slide2.xml><?xml version="1.0" encoding="utf-8"?>
 <p:sld xmlns:a="http://schemas.openxmlformats.org/drawingml/2006/main" xmlns:p="http://schemas.openxmlformats.org/presentationml/2006/main" xmlns:r="http://schemas.openxmlformats.org/officeDocument/2006/relationships">
   <p:cSld>
@@ -13267,6 +17115,3505 @@
                 <a:latin typeface="Arial"/>
               </a:rPr>
               <a:t>2</a:t>
+            </a:r>
+          </a:p>
+        </p:txBody>
+      </p:sp>
+    </p:spTree>
+  </p:cSld>
+  <p:clrMapOvr>
+    <a:masterClrMapping/>
+  </p:clrMapOvr>
+</p:sld>
+</file>
+
+<file path=ppt/slides/slide20.xml><?xml version="1.0" encoding="utf-8"?>
+<p:sld xmlns:a="http://schemas.openxmlformats.org/drawingml/2006/main" xmlns:p="http://schemas.openxmlformats.org/presentationml/2006/main" xmlns:r="http://schemas.openxmlformats.org/officeDocument/2006/relationships">
+  <p:cSld>
+    <p:bg>
+      <p:bgPr>
+        <a:solidFill>
+          <a:srgbClr val="1E2126"/>
+        </a:solidFill>
+        <a:effectLst/>
+      </p:bgPr>
+    </p:bg>
+    <p:spTree>
+      <p:nvGrpSpPr>
+        <p:cNvPr id="1" name=""/>
+        <p:cNvGrpSpPr/>
+        <p:nvPr/>
+      </p:nvGrpSpPr>
+      <p:grpSpPr/>
+      <p:sp>
+        <p:nvSpPr>
+          <p:cNvPr id="2" name="TITLE"/>
+          <p:cNvSpPr>
+            <a:spLocks noGrp="1"/>
+          </p:cNvSpPr>
+          <p:nvPr>
+            <p:ph type="title"/>
+          </p:nvPr>
+        </p:nvSpPr>
+        <p:spPr>
+          <a:xfrm>
+            <a:off x="548640" y="365760"/>
+            <a:ext cx="9326880" cy="731520"/>
+          </a:xfrm>
+        </p:spPr>
+        <p:txBody>
+          <a:bodyPr wrap="square" anchor="ctr" lIns="0" rIns="0" tIns="0" bIns="0">
+            <a:noAutofit/>
+          </a:bodyPr>
+          <a:lstStyle/>
+          <a:p>
+            <a:pPr algn="l"/>
+            <a:r>
+              <a:rPr sz="3600" b="1" i="0" lang="en-GB">
+                <a:solidFill>
+                  <a:srgbClr val="F2F2F2"/>
+                </a:solidFill>
+                <a:latin typeface="Arial"/>
+              </a:rPr>
+              <a:t>Reactions to your trains</a:t>
+            </a:r>
+          </a:p>
+        </p:txBody>
+      </p:sp>
+      <p:sp>
+        <p:nvSpPr>
+          <p:cNvPr id="3" name="CHIP"/>
+          <p:cNvSpPr/>
+          <p:nvPr/>
+        </p:nvSpPr>
+        <p:spPr>
+          <a:xfrm>
+            <a:off x="10088575" y="530352"/>
+            <a:ext cx="1554480" cy="365760"/>
+          </a:xfrm>
+          <a:prstGeom prst="roundRect">
+            <a:avLst>
+              <a:gd name="adj" fmla="val 30000"/>
+            </a:avLst>
+          </a:prstGeom>
+          <a:solidFill>
+            <a:srgbClr val="B084F5"/>
+          </a:solidFill>
+          <a:ln>
+            <a:noFill/>
+          </a:ln>
+        </p:spPr>
+        <p:txBody>
+          <a:bodyPr rtlCol="0" anchor="ctr" wrap="square" lIns="54864" tIns="0" rIns="54864" bIns="0">
+            <a:noAutofit/>
+          </a:bodyPr>
+          <a:lstStyle/>
+          <a:p>
+            <a:pPr algn="ctr"/>
+            <a:r>
+              <a:rPr sz="1400" b="1" i="0" lang="en-GB">
+                <a:solidFill>
+                  <a:srgbClr val="101418"/>
+                </a:solidFill>
+                <a:latin typeface="Arial"/>
+              </a:rPr>
+              <a:t>PROPOSED</a:t>
+            </a:r>
+          </a:p>
+        </p:txBody>
+      </p:sp>
+      <p:grpSp>
+        <p:nvGrpSpPr>
+          <p:cNvPr id="4" name="Placeholder avatar" descr="Placeholder avatar for the railway guide: a plain round head with no face, a headset and orange shoulders. Her look is undecided (OQ15)."/>
+          <p:cNvGrpSpPr/>
+          <p:nvPr/>
+        </p:nvGrpSpPr>
+        <p:grpSpPr>
+          <a:xfrm>
+            <a:off x="2606039" y="1554480"/>
+            <a:ext cx="3200400" cy="3288410"/>
+            <a:chOff x="2606039" y="1554480"/>
+            <a:chExt cx="3200400" cy="3288410"/>
+          </a:xfrm>
+        </p:grpSpPr>
+        <p:sp>
+          <p:nvSpPr>
+            <p:cNvPr id="5" name="shoulders"/>
+            <p:cNvSpPr/>
+            <p:nvPr/>
+          </p:nvSpPr>
+          <p:spPr>
+            <a:xfrm>
+              <a:off x="2606039" y="3322701"/>
+              <a:ext cx="3200400" cy="1520189"/>
+            </a:xfrm>
+            <a:prstGeom prst="round2SameRect">
+              <a:avLst>
+                <a:gd name="adj1" fmla="val 50000"/>
+                <a:gd name="adj2" fmla="val 0"/>
+              </a:avLst>
+            </a:prstGeom>
+            <a:solidFill>
+              <a:srgbClr val="F28C28"/>
+            </a:solidFill>
+            <a:ln>
+              <a:noFill/>
+            </a:ln>
+          </p:spPr>
+          <p:txBody>
+            <a:bodyPr rtlCol="0" anchor="ctr"/>
+            <a:lstStyle/>
+            <a:p>
+              <a:pPr algn="ctr"/>
+            </a:p>
+          </p:txBody>
+        </p:sp>
+        <p:sp>
+          <p:nvSpPr>
+            <p:cNvPr id="6" name="neck"/>
+            <p:cNvSpPr/>
+            <p:nvPr/>
+          </p:nvSpPr>
+          <p:spPr>
+            <a:xfrm>
+              <a:off x="3886200" y="3122676"/>
+              <a:ext cx="640080" cy="640080"/>
+            </a:xfrm>
+            <a:prstGeom prst="rect">
+              <a:avLst/>
+            </a:prstGeom>
+            <a:solidFill>
+              <a:srgbClr val="B9BEC4"/>
+            </a:solidFill>
+            <a:ln>
+              <a:noFill/>
+            </a:ln>
+          </p:spPr>
+          <p:txBody>
+            <a:bodyPr rtlCol="0" anchor="ctr"/>
+            <a:lstStyle/>
+            <a:p>
+              <a:pPr algn="ctr"/>
+            </a:p>
+          </p:txBody>
+        </p:sp>
+        <p:sp>
+          <p:nvSpPr>
+            <p:cNvPr id="7" name="head"/>
+            <p:cNvSpPr/>
+            <p:nvPr/>
+          </p:nvSpPr>
+          <p:spPr>
+            <a:xfrm>
+              <a:off x="3406139" y="1762506"/>
+              <a:ext cx="1600200" cy="1600200"/>
+            </a:xfrm>
+            <a:prstGeom prst="ellipse">
+              <a:avLst/>
+            </a:prstGeom>
+            <a:solidFill>
+              <a:srgbClr val="D5D9DE"/>
+            </a:solidFill>
+            <a:ln w="19050">
+              <a:solidFill>
+                <a:srgbClr val="9AA0A6"/>
+              </a:solidFill>
+            </a:ln>
+          </p:spPr>
+          <p:txBody>
+            <a:bodyPr rtlCol="0" anchor="ctr"/>
+            <a:lstStyle/>
+            <a:p>
+              <a:pPr algn="ctr"/>
+            </a:p>
+          </p:txBody>
+        </p:sp>
+        <p:sp>
+          <p:nvSpPr>
+            <p:cNvPr id="8" name="headset band"/>
+            <p:cNvSpPr/>
+            <p:nvPr/>
+          </p:nvSpPr>
+          <p:spPr>
+            <a:xfrm>
+              <a:off x="3207925" y="1554480"/>
+              <a:ext cx="1996629" cy="893299"/>
+            </a:xfrm>
+            <a:custGeom>
+              <a:avLst/>
+              <a:gdLst/>
+              <a:ahLst/>
+              <a:cxnLst/>
+              <a:rect l="l" t="t" r="r" b="b"/>
+              <a:pathLst>
+                <a:path w="1996629" h="893299">
+                  <a:moveTo>
+                    <a:pt x="1996629" y="867821"/>
+                  </a:moveTo>
+                  <a:lnTo>
+                    <a:pt x="1972844" y="750037"/>
+                  </a:lnTo>
+                  <a:lnTo>
+                    <a:pt x="1935214" y="635919"/>
+                  </a:lnTo>
+                  <a:lnTo>
+                    <a:pt x="1884273" y="527089"/>
+                  </a:lnTo>
+                  <a:lnTo>
+                    <a:pt x="1820745" y="425094"/>
+                  </a:lnTo>
+                  <a:lnTo>
+                    <a:pt x="1745533" y="331381"/>
+                  </a:lnTo>
+                  <a:lnTo>
+                    <a:pt x="1659705" y="247283"/>
+                  </a:lnTo>
+                  <a:lnTo>
+                    <a:pt x="1564480" y="173995"/>
+                  </a:lnTo>
+                  <a:lnTo>
+                    <a:pt x="1461212" y="112557"/>
+                  </a:lnTo>
+                  <a:lnTo>
+                    <a:pt x="1351368" y="63842"/>
+                  </a:lnTo>
+                  <a:lnTo>
+                    <a:pt x="1236507" y="28543"/>
+                  </a:lnTo>
+                  <a:lnTo>
+                    <a:pt x="1118263" y="7161"/>
+                  </a:lnTo>
+                  <a:lnTo>
+                    <a:pt x="998315" y="0"/>
+                  </a:lnTo>
+                  <a:lnTo>
+                    <a:pt x="878366" y="7161"/>
+                  </a:lnTo>
+                  <a:lnTo>
+                    <a:pt x="760122" y="28543"/>
+                  </a:lnTo>
+                  <a:lnTo>
+                    <a:pt x="645261" y="63842"/>
+                  </a:lnTo>
+                  <a:lnTo>
+                    <a:pt x="535417" y="112557"/>
+                  </a:lnTo>
+                  <a:lnTo>
+                    <a:pt x="432149" y="173995"/>
+                  </a:lnTo>
+                  <a:lnTo>
+                    <a:pt x="336924" y="247283"/>
+                  </a:lnTo>
+                  <a:lnTo>
+                    <a:pt x="251096" y="331381"/>
+                  </a:lnTo>
+                  <a:lnTo>
+                    <a:pt x="175884" y="425094"/>
+                  </a:lnTo>
+                  <a:lnTo>
+                    <a:pt x="112356" y="527089"/>
+                  </a:lnTo>
+                  <a:lnTo>
+                    <a:pt x="61415" y="635919"/>
+                  </a:lnTo>
+                  <a:lnTo>
+                    <a:pt x="23785" y="750037"/>
+                  </a:lnTo>
+                  <a:lnTo>
+                    <a:pt x="0" y="867821"/>
+                  </a:lnTo>
+                  <a:lnTo>
+                    <a:pt x="181281" y="893299"/>
+                  </a:lnTo>
+                  <a:lnTo>
+                    <a:pt x="200747" y="796903"/>
+                  </a:lnTo>
+                  <a:lnTo>
+                    <a:pt x="231544" y="703507"/>
+                  </a:lnTo>
+                  <a:lnTo>
+                    <a:pt x="273235" y="614439"/>
+                  </a:lnTo>
+                  <a:lnTo>
+                    <a:pt x="325227" y="530965"/>
+                  </a:lnTo>
+                  <a:lnTo>
+                    <a:pt x="386782" y="454269"/>
+                  </a:lnTo>
+                  <a:lnTo>
+                    <a:pt x="457024" y="385442"/>
+                  </a:lnTo>
+                  <a:lnTo>
+                    <a:pt x="534957" y="325462"/>
+                  </a:lnTo>
+                  <a:lnTo>
+                    <a:pt x="619473" y="275180"/>
+                  </a:lnTo>
+                  <a:lnTo>
+                    <a:pt x="709371" y="235312"/>
+                  </a:lnTo>
+                  <a:lnTo>
+                    <a:pt x="803374" y="206423"/>
+                  </a:lnTo>
+                  <a:lnTo>
+                    <a:pt x="900147" y="188923"/>
+                  </a:lnTo>
+                  <a:lnTo>
+                    <a:pt x="998315" y="183062"/>
+                  </a:lnTo>
+                  <a:lnTo>
+                    <a:pt x="1096482" y="188923"/>
+                  </a:lnTo>
+                  <a:lnTo>
+                    <a:pt x="1193255" y="206423"/>
+                  </a:lnTo>
+                  <a:lnTo>
+                    <a:pt x="1287258" y="235312"/>
+                  </a:lnTo>
+                  <a:lnTo>
+                    <a:pt x="1377156" y="275180"/>
+                  </a:lnTo>
+                  <a:lnTo>
+                    <a:pt x="1461672" y="325462"/>
+                  </a:lnTo>
+                  <a:lnTo>
+                    <a:pt x="1539605" y="385442"/>
+                  </a:lnTo>
+                  <a:lnTo>
+                    <a:pt x="1609847" y="454269"/>
+                  </a:lnTo>
+                  <a:lnTo>
+                    <a:pt x="1671402" y="530965"/>
+                  </a:lnTo>
+                  <a:lnTo>
+                    <a:pt x="1723394" y="614439"/>
+                  </a:lnTo>
+                  <a:lnTo>
+                    <a:pt x="1765085" y="703507"/>
+                  </a:lnTo>
+                  <a:lnTo>
+                    <a:pt x="1795882" y="796903"/>
+                  </a:lnTo>
+                  <a:lnTo>
+                    <a:pt x="1815348" y="893299"/>
+                  </a:lnTo>
+                  <a:close/>
+                </a:path>
+              </a:pathLst>
+            </a:custGeom>
+            <a:solidFill>
+              <a:srgbClr val="3A3F47"/>
+            </a:solidFill>
+            <a:ln w="19050">
+              <a:solidFill>
+                <a:srgbClr val="9AA0A6"/>
+              </a:solidFill>
+            </a:ln>
+          </p:spPr>
+          <p:txBody>
+            <a:bodyPr rtlCol="0" anchor="ctr"/>
+            <a:lstStyle/>
+            <a:p>
+              <a:pPr algn="ctr"/>
+            </a:p>
+          </p:txBody>
+        </p:sp>
+        <p:sp>
+          <p:nvSpPr>
+            <p:cNvPr id="9" name="ear cup"/>
+            <p:cNvSpPr/>
+            <p:nvPr/>
+          </p:nvSpPr>
+          <p:spPr>
+            <a:xfrm>
+              <a:off x="3147707" y="2338578"/>
+              <a:ext cx="288036" cy="544068"/>
+            </a:xfrm>
+            <a:prstGeom prst="roundRect">
+              <a:avLst>
+                <a:gd name="adj" fmla="val 38888"/>
+              </a:avLst>
+            </a:prstGeom>
+            <a:solidFill>
+              <a:srgbClr val="3A3F47"/>
+            </a:solidFill>
+            <a:ln w="19050">
+              <a:solidFill>
+                <a:srgbClr val="9AA0A6"/>
+              </a:solidFill>
+            </a:ln>
+          </p:spPr>
+          <p:txBody>
+            <a:bodyPr rtlCol="0" anchor="ctr"/>
+            <a:lstStyle/>
+            <a:p>
+              <a:pPr algn="ctr"/>
+            </a:p>
+          </p:txBody>
+        </p:sp>
+        <p:sp>
+          <p:nvSpPr>
+            <p:cNvPr id="10" name="ear cup"/>
+            <p:cNvSpPr/>
+            <p:nvPr/>
+          </p:nvSpPr>
+          <p:spPr>
+            <a:xfrm>
+              <a:off x="4976736" y="2338578"/>
+              <a:ext cx="288036" cy="544068"/>
+            </a:xfrm>
+            <a:prstGeom prst="roundRect">
+              <a:avLst>
+                <a:gd name="adj" fmla="val 38888"/>
+              </a:avLst>
+            </a:prstGeom>
+            <a:solidFill>
+              <a:srgbClr val="3A3F47"/>
+            </a:solidFill>
+            <a:ln w="19050">
+              <a:solidFill>
+                <a:srgbClr val="9AA0A6"/>
+              </a:solidFill>
+            </a:ln>
+          </p:spPr>
+          <p:txBody>
+            <a:bodyPr rtlCol="0" anchor="ctr"/>
+            <a:lstStyle/>
+            <a:p>
+              <a:pPr algn="ctr"/>
+            </a:p>
+          </p:txBody>
+        </p:sp>
+        <p:sp>
+          <p:nvSpPr>
+            <p:cNvPr id="11" name="mic boom"/>
+            <p:cNvSpPr/>
+            <p:nvPr/>
+          </p:nvSpPr>
+          <p:spPr>
+            <a:xfrm>
+              <a:off x="3302126" y="2850642"/>
+              <a:ext cx="632079" cy="376291"/>
+            </a:xfrm>
+            <a:custGeom>
+              <a:avLst/>
+              <a:gdLst/>
+              <a:ahLst/>
+              <a:cxnLst/>
+              <a:rect l="l" t="t" r="r" b="b"/>
+              <a:pathLst>
+                <a:path w="632079" h="376291">
+                  <a:moveTo>
+                    <a:pt x="0" y="0"/>
+                  </a:moveTo>
+                  <a:lnTo>
+                    <a:pt x="807" y="32963"/>
+                  </a:lnTo>
+                  <a:lnTo>
+                    <a:pt x="3225" y="64416"/>
+                  </a:lnTo>
+                  <a:lnTo>
+                    <a:pt x="7257" y="94358"/>
+                  </a:lnTo>
+                  <a:lnTo>
+                    <a:pt x="12900" y="122790"/>
+                  </a:lnTo>
+                  <a:lnTo>
+                    <a:pt x="20156" y="149712"/>
+                  </a:lnTo>
+                  <a:lnTo>
+                    <a:pt x="29025" y="175123"/>
+                  </a:lnTo>
+                  <a:lnTo>
+                    <a:pt x="39505" y="199024"/>
+                  </a:lnTo>
+                  <a:lnTo>
+                    <a:pt x="51599" y="221415"/>
+                  </a:lnTo>
+                  <a:lnTo>
+                    <a:pt x="65305" y="242295"/>
+                  </a:lnTo>
+                  <a:lnTo>
+                    <a:pt x="80623" y="261665"/>
+                  </a:lnTo>
+                  <a:lnTo>
+                    <a:pt x="97554" y="279524"/>
+                  </a:lnTo>
+                  <a:lnTo>
+                    <a:pt x="116097" y="295873"/>
+                  </a:lnTo>
+                  <a:lnTo>
+                    <a:pt x="136252" y="310712"/>
+                  </a:lnTo>
+                  <a:lnTo>
+                    <a:pt x="158020" y="324040"/>
+                  </a:lnTo>
+                  <a:lnTo>
+                    <a:pt x="181401" y="335858"/>
+                  </a:lnTo>
+                  <a:lnTo>
+                    <a:pt x="206394" y="346165"/>
+                  </a:lnTo>
+                  <a:lnTo>
+                    <a:pt x="232999" y="354962"/>
+                  </a:lnTo>
+                  <a:lnTo>
+                    <a:pt x="261217" y="362249"/>
+                  </a:lnTo>
+                  <a:lnTo>
+                    <a:pt x="291047" y="368025"/>
+                  </a:lnTo>
+                  <a:lnTo>
+                    <a:pt x="322490" y="372291"/>
+                  </a:lnTo>
+                  <a:lnTo>
+                    <a:pt x="355545" y="375046"/>
+                  </a:lnTo>
+                  <a:lnTo>
+                    <a:pt x="390213" y="376291"/>
+                  </a:lnTo>
+                  <a:lnTo>
+                    <a:pt x="426493" y="376026"/>
+                  </a:lnTo>
+                  <a:lnTo>
+                    <a:pt x="464385" y="374250"/>
+                  </a:lnTo>
+                  <a:lnTo>
+                    <a:pt x="503890" y="370964"/>
+                  </a:lnTo>
+                  <a:lnTo>
+                    <a:pt x="545007" y="366168"/>
+                  </a:lnTo>
+                  <a:lnTo>
+                    <a:pt x="587737" y="359861"/>
+                  </a:lnTo>
+                  <a:lnTo>
+                    <a:pt x="632079" y="352044"/>
+                  </a:lnTo>
+                </a:path>
+              </a:pathLst>
+            </a:custGeom>
+            <a:noFill/>
+            <a:ln w="71120">
+              <a:solidFill>
+                <a:srgbClr val="9AA0A6"/>
+              </a:solidFill>
+            </a:ln>
+          </p:spPr>
+          <p:txBody>
+            <a:bodyPr rtlCol="0" anchor="ctr"/>
+            <a:lstStyle/>
+            <a:p>
+              <a:pPr algn="ctr"/>
+            </a:p>
+          </p:txBody>
+        </p:sp>
+        <p:sp>
+          <p:nvSpPr>
+            <p:cNvPr id="12" name="mic tip"/>
+            <p:cNvSpPr/>
+            <p:nvPr/>
+          </p:nvSpPr>
+          <p:spPr>
+            <a:xfrm>
+              <a:off x="3838193" y="3106674"/>
+              <a:ext cx="192024" cy="192024"/>
+            </a:xfrm>
+            <a:prstGeom prst="ellipse">
+              <a:avLst/>
+            </a:prstGeom>
+            <a:solidFill>
+              <a:srgbClr val="9AA0A6"/>
+            </a:solidFill>
+            <a:ln>
+              <a:noFill/>
+            </a:ln>
+          </p:spPr>
+          <p:txBody>
+            <a:bodyPr rtlCol="0" anchor="ctr"/>
+            <a:lstStyle/>
+            <a:p>
+              <a:pPr algn="ctr"/>
+            </a:p>
+          </p:txBody>
+        </p:sp>
+      </p:grpSp>
+      <p:sp>
+        <p:nvSpPr>
+          <p:cNvPr id="13" name="guide bubble body"/>
+          <p:cNvSpPr/>
+          <p:nvPr/>
+        </p:nvSpPr>
+        <p:spPr>
+          <a:xfrm>
+            <a:off x="6126480" y="2011680"/>
+            <a:ext cx="3108960" cy="1234440"/>
+          </a:xfrm>
+          <a:prstGeom prst="roundRect">
+            <a:avLst>
+              <a:gd name="adj" fmla="val 22222"/>
+            </a:avLst>
+          </a:prstGeom>
+          <a:solidFill>
+            <a:srgbClr val="F2F2F2"/>
+          </a:solidFill>
+          <a:ln>
+            <a:noFill/>
+          </a:ln>
+        </p:spPr>
+        <p:txBody>
+          <a:bodyPr rtlCol="0" anchor="ctr" wrap="square" lIns="109728" rIns="109728">
+            <a:noAutofit/>
+          </a:bodyPr>
+          <a:lstStyle/>
+          <a:p>
+            <a:pPr algn="ctr"/>
+            <a:r>
+              <a:rPr sz="4800" b="1" i="0" lang="en-GB">
+                <a:solidFill>
+                  <a:srgbClr val="101418"/>
+                </a:solidFill>
+                <a:latin typeface="Arial"/>
+              </a:rPr>
+              <a:t>...</a:t>
+            </a:r>
+          </a:p>
+        </p:txBody>
+      </p:sp>
+      <p:sp>
+        <p:nvSpPr>
+          <p:cNvPr id="14" name="guide bubble tail"/>
+          <p:cNvSpPr/>
+          <p:nvPr/>
+        </p:nvSpPr>
+        <p:spPr>
+          <a:xfrm>
+            <a:off x="5669280" y="2606040"/>
+            <a:ext cx="475488" cy="365760"/>
+          </a:xfrm>
+          <a:custGeom>
+            <a:avLst/>
+            <a:gdLst/>
+            <a:ahLst/>
+            <a:cxnLst/>
+            <a:rect l="l" t="t" r="r" b="b"/>
+            <a:pathLst>
+              <a:path w="475488" h="365760">
+                <a:moveTo>
+                  <a:pt x="475488" y="0"/>
+                </a:moveTo>
+                <a:lnTo>
+                  <a:pt x="475488" y="365760"/>
+                </a:lnTo>
+                <a:lnTo>
+                  <a:pt x="0" y="256032"/>
+                </a:lnTo>
+                <a:close/>
+              </a:path>
+            </a:pathLst>
+          </a:custGeom>
+          <a:solidFill>
+            <a:srgbClr val="F2F2F2"/>
+          </a:solidFill>
+          <a:ln>
+            <a:noFill/>
+          </a:ln>
+        </p:spPr>
+        <p:txBody>
+          <a:bodyPr rtlCol="0" anchor="ctr"/>
+          <a:lstStyle/>
+          <a:p>
+            <a:pPr algn="ctr"/>
+          </a:p>
+        </p:txBody>
+      </p:sp>
+      <p:sp>
+        <p:nvSpPr>
+          <p:cNvPr id="15" name="dialogue note"/>
+          <p:cNvSpPr/>
+          <p:nvPr/>
+        </p:nvSpPr>
+        <p:spPr>
+          <a:xfrm>
+            <a:off x="6126480" y="3611880"/>
+            <a:ext cx="3108960" cy="502920"/>
+          </a:xfrm>
+          <a:prstGeom prst="roundRect">
+            <a:avLst>
+              <a:gd name="adj" fmla="val 14545"/>
+            </a:avLst>
+          </a:prstGeom>
+          <a:solidFill>
+            <a:srgbClr val="2B2F36"/>
+          </a:solidFill>
+          <a:ln w="25400">
+            <a:solidFill>
+              <a:srgbClr val="A9B0B8"/>
+            </a:solidFill>
+            <a:prstDash val="dash"/>
+          </a:ln>
+        </p:spPr>
+        <p:txBody>
+          <a:bodyPr rtlCol="0" anchor="ctr" wrap="square" lIns="54864" tIns="27432" rIns="54864" bIns="27432">
+            <a:noAutofit/>
+          </a:bodyPr>
+          <a:lstStyle/>
+          <a:p>
+            <a:pPr algn="ctr"/>
+            <a:r>
+              <a:rPr sz="1800" b="1" i="0" lang="en-GB">
+                <a:solidFill>
+                  <a:srgbClr val="F2F2F2"/>
+                </a:solidFill>
+                <a:latin typeface="Arial"/>
+              </a:rPr>
+              <a:t>Dialogue not written yet.</a:t>
+            </a:r>
+          </a:p>
+        </p:txBody>
+      </p:sp>
+      <p:sp>
+        <p:nvSpPr>
+          <p:cNvPr id="16" name="PLACEHOLDER LABEL"/>
+          <p:cNvSpPr txBox="1"/>
+          <p:nvPr/>
+        </p:nvSpPr>
+        <p:spPr>
+          <a:xfrm>
+            <a:off x="2103120" y="4983480"/>
+            <a:ext cx="4206240" cy="502920"/>
+          </a:xfrm>
+          <a:prstGeom prst="rect">
+            <a:avLst/>
+          </a:prstGeom>
+          <a:noFill/>
+        </p:spPr>
+        <p:txBody>
+          <a:bodyPr wrap="square" anchor="ctr" lIns="18288" tIns="9144" rIns="18288" bIns="9144">
+            <a:noAutofit/>
+          </a:bodyPr>
+          <a:lstStyle/>
+          <a:p>
+            <a:pPr algn="ctr"/>
+            <a:r>
+              <a:rPr sz="1400" b="0" i="0" lang="en-GB">
+                <a:solidFill>
+                  <a:srgbClr val="A9B0B8"/>
+                </a:solidFill>
+                <a:latin typeface="Arial"/>
+              </a:rPr>
+              <a:t>Placeholder avatar. Her look is undecided (OQ15).</a:t>
+            </a:r>
+          </a:p>
+        </p:txBody>
+      </p:sp>
+      <p:sp>
+        <p:nvSpPr>
+          <p:cNvPr id="17" name="CAPTION BAR"/>
+          <p:cNvSpPr/>
+          <p:nvPr/>
+        </p:nvSpPr>
+        <p:spPr>
+          <a:xfrm>
+            <a:off x="548640" y="5760720"/>
+            <a:ext cx="11091672" cy="731520"/>
+          </a:xfrm>
+          <a:prstGeom prst="roundRect">
+            <a:avLst>
+              <a:gd name="adj" fmla="val 10000"/>
+            </a:avLst>
+          </a:prstGeom>
+          <a:solidFill>
+            <a:srgbClr val="2B2F36"/>
+          </a:solidFill>
+          <a:ln>
+            <a:noFill/>
+          </a:ln>
+        </p:spPr>
+        <p:txBody>
+          <a:bodyPr rtlCol="0" anchor="ctr"/>
+          <a:lstStyle/>
+          <a:p>
+            <a:pPr algn="ctr"/>
+          </a:p>
+        </p:txBody>
+      </p:sp>
+      <p:sp>
+        <p:nvSpPr>
+          <p:cNvPr id="18" name="CAPTION RULE"/>
+          <p:cNvSpPr/>
+          <p:nvPr/>
+        </p:nvSpPr>
+        <p:spPr>
+          <a:xfrm>
+            <a:off x="548640" y="5815583"/>
+            <a:ext cx="73152" cy="621792"/>
+          </a:xfrm>
+          <a:prstGeom prst="rect">
+            <a:avLst/>
+          </a:prstGeom>
+          <a:solidFill>
+            <a:srgbClr val="F28C28"/>
+          </a:solidFill>
+          <a:ln>
+            <a:noFill/>
+          </a:ln>
+        </p:spPr>
+        <p:txBody>
+          <a:bodyPr rtlCol="0" anchor="ctr"/>
+          <a:lstStyle/>
+          <a:p>
+            <a:pPr algn="ctr"/>
+          </a:p>
+        </p:txBody>
+      </p:sp>
+      <p:sp>
+        <p:nvSpPr>
+          <p:cNvPr id="19" name="CAPTION"/>
+          <p:cNvSpPr txBox="1"/>
+          <p:nvPr/>
+        </p:nvSpPr>
+        <p:spPr>
+          <a:xfrm>
+            <a:off x="777240" y="5760720"/>
+            <a:ext cx="10744200" cy="731520"/>
+          </a:xfrm>
+          <a:prstGeom prst="rect">
+            <a:avLst/>
+          </a:prstGeom>
+          <a:noFill/>
+        </p:spPr>
+        <p:txBody>
+          <a:bodyPr wrap="square" anchor="ctr" lIns="18288" tIns="9144" rIns="18288" bIns="9144">
+            <a:noAutofit/>
+          </a:bodyPr>
+          <a:lstStyle/>
+          <a:p>
+            <a:pPr algn="l"/>
+            <a:r>
+              <a:rPr sz="2000" b="0" i="0" lang="en-GB">
+                <a:solidFill>
+                  <a:srgbClr val="F2F2F2"/>
+                </a:solidFill>
+                <a:latin typeface="Arial"/>
+              </a:rPr>
+              <a:t>She might react to special liveries and famous engines. Rarely, not on every placement.</a:t>
+            </a:r>
+          </a:p>
+        </p:txBody>
+      </p:sp>
+      <p:sp>
+        <p:nvSpPr>
+          <p:cNvPr id="20" name="NUM"/>
+          <p:cNvSpPr txBox="1"/>
+          <p:nvPr/>
+        </p:nvSpPr>
+        <p:spPr>
+          <a:xfrm>
+            <a:off x="10725912" y="6528816"/>
+            <a:ext cx="914400" cy="274320"/>
+          </a:xfrm>
+          <a:prstGeom prst="rect">
+            <a:avLst/>
+          </a:prstGeom>
+          <a:noFill/>
+        </p:spPr>
+        <p:txBody>
+          <a:bodyPr wrap="square" anchor="ctr" lIns="18288" tIns="9144" rIns="18288" bIns="9144">
+            <a:noAutofit/>
+          </a:bodyPr>
+          <a:lstStyle/>
+          <a:p>
+            <a:pPr algn="r"/>
+            <a:r>
+              <a:rPr sz="1400" b="0" i="0" lang="en-GB">
+                <a:solidFill>
+                  <a:srgbClr val="A9B0B8"/>
+                </a:solidFill>
+                <a:latin typeface="Arial"/>
+              </a:rPr>
+              <a:t>20</a:t>
+            </a:r>
+          </a:p>
+        </p:txBody>
+      </p:sp>
+    </p:spTree>
+  </p:cSld>
+  <p:clrMapOvr>
+    <a:masterClrMapping/>
+  </p:clrMapOvr>
+</p:sld>
+</file>
+
+<file path=ppt/slides/slide21.xml><?xml version="1.0" encoding="utf-8"?>
+<p:sld xmlns:a="http://schemas.openxmlformats.org/drawingml/2006/main" xmlns:p="http://schemas.openxmlformats.org/presentationml/2006/main" xmlns:r="http://schemas.openxmlformats.org/officeDocument/2006/relationships">
+  <p:cSld>
+    <p:bg>
+      <p:bgPr>
+        <a:solidFill>
+          <a:srgbClr val="1E2126"/>
+        </a:solidFill>
+        <a:effectLst/>
+      </p:bgPr>
+    </p:bg>
+    <p:spTree>
+      <p:nvGrpSpPr>
+        <p:cNvPr id="1" name=""/>
+        <p:cNvGrpSpPr/>
+        <p:nvPr/>
+      </p:nvGrpSpPr>
+      <p:grpSpPr/>
+      <p:sp>
+        <p:nvSpPr>
+          <p:cNvPr id="2" name="TITLE"/>
+          <p:cNvSpPr>
+            <a:spLocks noGrp="1"/>
+          </p:cNvSpPr>
+          <p:nvPr>
+            <p:ph type="title"/>
+          </p:nvPr>
+        </p:nvSpPr>
+        <p:spPr>
+          <a:xfrm>
+            <a:off x="548640" y="365760"/>
+            <a:ext cx="9326880" cy="731520"/>
+          </a:xfrm>
+        </p:spPr>
+        <p:txBody>
+          <a:bodyPr wrap="square" anchor="ctr" lIns="0" rIns="0" tIns="0" bIns="0">
+            <a:noAutofit/>
+          </a:bodyPr>
+          <a:lstStyle/>
+          <a:p>
+            <a:pPr algn="l"/>
+            <a:r>
+              <a:rPr sz="3600" b="1" i="0" lang="en-GB">
+                <a:solidFill>
+                  <a:srgbClr val="F2F2F2"/>
+                </a:solidFill>
+                <a:latin typeface="Arial"/>
+              </a:rPr>
+              <a:t>Where this stands</a:t>
+            </a:r>
+          </a:p>
+        </p:txBody>
+      </p:sp>
+      <p:sp>
+        <p:nvSpPr>
+          <p:cNvPr id="3" name="CHIP"/>
+          <p:cNvSpPr/>
+          <p:nvPr/>
+        </p:nvSpPr>
+        <p:spPr>
+          <a:xfrm>
+            <a:off x="10088575" y="530352"/>
+            <a:ext cx="1554480" cy="365760"/>
+          </a:xfrm>
+          <a:prstGeom prst="roundRect">
+            <a:avLst>
+              <a:gd name="adj" fmla="val 30000"/>
+            </a:avLst>
+          </a:prstGeom>
+          <a:solidFill>
+            <a:srgbClr val="4DA3FF"/>
+          </a:solidFill>
+          <a:ln>
+            <a:noFill/>
+          </a:ln>
+        </p:spPr>
+        <p:txBody>
+          <a:bodyPr rtlCol="0" anchor="ctr" wrap="square" lIns="54864" tIns="0" rIns="54864" bIns="0">
+            <a:noAutofit/>
+          </a:bodyPr>
+          <a:lstStyle/>
+          <a:p>
+            <a:pPr algn="ctr"/>
+            <a:r>
+              <a:rPr sz="1400" b="1" i="0" lang="en-GB">
+                <a:solidFill>
+                  <a:srgbClr val="101418"/>
+                </a:solidFill>
+                <a:latin typeface="Arial"/>
+              </a:rPr>
+              <a:t>PROVISIONAL</a:t>
+            </a:r>
+          </a:p>
+        </p:txBody>
+      </p:sp>
+      <p:grpSp>
+        <p:nvGrpSpPr>
+          <p:cNvPr id="4" name="Four planned steps" descr="A row of four steps, all planned and none built yet: guide script, character art, lessons and build menu tab. Dashed outlines show they are not built."/>
+          <p:cNvGrpSpPr/>
+          <p:nvPr/>
+        </p:nvGrpSpPr>
+        <p:grpSpPr>
+          <a:xfrm>
+            <a:off x="548640" y="1554480"/>
+            <a:ext cx="11091672" cy="3108960"/>
+            <a:chOff x="548640" y="1554480"/>
+            <a:chExt cx="11091672" cy="3108960"/>
+          </a:xfrm>
+        </p:grpSpPr>
+        <p:sp>
+          <p:nvSpPr>
+            <p:cNvPr id="5" name="planned step"/>
+            <p:cNvSpPr/>
+            <p:nvPr/>
+          </p:nvSpPr>
+          <p:spPr>
+            <a:xfrm>
+              <a:off x="548640" y="1554480"/>
+              <a:ext cx="2560320" cy="3108960"/>
+            </a:xfrm>
+            <a:prstGeom prst="roundRect">
+              <a:avLst>
+                <a:gd name="adj" fmla="val 3571"/>
+              </a:avLst>
+            </a:prstGeom>
+            <a:solidFill>
+              <a:srgbClr val="2B2F36"/>
+            </a:solidFill>
+            <a:ln w="31750">
+              <a:solidFill>
+                <a:srgbClr val="A9B0B8"/>
+              </a:solidFill>
+              <a:prstDash val="dash"/>
+            </a:ln>
+          </p:spPr>
+          <p:txBody>
+            <a:bodyPr rtlCol="0" anchor="ctr"/>
+            <a:lstStyle/>
+            <a:p>
+              <a:pPr algn="ctr"/>
+            </a:p>
+          </p:txBody>
+        </p:sp>
+        <p:sp>
+          <p:nvSpPr>
+            <p:cNvPr id="6" name="planned disc"/>
+            <p:cNvSpPr/>
+            <p:nvPr/>
+          </p:nvSpPr>
+          <p:spPr>
+            <a:xfrm>
+              <a:off x="1234440" y="1874519"/>
+              <a:ext cx="1188720" cy="1188720"/>
+            </a:xfrm>
+            <a:prstGeom prst="ellipse">
+              <a:avLst/>
+            </a:prstGeom>
+            <a:solidFill>
+              <a:srgbClr val="343A43"/>
+            </a:solidFill>
+            <a:ln w="31750">
+              <a:solidFill>
+                <a:srgbClr val="A9B0B8"/>
+              </a:solidFill>
+              <a:prstDash val="dash"/>
+            </a:ln>
+          </p:spPr>
+          <p:txBody>
+            <a:bodyPr rtlCol="0" anchor="ctr"/>
+            <a:lstStyle/>
+            <a:p>
+              <a:pPr algn="ctr"/>
+            </a:p>
+          </p:txBody>
+        </p:sp>
+        <p:sp>
+          <p:nvSpPr>
+            <p:cNvPr id="7" name="script page"/>
+            <p:cNvSpPr/>
+            <p:nvPr/>
+          </p:nvSpPr>
+          <p:spPr>
+            <a:xfrm>
+              <a:off x="1554480" y="2103120"/>
+              <a:ext cx="548640" cy="731520"/>
+            </a:xfrm>
+            <a:prstGeom prst="roundRect">
+              <a:avLst>
+                <a:gd name="adj" fmla="val 8333"/>
+              </a:avLst>
+            </a:prstGeom>
+            <a:solidFill>
+              <a:srgbClr val="F2F2F2"/>
+            </a:solidFill>
+            <a:ln>
+              <a:noFill/>
+            </a:ln>
+          </p:spPr>
+          <p:txBody>
+            <a:bodyPr rtlCol="0" anchor="ctr"/>
+            <a:lstStyle/>
+            <a:p>
+              <a:pPr algn="ctr"/>
+            </a:p>
+          </p:txBody>
+        </p:sp>
+        <p:sp>
+          <p:nvSpPr>
+            <p:cNvPr id="8" name="script line"/>
+            <p:cNvSpPr/>
+            <p:nvPr/>
+          </p:nvSpPr>
+          <p:spPr>
+            <a:xfrm>
+              <a:off x="1645920" y="2212848"/>
+              <a:ext cx="365760" cy="64008"/>
+            </a:xfrm>
+            <a:prstGeom prst="rect">
+              <a:avLst/>
+            </a:prstGeom>
+            <a:solidFill>
+              <a:srgbClr val="A9B0B8"/>
+            </a:solidFill>
+            <a:ln>
+              <a:noFill/>
+            </a:ln>
+          </p:spPr>
+          <p:txBody>
+            <a:bodyPr rtlCol="0" anchor="ctr"/>
+            <a:lstStyle/>
+            <a:p>
+              <a:pPr algn="ctr"/>
+            </a:p>
+          </p:txBody>
+        </p:sp>
+        <p:sp>
+          <p:nvSpPr>
+            <p:cNvPr id="9" name="script line"/>
+            <p:cNvSpPr/>
+            <p:nvPr/>
+          </p:nvSpPr>
+          <p:spPr>
+            <a:xfrm>
+              <a:off x="1645920" y="2368296"/>
+              <a:ext cx="365760" cy="64008"/>
+            </a:xfrm>
+            <a:prstGeom prst="rect">
+              <a:avLst/>
+            </a:prstGeom>
+            <a:solidFill>
+              <a:srgbClr val="A9B0B8"/>
+            </a:solidFill>
+            <a:ln>
+              <a:noFill/>
+            </a:ln>
+          </p:spPr>
+          <p:txBody>
+            <a:bodyPr rtlCol="0" anchor="ctr"/>
+            <a:lstStyle/>
+            <a:p>
+              <a:pPr algn="ctr"/>
+            </a:p>
+          </p:txBody>
+        </p:sp>
+        <p:sp>
+          <p:nvSpPr>
+            <p:cNvPr id="10" name="script line"/>
+            <p:cNvSpPr/>
+            <p:nvPr/>
+          </p:nvSpPr>
+          <p:spPr>
+            <a:xfrm>
+              <a:off x="1645920" y="2523744"/>
+              <a:ext cx="365760" cy="64008"/>
+            </a:xfrm>
+            <a:prstGeom prst="rect">
+              <a:avLst/>
+            </a:prstGeom>
+            <a:solidFill>
+              <a:srgbClr val="A9B0B8"/>
+            </a:solidFill>
+            <a:ln>
+              <a:noFill/>
+            </a:ln>
+          </p:spPr>
+          <p:txBody>
+            <a:bodyPr rtlCol="0" anchor="ctr"/>
+            <a:lstStyle/>
+            <a:p>
+              <a:pPr algn="ctr"/>
+            </a:p>
+          </p:txBody>
+        </p:sp>
+        <p:sp>
+          <p:nvSpPr>
+            <p:cNvPr id="11" name="script line"/>
+            <p:cNvSpPr/>
+            <p:nvPr/>
+          </p:nvSpPr>
+          <p:spPr>
+            <a:xfrm>
+              <a:off x="1645920" y="2679191"/>
+              <a:ext cx="219456" cy="64008"/>
+            </a:xfrm>
+            <a:prstGeom prst="rect">
+              <a:avLst/>
+            </a:prstGeom>
+            <a:solidFill>
+              <a:srgbClr val="A9B0B8"/>
+            </a:solidFill>
+            <a:ln>
+              <a:noFill/>
+            </a:ln>
+          </p:spPr>
+          <p:txBody>
+            <a:bodyPr rtlCol="0" anchor="ctr"/>
+            <a:lstStyle/>
+            <a:p>
+              <a:pPr algn="ctr"/>
+            </a:p>
+          </p:txBody>
+        </p:sp>
+        <p:sp>
+          <p:nvSpPr>
+            <p:cNvPr id="12" name="step label"/>
+            <p:cNvSpPr txBox="1"/>
+            <p:nvPr/>
+          </p:nvSpPr>
+          <p:spPr>
+            <a:xfrm>
+              <a:off x="685800" y="3383280"/>
+              <a:ext cx="2286000" cy="1097280"/>
+            </a:xfrm>
+            <a:prstGeom prst="rect">
+              <a:avLst/>
+            </a:prstGeom>
+            <a:noFill/>
+          </p:spPr>
+          <p:txBody>
+            <a:bodyPr wrap="square" anchor="ctr" lIns="18288" tIns="9144" rIns="18288" bIns="9144">
+              <a:noAutofit/>
+            </a:bodyPr>
+            <a:lstStyle/>
+            <a:p>
+              <a:pPr algn="ctr"/>
+              <a:r>
+                <a:rPr sz="2200" b="1" i="0" lang="en-GB">
+                  <a:solidFill>
+                    <a:srgbClr val="F2F2F2"/>
+                  </a:solidFill>
+                  <a:latin typeface="Arial"/>
+                </a:rPr>
+                <a:t>Guide script: planned</a:t>
+              </a:r>
+            </a:p>
+          </p:txBody>
+        </p:sp>
+        <p:cxnSp>
+          <p:nvCxnSpPr>
+            <p:cNvPr id="13" name="planned link"/>
+            <p:cNvCxnSpPr/>
+            <p:nvPr/>
+          </p:nvCxnSpPr>
+          <p:spPr>
+            <a:xfrm>
+              <a:off x="3145536" y="2468880"/>
+              <a:ext cx="210312" cy="0"/>
+            </a:xfrm>
+            <a:prstGeom prst="line">
+              <a:avLst/>
+            </a:prstGeom>
+            <a:ln w="38100">
+              <a:solidFill>
+                <a:srgbClr val="A9B0B8"/>
+              </a:solidFill>
+              <a:prstDash val="sysDash"/>
+              <a:tailEnd type="triangle" w="med" len="med"/>
+            </a:ln>
+          </p:spPr>
+        </p:cxnSp>
+        <p:sp>
+          <p:nvSpPr>
+            <p:cNvPr id="14" name="planned step"/>
+            <p:cNvSpPr/>
+            <p:nvPr/>
+          </p:nvSpPr>
+          <p:spPr>
+            <a:xfrm>
+              <a:off x="3392424" y="1554480"/>
+              <a:ext cx="2560320" cy="3108960"/>
+            </a:xfrm>
+            <a:prstGeom prst="roundRect">
+              <a:avLst>
+                <a:gd name="adj" fmla="val 3571"/>
+              </a:avLst>
+            </a:prstGeom>
+            <a:solidFill>
+              <a:srgbClr val="2B2F36"/>
+            </a:solidFill>
+            <a:ln w="31750">
+              <a:solidFill>
+                <a:srgbClr val="A9B0B8"/>
+              </a:solidFill>
+              <a:prstDash val="dash"/>
+            </a:ln>
+          </p:spPr>
+          <p:txBody>
+            <a:bodyPr rtlCol="0" anchor="ctr"/>
+            <a:lstStyle/>
+            <a:p>
+              <a:pPr algn="ctr"/>
+            </a:p>
+          </p:txBody>
+        </p:sp>
+        <p:sp>
+          <p:nvSpPr>
+            <p:cNvPr id="15" name="planned disc"/>
+            <p:cNvSpPr/>
+            <p:nvPr/>
+          </p:nvSpPr>
+          <p:spPr>
+            <a:xfrm>
+              <a:off x="4078223" y="1874519"/>
+              <a:ext cx="1188720" cy="1188720"/>
+            </a:xfrm>
+            <a:prstGeom prst="ellipse">
+              <a:avLst/>
+            </a:prstGeom>
+            <a:solidFill>
+              <a:srgbClr val="343A43"/>
+            </a:solidFill>
+            <a:ln w="31750">
+              <a:solidFill>
+                <a:srgbClr val="A9B0B8"/>
+              </a:solidFill>
+              <a:prstDash val="dash"/>
+            </a:ln>
+          </p:spPr>
+          <p:txBody>
+            <a:bodyPr rtlCol="0" anchor="ctr"/>
+            <a:lstStyle/>
+            <a:p>
+              <a:pPr algn="ctr"/>
+            </a:p>
+          </p:txBody>
+        </p:sp>
+        <p:sp>
+          <p:nvSpPr>
+            <p:cNvPr id="16" name="art frame"/>
+            <p:cNvSpPr/>
+            <p:nvPr/>
+          </p:nvSpPr>
+          <p:spPr>
+            <a:xfrm>
+              <a:off x="4288536" y="2176272"/>
+              <a:ext cx="768096" cy="585216"/>
+            </a:xfrm>
+            <a:prstGeom prst="roundRect">
+              <a:avLst>
+                <a:gd name="adj" fmla="val 7812"/>
+              </a:avLst>
+            </a:prstGeom>
+            <a:solidFill>
+              <a:srgbClr val="F2F2F2"/>
+            </a:solidFill>
+            <a:ln>
+              <a:noFill/>
+            </a:ln>
+          </p:spPr>
+          <p:txBody>
+            <a:bodyPr rtlCol="0" anchor="ctr"/>
+            <a:lstStyle/>
+            <a:p>
+              <a:pPr algn="ctr"/>
+            </a:p>
+          </p:txBody>
+        </p:sp>
+        <p:sp>
+          <p:nvSpPr>
+            <p:cNvPr id="17" name="art hills"/>
+            <p:cNvSpPr/>
+            <p:nvPr/>
+          </p:nvSpPr>
+          <p:spPr>
+            <a:xfrm>
+              <a:off x="4361688" y="2414016"/>
+              <a:ext cx="621791" cy="274320"/>
+            </a:xfrm>
+            <a:custGeom>
+              <a:avLst/>
+              <a:gdLst/>
+              <a:ahLst/>
+              <a:cxnLst/>
+              <a:rect l="l" t="t" r="r" b="b"/>
+              <a:pathLst>
+                <a:path w="621791" h="274320">
+                  <a:moveTo>
+                    <a:pt x="0" y="274320"/>
+                  </a:moveTo>
+                  <a:lnTo>
+                    <a:pt x="237743" y="0"/>
+                  </a:lnTo>
+                  <a:lnTo>
+                    <a:pt x="384048" y="164592"/>
+                  </a:lnTo>
+                  <a:lnTo>
+                    <a:pt x="493776" y="36576"/>
+                  </a:lnTo>
+                  <a:lnTo>
+                    <a:pt x="621791" y="274320"/>
+                  </a:lnTo>
+                  <a:close/>
+                </a:path>
+              </a:pathLst>
+            </a:custGeom>
+            <a:solidFill>
+              <a:srgbClr val="A9B0B8"/>
+            </a:solidFill>
+            <a:ln>
+              <a:noFill/>
+            </a:ln>
+          </p:spPr>
+          <p:txBody>
+            <a:bodyPr rtlCol="0" anchor="ctr"/>
+            <a:lstStyle/>
+            <a:p>
+              <a:pPr algn="ctr"/>
+            </a:p>
+          </p:txBody>
+        </p:sp>
+        <p:sp>
+          <p:nvSpPr>
+            <p:cNvPr id="18" name="art sun"/>
+            <p:cNvSpPr/>
+            <p:nvPr/>
+          </p:nvSpPr>
+          <p:spPr>
+            <a:xfrm>
+              <a:off x="4782312" y="2240280"/>
+              <a:ext cx="146304" cy="146304"/>
+            </a:xfrm>
+            <a:prstGeom prst="ellipse">
+              <a:avLst/>
+            </a:prstGeom>
+            <a:solidFill>
+              <a:srgbClr val="A9B0B8"/>
+            </a:solidFill>
+            <a:ln>
+              <a:noFill/>
+            </a:ln>
+          </p:spPr>
+          <p:txBody>
+            <a:bodyPr rtlCol="0" anchor="ctr"/>
+            <a:lstStyle/>
+            <a:p>
+              <a:pPr algn="ctr"/>
+            </a:p>
+          </p:txBody>
+        </p:sp>
+        <p:sp>
+          <p:nvSpPr>
+            <p:cNvPr id="19" name="step label"/>
+            <p:cNvSpPr txBox="1"/>
+            <p:nvPr/>
+          </p:nvSpPr>
+          <p:spPr>
+            <a:xfrm>
+              <a:off x="3529584" y="3383280"/>
+              <a:ext cx="2286000" cy="1097280"/>
+            </a:xfrm>
+            <a:prstGeom prst="rect">
+              <a:avLst/>
+            </a:prstGeom>
+            <a:noFill/>
+          </p:spPr>
+          <p:txBody>
+            <a:bodyPr wrap="square" anchor="ctr" lIns="18288" tIns="9144" rIns="18288" bIns="9144">
+              <a:noAutofit/>
+            </a:bodyPr>
+            <a:lstStyle/>
+            <a:p>
+              <a:pPr algn="ctr"/>
+              <a:r>
+                <a:rPr sz="2200" b="1" i="0" lang="en-GB">
+                  <a:solidFill>
+                    <a:srgbClr val="F2F2F2"/>
+                  </a:solidFill>
+                  <a:latin typeface="Arial"/>
+                </a:rPr>
+                <a:t>Character art: planned</a:t>
+              </a:r>
+            </a:p>
+          </p:txBody>
+        </p:sp>
+        <p:cxnSp>
+          <p:nvCxnSpPr>
+            <p:cNvPr id="20" name="planned link"/>
+            <p:cNvCxnSpPr/>
+            <p:nvPr/>
+          </p:nvCxnSpPr>
+          <p:spPr>
+            <a:xfrm>
+              <a:off x="5989320" y="2468880"/>
+              <a:ext cx="210311" cy="0"/>
+            </a:xfrm>
+            <a:prstGeom prst="line">
+              <a:avLst/>
+            </a:prstGeom>
+            <a:ln w="38100">
+              <a:solidFill>
+                <a:srgbClr val="A9B0B8"/>
+              </a:solidFill>
+              <a:prstDash val="sysDash"/>
+              <a:tailEnd type="triangle" w="med" len="med"/>
+            </a:ln>
+          </p:spPr>
+        </p:cxnSp>
+        <p:sp>
+          <p:nvSpPr>
+            <p:cNvPr id="21" name="planned step"/>
+            <p:cNvSpPr/>
+            <p:nvPr/>
+          </p:nvSpPr>
+          <p:spPr>
+            <a:xfrm>
+              <a:off x="6236207" y="1554480"/>
+              <a:ext cx="2560320" cy="3108960"/>
+            </a:xfrm>
+            <a:prstGeom prst="roundRect">
+              <a:avLst>
+                <a:gd name="adj" fmla="val 3571"/>
+              </a:avLst>
+            </a:prstGeom>
+            <a:solidFill>
+              <a:srgbClr val="2B2F36"/>
+            </a:solidFill>
+            <a:ln w="31750">
+              <a:solidFill>
+                <a:srgbClr val="A9B0B8"/>
+              </a:solidFill>
+              <a:prstDash val="dash"/>
+            </a:ln>
+          </p:spPr>
+          <p:txBody>
+            <a:bodyPr rtlCol="0" anchor="ctr"/>
+            <a:lstStyle/>
+            <a:p>
+              <a:pPr algn="ctr"/>
+            </a:p>
+          </p:txBody>
+        </p:sp>
+        <p:sp>
+          <p:nvSpPr>
+            <p:cNvPr id="22" name="planned disc"/>
+            <p:cNvSpPr/>
+            <p:nvPr/>
+          </p:nvSpPr>
+          <p:spPr>
+            <a:xfrm>
+              <a:off x="6922007" y="1874519"/>
+              <a:ext cx="1188720" cy="1188720"/>
+            </a:xfrm>
+            <a:prstGeom prst="ellipse">
+              <a:avLst/>
+            </a:prstGeom>
+            <a:solidFill>
+              <a:srgbClr val="343A43"/>
+            </a:solidFill>
+            <a:ln w="31750">
+              <a:solidFill>
+                <a:srgbClr val="A9B0B8"/>
+              </a:solidFill>
+              <a:prstDash val="dash"/>
+            </a:ln>
+          </p:spPr>
+          <p:txBody>
+            <a:bodyPr rtlCol="0" anchor="ctr"/>
+            <a:lstStyle/>
+            <a:p>
+              <a:pPr algn="ctr"/>
+            </a:p>
+          </p:txBody>
+        </p:sp>
+        <p:sp>
+          <p:nvSpPr>
+            <p:cNvPr id="23" name="lesson screen"/>
+            <p:cNvSpPr/>
+            <p:nvPr/>
+          </p:nvSpPr>
+          <p:spPr>
+            <a:xfrm>
+              <a:off x="7150607" y="2148840"/>
+              <a:ext cx="731520" cy="640080"/>
+            </a:xfrm>
+            <a:prstGeom prst="roundRect">
+              <a:avLst>
+                <a:gd name="adj" fmla="val 8571"/>
+              </a:avLst>
+            </a:prstGeom>
+            <a:solidFill>
+              <a:srgbClr val="F2F2F2"/>
+            </a:solidFill>
+            <a:ln>
+              <a:noFill/>
+            </a:ln>
+          </p:spPr>
+          <p:txBody>
+            <a:bodyPr rtlCol="0" anchor="ctr"/>
+            <a:lstStyle/>
+            <a:p>
+              <a:pPr algn="ctr"/>
+            </a:p>
+          </p:txBody>
+        </p:sp>
+        <p:sp>
+          <p:nvSpPr>
+            <p:cNvPr id="24" name="play"/>
+            <p:cNvSpPr/>
+            <p:nvPr/>
+          </p:nvSpPr>
+          <p:spPr>
+            <a:xfrm>
+              <a:off x="7425842" y="2313432"/>
+              <a:ext cx="264261" cy="310896"/>
+            </a:xfrm>
+            <a:custGeom>
+              <a:avLst/>
+              <a:gdLst/>
+              <a:ahLst/>
+              <a:cxnLst/>
+              <a:rect l="l" t="t" r="r" b="b"/>
+              <a:pathLst>
+                <a:path w="264261" h="310896">
+                  <a:moveTo>
+                    <a:pt x="0" y="0"/>
+                  </a:moveTo>
+                  <a:lnTo>
+                    <a:pt x="0" y="310896"/>
+                  </a:lnTo>
+                  <a:lnTo>
+                    <a:pt x="264261" y="155448"/>
+                  </a:lnTo>
+                  <a:close/>
+                </a:path>
+              </a:pathLst>
+            </a:custGeom>
+            <a:solidFill>
+              <a:srgbClr val="A9B0B8"/>
+            </a:solidFill>
+            <a:ln>
+              <a:noFill/>
+            </a:ln>
+          </p:spPr>
+          <p:txBody>
+            <a:bodyPr rtlCol="0" anchor="ctr"/>
+            <a:lstStyle/>
+            <a:p>
+              <a:pPr algn="ctr"/>
+            </a:p>
+          </p:txBody>
+        </p:sp>
+        <p:sp>
+          <p:nvSpPr>
+            <p:cNvPr id="25" name="step label"/>
+            <p:cNvSpPr txBox="1"/>
+            <p:nvPr/>
+          </p:nvSpPr>
+          <p:spPr>
+            <a:xfrm>
+              <a:off x="6373368" y="3383280"/>
+              <a:ext cx="2286000" cy="1097280"/>
+            </a:xfrm>
+            <a:prstGeom prst="rect">
+              <a:avLst/>
+            </a:prstGeom>
+            <a:noFill/>
+          </p:spPr>
+          <p:txBody>
+            <a:bodyPr wrap="square" anchor="ctr" lIns="18288" tIns="9144" rIns="18288" bIns="9144">
+              <a:noAutofit/>
+            </a:bodyPr>
+            <a:lstStyle/>
+            <a:p>
+              <a:pPr algn="ctr"/>
+              <a:r>
+                <a:rPr sz="2200" b="1" i="0" lang="en-GB">
+                  <a:solidFill>
+                    <a:srgbClr val="F2F2F2"/>
+                  </a:solidFill>
+                  <a:latin typeface="Arial"/>
+                </a:rPr>
+                <a:t>Lessons: planned</a:t>
+              </a:r>
+            </a:p>
+          </p:txBody>
+        </p:sp>
+        <p:cxnSp>
+          <p:nvCxnSpPr>
+            <p:cNvPr id="26" name="planned link"/>
+            <p:cNvCxnSpPr/>
+            <p:nvPr/>
+          </p:nvCxnSpPr>
+          <p:spPr>
+            <a:xfrm>
+              <a:off x="8833103" y="2468880"/>
+              <a:ext cx="210313" cy="0"/>
+            </a:xfrm>
+            <a:prstGeom prst="line">
+              <a:avLst/>
+            </a:prstGeom>
+            <a:ln w="38100">
+              <a:solidFill>
+                <a:srgbClr val="A9B0B8"/>
+              </a:solidFill>
+              <a:prstDash val="sysDash"/>
+              <a:tailEnd type="triangle" w="med" len="med"/>
+            </a:ln>
+          </p:spPr>
+        </p:cxnSp>
+        <p:sp>
+          <p:nvSpPr>
+            <p:cNvPr id="27" name="planned step"/>
+            <p:cNvSpPr/>
+            <p:nvPr/>
+          </p:nvSpPr>
+          <p:spPr>
+            <a:xfrm>
+              <a:off x="9079992" y="1554480"/>
+              <a:ext cx="2560320" cy="3108960"/>
+            </a:xfrm>
+            <a:prstGeom prst="roundRect">
+              <a:avLst>
+                <a:gd name="adj" fmla="val 3571"/>
+              </a:avLst>
+            </a:prstGeom>
+            <a:solidFill>
+              <a:srgbClr val="2B2F36"/>
+            </a:solidFill>
+            <a:ln w="31750">
+              <a:solidFill>
+                <a:srgbClr val="A9B0B8"/>
+              </a:solidFill>
+              <a:prstDash val="dash"/>
+            </a:ln>
+          </p:spPr>
+          <p:txBody>
+            <a:bodyPr rtlCol="0" anchor="ctr"/>
+            <a:lstStyle/>
+            <a:p>
+              <a:pPr algn="ctr"/>
+            </a:p>
+          </p:txBody>
+        </p:sp>
+        <p:sp>
+          <p:nvSpPr>
+            <p:cNvPr id="28" name="planned disc"/>
+            <p:cNvSpPr/>
+            <p:nvPr/>
+          </p:nvSpPr>
+          <p:spPr>
+            <a:xfrm>
+              <a:off x="9765792" y="1874519"/>
+              <a:ext cx="1188720" cy="1188720"/>
+            </a:xfrm>
+            <a:prstGeom prst="ellipse">
+              <a:avLst/>
+            </a:prstGeom>
+            <a:solidFill>
+              <a:srgbClr val="343A43"/>
+            </a:solidFill>
+            <a:ln w="31750">
+              <a:solidFill>
+                <a:srgbClr val="A9B0B8"/>
+              </a:solidFill>
+              <a:prstDash val="dash"/>
+            </a:ln>
+          </p:spPr>
+          <p:txBody>
+            <a:bodyPr rtlCol="0" anchor="ctr"/>
+            <a:lstStyle/>
+            <a:p>
+              <a:pPr algn="ctr"/>
+            </a:p>
+          </p:txBody>
+        </p:sp>
+        <p:sp>
+          <p:nvSpPr>
+            <p:cNvPr id="29" name="menu tab"/>
+            <p:cNvSpPr/>
+            <p:nvPr/>
+          </p:nvSpPr>
+          <p:spPr>
+            <a:xfrm>
+              <a:off x="9976104" y="2148840"/>
+              <a:ext cx="457200" cy="237744"/>
+            </a:xfrm>
+            <a:prstGeom prst="round2SameRect">
+              <a:avLst>
+                <a:gd name="adj1" fmla="val 22000"/>
+                <a:gd name="adj2" fmla="val 0"/>
+              </a:avLst>
+            </a:prstGeom>
+            <a:solidFill>
+              <a:srgbClr val="F2F2F2"/>
+            </a:solidFill>
+            <a:ln>
+              <a:noFill/>
+            </a:ln>
+          </p:spPr>
+          <p:txBody>
+            <a:bodyPr rtlCol="0" anchor="ctr"/>
+            <a:lstStyle/>
+            <a:p>
+              <a:pPr algn="ctr"/>
+            </a:p>
+          </p:txBody>
+        </p:sp>
+        <p:sp>
+          <p:nvSpPr>
+            <p:cNvPr id="30" name="menu tab"/>
+            <p:cNvSpPr/>
+            <p:nvPr/>
+          </p:nvSpPr>
+          <p:spPr>
+            <a:xfrm>
+              <a:off x="10469880" y="2148840"/>
+              <a:ext cx="274320" cy="237744"/>
+            </a:xfrm>
+            <a:prstGeom prst="round2SameRect">
+              <a:avLst>
+                <a:gd name="adj1" fmla="val 22000"/>
+                <a:gd name="adj2" fmla="val 0"/>
+              </a:avLst>
+            </a:prstGeom>
+            <a:solidFill>
+              <a:srgbClr val="A9B0B8"/>
+            </a:solidFill>
+            <a:ln>
+              <a:noFill/>
+            </a:ln>
+          </p:spPr>
+          <p:txBody>
+            <a:bodyPr rtlCol="0" anchor="ctr"/>
+            <a:lstStyle/>
+            <a:p>
+              <a:pPr algn="ctr"/>
+            </a:p>
+          </p:txBody>
+        </p:sp>
+        <p:sp>
+          <p:nvSpPr>
+            <p:cNvPr id="31" name="menu body"/>
+            <p:cNvSpPr/>
+            <p:nvPr/>
+          </p:nvSpPr>
+          <p:spPr>
+            <a:xfrm>
+              <a:off x="9976104" y="2386584"/>
+              <a:ext cx="768096" cy="420624"/>
+            </a:xfrm>
+            <a:prstGeom prst="roundRect">
+              <a:avLst>
+                <a:gd name="adj" fmla="val 8695"/>
+              </a:avLst>
+            </a:prstGeom>
+            <a:solidFill>
+              <a:srgbClr val="F2F2F2"/>
+            </a:solidFill>
+            <a:ln>
+              <a:noFill/>
+            </a:ln>
+          </p:spPr>
+          <p:txBody>
+            <a:bodyPr rtlCol="0" anchor="ctr"/>
+            <a:lstStyle/>
+            <a:p>
+              <a:pPr algn="ctr"/>
+            </a:p>
+          </p:txBody>
+        </p:sp>
+        <p:sp>
+          <p:nvSpPr>
+            <p:cNvPr id="32" name="step label"/>
+            <p:cNvSpPr txBox="1"/>
+            <p:nvPr/>
+          </p:nvSpPr>
+          <p:spPr>
+            <a:xfrm>
+              <a:off x="9217152" y="3383280"/>
+              <a:ext cx="2286000" cy="1097280"/>
+            </a:xfrm>
+            <a:prstGeom prst="rect">
+              <a:avLst/>
+            </a:prstGeom>
+            <a:noFill/>
+          </p:spPr>
+          <p:txBody>
+            <a:bodyPr wrap="square" anchor="ctr" lIns="18288" tIns="9144" rIns="18288" bIns="9144">
+              <a:noAutofit/>
+            </a:bodyPr>
+            <a:lstStyle/>
+            <a:p>
+              <a:pPr algn="ctr"/>
+              <a:r>
+                <a:rPr sz="2200" b="1" i="0" lang="en-GB">
+                  <a:solidFill>
+                    <a:srgbClr val="F2F2F2"/>
+                  </a:solidFill>
+                  <a:latin typeface="Arial"/>
+                </a:rPr>
+                <a:t>Build menu tab: planned</a:t>
+              </a:r>
+            </a:p>
+          </p:txBody>
+        </p:sp>
+      </p:grpSp>
+      <p:sp>
+        <p:nvSpPr>
+          <p:cNvPr id="33" name="ICHIP"/>
+          <p:cNvSpPr/>
+          <p:nvPr/>
+        </p:nvSpPr>
+        <p:spPr>
+          <a:xfrm>
+            <a:off x="548640" y="5029200"/>
+            <a:ext cx="1862339" cy="310896"/>
+          </a:xfrm>
+          <a:prstGeom prst="roundRect">
+            <a:avLst>
+              <a:gd name="adj" fmla="val 35294"/>
+            </a:avLst>
+          </a:prstGeom>
+          <a:solidFill>
+            <a:srgbClr val="4DA3FF"/>
+          </a:solidFill>
+          <a:ln>
+            <a:noFill/>
+          </a:ln>
+        </p:spPr>
+        <p:txBody>
+          <a:bodyPr rtlCol="0" anchor="ctr" wrap="square" lIns="54864" tIns="0" rIns="54864" bIns="0">
+            <a:noAutofit/>
+          </a:bodyPr>
+          <a:lstStyle/>
+          <a:p>
+            <a:pPr algn="ctr"/>
+            <a:r>
+              <a:rPr sz="1400" b="1" i="0" lang="en-GB">
+                <a:solidFill>
+                  <a:srgbClr val="101418"/>
+                </a:solidFill>
+                <a:latin typeface="Arial"/>
+              </a:rPr>
+              <a:t>Plans can change.</a:t>
+            </a:r>
+          </a:p>
+        </p:txBody>
+      </p:sp>
+      <p:sp>
+        <p:nvSpPr>
+          <p:cNvPr id="34" name="CAPTION BAR"/>
+          <p:cNvSpPr/>
+          <p:nvPr/>
+        </p:nvSpPr>
+        <p:spPr>
+          <a:xfrm>
+            <a:off x="548640" y="5760720"/>
+            <a:ext cx="11091672" cy="731520"/>
+          </a:xfrm>
+          <a:prstGeom prst="roundRect">
+            <a:avLst>
+              <a:gd name="adj" fmla="val 10000"/>
+            </a:avLst>
+          </a:prstGeom>
+          <a:solidFill>
+            <a:srgbClr val="2B2F36"/>
+          </a:solidFill>
+          <a:ln>
+            <a:noFill/>
+          </a:ln>
+        </p:spPr>
+        <p:txBody>
+          <a:bodyPr rtlCol="0" anchor="ctr"/>
+          <a:lstStyle/>
+          <a:p>
+            <a:pPr algn="ctr"/>
+          </a:p>
+        </p:txBody>
+      </p:sp>
+      <p:sp>
+        <p:nvSpPr>
+          <p:cNvPr id="35" name="CAPTION RULE"/>
+          <p:cNvSpPr/>
+          <p:nvPr/>
+        </p:nvSpPr>
+        <p:spPr>
+          <a:xfrm>
+            <a:off x="548640" y="5815583"/>
+            <a:ext cx="73152" cy="621792"/>
+          </a:xfrm>
+          <a:prstGeom prst="rect">
+            <a:avLst/>
+          </a:prstGeom>
+          <a:solidFill>
+            <a:srgbClr val="F28C28"/>
+          </a:solidFill>
+          <a:ln>
+            <a:noFill/>
+          </a:ln>
+        </p:spPr>
+        <p:txBody>
+          <a:bodyPr rtlCol="0" anchor="ctr"/>
+          <a:lstStyle/>
+          <a:p>
+            <a:pPr algn="ctr"/>
+          </a:p>
+        </p:txBody>
+      </p:sp>
+      <p:sp>
+        <p:nvSpPr>
+          <p:cNvPr id="36" name="CAPTION"/>
+          <p:cNvSpPr txBox="1"/>
+          <p:nvPr/>
+        </p:nvSpPr>
+        <p:spPr>
+          <a:xfrm>
+            <a:off x="777240" y="5760720"/>
+            <a:ext cx="10744200" cy="731520"/>
+          </a:xfrm>
+          <a:prstGeom prst="rect">
+            <a:avLst/>
+          </a:prstGeom>
+          <a:noFill/>
+        </p:spPr>
+        <p:txBody>
+          <a:bodyPr wrap="square" anchor="ctr" lIns="18288" tIns="9144" rIns="18288" bIns="9144">
+            <a:noAutofit/>
+          </a:bodyPr>
+          <a:lstStyle/>
+          <a:p>
+            <a:pPr algn="l"/>
+            <a:r>
+              <a:rPr sz="2000" b="0" i="0" lang="en-GB">
+                <a:solidFill>
+                  <a:srgbClr val="F2F2F2"/>
+                </a:solidFill>
+                <a:latin typeface="Arial"/>
+              </a:rPr>
+              <a:t>The guide, lessons and menu are planned. They are not built yet.</a:t>
+            </a:r>
+          </a:p>
+        </p:txBody>
+      </p:sp>
+      <p:sp>
+        <p:nvSpPr>
+          <p:cNvPr id="37" name="NUM"/>
+          <p:cNvSpPr txBox="1"/>
+          <p:nvPr/>
+        </p:nvSpPr>
+        <p:spPr>
+          <a:xfrm>
+            <a:off x="10725912" y="6528816"/>
+            <a:ext cx="914400" cy="274320"/>
+          </a:xfrm>
+          <a:prstGeom prst="rect">
+            <a:avLst/>
+          </a:prstGeom>
+          <a:noFill/>
+        </p:spPr>
+        <p:txBody>
+          <a:bodyPr wrap="square" anchor="ctr" lIns="18288" tIns="9144" rIns="18288" bIns="9144">
+            <a:noAutofit/>
+          </a:bodyPr>
+          <a:lstStyle/>
+          <a:p>
+            <a:pPr algn="r"/>
+            <a:r>
+              <a:rPr sz="1400" b="0" i="0" lang="en-GB">
+                <a:solidFill>
+                  <a:srgbClr val="A9B0B8"/>
+                </a:solidFill>
+                <a:latin typeface="Arial"/>
+              </a:rPr>
+              <a:t>21</a:t>
+            </a:r>
+          </a:p>
+        </p:txBody>
+      </p:sp>
+    </p:spTree>
+  </p:cSld>
+  <p:clrMapOvr>
+    <a:masterClrMapping/>
+  </p:clrMapOvr>
+</p:sld>
+</file>
+
+<file path=ppt/slides/slide22.xml><?xml version="1.0" encoding="utf-8"?>
+<p:sld xmlns:a="http://schemas.openxmlformats.org/drawingml/2006/main" xmlns:p="http://schemas.openxmlformats.org/presentationml/2006/main" xmlns:r="http://schemas.openxmlformats.org/officeDocument/2006/relationships">
+  <p:cSld>
+    <p:bg>
+      <p:bgPr>
+        <a:solidFill>
+          <a:srgbClr val="1E2126"/>
+        </a:solidFill>
+        <a:effectLst/>
+      </p:bgPr>
+    </p:bg>
+    <p:spTree>
+      <p:nvGrpSpPr>
+        <p:cNvPr id="1" name=""/>
+        <p:cNvGrpSpPr/>
+        <p:nvPr/>
+      </p:nvGrpSpPr>
+      <p:grpSpPr/>
+      <p:sp>
+        <p:nvSpPr>
+          <p:cNvPr id="2" name="TITLE"/>
+          <p:cNvSpPr>
+            <a:spLocks noGrp="1"/>
+          </p:cNvSpPr>
+          <p:nvPr>
+            <p:ph type="title"/>
+          </p:nvPr>
+        </p:nvSpPr>
+        <p:spPr>
+          <a:xfrm>
+            <a:off x="548640" y="365760"/>
+            <a:ext cx="9326880" cy="731520"/>
+          </a:xfrm>
+        </p:spPr>
+        <p:txBody>
+          <a:bodyPr wrap="square" anchor="ctr" lIns="0" rIns="0" tIns="0" bIns="0">
+            <a:noAutofit/>
+          </a:bodyPr>
+          <a:lstStyle/>
+          <a:p>
+            <a:pPr algn="l"/>
+            <a:r>
+              <a:rPr sz="3600" b="1" i="0" lang="en-GB">
+                <a:solidFill>
+                  <a:srgbClr val="F2F2F2"/>
+                </a:solidFill>
+                <a:latin typeface="Arial"/>
+              </a:rPr>
+              <a:t>Still undecided</a:t>
+            </a:r>
+          </a:p>
+        </p:txBody>
+      </p:sp>
+      <p:sp>
+        <p:nvSpPr>
+          <p:cNvPr id="3" name="CHIP"/>
+          <p:cNvSpPr/>
+          <p:nvPr/>
+        </p:nvSpPr>
+        <p:spPr>
+          <a:xfrm>
+            <a:off x="10088575" y="530352"/>
+            <a:ext cx="1554480" cy="365760"/>
+          </a:xfrm>
+          <a:prstGeom prst="roundRect">
+            <a:avLst>
+              <a:gd name="adj" fmla="val 30000"/>
+            </a:avLst>
+          </a:prstGeom>
+          <a:noFill/>
+          <a:ln w="25400">
+            <a:solidFill>
+              <a:srgbClr val="A9B0B8"/>
+            </a:solidFill>
+          </a:ln>
+        </p:spPr>
+        <p:txBody>
+          <a:bodyPr rtlCol="0" anchor="ctr" wrap="square" lIns="54864" tIns="0" rIns="54864" bIns="0">
+            <a:noAutofit/>
+          </a:bodyPr>
+          <a:lstStyle/>
+          <a:p>
+            <a:pPr algn="ctr"/>
+            <a:r>
+              <a:rPr sz="1400" b="1" i="0" lang="en-GB">
+                <a:solidFill>
+                  <a:srgbClr val="F2F2F2"/>
+                </a:solidFill>
+                <a:latin typeface="Arial"/>
+              </a:rPr>
+              <a:t>UNDECIDED</a:t>
+            </a:r>
+          </a:p>
+        </p:txBody>
+      </p:sp>
+      <p:grpSp>
+        <p:nvGrpSpPr>
+          <p:cNvPr id="4" name="Eight open questions" descr="A grid of eight cards, each with an Undecided tag and an open question: her name, her look, library layout, origin story, which lessons and when, milestone voice lines, how the surprise works, and build menu layout."/>
+          <p:cNvGrpSpPr/>
+          <p:nvPr/>
+        </p:nvGrpSpPr>
+        <p:grpSpPr>
+          <a:xfrm>
+            <a:off x="548640" y="1463040"/>
+            <a:ext cx="11091672" cy="3931920"/>
+            <a:chOff x="548640" y="1463040"/>
+            <a:chExt cx="11091672" cy="3931920"/>
+          </a:xfrm>
+        </p:grpSpPr>
+        <p:sp>
+          <p:nvSpPr>
+            <p:cNvPr id="5" name="question card"/>
+            <p:cNvSpPr/>
+            <p:nvPr/>
+          </p:nvSpPr>
+          <p:spPr>
+            <a:xfrm>
+              <a:off x="548640" y="1463040"/>
+              <a:ext cx="2560320" cy="1828800"/>
+            </a:xfrm>
+            <a:prstGeom prst="roundRect">
+              <a:avLst>
+                <a:gd name="adj" fmla="val 5000"/>
+              </a:avLst>
+            </a:prstGeom>
+            <a:solidFill>
+              <a:srgbClr val="2B2F36"/>
+            </a:solidFill>
+            <a:ln w="25400">
+              <a:solidFill>
+                <a:srgbClr val="A9B0B8"/>
+              </a:solidFill>
+            </a:ln>
+          </p:spPr>
+          <p:txBody>
+            <a:bodyPr rtlCol="0" anchor="ctr"/>
+            <a:lstStyle/>
+            <a:p>
+              <a:pPr algn="ctr"/>
+            </a:p>
+          </p:txBody>
+        </p:sp>
+        <p:sp>
+          <p:nvSpPr>
+            <p:cNvPr id="6" name="CHIP CARD"/>
+            <p:cNvSpPr/>
+            <p:nvPr/>
+          </p:nvSpPr>
+          <p:spPr>
+            <a:xfrm>
+              <a:off x="731520" y="1645920"/>
+              <a:ext cx="1417320" cy="310896"/>
+            </a:xfrm>
+            <a:prstGeom prst="roundRect">
+              <a:avLst>
+                <a:gd name="adj" fmla="val 35294"/>
+              </a:avLst>
+            </a:prstGeom>
+            <a:noFill/>
+            <a:ln w="25400">
+              <a:solidFill>
+                <a:srgbClr val="A9B0B8"/>
+              </a:solidFill>
+            </a:ln>
+          </p:spPr>
+          <p:txBody>
+            <a:bodyPr rtlCol="0" anchor="ctr" wrap="square" lIns="54864" tIns="0" rIns="54864" bIns="0">
+              <a:noAutofit/>
+            </a:bodyPr>
+            <a:lstStyle/>
+            <a:p>
+              <a:pPr algn="ctr"/>
+              <a:r>
+                <a:rPr sz="1400" b="1" i="0" lang="en-GB">
+                  <a:solidFill>
+                    <a:srgbClr val="F2F2F2"/>
+                  </a:solidFill>
+                  <a:latin typeface="Arial"/>
+                </a:rPr>
+                <a:t>UNDECIDED</a:t>
+              </a:r>
+            </a:p>
+          </p:txBody>
+        </p:sp>
+        <p:sp>
+          <p:nvSpPr>
+            <p:cNvPr id="7" name="question"/>
+            <p:cNvSpPr txBox="1"/>
+            <p:nvPr/>
+          </p:nvSpPr>
+          <p:spPr>
+            <a:xfrm>
+              <a:off x="731520" y="2103120"/>
+              <a:ext cx="2194560" cy="1051560"/>
+            </a:xfrm>
+            <a:prstGeom prst="rect">
+              <a:avLst/>
+            </a:prstGeom>
+            <a:noFill/>
+          </p:spPr>
+          <p:txBody>
+            <a:bodyPr wrap="square" anchor="ctr" lIns="18288" tIns="9144" rIns="18288" bIns="9144">
+              <a:noAutofit/>
+            </a:bodyPr>
+            <a:lstStyle/>
+            <a:p>
+              <a:pPr algn="l"/>
+              <a:r>
+                <a:rPr sz="2000" b="1" i="0" lang="en-GB">
+                  <a:solidFill>
+                    <a:srgbClr val="F2F2F2"/>
+                  </a:solidFill>
+                  <a:latin typeface="Arial"/>
+                </a:rPr>
+                <a:t>Her name (OQ15)</a:t>
+              </a:r>
+            </a:p>
+          </p:txBody>
+        </p:sp>
+        <p:sp>
+          <p:nvSpPr>
+            <p:cNvPr id="8" name="question card"/>
+            <p:cNvSpPr/>
+            <p:nvPr/>
+          </p:nvSpPr>
+          <p:spPr>
+            <a:xfrm>
+              <a:off x="3392424" y="1463040"/>
+              <a:ext cx="2560320" cy="1828800"/>
+            </a:xfrm>
+            <a:prstGeom prst="roundRect">
+              <a:avLst>
+                <a:gd name="adj" fmla="val 5000"/>
+              </a:avLst>
+            </a:prstGeom>
+            <a:solidFill>
+              <a:srgbClr val="2B2F36"/>
+            </a:solidFill>
+            <a:ln w="25400">
+              <a:solidFill>
+                <a:srgbClr val="A9B0B8"/>
+              </a:solidFill>
+            </a:ln>
+          </p:spPr>
+          <p:txBody>
+            <a:bodyPr rtlCol="0" anchor="ctr"/>
+            <a:lstStyle/>
+            <a:p>
+              <a:pPr algn="ctr"/>
+            </a:p>
+          </p:txBody>
+        </p:sp>
+        <p:sp>
+          <p:nvSpPr>
+            <p:cNvPr id="9" name="CHIP CARD"/>
+            <p:cNvSpPr/>
+            <p:nvPr/>
+          </p:nvSpPr>
+          <p:spPr>
+            <a:xfrm>
+              <a:off x="3575304" y="1645920"/>
+              <a:ext cx="1417320" cy="310896"/>
+            </a:xfrm>
+            <a:prstGeom prst="roundRect">
+              <a:avLst>
+                <a:gd name="adj" fmla="val 35294"/>
+              </a:avLst>
+            </a:prstGeom>
+            <a:noFill/>
+            <a:ln w="25400">
+              <a:solidFill>
+                <a:srgbClr val="A9B0B8"/>
+              </a:solidFill>
+            </a:ln>
+          </p:spPr>
+          <p:txBody>
+            <a:bodyPr rtlCol="0" anchor="ctr" wrap="square" lIns="54864" tIns="0" rIns="54864" bIns="0">
+              <a:noAutofit/>
+            </a:bodyPr>
+            <a:lstStyle/>
+            <a:p>
+              <a:pPr algn="ctr"/>
+              <a:r>
+                <a:rPr sz="1400" b="1" i="0" lang="en-GB">
+                  <a:solidFill>
+                    <a:srgbClr val="F2F2F2"/>
+                  </a:solidFill>
+                  <a:latin typeface="Arial"/>
+                </a:rPr>
+                <a:t>UNDECIDED</a:t>
+              </a:r>
+            </a:p>
+          </p:txBody>
+        </p:sp>
+        <p:sp>
+          <p:nvSpPr>
+            <p:cNvPr id="10" name="question"/>
+            <p:cNvSpPr txBox="1"/>
+            <p:nvPr/>
+          </p:nvSpPr>
+          <p:spPr>
+            <a:xfrm>
+              <a:off x="3575304" y="2103120"/>
+              <a:ext cx="2194560" cy="1051560"/>
+            </a:xfrm>
+            <a:prstGeom prst="rect">
+              <a:avLst/>
+            </a:prstGeom>
+            <a:noFill/>
+          </p:spPr>
+          <p:txBody>
+            <a:bodyPr wrap="square" anchor="ctr" lIns="18288" tIns="9144" rIns="18288" bIns="9144">
+              <a:noAutofit/>
+            </a:bodyPr>
+            <a:lstStyle/>
+            <a:p>
+              <a:pPr algn="l"/>
+              <a:r>
+                <a:rPr sz="2000" b="1" i="0" lang="en-GB">
+                  <a:solidFill>
+                    <a:srgbClr val="F2F2F2"/>
+                  </a:solidFill>
+                  <a:latin typeface="Arial"/>
+                </a:rPr>
+                <a:t>Her look (OQ15)</a:t>
+              </a:r>
+            </a:p>
+          </p:txBody>
+        </p:sp>
+        <p:sp>
+          <p:nvSpPr>
+            <p:cNvPr id="11" name="question card"/>
+            <p:cNvSpPr/>
+            <p:nvPr/>
+          </p:nvSpPr>
+          <p:spPr>
+            <a:xfrm>
+              <a:off x="6236207" y="1463040"/>
+              <a:ext cx="2560320" cy="1828800"/>
+            </a:xfrm>
+            <a:prstGeom prst="roundRect">
+              <a:avLst>
+                <a:gd name="adj" fmla="val 5000"/>
+              </a:avLst>
+            </a:prstGeom>
+            <a:solidFill>
+              <a:srgbClr val="2B2F36"/>
+            </a:solidFill>
+            <a:ln w="25400">
+              <a:solidFill>
+                <a:srgbClr val="A9B0B8"/>
+              </a:solidFill>
+            </a:ln>
+          </p:spPr>
+          <p:txBody>
+            <a:bodyPr rtlCol="0" anchor="ctr"/>
+            <a:lstStyle/>
+            <a:p>
+              <a:pPr algn="ctr"/>
+            </a:p>
+          </p:txBody>
+        </p:sp>
+        <p:sp>
+          <p:nvSpPr>
+            <p:cNvPr id="12" name="CHIP CARD"/>
+            <p:cNvSpPr/>
+            <p:nvPr/>
+          </p:nvSpPr>
+          <p:spPr>
+            <a:xfrm>
+              <a:off x="6419088" y="1645920"/>
+              <a:ext cx="1417320" cy="310896"/>
+            </a:xfrm>
+            <a:prstGeom prst="roundRect">
+              <a:avLst>
+                <a:gd name="adj" fmla="val 35294"/>
+              </a:avLst>
+            </a:prstGeom>
+            <a:noFill/>
+            <a:ln w="25400">
+              <a:solidFill>
+                <a:srgbClr val="A9B0B8"/>
+              </a:solidFill>
+            </a:ln>
+          </p:spPr>
+          <p:txBody>
+            <a:bodyPr rtlCol="0" anchor="ctr" wrap="square" lIns="54864" tIns="0" rIns="54864" bIns="0">
+              <a:noAutofit/>
+            </a:bodyPr>
+            <a:lstStyle/>
+            <a:p>
+              <a:pPr algn="ctr"/>
+              <a:r>
+                <a:rPr sz="1400" b="1" i="0" lang="en-GB">
+                  <a:solidFill>
+                    <a:srgbClr val="F2F2F2"/>
+                  </a:solidFill>
+                  <a:latin typeface="Arial"/>
+                </a:rPr>
+                <a:t>UNDECIDED</a:t>
+              </a:r>
+            </a:p>
+          </p:txBody>
+        </p:sp>
+        <p:sp>
+          <p:nvSpPr>
+            <p:cNvPr id="13" name="question"/>
+            <p:cNvSpPr txBox="1"/>
+            <p:nvPr/>
+          </p:nvSpPr>
+          <p:spPr>
+            <a:xfrm>
+              <a:off x="6419088" y="2103120"/>
+              <a:ext cx="2194560" cy="1051560"/>
+            </a:xfrm>
+            <a:prstGeom prst="rect">
+              <a:avLst/>
+            </a:prstGeom>
+            <a:noFill/>
+          </p:spPr>
+          <p:txBody>
+            <a:bodyPr wrap="square" anchor="ctr" lIns="18288" tIns="9144" rIns="18288" bIns="9144">
+              <a:noAutofit/>
+            </a:bodyPr>
+            <a:lstStyle/>
+            <a:p>
+              <a:pPr algn="l"/>
+              <a:r>
+                <a:rPr sz="2000" b="1" i="0" lang="en-GB">
+                  <a:solidFill>
+                    <a:srgbClr val="F2F2F2"/>
+                  </a:solidFill>
+                  <a:latin typeface="Arial"/>
+                </a:rPr>
+                <a:t>Library layout (OQ15)</a:t>
+              </a:r>
+            </a:p>
+          </p:txBody>
+        </p:sp>
+        <p:sp>
+          <p:nvSpPr>
+            <p:cNvPr id="14" name="question card"/>
+            <p:cNvSpPr/>
+            <p:nvPr/>
+          </p:nvSpPr>
+          <p:spPr>
+            <a:xfrm>
+              <a:off x="9079992" y="1463040"/>
+              <a:ext cx="2560320" cy="1828800"/>
+            </a:xfrm>
+            <a:prstGeom prst="roundRect">
+              <a:avLst>
+                <a:gd name="adj" fmla="val 5000"/>
+              </a:avLst>
+            </a:prstGeom>
+            <a:solidFill>
+              <a:srgbClr val="2B2F36"/>
+            </a:solidFill>
+            <a:ln w="25400">
+              <a:solidFill>
+                <a:srgbClr val="A9B0B8"/>
+              </a:solidFill>
+            </a:ln>
+          </p:spPr>
+          <p:txBody>
+            <a:bodyPr rtlCol="0" anchor="ctr"/>
+            <a:lstStyle/>
+            <a:p>
+              <a:pPr algn="ctr"/>
+            </a:p>
+          </p:txBody>
+        </p:sp>
+        <p:sp>
+          <p:nvSpPr>
+            <p:cNvPr id="15" name="CHIP CARD"/>
+            <p:cNvSpPr/>
+            <p:nvPr/>
+          </p:nvSpPr>
+          <p:spPr>
+            <a:xfrm>
+              <a:off x="9262872" y="1645920"/>
+              <a:ext cx="1417320" cy="310896"/>
+            </a:xfrm>
+            <a:prstGeom prst="roundRect">
+              <a:avLst>
+                <a:gd name="adj" fmla="val 35294"/>
+              </a:avLst>
+            </a:prstGeom>
+            <a:noFill/>
+            <a:ln w="25400">
+              <a:solidFill>
+                <a:srgbClr val="A9B0B8"/>
+              </a:solidFill>
+            </a:ln>
+          </p:spPr>
+          <p:txBody>
+            <a:bodyPr rtlCol="0" anchor="ctr" wrap="square" lIns="54864" tIns="0" rIns="54864" bIns="0">
+              <a:noAutofit/>
+            </a:bodyPr>
+            <a:lstStyle/>
+            <a:p>
+              <a:pPr algn="ctr"/>
+              <a:r>
+                <a:rPr sz="1400" b="1" i="0" lang="en-GB">
+                  <a:solidFill>
+                    <a:srgbClr val="F2F2F2"/>
+                  </a:solidFill>
+                  <a:latin typeface="Arial"/>
+                </a:rPr>
+                <a:t>UNDECIDED</a:t>
+              </a:r>
+            </a:p>
+          </p:txBody>
+        </p:sp>
+        <p:sp>
+          <p:nvSpPr>
+            <p:cNvPr id="16" name="question"/>
+            <p:cNvSpPr txBox="1"/>
+            <p:nvPr/>
+          </p:nvSpPr>
+          <p:spPr>
+            <a:xfrm>
+              <a:off x="9262872" y="2103120"/>
+              <a:ext cx="2194560" cy="1051560"/>
+            </a:xfrm>
+            <a:prstGeom prst="rect">
+              <a:avLst/>
+            </a:prstGeom>
+            <a:noFill/>
+          </p:spPr>
+          <p:txBody>
+            <a:bodyPr wrap="square" anchor="ctr" lIns="18288" tIns="9144" rIns="18288" bIns="9144">
+              <a:noAutofit/>
+            </a:bodyPr>
+            <a:lstStyle/>
+            <a:p>
+              <a:pPr algn="l"/>
+              <a:r>
+                <a:rPr sz="2000" b="1" i="0" lang="en-GB">
+                  <a:solidFill>
+                    <a:srgbClr val="F2F2F2"/>
+                  </a:solidFill>
+                  <a:latin typeface="Arial"/>
+                </a:rPr>
+                <a:t>Origin story (OQ16)</a:t>
+              </a:r>
+            </a:p>
+          </p:txBody>
+        </p:sp>
+        <p:sp>
+          <p:nvSpPr>
+            <p:cNvPr id="17" name="question card"/>
+            <p:cNvSpPr/>
+            <p:nvPr/>
+          </p:nvSpPr>
+          <p:spPr>
+            <a:xfrm>
+              <a:off x="548640" y="3566160"/>
+              <a:ext cx="2560320" cy="1828800"/>
+            </a:xfrm>
+            <a:prstGeom prst="roundRect">
+              <a:avLst>
+                <a:gd name="adj" fmla="val 5000"/>
+              </a:avLst>
+            </a:prstGeom>
+            <a:solidFill>
+              <a:srgbClr val="2B2F36"/>
+            </a:solidFill>
+            <a:ln w="25400">
+              <a:solidFill>
+                <a:srgbClr val="A9B0B8"/>
+              </a:solidFill>
+            </a:ln>
+          </p:spPr>
+          <p:txBody>
+            <a:bodyPr rtlCol="0" anchor="ctr"/>
+            <a:lstStyle/>
+            <a:p>
+              <a:pPr algn="ctr"/>
+            </a:p>
+          </p:txBody>
+        </p:sp>
+        <p:sp>
+          <p:nvSpPr>
+            <p:cNvPr id="18" name="CHIP CARD"/>
+            <p:cNvSpPr/>
+            <p:nvPr/>
+          </p:nvSpPr>
+          <p:spPr>
+            <a:xfrm>
+              <a:off x="731520" y="3749039"/>
+              <a:ext cx="1417320" cy="310896"/>
+            </a:xfrm>
+            <a:prstGeom prst="roundRect">
+              <a:avLst>
+                <a:gd name="adj" fmla="val 35294"/>
+              </a:avLst>
+            </a:prstGeom>
+            <a:noFill/>
+            <a:ln w="25400">
+              <a:solidFill>
+                <a:srgbClr val="A9B0B8"/>
+              </a:solidFill>
+            </a:ln>
+          </p:spPr>
+          <p:txBody>
+            <a:bodyPr rtlCol="0" anchor="ctr" wrap="square" lIns="54864" tIns="0" rIns="54864" bIns="0">
+              <a:noAutofit/>
+            </a:bodyPr>
+            <a:lstStyle/>
+            <a:p>
+              <a:pPr algn="ctr"/>
+              <a:r>
+                <a:rPr sz="1400" b="1" i="0" lang="en-GB">
+                  <a:solidFill>
+                    <a:srgbClr val="F2F2F2"/>
+                  </a:solidFill>
+                  <a:latin typeface="Arial"/>
+                </a:rPr>
+                <a:t>UNDECIDED</a:t>
+              </a:r>
+            </a:p>
+          </p:txBody>
+        </p:sp>
+        <p:sp>
+          <p:nvSpPr>
+            <p:cNvPr id="19" name="question"/>
+            <p:cNvSpPr txBox="1"/>
+            <p:nvPr/>
+          </p:nvSpPr>
+          <p:spPr>
+            <a:xfrm>
+              <a:off x="731520" y="4206240"/>
+              <a:ext cx="2194560" cy="1051560"/>
+            </a:xfrm>
+            <a:prstGeom prst="rect">
+              <a:avLst/>
+            </a:prstGeom>
+            <a:noFill/>
+          </p:spPr>
+          <p:txBody>
+            <a:bodyPr wrap="square" anchor="ctr" lIns="18288" tIns="9144" rIns="18288" bIns="9144">
+              <a:noAutofit/>
+            </a:bodyPr>
+            <a:lstStyle/>
+            <a:p>
+              <a:pPr algn="l"/>
+              <a:r>
+                <a:rPr sz="2000" b="1" i="0" lang="en-GB">
+                  <a:solidFill>
+                    <a:srgbClr val="F2F2F2"/>
+                  </a:solidFill>
+                  <a:latin typeface="Arial"/>
+                </a:rPr>
+                <a:t>Which lessons, and when (OQ17)</a:t>
+              </a:r>
+            </a:p>
+          </p:txBody>
+        </p:sp>
+        <p:sp>
+          <p:nvSpPr>
+            <p:cNvPr id="20" name="question card"/>
+            <p:cNvSpPr/>
+            <p:nvPr/>
+          </p:nvSpPr>
+          <p:spPr>
+            <a:xfrm>
+              <a:off x="3392424" y="3566160"/>
+              <a:ext cx="2560320" cy="1828800"/>
+            </a:xfrm>
+            <a:prstGeom prst="roundRect">
+              <a:avLst>
+                <a:gd name="adj" fmla="val 5000"/>
+              </a:avLst>
+            </a:prstGeom>
+            <a:solidFill>
+              <a:srgbClr val="2B2F36"/>
+            </a:solidFill>
+            <a:ln w="25400">
+              <a:solidFill>
+                <a:srgbClr val="A9B0B8"/>
+              </a:solidFill>
+            </a:ln>
+          </p:spPr>
+          <p:txBody>
+            <a:bodyPr rtlCol="0" anchor="ctr"/>
+            <a:lstStyle/>
+            <a:p>
+              <a:pPr algn="ctr"/>
+            </a:p>
+          </p:txBody>
+        </p:sp>
+        <p:sp>
+          <p:nvSpPr>
+            <p:cNvPr id="21" name="CHIP CARD"/>
+            <p:cNvSpPr/>
+            <p:nvPr/>
+          </p:nvSpPr>
+          <p:spPr>
+            <a:xfrm>
+              <a:off x="3575304" y="3749039"/>
+              <a:ext cx="1417320" cy="310896"/>
+            </a:xfrm>
+            <a:prstGeom prst="roundRect">
+              <a:avLst>
+                <a:gd name="adj" fmla="val 35294"/>
+              </a:avLst>
+            </a:prstGeom>
+            <a:noFill/>
+            <a:ln w="25400">
+              <a:solidFill>
+                <a:srgbClr val="A9B0B8"/>
+              </a:solidFill>
+            </a:ln>
+          </p:spPr>
+          <p:txBody>
+            <a:bodyPr rtlCol="0" anchor="ctr" wrap="square" lIns="54864" tIns="0" rIns="54864" bIns="0">
+              <a:noAutofit/>
+            </a:bodyPr>
+            <a:lstStyle/>
+            <a:p>
+              <a:pPr algn="ctr"/>
+              <a:r>
+                <a:rPr sz="1400" b="1" i="0" lang="en-GB">
+                  <a:solidFill>
+                    <a:srgbClr val="F2F2F2"/>
+                  </a:solidFill>
+                  <a:latin typeface="Arial"/>
+                </a:rPr>
+                <a:t>UNDECIDED</a:t>
+              </a:r>
+            </a:p>
+          </p:txBody>
+        </p:sp>
+        <p:sp>
+          <p:nvSpPr>
+            <p:cNvPr id="22" name="question"/>
+            <p:cNvSpPr txBox="1"/>
+            <p:nvPr/>
+          </p:nvSpPr>
+          <p:spPr>
+            <a:xfrm>
+              <a:off x="3575304" y="4206240"/>
+              <a:ext cx="2194560" cy="1051560"/>
+            </a:xfrm>
+            <a:prstGeom prst="rect">
+              <a:avLst/>
+            </a:prstGeom>
+            <a:noFill/>
+          </p:spPr>
+          <p:txBody>
+            <a:bodyPr wrap="square" anchor="ctr" lIns="18288" tIns="9144" rIns="18288" bIns="9144">
+              <a:noAutofit/>
+            </a:bodyPr>
+            <a:lstStyle/>
+            <a:p>
+              <a:pPr algn="l"/>
+              <a:r>
+                <a:rPr sz="2000" b="1" i="0" lang="en-GB">
+                  <a:solidFill>
+                    <a:srgbClr val="F2F2F2"/>
+                  </a:solidFill>
+                  <a:latin typeface="Arial"/>
+                </a:rPr>
+                <a:t>Milestone voice lines (OQ17)</a:t>
+              </a:r>
+            </a:p>
+          </p:txBody>
+        </p:sp>
+        <p:sp>
+          <p:nvSpPr>
+            <p:cNvPr id="23" name="question card"/>
+            <p:cNvSpPr/>
+            <p:nvPr/>
+          </p:nvSpPr>
+          <p:spPr>
+            <a:xfrm>
+              <a:off x="6236207" y="3566160"/>
+              <a:ext cx="2560320" cy="1828800"/>
+            </a:xfrm>
+            <a:prstGeom prst="roundRect">
+              <a:avLst>
+                <a:gd name="adj" fmla="val 5000"/>
+              </a:avLst>
+            </a:prstGeom>
+            <a:solidFill>
+              <a:srgbClr val="2B2F36"/>
+            </a:solidFill>
+            <a:ln w="25400">
+              <a:solidFill>
+                <a:srgbClr val="A9B0B8"/>
+              </a:solidFill>
+            </a:ln>
+          </p:spPr>
+          <p:txBody>
+            <a:bodyPr rtlCol="0" anchor="ctr"/>
+            <a:lstStyle/>
+            <a:p>
+              <a:pPr algn="ctr"/>
+            </a:p>
+          </p:txBody>
+        </p:sp>
+        <p:sp>
+          <p:nvSpPr>
+            <p:cNvPr id="24" name="CHIP CARD"/>
+            <p:cNvSpPr/>
+            <p:nvPr/>
+          </p:nvSpPr>
+          <p:spPr>
+            <a:xfrm>
+              <a:off x="6419088" y="3749039"/>
+              <a:ext cx="1417320" cy="310896"/>
+            </a:xfrm>
+            <a:prstGeom prst="roundRect">
+              <a:avLst>
+                <a:gd name="adj" fmla="val 35294"/>
+              </a:avLst>
+            </a:prstGeom>
+            <a:noFill/>
+            <a:ln w="25400">
+              <a:solidFill>
+                <a:srgbClr val="A9B0B8"/>
+              </a:solidFill>
+            </a:ln>
+          </p:spPr>
+          <p:txBody>
+            <a:bodyPr rtlCol="0" anchor="ctr" wrap="square" lIns="54864" tIns="0" rIns="54864" bIns="0">
+              <a:noAutofit/>
+            </a:bodyPr>
+            <a:lstStyle/>
+            <a:p>
+              <a:pPr algn="ctr"/>
+              <a:r>
+                <a:rPr sz="1400" b="1" i="0" lang="en-GB">
+                  <a:solidFill>
+                    <a:srgbClr val="F2F2F2"/>
+                  </a:solidFill>
+                  <a:latin typeface="Arial"/>
+                </a:rPr>
+                <a:t>UNDECIDED</a:t>
+              </a:r>
+            </a:p>
+          </p:txBody>
+        </p:sp>
+        <p:sp>
+          <p:nvSpPr>
+            <p:cNvPr id="25" name="question"/>
+            <p:cNvSpPr txBox="1"/>
+            <p:nvPr/>
+          </p:nvSpPr>
+          <p:spPr>
+            <a:xfrm>
+              <a:off x="6419088" y="4206240"/>
+              <a:ext cx="2194560" cy="1051560"/>
+            </a:xfrm>
+            <a:prstGeom prst="rect">
+              <a:avLst/>
+            </a:prstGeom>
+            <a:noFill/>
+          </p:spPr>
+          <p:txBody>
+            <a:bodyPr wrap="square" anchor="ctr" lIns="18288" tIns="9144" rIns="18288" bIns="9144">
+              <a:noAutofit/>
+            </a:bodyPr>
+            <a:lstStyle/>
+            <a:p>
+              <a:pPr algn="l"/>
+              <a:r>
+                <a:rPr sz="2000" b="1" i="0" lang="en-GB">
+                  <a:solidFill>
+                    <a:srgbClr val="F2F2F2"/>
+                  </a:solidFill>
+                  <a:latin typeface="Arial"/>
+                </a:rPr>
+                <a:t>How the surprise works (OQ18)</a:t>
+              </a:r>
+            </a:p>
+          </p:txBody>
+        </p:sp>
+        <p:sp>
+          <p:nvSpPr>
+            <p:cNvPr id="26" name="question card"/>
+            <p:cNvSpPr/>
+            <p:nvPr/>
+          </p:nvSpPr>
+          <p:spPr>
+            <a:xfrm>
+              <a:off x="9079992" y="3566160"/>
+              <a:ext cx="2560320" cy="1828800"/>
+            </a:xfrm>
+            <a:prstGeom prst="roundRect">
+              <a:avLst>
+                <a:gd name="adj" fmla="val 5000"/>
+              </a:avLst>
+            </a:prstGeom>
+            <a:solidFill>
+              <a:srgbClr val="2B2F36"/>
+            </a:solidFill>
+            <a:ln w="25400">
+              <a:solidFill>
+                <a:srgbClr val="A9B0B8"/>
+              </a:solidFill>
+            </a:ln>
+          </p:spPr>
+          <p:txBody>
+            <a:bodyPr rtlCol="0" anchor="ctr"/>
+            <a:lstStyle/>
+            <a:p>
+              <a:pPr algn="ctr"/>
+            </a:p>
+          </p:txBody>
+        </p:sp>
+        <p:sp>
+          <p:nvSpPr>
+            <p:cNvPr id="27" name="CHIP CARD"/>
+            <p:cNvSpPr/>
+            <p:nvPr/>
+          </p:nvSpPr>
+          <p:spPr>
+            <a:xfrm>
+              <a:off x="9262872" y="3749039"/>
+              <a:ext cx="1417320" cy="310896"/>
+            </a:xfrm>
+            <a:prstGeom prst="roundRect">
+              <a:avLst>
+                <a:gd name="adj" fmla="val 35294"/>
+              </a:avLst>
+            </a:prstGeom>
+            <a:noFill/>
+            <a:ln w="25400">
+              <a:solidFill>
+                <a:srgbClr val="A9B0B8"/>
+              </a:solidFill>
+            </a:ln>
+          </p:spPr>
+          <p:txBody>
+            <a:bodyPr rtlCol="0" anchor="ctr" wrap="square" lIns="54864" tIns="0" rIns="54864" bIns="0">
+              <a:noAutofit/>
+            </a:bodyPr>
+            <a:lstStyle/>
+            <a:p>
+              <a:pPr algn="ctr"/>
+              <a:r>
+                <a:rPr sz="1400" b="1" i="0" lang="en-GB">
+                  <a:solidFill>
+                    <a:srgbClr val="F2F2F2"/>
+                  </a:solidFill>
+                  <a:latin typeface="Arial"/>
+                </a:rPr>
+                <a:t>UNDECIDED</a:t>
+              </a:r>
+            </a:p>
+          </p:txBody>
+        </p:sp>
+        <p:sp>
+          <p:nvSpPr>
+            <p:cNvPr id="28" name="question"/>
+            <p:cNvSpPr txBox="1"/>
+            <p:nvPr/>
+          </p:nvSpPr>
+          <p:spPr>
+            <a:xfrm>
+              <a:off x="9262872" y="4206240"/>
+              <a:ext cx="2194560" cy="1051560"/>
+            </a:xfrm>
+            <a:prstGeom prst="rect">
+              <a:avLst/>
+            </a:prstGeom>
+            <a:noFill/>
+          </p:spPr>
+          <p:txBody>
+            <a:bodyPr wrap="square" anchor="ctr" lIns="18288" tIns="9144" rIns="18288" bIns="9144">
+              <a:noAutofit/>
+            </a:bodyPr>
+            <a:lstStyle/>
+            <a:p>
+              <a:pPr algn="l"/>
+              <a:r>
+                <a:rPr sz="2000" b="1" i="0" lang="en-GB">
+                  <a:solidFill>
+                    <a:srgbClr val="F2F2F2"/>
+                  </a:solidFill>
+                  <a:latin typeface="Arial"/>
+                </a:rPr>
+                <a:t>Build menu layout (OQ19)</a:t>
+              </a:r>
+            </a:p>
+          </p:txBody>
+        </p:sp>
+      </p:grpSp>
+      <p:sp>
+        <p:nvSpPr>
+          <p:cNvPr id="29" name="CAPTION BAR"/>
+          <p:cNvSpPr/>
+          <p:nvPr/>
+        </p:nvSpPr>
+        <p:spPr>
+          <a:xfrm>
+            <a:off x="548640" y="5760720"/>
+            <a:ext cx="11091672" cy="731520"/>
+          </a:xfrm>
+          <a:prstGeom prst="roundRect">
+            <a:avLst>
+              <a:gd name="adj" fmla="val 10000"/>
+            </a:avLst>
+          </a:prstGeom>
+          <a:solidFill>
+            <a:srgbClr val="2B2F36"/>
+          </a:solidFill>
+          <a:ln>
+            <a:noFill/>
+          </a:ln>
+        </p:spPr>
+        <p:txBody>
+          <a:bodyPr rtlCol="0" anchor="ctr"/>
+          <a:lstStyle/>
+          <a:p>
+            <a:pPr algn="ctr"/>
+          </a:p>
+        </p:txBody>
+      </p:sp>
+      <p:sp>
+        <p:nvSpPr>
+          <p:cNvPr id="30" name="CAPTION RULE"/>
+          <p:cNvSpPr/>
+          <p:nvPr/>
+        </p:nvSpPr>
+        <p:spPr>
+          <a:xfrm>
+            <a:off x="548640" y="5815583"/>
+            <a:ext cx="73152" cy="621792"/>
+          </a:xfrm>
+          <a:prstGeom prst="rect">
+            <a:avLst/>
+          </a:prstGeom>
+          <a:solidFill>
+            <a:srgbClr val="F28C28"/>
+          </a:solidFill>
+          <a:ln>
+            <a:noFill/>
+          </a:ln>
+        </p:spPr>
+        <p:txBody>
+          <a:bodyPr rtlCol="0" anchor="ctr"/>
+          <a:lstStyle/>
+          <a:p>
+            <a:pPr algn="ctr"/>
+          </a:p>
+        </p:txBody>
+      </p:sp>
+      <p:sp>
+        <p:nvSpPr>
+          <p:cNvPr id="31" name="CAPTION"/>
+          <p:cNvSpPr txBox="1"/>
+          <p:nvPr/>
+        </p:nvSpPr>
+        <p:spPr>
+          <a:xfrm>
+            <a:off x="777240" y="5760720"/>
+            <a:ext cx="10744200" cy="731520"/>
+          </a:xfrm>
+          <a:prstGeom prst="rect">
+            <a:avLst/>
+          </a:prstGeom>
+          <a:noFill/>
+        </p:spPr>
+        <p:txBody>
+          <a:bodyPr wrap="square" anchor="ctr" lIns="18288" tIns="9144" rIns="18288" bIns="9144">
+            <a:noAutofit/>
+          </a:bodyPr>
+          <a:lstStyle/>
+          <a:p>
+            <a:pPr algn="l"/>
+            <a:r>
+              <a:rPr sz="2000" b="0" i="0" lang="en-GB">
+                <a:solidFill>
+                  <a:srgbClr val="F2F2F2"/>
+                </a:solidFill>
+                <a:latin typeface="Arial"/>
+              </a:rPr>
+              <a:t>These questions are open. Nothing here has been chosen yet.</a:t>
+            </a:r>
+          </a:p>
+        </p:txBody>
+      </p:sp>
+      <p:sp>
+        <p:nvSpPr>
+          <p:cNvPr id="32" name="NUM"/>
+          <p:cNvSpPr txBox="1"/>
+          <p:nvPr/>
+        </p:nvSpPr>
+        <p:spPr>
+          <a:xfrm>
+            <a:off x="10725912" y="6528816"/>
+            <a:ext cx="914400" cy="274320"/>
+          </a:xfrm>
+          <a:prstGeom prst="rect">
+            <a:avLst/>
+          </a:prstGeom>
+          <a:noFill/>
+        </p:spPr>
+        <p:txBody>
+          <a:bodyPr wrap="square" anchor="ctr" lIns="18288" tIns="9144" rIns="18288" bIns="9144">
+            <a:noAutofit/>
+          </a:bodyPr>
+          <a:lstStyle/>
+          <a:p>
+            <a:pPr algn="r"/>
+            <a:r>
+              <a:rPr sz="1400" b="0" i="0" lang="en-GB">
+                <a:solidFill>
+                  <a:srgbClr val="A9B0B8"/>
+                </a:solidFill>
+                <a:latin typeface="Arial"/>
+              </a:rPr>
+              <a:t>22</a:t>
+            </a:r>
+          </a:p>
+        </p:txBody>
+      </p:sp>
+    </p:spTree>
+  </p:cSld>
+  <p:clrMapOvr>
+    <a:masterClrMapping/>
+  </p:clrMapOvr>
+</p:sld>
+</file>
+
+<file path=ppt/slides/slide23.xml><?xml version="1.0" encoding="utf-8"?>
+<p:sld xmlns:a="http://schemas.openxmlformats.org/drawingml/2006/main" xmlns:p="http://schemas.openxmlformats.org/presentationml/2006/main" xmlns:r="http://schemas.openxmlformats.org/officeDocument/2006/relationships">
+  <p:cSld>
+    <p:bg>
+      <p:bgPr>
+        <a:solidFill>
+          <a:srgbClr val="1E2126"/>
+        </a:solidFill>
+        <a:effectLst/>
+      </p:bgPr>
+    </p:bg>
+    <p:spTree>
+      <p:nvGrpSpPr>
+        <p:cNvPr id="1" name=""/>
+        <p:cNvGrpSpPr/>
+        <p:nvPr/>
+      </p:nvGrpSpPr>
+      <p:grpSpPr/>
+      <p:sp>
+        <p:nvSpPr>
+          <p:cNvPr id="2" name="TITLE"/>
+          <p:cNvSpPr>
+            <a:spLocks noGrp="1"/>
+          </p:cNvSpPr>
+          <p:nvPr>
+            <p:ph type="title"/>
+          </p:nvPr>
+        </p:nvSpPr>
+        <p:spPr>
+          <a:xfrm>
+            <a:off x="548640" y="365760"/>
+            <a:ext cx="9326880" cy="731520"/>
+          </a:xfrm>
+        </p:spPr>
+        <p:txBody>
+          <a:bodyPr wrap="square" anchor="ctr" lIns="0" rIns="0" tIns="0" bIns="0">
+            <a:noAutofit/>
+          </a:bodyPr>
+          <a:lstStyle/>
+          <a:p>
+            <a:pPr algn="l"/>
+            <a:r>
+              <a:rPr sz="3600" b="1" i="0" lang="en-GB">
+                <a:solidFill>
+                  <a:srgbClr val="F2F2F2"/>
+                </a:solidFill>
+                <a:latin typeface="Arial"/>
+              </a:rPr>
+              <a:t>Image credits</a:t>
+            </a:r>
+          </a:p>
+        </p:txBody>
+      </p:sp>
+      <p:sp>
+        <p:nvSpPr>
+          <p:cNvPr id="3" name="second line panel"/>
+          <p:cNvSpPr/>
+          <p:nvPr/>
+        </p:nvSpPr>
+        <p:spPr>
+          <a:xfrm>
+            <a:off x="548640" y="2697480"/>
+            <a:ext cx="11091672" cy="1554480"/>
+          </a:xfrm>
+          <a:prstGeom prst="roundRect">
+            <a:avLst>
+              <a:gd name="adj" fmla="val 4705"/>
+            </a:avLst>
+          </a:prstGeom>
+          <a:solidFill>
+            <a:srgbClr val="2B2F36"/>
+          </a:solidFill>
+          <a:ln>
+            <a:noFill/>
+          </a:ln>
+        </p:spPr>
+        <p:txBody>
+          <a:bodyPr rtlCol="0" anchor="ctr"/>
+          <a:lstStyle/>
+          <a:p>
+            <a:pPr algn="ctr"/>
+          </a:p>
+        </p:txBody>
+      </p:sp>
+      <p:sp>
+        <p:nvSpPr>
+          <p:cNvPr id="4" name="SECOND LINE"/>
+          <p:cNvSpPr txBox="1"/>
+          <p:nvPr/>
+        </p:nvSpPr>
+        <p:spPr>
+          <a:xfrm>
+            <a:off x="822960" y="2697480"/>
+            <a:ext cx="10543032" cy="1554480"/>
+          </a:xfrm>
+          <a:prstGeom prst="rect">
+            <a:avLst/>
+          </a:prstGeom>
+          <a:noFill/>
+        </p:spPr>
+        <p:txBody>
+          <a:bodyPr wrap="square" anchor="ctr" lIns="18288" tIns="9144" rIns="18288" bIns="9144">
+            <a:noAutofit/>
+          </a:bodyPr>
+          <a:lstStyle/>
+          <a:p>
+            <a:pPr algn="ctr"/>
+            <a:r>
+              <a:rPr sz="2800" b="1" i="0" lang="en-GB">
+                <a:solidFill>
+                  <a:srgbClr val="F2F2F2"/>
+                </a:solidFill>
+                <a:latin typeface="Arial"/>
+              </a:rPr>
+              <a:t>All drawings are native shapes made for this deck.</a:t>
+            </a:r>
+          </a:p>
+        </p:txBody>
+      </p:sp>
+      <p:sp>
+        <p:nvSpPr>
+          <p:cNvPr id="5" name="CAPTION BAR"/>
+          <p:cNvSpPr/>
+          <p:nvPr/>
+        </p:nvSpPr>
+        <p:spPr>
+          <a:xfrm>
+            <a:off x="548640" y="5760720"/>
+            <a:ext cx="11091672" cy="731520"/>
+          </a:xfrm>
+          <a:prstGeom prst="roundRect">
+            <a:avLst>
+              <a:gd name="adj" fmla="val 10000"/>
+            </a:avLst>
+          </a:prstGeom>
+          <a:solidFill>
+            <a:srgbClr val="2B2F36"/>
+          </a:solidFill>
+          <a:ln>
+            <a:noFill/>
+          </a:ln>
+        </p:spPr>
+        <p:txBody>
+          <a:bodyPr rtlCol="0" anchor="ctr"/>
+          <a:lstStyle/>
+          <a:p>
+            <a:pPr algn="ctr"/>
+          </a:p>
+        </p:txBody>
+      </p:sp>
+      <p:sp>
+        <p:nvSpPr>
+          <p:cNvPr id="6" name="CAPTION RULE"/>
+          <p:cNvSpPr/>
+          <p:nvPr/>
+        </p:nvSpPr>
+        <p:spPr>
+          <a:xfrm>
+            <a:off x="548640" y="5815583"/>
+            <a:ext cx="73152" cy="621792"/>
+          </a:xfrm>
+          <a:prstGeom prst="rect">
+            <a:avLst/>
+          </a:prstGeom>
+          <a:solidFill>
+            <a:srgbClr val="F28C28"/>
+          </a:solidFill>
+          <a:ln>
+            <a:noFill/>
+          </a:ln>
+        </p:spPr>
+        <p:txBody>
+          <a:bodyPr rtlCol="0" anchor="ctr"/>
+          <a:lstStyle/>
+          <a:p>
+            <a:pPr algn="ctr"/>
+          </a:p>
+        </p:txBody>
+      </p:sp>
+      <p:sp>
+        <p:nvSpPr>
+          <p:cNvPr id="7" name="CAPTION"/>
+          <p:cNvSpPr txBox="1"/>
+          <p:nvPr/>
+        </p:nvSpPr>
+        <p:spPr>
+          <a:xfrm>
+            <a:off x="777240" y="5760720"/>
+            <a:ext cx="10744200" cy="731520"/>
+          </a:xfrm>
+          <a:prstGeom prst="rect">
+            <a:avLst/>
+          </a:prstGeom>
+          <a:noFill/>
+        </p:spPr>
+        <p:txBody>
+          <a:bodyPr wrap="square" anchor="ctr" lIns="18288" tIns="9144" rIns="18288" bIns="9144">
+            <a:noAutofit/>
+          </a:bodyPr>
+          <a:lstStyle/>
+          <a:p>
+            <a:pPr algn="l"/>
+            <a:r>
+              <a:rPr sz="2000" b="0" i="0" lang="en-GB">
+                <a:solidFill>
+                  <a:srgbClr val="F2F2F2"/>
+                </a:solidFill>
+                <a:latin typeface="Arial"/>
+              </a:rPr>
+              <a:t>This deck uses no photographs.</a:t>
+            </a:r>
+          </a:p>
+        </p:txBody>
+      </p:sp>
+      <p:sp>
+        <p:nvSpPr>
+          <p:cNvPr id="8" name="NUM"/>
+          <p:cNvSpPr txBox="1"/>
+          <p:nvPr/>
+        </p:nvSpPr>
+        <p:spPr>
+          <a:xfrm>
+            <a:off x="10725912" y="6528816"/>
+            <a:ext cx="914400" cy="274320"/>
+          </a:xfrm>
+          <a:prstGeom prst="rect">
+            <a:avLst/>
+          </a:prstGeom>
+          <a:noFill/>
+        </p:spPr>
+        <p:txBody>
+          <a:bodyPr wrap="square" anchor="ctr" lIns="18288" tIns="9144" rIns="18288" bIns="9144">
+            <a:noAutofit/>
+          </a:bodyPr>
+          <a:lstStyle/>
+          <a:p>
+            <a:pPr algn="r"/>
+            <a:r>
+              <a:rPr sz="1400" b="0" i="0" lang="en-GB">
+                <a:solidFill>
+                  <a:srgbClr val="A9B0B8"/>
+                </a:solidFill>
+                <a:latin typeface="Arial"/>
+              </a:rPr>
+              <a:t>23</a:t>
             </a:r>
           </a:p>
         </p:txBody>

--- a/Reporting/Claude Presents/Deck6_Assistant/Railway_Guide_Lessons_and_Build_Menu_Explained.pptx
+++ b/Reporting/Claude Presents/Deck6_Assistant/Railway_Guide_Lessons_and_Build_Menu_Explained.pptx
@@ -3893,6 +3893,314 @@
   <p:clrMapOvr>
     <a:masterClrMapping/>
   </p:clrMapOvr>
+  <mc:AlternateContent xmlns:mc="http://schemas.openxmlformats.org/markup-compatibility/2006">
+    <mc:Choice xmlns:p14="http://schemas.microsoft.com/office/powerpoint/2010/main" Requires="p14">
+      <p:transition spd="med" p14:dur="700">
+        <p:fade/>
+      </p:transition>
+    </mc:Choice>
+    <mc:Fallback>
+      <p:transition spd="med">
+        <p:fade/>
+      </p:transition>
+    </mc:Fallback>
+  </mc:AlternateContent>
+  <p:timing>
+    <p:tnLst>
+      <p:par>
+        <p:cTn id="1" dur="indefinite" restart="never" nodeType="tmRoot">
+          <p:childTnLst>
+            <p:seq concurrent="1" nextAc="seek">
+              <p:cTn id="2" dur="indefinite" nodeType="mainSeq">
+                <p:childTnLst>
+                  <p:par>
+                    <p:cTn id="3" fill="hold">
+                      <p:stCondLst>
+                        <p:cond delay="indefinite"/>
+                        <p:cond evt="onBegin" delay="0">
+                          <p:tn val="2"/>
+                        </p:cond>
+                      </p:stCondLst>
+                      <p:childTnLst>
+                        <p:par>
+                          <p:cTn id="4" fill="hold">
+                            <p:stCondLst>
+                              <p:cond delay="0"/>
+                            </p:stCondLst>
+                            <p:childTnLst>
+                              <p:par>
+                                <p:cTn id="5" presetID="10" presetClass="entr" presetSubtype="0" fill="hold" nodeType="afterEffect">
+                                  <p:stCondLst>
+                                    <p:cond delay="0"/>
+                                  </p:stCondLst>
+                                  <p:childTnLst>
+                                    <p:set>
+                                      <p:cBhvr>
+                                        <p:cTn id="6" dur="1" fill="hold">
+                                          <p:stCondLst>
+                                            <p:cond delay="0"/>
+                                          </p:stCondLst>
+                                        </p:cTn>
+                                        <p:tgtEl>
+                                          <p:spTgt spid="3"/>
+                                        </p:tgtEl>
+                                        <p:attrNameLst>
+                                          <p:attrName>style.visibility</p:attrName>
+                                        </p:attrNameLst>
+                                      </p:cBhvr>
+                                      <p:to>
+                                        <p:strVal val="visible"/>
+                                      </p:to>
+                                    </p:set>
+                                    <p:animEffect transition="in" filter="fade">
+                                      <p:cBhvr>
+                                        <p:cTn id="7" dur="500"/>
+                                        <p:tgtEl>
+                                          <p:spTgt spid="3"/>
+                                        </p:tgtEl>
+                                      </p:cBhvr>
+                                    </p:animEffect>
+                                  </p:childTnLst>
+                                </p:cTn>
+                              </p:par>
+                              <p:par>
+                                <p:cTn id="8" presetID="10" presetClass="entr" presetSubtype="0" fill="hold" nodeType="withEffect">
+                                  <p:stCondLst>
+                                    <p:cond delay="257"/>
+                                  </p:stCondLst>
+                                  <p:childTnLst>
+                                    <p:set>
+                                      <p:cBhvr>
+                                        <p:cTn id="9" dur="1" fill="hold">
+                                          <p:stCondLst>
+                                            <p:cond delay="0"/>
+                                          </p:stCondLst>
+                                        </p:cTn>
+                                        <p:tgtEl>
+                                          <p:spTgt spid="4"/>
+                                        </p:tgtEl>
+                                        <p:attrNameLst>
+                                          <p:attrName>style.visibility</p:attrName>
+                                        </p:attrNameLst>
+                                      </p:cBhvr>
+                                      <p:to>
+                                        <p:strVal val="visible"/>
+                                      </p:to>
+                                    </p:set>
+                                    <p:animEffect transition="in" filter="fade">
+                                      <p:cBhvr>
+                                        <p:cTn id="10" dur="500"/>
+                                        <p:tgtEl>
+                                          <p:spTgt spid="4"/>
+                                        </p:tgtEl>
+                                      </p:cBhvr>
+                                    </p:animEffect>
+                                  </p:childTnLst>
+                                </p:cTn>
+                              </p:par>
+                              <p:par>
+                                <p:cTn id="11" presetID="10" presetClass="entr" presetSubtype="0" fill="hold" nodeType="withEffect">
+                                  <p:stCondLst>
+                                    <p:cond delay="514"/>
+                                  </p:stCondLst>
+                                  <p:childTnLst>
+                                    <p:set>
+                                      <p:cBhvr>
+                                        <p:cTn id="12" dur="1" fill="hold">
+                                          <p:stCondLst>
+                                            <p:cond delay="0"/>
+                                          </p:stCondLst>
+                                        </p:cTn>
+                                        <p:tgtEl>
+                                          <p:spTgt spid="13"/>
+                                        </p:tgtEl>
+                                        <p:attrNameLst>
+                                          <p:attrName>style.visibility</p:attrName>
+                                        </p:attrNameLst>
+                                      </p:cBhvr>
+                                      <p:to>
+                                        <p:strVal val="visible"/>
+                                      </p:to>
+                                    </p:set>
+                                    <p:animEffect transition="in" filter="fade">
+                                      <p:cBhvr>
+                                        <p:cTn id="13" dur="500"/>
+                                        <p:tgtEl>
+                                          <p:spTgt spid="13"/>
+                                        </p:tgtEl>
+                                      </p:cBhvr>
+                                    </p:animEffect>
+                                  </p:childTnLst>
+                                </p:cTn>
+                              </p:par>
+                              <p:par>
+                                <p:cTn id="14" presetID="10" presetClass="entr" presetSubtype="0" fill="hold" nodeType="withEffect">
+                                  <p:stCondLst>
+                                    <p:cond delay="771"/>
+                                  </p:stCondLst>
+                                  <p:childTnLst>
+                                    <p:set>
+                                      <p:cBhvr>
+                                        <p:cTn id="15" dur="1" fill="hold">
+                                          <p:stCondLst>
+                                            <p:cond delay="0"/>
+                                          </p:stCondLst>
+                                        </p:cTn>
+                                        <p:tgtEl>
+                                          <p:spTgt spid="14"/>
+                                        </p:tgtEl>
+                                        <p:attrNameLst>
+                                          <p:attrName>style.visibility</p:attrName>
+                                        </p:attrNameLst>
+                                      </p:cBhvr>
+                                      <p:to>
+                                        <p:strVal val="visible"/>
+                                      </p:to>
+                                    </p:set>
+                                    <p:animEffect transition="in" filter="fade">
+                                      <p:cBhvr>
+                                        <p:cTn id="16" dur="500"/>
+                                        <p:tgtEl>
+                                          <p:spTgt spid="14"/>
+                                        </p:tgtEl>
+                                      </p:cBhvr>
+                                    </p:animEffect>
+                                  </p:childTnLst>
+                                </p:cTn>
+                              </p:par>
+                              <p:par>
+                                <p:cTn id="17" presetID="10" presetClass="entr" presetSubtype="0" fill="hold" nodeType="withEffect">
+                                  <p:stCondLst>
+                                    <p:cond delay="1028"/>
+                                  </p:stCondLst>
+                                  <p:childTnLst>
+                                    <p:set>
+                                      <p:cBhvr>
+                                        <p:cTn id="18" dur="1" fill="hold">
+                                          <p:stCondLst>
+                                            <p:cond delay="0"/>
+                                          </p:stCondLst>
+                                        </p:cTn>
+                                        <p:tgtEl>
+                                          <p:spTgt spid="15"/>
+                                        </p:tgtEl>
+                                        <p:attrNameLst>
+                                          <p:attrName>style.visibility</p:attrName>
+                                        </p:attrNameLst>
+                                      </p:cBhvr>
+                                      <p:to>
+                                        <p:strVal val="visible"/>
+                                      </p:to>
+                                    </p:set>
+                                    <p:animEffect transition="in" filter="fade">
+                                      <p:cBhvr>
+                                        <p:cTn id="19" dur="500"/>
+                                        <p:tgtEl>
+                                          <p:spTgt spid="15"/>
+                                        </p:tgtEl>
+                                      </p:cBhvr>
+                                    </p:animEffect>
+                                  </p:childTnLst>
+                                </p:cTn>
+                              </p:par>
+                              <p:par>
+                                <p:cTn id="20" presetID="10" presetClass="entr" presetSubtype="0" fill="hold" nodeType="withEffect">
+                                  <p:stCondLst>
+                                    <p:cond delay="1285"/>
+                                  </p:stCondLst>
+                                  <p:childTnLst>
+                                    <p:set>
+                                      <p:cBhvr>
+                                        <p:cTn id="21" dur="1" fill="hold">
+                                          <p:stCondLst>
+                                            <p:cond delay="0"/>
+                                          </p:stCondLst>
+                                        </p:cTn>
+                                        <p:tgtEl>
+                                          <p:spTgt spid="16"/>
+                                        </p:tgtEl>
+                                        <p:attrNameLst>
+                                          <p:attrName>style.visibility</p:attrName>
+                                        </p:attrNameLst>
+                                      </p:cBhvr>
+                                      <p:to>
+                                        <p:strVal val="visible"/>
+                                      </p:to>
+                                    </p:set>
+                                    <p:animEffect transition="in" filter="fade">
+                                      <p:cBhvr>
+                                        <p:cTn id="22" dur="500"/>
+                                        <p:tgtEl>
+                                          <p:spTgt spid="16"/>
+                                        </p:tgtEl>
+                                      </p:cBhvr>
+                                    </p:animEffect>
+                                  </p:childTnLst>
+                                </p:cTn>
+                              </p:par>
+                              <p:par>
+                                <p:cTn id="23" presetID="10" presetClass="entr" presetSubtype="0" fill="hold" nodeType="withEffect">
+                                  <p:stCondLst>
+                                    <p:cond delay="1542"/>
+                                  </p:stCondLst>
+                                  <p:childTnLst>
+                                    <p:set>
+                                      <p:cBhvr>
+                                        <p:cTn id="24" dur="1" fill="hold">
+                                          <p:stCondLst>
+                                            <p:cond delay="0"/>
+                                          </p:stCondLst>
+                                        </p:cTn>
+                                        <p:tgtEl>
+                                          <p:spTgt spid="17"/>
+                                        </p:tgtEl>
+                                        <p:attrNameLst>
+                                          <p:attrName>style.visibility</p:attrName>
+                                        </p:attrNameLst>
+                                      </p:cBhvr>
+                                      <p:to>
+                                        <p:strVal val="visible"/>
+                                      </p:to>
+                                    </p:set>
+                                    <p:animEffect transition="in" filter="fade">
+                                      <p:cBhvr>
+                                        <p:cTn id="25" dur="500"/>
+                                        <p:tgtEl>
+                                          <p:spTgt spid="17"/>
+                                        </p:tgtEl>
+                                      </p:cBhvr>
+                                    </p:animEffect>
+                                  </p:childTnLst>
+                                </p:cTn>
+                              </p:par>
+                            </p:childTnLst>
+                          </p:cTn>
+                        </p:par>
+                      </p:childTnLst>
+                    </p:cTn>
+                  </p:par>
+                </p:childTnLst>
+              </p:cTn>
+              <p:prevCondLst>
+                <p:cond evt="onPrev" delay="0">
+                  <p:tgtEl>
+                    <p:sldTgt/>
+                  </p:tgtEl>
+                </p:cond>
+              </p:prevCondLst>
+              <p:nextCondLst>
+                <p:cond evt="onNext" delay="0">
+                  <p:tgtEl>
+                    <p:sldTgt/>
+                  </p:tgtEl>
+                </p:cond>
+              </p:nextCondLst>
+            </p:seq>
+          </p:childTnLst>
+        </p:cTn>
+      </p:par>
+    </p:tnLst>
+  </p:timing>
 </p:sld>
 </file>
 
@@ -5682,6 +5990,279 @@
   <p:clrMapOvr>
     <a:masterClrMapping/>
   </p:clrMapOvr>
+  <mc:AlternateContent xmlns:mc="http://schemas.openxmlformats.org/markup-compatibility/2006">
+    <mc:Choice xmlns:p14="http://schemas.microsoft.com/office/powerpoint/2010/main" Requires="p14">
+      <p:transition spd="med" p14:dur="700">
+        <p:fade/>
+      </p:transition>
+    </mc:Choice>
+    <mc:Fallback>
+      <p:transition spd="med">
+        <p:fade/>
+      </p:transition>
+    </mc:Fallback>
+  </mc:AlternateContent>
+  <p:timing>
+    <p:tnLst>
+      <p:par>
+        <p:cTn id="1" dur="indefinite" restart="never" nodeType="tmRoot">
+          <p:childTnLst>
+            <p:seq concurrent="1" nextAc="seek">
+              <p:cTn id="2" dur="indefinite" nodeType="mainSeq">
+                <p:childTnLst>
+                  <p:par>
+                    <p:cTn id="3" fill="hold">
+                      <p:stCondLst>
+                        <p:cond delay="indefinite"/>
+                        <p:cond evt="onBegin" delay="0">
+                          <p:tn val="2"/>
+                        </p:cond>
+                      </p:stCondLst>
+                      <p:childTnLst>
+                        <p:par>
+                          <p:cTn id="4" fill="hold">
+                            <p:stCondLst>
+                              <p:cond delay="0"/>
+                            </p:stCondLst>
+                            <p:childTnLst>
+                              <p:par>
+                                <p:cTn id="5" presetID="10" presetClass="entr" presetSubtype="0" fill="hold" nodeType="afterEffect">
+                                  <p:stCondLst>
+                                    <p:cond delay="0"/>
+                                  </p:stCondLst>
+                                  <p:childTnLst>
+                                    <p:set>
+                                      <p:cBhvr>
+                                        <p:cTn id="6" dur="1" fill="hold">
+                                          <p:stCondLst>
+                                            <p:cond delay="0"/>
+                                          </p:stCondLst>
+                                        </p:cTn>
+                                        <p:tgtEl>
+                                          <p:spTgt spid="4"/>
+                                        </p:tgtEl>
+                                        <p:attrNameLst>
+                                          <p:attrName>style.visibility</p:attrName>
+                                        </p:attrNameLst>
+                                      </p:cBhvr>
+                                      <p:to>
+                                        <p:strVal val="visible"/>
+                                      </p:to>
+                                    </p:set>
+                                    <p:animEffect transition="in" filter="fade">
+                                      <p:cBhvr>
+                                        <p:cTn id="7" dur="500"/>
+                                        <p:tgtEl>
+                                          <p:spTgt spid="4"/>
+                                        </p:tgtEl>
+                                      </p:cBhvr>
+                                    </p:animEffect>
+                                  </p:childTnLst>
+                                </p:cTn>
+                              </p:par>
+                              <p:par>
+                                <p:cTn id="8" presetID="10" presetClass="entr" presetSubtype="0" fill="hold" nodeType="withEffect">
+                                  <p:stCondLst>
+                                    <p:cond delay="300"/>
+                                  </p:stCondLst>
+                                  <p:childTnLst>
+                                    <p:set>
+                                      <p:cBhvr>
+                                        <p:cTn id="9" dur="1" fill="hold">
+                                          <p:stCondLst>
+                                            <p:cond delay="0"/>
+                                          </p:stCondLst>
+                                        </p:cTn>
+                                        <p:tgtEl>
+                                          <p:spTgt spid="53"/>
+                                        </p:tgtEl>
+                                        <p:attrNameLst>
+                                          <p:attrName>style.visibility</p:attrName>
+                                        </p:attrNameLst>
+                                      </p:cBhvr>
+                                      <p:to>
+                                        <p:strVal val="visible"/>
+                                      </p:to>
+                                    </p:set>
+                                    <p:animEffect transition="in" filter="fade">
+                                      <p:cBhvr>
+                                        <p:cTn id="10" dur="500"/>
+                                        <p:tgtEl>
+                                          <p:spTgt spid="53"/>
+                                        </p:tgtEl>
+                                      </p:cBhvr>
+                                    </p:animEffect>
+                                  </p:childTnLst>
+                                </p:cTn>
+                              </p:par>
+                              <p:par>
+                                <p:cTn id="11" presetID="10" presetClass="entr" presetSubtype="0" fill="hold" nodeType="withEffect">
+                                  <p:stCondLst>
+                                    <p:cond delay="600"/>
+                                  </p:stCondLst>
+                                  <p:childTnLst>
+                                    <p:set>
+                                      <p:cBhvr>
+                                        <p:cTn id="12" dur="1" fill="hold">
+                                          <p:stCondLst>
+                                            <p:cond delay="0"/>
+                                          </p:stCondLst>
+                                        </p:cTn>
+                                        <p:tgtEl>
+                                          <p:spTgt spid="54"/>
+                                        </p:tgtEl>
+                                        <p:attrNameLst>
+                                          <p:attrName>style.visibility</p:attrName>
+                                        </p:attrNameLst>
+                                      </p:cBhvr>
+                                      <p:to>
+                                        <p:strVal val="visible"/>
+                                      </p:to>
+                                    </p:set>
+                                    <p:animEffect transition="in" filter="fade">
+                                      <p:cBhvr>
+                                        <p:cTn id="13" dur="500"/>
+                                        <p:tgtEl>
+                                          <p:spTgt spid="54"/>
+                                        </p:tgtEl>
+                                      </p:cBhvr>
+                                    </p:animEffect>
+                                  </p:childTnLst>
+                                </p:cTn>
+                              </p:par>
+                              <p:par>
+                                <p:cTn id="14" presetID="10" presetClass="entr" presetSubtype="0" fill="hold" nodeType="withEffect">
+                                  <p:stCondLst>
+                                    <p:cond delay="900"/>
+                                  </p:stCondLst>
+                                  <p:childTnLst>
+                                    <p:set>
+                                      <p:cBhvr>
+                                        <p:cTn id="15" dur="1" fill="hold">
+                                          <p:stCondLst>
+                                            <p:cond delay="0"/>
+                                          </p:stCondLst>
+                                        </p:cTn>
+                                        <p:tgtEl>
+                                          <p:spTgt spid="55"/>
+                                        </p:tgtEl>
+                                        <p:attrNameLst>
+                                          <p:attrName>style.visibility</p:attrName>
+                                        </p:attrNameLst>
+                                      </p:cBhvr>
+                                      <p:to>
+                                        <p:strVal val="visible"/>
+                                      </p:to>
+                                    </p:set>
+                                    <p:animEffect transition="in" filter="fade">
+                                      <p:cBhvr>
+                                        <p:cTn id="16" dur="500"/>
+                                        <p:tgtEl>
+                                          <p:spTgt spid="55"/>
+                                        </p:tgtEl>
+                                      </p:cBhvr>
+                                    </p:animEffect>
+                                  </p:childTnLst>
+                                </p:cTn>
+                              </p:par>
+                              <p:par>
+                                <p:cTn id="17" presetID="10" presetClass="entr" presetSubtype="0" fill="hold" nodeType="withEffect">
+                                  <p:stCondLst>
+                                    <p:cond delay="1200"/>
+                                  </p:stCondLst>
+                                  <p:childTnLst>
+                                    <p:set>
+                                      <p:cBhvr>
+                                        <p:cTn id="18" dur="1" fill="hold">
+                                          <p:stCondLst>
+                                            <p:cond delay="0"/>
+                                          </p:stCondLst>
+                                        </p:cTn>
+                                        <p:tgtEl>
+                                          <p:spTgt spid="56"/>
+                                        </p:tgtEl>
+                                        <p:attrNameLst>
+                                          <p:attrName>style.visibility</p:attrName>
+                                        </p:attrNameLst>
+                                      </p:cBhvr>
+                                      <p:to>
+                                        <p:strVal val="visible"/>
+                                      </p:to>
+                                    </p:set>
+                                    <p:animEffect transition="in" filter="fade">
+                                      <p:cBhvr>
+                                        <p:cTn id="19" dur="500"/>
+                                        <p:tgtEl>
+                                          <p:spTgt spid="56"/>
+                                        </p:tgtEl>
+                                      </p:cBhvr>
+                                    </p:animEffect>
+                                  </p:childTnLst>
+                                </p:cTn>
+                              </p:par>
+                              <p:par>
+                                <p:cTn id="20" presetID="10" presetClass="entr" presetSubtype="0" fill="hold" nodeType="withEffect">
+                                  <p:stCondLst>
+                                    <p:cond delay="1500"/>
+                                  </p:stCondLst>
+                                  <p:childTnLst>
+                                    <p:set>
+                                      <p:cBhvr>
+                                        <p:cTn id="21" dur="1" fill="hold">
+                                          <p:stCondLst>
+                                            <p:cond delay="0"/>
+                                          </p:stCondLst>
+                                        </p:cTn>
+                                        <p:tgtEl>
+                                          <p:spTgt spid="57"/>
+                                        </p:tgtEl>
+                                        <p:attrNameLst>
+                                          <p:attrName>style.visibility</p:attrName>
+                                        </p:attrNameLst>
+                                      </p:cBhvr>
+                                      <p:to>
+                                        <p:strVal val="visible"/>
+                                      </p:to>
+                                    </p:set>
+                                    <p:animEffect transition="in" filter="fade">
+                                      <p:cBhvr>
+                                        <p:cTn id="22" dur="500"/>
+                                        <p:tgtEl>
+                                          <p:spTgt spid="57"/>
+                                        </p:tgtEl>
+                                      </p:cBhvr>
+                                    </p:animEffect>
+                                  </p:childTnLst>
+                                </p:cTn>
+                              </p:par>
+                            </p:childTnLst>
+                          </p:cTn>
+                        </p:par>
+                      </p:childTnLst>
+                    </p:cTn>
+                  </p:par>
+                </p:childTnLst>
+              </p:cTn>
+              <p:prevCondLst>
+                <p:cond evt="onPrev" delay="0">
+                  <p:tgtEl>
+                    <p:sldTgt/>
+                  </p:tgtEl>
+                </p:cond>
+              </p:prevCondLst>
+              <p:nextCondLst>
+                <p:cond evt="onNext" delay="0">
+                  <p:tgtEl>
+                    <p:sldTgt/>
+                  </p:tgtEl>
+                </p:cond>
+              </p:nextCondLst>
+            </p:seq>
+          </p:childTnLst>
+        </p:cTn>
+      </p:par>
+    </p:tnLst>
+  </p:timing>
 </p:sld>
 </file>
 
@@ -8207,6 +8788,314 @@
   <p:clrMapOvr>
     <a:masterClrMapping/>
   </p:clrMapOvr>
+  <mc:AlternateContent xmlns:mc="http://schemas.openxmlformats.org/markup-compatibility/2006">
+    <mc:Choice xmlns:p14="http://schemas.microsoft.com/office/powerpoint/2010/main" Requires="p14">
+      <p:transition spd="med" p14:dur="700">
+        <p:fade/>
+      </p:transition>
+    </mc:Choice>
+    <mc:Fallback>
+      <p:transition spd="med">
+        <p:fade/>
+      </p:transition>
+    </mc:Fallback>
+  </mc:AlternateContent>
+  <p:timing>
+    <p:tnLst>
+      <p:par>
+        <p:cTn id="1" dur="indefinite" restart="never" nodeType="tmRoot">
+          <p:childTnLst>
+            <p:seq concurrent="1" nextAc="seek">
+              <p:cTn id="2" dur="indefinite" nodeType="mainSeq">
+                <p:childTnLst>
+                  <p:par>
+                    <p:cTn id="3" fill="hold">
+                      <p:stCondLst>
+                        <p:cond delay="indefinite"/>
+                        <p:cond evt="onBegin" delay="0">
+                          <p:tn val="2"/>
+                        </p:cond>
+                      </p:stCondLst>
+                      <p:childTnLst>
+                        <p:par>
+                          <p:cTn id="4" fill="hold">
+                            <p:stCondLst>
+                              <p:cond delay="0"/>
+                            </p:stCondLst>
+                            <p:childTnLst>
+                              <p:par>
+                                <p:cTn id="5" presetID="10" presetClass="entr" presetSubtype="0" fill="hold" nodeType="afterEffect">
+                                  <p:stCondLst>
+                                    <p:cond delay="0"/>
+                                  </p:stCondLst>
+                                  <p:childTnLst>
+                                    <p:set>
+                                      <p:cBhvr>
+                                        <p:cTn id="6" dur="1" fill="hold">
+                                          <p:stCondLst>
+                                            <p:cond delay="0"/>
+                                          </p:stCondLst>
+                                        </p:cTn>
+                                        <p:tgtEl>
+                                          <p:spTgt spid="4"/>
+                                        </p:tgtEl>
+                                        <p:attrNameLst>
+                                          <p:attrName>style.visibility</p:attrName>
+                                        </p:attrNameLst>
+                                      </p:cBhvr>
+                                      <p:to>
+                                        <p:strVal val="visible"/>
+                                      </p:to>
+                                    </p:set>
+                                    <p:animEffect transition="in" filter="fade">
+                                      <p:cBhvr>
+                                        <p:cTn id="7" dur="500"/>
+                                        <p:tgtEl>
+                                          <p:spTgt spid="4"/>
+                                        </p:tgtEl>
+                                      </p:cBhvr>
+                                    </p:animEffect>
+                                  </p:childTnLst>
+                                </p:cTn>
+                              </p:par>
+                              <p:par>
+                                <p:cTn id="8" presetID="10" presetClass="entr" presetSubtype="0" fill="hold" nodeType="withEffect">
+                                  <p:stCondLst>
+                                    <p:cond delay="257"/>
+                                  </p:stCondLst>
+                                  <p:childTnLst>
+                                    <p:set>
+                                      <p:cBhvr>
+                                        <p:cTn id="9" dur="1" fill="hold">
+                                          <p:stCondLst>
+                                            <p:cond delay="0"/>
+                                          </p:stCondLst>
+                                        </p:cTn>
+                                        <p:tgtEl>
+                                          <p:spTgt spid="57"/>
+                                        </p:tgtEl>
+                                        <p:attrNameLst>
+                                          <p:attrName>style.visibility</p:attrName>
+                                        </p:attrNameLst>
+                                      </p:cBhvr>
+                                      <p:to>
+                                        <p:strVal val="visible"/>
+                                      </p:to>
+                                    </p:set>
+                                    <p:animEffect transition="in" filter="fade">
+                                      <p:cBhvr>
+                                        <p:cTn id="10" dur="500"/>
+                                        <p:tgtEl>
+                                          <p:spTgt spid="57"/>
+                                        </p:tgtEl>
+                                      </p:cBhvr>
+                                    </p:animEffect>
+                                  </p:childTnLst>
+                                </p:cTn>
+                              </p:par>
+                              <p:par>
+                                <p:cTn id="11" presetID="10" presetClass="entr" presetSubtype="0" fill="hold" nodeType="withEffect">
+                                  <p:stCondLst>
+                                    <p:cond delay="514"/>
+                                  </p:stCondLst>
+                                  <p:childTnLst>
+                                    <p:set>
+                                      <p:cBhvr>
+                                        <p:cTn id="12" dur="1" fill="hold">
+                                          <p:stCondLst>
+                                            <p:cond delay="0"/>
+                                          </p:stCondLst>
+                                        </p:cTn>
+                                        <p:tgtEl>
+                                          <p:spTgt spid="58"/>
+                                        </p:tgtEl>
+                                        <p:attrNameLst>
+                                          <p:attrName>style.visibility</p:attrName>
+                                        </p:attrNameLst>
+                                      </p:cBhvr>
+                                      <p:to>
+                                        <p:strVal val="visible"/>
+                                      </p:to>
+                                    </p:set>
+                                    <p:animEffect transition="in" filter="fade">
+                                      <p:cBhvr>
+                                        <p:cTn id="13" dur="500"/>
+                                        <p:tgtEl>
+                                          <p:spTgt spid="58"/>
+                                        </p:tgtEl>
+                                      </p:cBhvr>
+                                    </p:animEffect>
+                                  </p:childTnLst>
+                                </p:cTn>
+                              </p:par>
+                              <p:par>
+                                <p:cTn id="14" presetID="10" presetClass="entr" presetSubtype="0" fill="hold" nodeType="withEffect">
+                                  <p:stCondLst>
+                                    <p:cond delay="771"/>
+                                  </p:stCondLst>
+                                  <p:childTnLst>
+                                    <p:set>
+                                      <p:cBhvr>
+                                        <p:cTn id="15" dur="1" fill="hold">
+                                          <p:stCondLst>
+                                            <p:cond delay="0"/>
+                                          </p:stCondLst>
+                                        </p:cTn>
+                                        <p:tgtEl>
+                                          <p:spTgt spid="59"/>
+                                        </p:tgtEl>
+                                        <p:attrNameLst>
+                                          <p:attrName>style.visibility</p:attrName>
+                                        </p:attrNameLst>
+                                      </p:cBhvr>
+                                      <p:to>
+                                        <p:strVal val="visible"/>
+                                      </p:to>
+                                    </p:set>
+                                    <p:animEffect transition="in" filter="fade">
+                                      <p:cBhvr>
+                                        <p:cTn id="16" dur="500"/>
+                                        <p:tgtEl>
+                                          <p:spTgt spid="59"/>
+                                        </p:tgtEl>
+                                      </p:cBhvr>
+                                    </p:animEffect>
+                                  </p:childTnLst>
+                                </p:cTn>
+                              </p:par>
+                              <p:par>
+                                <p:cTn id="17" presetID="10" presetClass="entr" presetSubtype="0" fill="hold" nodeType="withEffect">
+                                  <p:stCondLst>
+                                    <p:cond delay="1028"/>
+                                  </p:stCondLst>
+                                  <p:childTnLst>
+                                    <p:set>
+                                      <p:cBhvr>
+                                        <p:cTn id="18" dur="1" fill="hold">
+                                          <p:stCondLst>
+                                            <p:cond delay="0"/>
+                                          </p:stCondLst>
+                                        </p:cTn>
+                                        <p:tgtEl>
+                                          <p:spTgt spid="60"/>
+                                        </p:tgtEl>
+                                        <p:attrNameLst>
+                                          <p:attrName>style.visibility</p:attrName>
+                                        </p:attrNameLst>
+                                      </p:cBhvr>
+                                      <p:to>
+                                        <p:strVal val="visible"/>
+                                      </p:to>
+                                    </p:set>
+                                    <p:animEffect transition="in" filter="fade">
+                                      <p:cBhvr>
+                                        <p:cTn id="19" dur="500"/>
+                                        <p:tgtEl>
+                                          <p:spTgt spid="60"/>
+                                        </p:tgtEl>
+                                      </p:cBhvr>
+                                    </p:animEffect>
+                                  </p:childTnLst>
+                                </p:cTn>
+                              </p:par>
+                              <p:par>
+                                <p:cTn id="20" presetID="10" presetClass="entr" presetSubtype="0" fill="hold" nodeType="withEffect">
+                                  <p:stCondLst>
+                                    <p:cond delay="1285"/>
+                                  </p:stCondLst>
+                                  <p:childTnLst>
+                                    <p:set>
+                                      <p:cBhvr>
+                                        <p:cTn id="21" dur="1" fill="hold">
+                                          <p:stCondLst>
+                                            <p:cond delay="0"/>
+                                          </p:stCondLst>
+                                        </p:cTn>
+                                        <p:tgtEl>
+                                          <p:spTgt spid="61"/>
+                                        </p:tgtEl>
+                                        <p:attrNameLst>
+                                          <p:attrName>style.visibility</p:attrName>
+                                        </p:attrNameLst>
+                                      </p:cBhvr>
+                                      <p:to>
+                                        <p:strVal val="visible"/>
+                                      </p:to>
+                                    </p:set>
+                                    <p:animEffect transition="in" filter="fade">
+                                      <p:cBhvr>
+                                        <p:cTn id="22" dur="500"/>
+                                        <p:tgtEl>
+                                          <p:spTgt spid="61"/>
+                                        </p:tgtEl>
+                                      </p:cBhvr>
+                                    </p:animEffect>
+                                  </p:childTnLst>
+                                </p:cTn>
+                              </p:par>
+                              <p:par>
+                                <p:cTn id="23" presetID="10" presetClass="entr" presetSubtype="0" fill="hold" nodeType="withEffect">
+                                  <p:stCondLst>
+                                    <p:cond delay="1542"/>
+                                  </p:stCondLst>
+                                  <p:childTnLst>
+                                    <p:set>
+                                      <p:cBhvr>
+                                        <p:cTn id="24" dur="1" fill="hold">
+                                          <p:stCondLst>
+                                            <p:cond delay="0"/>
+                                          </p:stCondLst>
+                                        </p:cTn>
+                                        <p:tgtEl>
+                                          <p:spTgt spid="62"/>
+                                        </p:tgtEl>
+                                        <p:attrNameLst>
+                                          <p:attrName>style.visibility</p:attrName>
+                                        </p:attrNameLst>
+                                      </p:cBhvr>
+                                      <p:to>
+                                        <p:strVal val="visible"/>
+                                      </p:to>
+                                    </p:set>
+                                    <p:animEffect transition="in" filter="fade">
+                                      <p:cBhvr>
+                                        <p:cTn id="25" dur="500"/>
+                                        <p:tgtEl>
+                                          <p:spTgt spid="62"/>
+                                        </p:tgtEl>
+                                      </p:cBhvr>
+                                    </p:animEffect>
+                                  </p:childTnLst>
+                                </p:cTn>
+                              </p:par>
+                            </p:childTnLst>
+                          </p:cTn>
+                        </p:par>
+                      </p:childTnLst>
+                    </p:cTn>
+                  </p:par>
+                </p:childTnLst>
+              </p:cTn>
+              <p:prevCondLst>
+                <p:cond evt="onPrev" delay="0">
+                  <p:tgtEl>
+                    <p:sldTgt/>
+                  </p:tgtEl>
+                </p:cond>
+              </p:prevCondLst>
+              <p:nextCondLst>
+                <p:cond evt="onNext" delay="0">
+                  <p:tgtEl>
+                    <p:sldTgt/>
+                  </p:tgtEl>
+                </p:cond>
+              </p:nextCondLst>
+            </p:seq>
+          </p:childTnLst>
+        </p:cTn>
+      </p:par>
+    </p:tnLst>
+  </p:timing>
 </p:sld>
 </file>
 
@@ -8984,6 +9873,209 @@
   <p:clrMapOvr>
     <a:masterClrMapping/>
   </p:clrMapOvr>
+  <mc:AlternateContent xmlns:mc="http://schemas.openxmlformats.org/markup-compatibility/2006">
+    <mc:Choice xmlns:p14="http://schemas.microsoft.com/office/powerpoint/2010/main" Requires="p14">
+      <p:transition spd="med" p14:dur="700">
+        <p:fade/>
+      </p:transition>
+    </mc:Choice>
+    <mc:Fallback>
+      <p:transition spd="med">
+        <p:fade/>
+      </p:transition>
+    </mc:Fallback>
+  </mc:AlternateContent>
+  <p:timing>
+    <p:tnLst>
+      <p:par>
+        <p:cTn id="1" dur="indefinite" restart="never" nodeType="tmRoot">
+          <p:childTnLst>
+            <p:seq concurrent="1" nextAc="seek">
+              <p:cTn id="2" dur="indefinite" nodeType="mainSeq">
+                <p:childTnLst>
+                  <p:par>
+                    <p:cTn id="3" fill="hold">
+                      <p:stCondLst>
+                        <p:cond delay="indefinite"/>
+                        <p:cond evt="onBegin" delay="0">
+                          <p:tn val="2"/>
+                        </p:cond>
+                      </p:stCondLst>
+                      <p:childTnLst>
+                        <p:par>
+                          <p:cTn id="4" fill="hold">
+                            <p:stCondLst>
+                              <p:cond delay="0"/>
+                            </p:stCondLst>
+                            <p:childTnLst>
+                              <p:par>
+                                <p:cTn id="5" presetID="10" presetClass="entr" presetSubtype="0" fill="hold" nodeType="afterEffect">
+                                  <p:stCondLst>
+                                    <p:cond delay="0"/>
+                                  </p:stCondLst>
+                                  <p:childTnLst>
+                                    <p:set>
+                                      <p:cBhvr>
+                                        <p:cTn id="6" dur="1" fill="hold">
+                                          <p:stCondLst>
+                                            <p:cond delay="0"/>
+                                          </p:stCondLst>
+                                        </p:cTn>
+                                        <p:tgtEl>
+                                          <p:spTgt spid="4"/>
+                                        </p:tgtEl>
+                                        <p:attrNameLst>
+                                          <p:attrName>style.visibility</p:attrName>
+                                        </p:attrNameLst>
+                                      </p:cBhvr>
+                                      <p:to>
+                                        <p:strVal val="visible"/>
+                                      </p:to>
+                                    </p:set>
+                                    <p:animEffect transition="in" filter="fade">
+                                      <p:cBhvr>
+                                        <p:cTn id="7" dur="500"/>
+                                        <p:tgtEl>
+                                          <p:spTgt spid="4"/>
+                                        </p:tgtEl>
+                                      </p:cBhvr>
+                                    </p:animEffect>
+                                  </p:childTnLst>
+                                </p:cTn>
+                              </p:par>
+                              <p:par>
+                                <p:cTn id="8" presetID="10" presetClass="entr" presetSubtype="0" fill="hold" nodeType="withEffect">
+                                  <p:stCondLst>
+                                    <p:cond delay="300"/>
+                                  </p:stCondLst>
+                                  <p:childTnLst>
+                                    <p:set>
+                                      <p:cBhvr>
+                                        <p:cTn id="9" dur="1" fill="hold">
+                                          <p:stCondLst>
+                                            <p:cond delay="0"/>
+                                          </p:stCondLst>
+                                        </p:cTn>
+                                        <p:tgtEl>
+                                          <p:spTgt spid="21"/>
+                                        </p:tgtEl>
+                                        <p:attrNameLst>
+                                          <p:attrName>style.visibility</p:attrName>
+                                        </p:attrNameLst>
+                                      </p:cBhvr>
+                                      <p:to>
+                                        <p:strVal val="visible"/>
+                                      </p:to>
+                                    </p:set>
+                                    <p:animEffect transition="in" filter="fade">
+                                      <p:cBhvr>
+                                        <p:cTn id="10" dur="500"/>
+                                        <p:tgtEl>
+                                          <p:spTgt spid="21"/>
+                                        </p:tgtEl>
+                                      </p:cBhvr>
+                                    </p:animEffect>
+                                  </p:childTnLst>
+                                </p:cTn>
+                              </p:par>
+                              <p:par>
+                                <p:cTn id="11" presetID="10" presetClass="entr" presetSubtype="0" fill="hold" nodeType="withEffect">
+                                  <p:stCondLst>
+                                    <p:cond delay="600"/>
+                                  </p:stCondLst>
+                                  <p:childTnLst>
+                                    <p:set>
+                                      <p:cBhvr>
+                                        <p:cTn id="12" dur="1" fill="hold">
+                                          <p:stCondLst>
+                                            <p:cond delay="0"/>
+                                          </p:stCondLst>
+                                        </p:cTn>
+                                        <p:tgtEl>
+                                          <p:spTgt spid="22"/>
+                                        </p:tgtEl>
+                                        <p:attrNameLst>
+                                          <p:attrName>style.visibility</p:attrName>
+                                        </p:attrNameLst>
+                                      </p:cBhvr>
+                                      <p:to>
+                                        <p:strVal val="visible"/>
+                                      </p:to>
+                                    </p:set>
+                                    <p:animEffect transition="in" filter="fade">
+                                      <p:cBhvr>
+                                        <p:cTn id="13" dur="500"/>
+                                        <p:tgtEl>
+                                          <p:spTgt spid="22"/>
+                                        </p:tgtEl>
+                                      </p:cBhvr>
+                                    </p:animEffect>
+                                  </p:childTnLst>
+                                </p:cTn>
+                              </p:par>
+                              <p:par>
+                                <p:cTn id="14" presetID="10" presetClass="entr" presetSubtype="0" fill="hold" nodeType="withEffect">
+                                  <p:stCondLst>
+                                    <p:cond delay="900"/>
+                                  </p:stCondLst>
+                                  <p:childTnLst>
+                                    <p:set>
+                                      <p:cBhvr>
+                                        <p:cTn id="15" dur="1" fill="hold">
+                                          <p:stCondLst>
+                                            <p:cond delay="0"/>
+                                          </p:stCondLst>
+                                        </p:cTn>
+                                        <p:tgtEl>
+                                          <p:spTgt spid="23"/>
+                                        </p:tgtEl>
+                                        <p:attrNameLst>
+                                          <p:attrName>style.visibility</p:attrName>
+                                        </p:attrNameLst>
+                                      </p:cBhvr>
+                                      <p:to>
+                                        <p:strVal val="visible"/>
+                                      </p:to>
+                                    </p:set>
+                                    <p:animEffect transition="in" filter="fade">
+                                      <p:cBhvr>
+                                        <p:cTn id="16" dur="500"/>
+                                        <p:tgtEl>
+                                          <p:spTgt spid="23"/>
+                                        </p:tgtEl>
+                                      </p:cBhvr>
+                                    </p:animEffect>
+                                  </p:childTnLst>
+                                </p:cTn>
+                              </p:par>
+                            </p:childTnLst>
+                          </p:cTn>
+                        </p:par>
+                      </p:childTnLst>
+                    </p:cTn>
+                  </p:par>
+                </p:childTnLst>
+              </p:cTn>
+              <p:prevCondLst>
+                <p:cond evt="onPrev" delay="0">
+                  <p:tgtEl>
+                    <p:sldTgt/>
+                  </p:tgtEl>
+                </p:cond>
+              </p:prevCondLst>
+              <p:nextCondLst>
+                <p:cond evt="onNext" delay="0">
+                  <p:tgtEl>
+                    <p:sldTgt/>
+                  </p:tgtEl>
+                </p:cond>
+              </p:nextCondLst>
+            </p:seq>
+          </p:childTnLst>
+        </p:cTn>
+      </p:par>
+    </p:tnLst>
+  </p:timing>
 </p:sld>
 </file>
 
@@ -9583,6 +10675,244 @@
   <p:clrMapOvr>
     <a:masterClrMapping/>
   </p:clrMapOvr>
+  <mc:AlternateContent xmlns:mc="http://schemas.openxmlformats.org/markup-compatibility/2006">
+    <mc:Choice xmlns:p14="http://schemas.microsoft.com/office/powerpoint/2010/main" Requires="p14">
+      <p:transition spd="med" p14:dur="700">
+        <p:fade/>
+      </p:transition>
+    </mc:Choice>
+    <mc:Fallback>
+      <p:transition spd="med">
+        <p:fade/>
+      </p:transition>
+    </mc:Fallback>
+  </mc:AlternateContent>
+  <p:timing>
+    <p:tnLst>
+      <p:par>
+        <p:cTn id="1" dur="indefinite" restart="never" nodeType="tmRoot">
+          <p:childTnLst>
+            <p:seq concurrent="1" nextAc="seek">
+              <p:cTn id="2" dur="indefinite" nodeType="mainSeq">
+                <p:childTnLst>
+                  <p:par>
+                    <p:cTn id="3" fill="hold">
+                      <p:stCondLst>
+                        <p:cond delay="indefinite"/>
+                        <p:cond evt="onBegin" delay="0">
+                          <p:tn val="2"/>
+                        </p:cond>
+                      </p:stCondLst>
+                      <p:childTnLst>
+                        <p:par>
+                          <p:cTn id="4" fill="hold">
+                            <p:stCondLst>
+                              <p:cond delay="0"/>
+                            </p:stCondLst>
+                            <p:childTnLst>
+                              <p:par>
+                                <p:cTn id="5" presetID="10" presetClass="entr" presetSubtype="0" fill="hold" nodeType="afterEffect">
+                                  <p:stCondLst>
+                                    <p:cond delay="0"/>
+                                  </p:stCondLst>
+                                  <p:childTnLst>
+                                    <p:set>
+                                      <p:cBhvr>
+                                        <p:cTn id="6" dur="1" fill="hold">
+                                          <p:stCondLst>
+                                            <p:cond delay="0"/>
+                                          </p:stCondLst>
+                                        </p:cTn>
+                                        <p:tgtEl>
+                                          <p:spTgt spid="4"/>
+                                        </p:tgtEl>
+                                        <p:attrNameLst>
+                                          <p:attrName>style.visibility</p:attrName>
+                                        </p:attrNameLst>
+                                      </p:cBhvr>
+                                      <p:to>
+                                        <p:strVal val="visible"/>
+                                      </p:to>
+                                    </p:set>
+                                    <p:animEffect transition="in" filter="fade">
+                                      <p:cBhvr>
+                                        <p:cTn id="7" dur="500"/>
+                                        <p:tgtEl>
+                                          <p:spTgt spid="4"/>
+                                        </p:tgtEl>
+                                      </p:cBhvr>
+                                    </p:animEffect>
+                                  </p:childTnLst>
+                                </p:cTn>
+                              </p:par>
+                              <p:par>
+                                <p:cTn id="8" presetID="10" presetClass="entr" presetSubtype="0" fill="hold" nodeType="withEffect">
+                                  <p:stCondLst>
+                                    <p:cond delay="300"/>
+                                  </p:stCondLst>
+                                  <p:childTnLst>
+                                    <p:set>
+                                      <p:cBhvr>
+                                        <p:cTn id="9" dur="1" fill="hold">
+                                          <p:stCondLst>
+                                            <p:cond delay="0"/>
+                                          </p:stCondLst>
+                                        </p:cTn>
+                                        <p:tgtEl>
+                                          <p:spTgt spid="12"/>
+                                        </p:tgtEl>
+                                        <p:attrNameLst>
+                                          <p:attrName>style.visibility</p:attrName>
+                                        </p:attrNameLst>
+                                      </p:cBhvr>
+                                      <p:to>
+                                        <p:strVal val="visible"/>
+                                      </p:to>
+                                    </p:set>
+                                    <p:animEffect transition="in" filter="fade">
+                                      <p:cBhvr>
+                                        <p:cTn id="10" dur="500"/>
+                                        <p:tgtEl>
+                                          <p:spTgt spid="12"/>
+                                        </p:tgtEl>
+                                      </p:cBhvr>
+                                    </p:animEffect>
+                                  </p:childTnLst>
+                                </p:cTn>
+                              </p:par>
+                              <p:par>
+                                <p:cTn id="11" presetID="10" presetClass="entr" presetSubtype="0" fill="hold" nodeType="withEffect">
+                                  <p:stCondLst>
+                                    <p:cond delay="600"/>
+                                  </p:stCondLst>
+                                  <p:childTnLst>
+                                    <p:set>
+                                      <p:cBhvr>
+                                        <p:cTn id="12" dur="1" fill="hold">
+                                          <p:stCondLst>
+                                            <p:cond delay="0"/>
+                                          </p:stCondLst>
+                                        </p:cTn>
+                                        <p:tgtEl>
+                                          <p:spTgt spid="13"/>
+                                        </p:tgtEl>
+                                        <p:attrNameLst>
+                                          <p:attrName>style.visibility</p:attrName>
+                                        </p:attrNameLst>
+                                      </p:cBhvr>
+                                      <p:to>
+                                        <p:strVal val="visible"/>
+                                      </p:to>
+                                    </p:set>
+                                    <p:animEffect transition="in" filter="fade">
+                                      <p:cBhvr>
+                                        <p:cTn id="13" dur="500"/>
+                                        <p:tgtEl>
+                                          <p:spTgt spid="13"/>
+                                        </p:tgtEl>
+                                      </p:cBhvr>
+                                    </p:animEffect>
+                                  </p:childTnLst>
+                                </p:cTn>
+                              </p:par>
+                              <p:par>
+                                <p:cTn id="14" presetID="10" presetClass="entr" presetSubtype="0" fill="hold" nodeType="withEffect">
+                                  <p:stCondLst>
+                                    <p:cond delay="900"/>
+                                  </p:stCondLst>
+                                  <p:childTnLst>
+                                    <p:set>
+                                      <p:cBhvr>
+                                        <p:cTn id="15" dur="1" fill="hold">
+                                          <p:stCondLst>
+                                            <p:cond delay="0"/>
+                                          </p:stCondLst>
+                                        </p:cTn>
+                                        <p:tgtEl>
+                                          <p:spTgt spid="14"/>
+                                        </p:tgtEl>
+                                        <p:attrNameLst>
+                                          <p:attrName>style.visibility</p:attrName>
+                                        </p:attrNameLst>
+                                      </p:cBhvr>
+                                      <p:to>
+                                        <p:strVal val="visible"/>
+                                      </p:to>
+                                    </p:set>
+                                    <p:animEffect transition="in" filter="fade">
+                                      <p:cBhvr>
+                                        <p:cTn id="16" dur="500"/>
+                                        <p:tgtEl>
+                                          <p:spTgt spid="14"/>
+                                        </p:tgtEl>
+                                      </p:cBhvr>
+                                    </p:animEffect>
+                                  </p:childTnLst>
+                                </p:cTn>
+                              </p:par>
+                              <p:par>
+                                <p:cTn id="17" presetID="10" presetClass="entr" presetSubtype="0" fill="hold" nodeType="withEffect">
+                                  <p:stCondLst>
+                                    <p:cond delay="1200"/>
+                                  </p:stCondLst>
+                                  <p:childTnLst>
+                                    <p:set>
+                                      <p:cBhvr>
+                                        <p:cTn id="18" dur="1" fill="hold">
+                                          <p:stCondLst>
+                                            <p:cond delay="0"/>
+                                          </p:stCondLst>
+                                        </p:cTn>
+                                        <p:tgtEl>
+                                          <p:spTgt spid="15"/>
+                                        </p:tgtEl>
+                                        <p:attrNameLst>
+                                          <p:attrName>style.visibility</p:attrName>
+                                        </p:attrNameLst>
+                                      </p:cBhvr>
+                                      <p:to>
+                                        <p:strVal val="visible"/>
+                                      </p:to>
+                                    </p:set>
+                                    <p:animEffect transition="in" filter="fade">
+                                      <p:cBhvr>
+                                        <p:cTn id="19" dur="500"/>
+                                        <p:tgtEl>
+                                          <p:spTgt spid="15"/>
+                                        </p:tgtEl>
+                                      </p:cBhvr>
+                                    </p:animEffect>
+                                  </p:childTnLst>
+                                </p:cTn>
+                              </p:par>
+                            </p:childTnLst>
+                          </p:cTn>
+                        </p:par>
+                      </p:childTnLst>
+                    </p:cTn>
+                  </p:par>
+                </p:childTnLst>
+              </p:cTn>
+              <p:prevCondLst>
+                <p:cond evt="onPrev" delay="0">
+                  <p:tgtEl>
+                    <p:sldTgt/>
+                  </p:tgtEl>
+                </p:cond>
+              </p:prevCondLst>
+              <p:nextCondLst>
+                <p:cond evt="onNext" delay="0">
+                  <p:tgtEl>
+                    <p:sldTgt/>
+                  </p:tgtEl>
+                </p:cond>
+              </p:nextCondLst>
+            </p:seq>
+          </p:childTnLst>
+        </p:cTn>
+      </p:par>
+    </p:tnLst>
+  </p:timing>
 </p:sld>
 </file>
 
@@ -10527,6 +11857,244 @@
   <p:clrMapOvr>
     <a:masterClrMapping/>
   </p:clrMapOvr>
+  <mc:AlternateContent xmlns:mc="http://schemas.openxmlformats.org/markup-compatibility/2006">
+    <mc:Choice xmlns:p14="http://schemas.microsoft.com/office/powerpoint/2010/main" Requires="p14">
+      <p:transition spd="med" p14:dur="700">
+        <p:fade/>
+      </p:transition>
+    </mc:Choice>
+    <mc:Fallback>
+      <p:transition spd="med">
+        <p:fade/>
+      </p:transition>
+    </mc:Fallback>
+  </mc:AlternateContent>
+  <p:timing>
+    <p:tnLst>
+      <p:par>
+        <p:cTn id="1" dur="indefinite" restart="never" nodeType="tmRoot">
+          <p:childTnLst>
+            <p:seq concurrent="1" nextAc="seek">
+              <p:cTn id="2" dur="indefinite" nodeType="mainSeq">
+                <p:childTnLst>
+                  <p:par>
+                    <p:cTn id="3" fill="hold">
+                      <p:stCondLst>
+                        <p:cond delay="indefinite"/>
+                        <p:cond evt="onBegin" delay="0">
+                          <p:tn val="2"/>
+                        </p:cond>
+                      </p:stCondLst>
+                      <p:childTnLst>
+                        <p:par>
+                          <p:cTn id="4" fill="hold">
+                            <p:stCondLst>
+                              <p:cond delay="0"/>
+                            </p:stCondLst>
+                            <p:childTnLst>
+                              <p:par>
+                                <p:cTn id="5" presetID="10" presetClass="entr" presetSubtype="0" fill="hold" nodeType="afterEffect">
+                                  <p:stCondLst>
+                                    <p:cond delay="0"/>
+                                  </p:stCondLst>
+                                  <p:childTnLst>
+                                    <p:set>
+                                      <p:cBhvr>
+                                        <p:cTn id="6" dur="1" fill="hold">
+                                          <p:stCondLst>
+                                            <p:cond delay="0"/>
+                                          </p:stCondLst>
+                                        </p:cTn>
+                                        <p:tgtEl>
+                                          <p:spTgt spid="4"/>
+                                        </p:tgtEl>
+                                        <p:attrNameLst>
+                                          <p:attrName>style.visibility</p:attrName>
+                                        </p:attrNameLst>
+                                      </p:cBhvr>
+                                      <p:to>
+                                        <p:strVal val="visible"/>
+                                      </p:to>
+                                    </p:set>
+                                    <p:animEffect transition="in" filter="fade">
+                                      <p:cBhvr>
+                                        <p:cTn id="7" dur="500"/>
+                                        <p:tgtEl>
+                                          <p:spTgt spid="4"/>
+                                        </p:tgtEl>
+                                      </p:cBhvr>
+                                    </p:animEffect>
+                                  </p:childTnLst>
+                                </p:cTn>
+                              </p:par>
+                              <p:par>
+                                <p:cTn id="8" presetID="10" presetClass="entr" presetSubtype="0" fill="hold" nodeType="withEffect">
+                                  <p:stCondLst>
+                                    <p:cond delay="300"/>
+                                  </p:stCondLst>
+                                  <p:childTnLst>
+                                    <p:set>
+                                      <p:cBhvr>
+                                        <p:cTn id="9" dur="1" fill="hold">
+                                          <p:stCondLst>
+                                            <p:cond delay="0"/>
+                                          </p:stCondLst>
+                                        </p:cTn>
+                                        <p:tgtEl>
+                                          <p:spTgt spid="26"/>
+                                        </p:tgtEl>
+                                        <p:attrNameLst>
+                                          <p:attrName>style.visibility</p:attrName>
+                                        </p:attrNameLst>
+                                      </p:cBhvr>
+                                      <p:to>
+                                        <p:strVal val="visible"/>
+                                      </p:to>
+                                    </p:set>
+                                    <p:animEffect transition="in" filter="fade">
+                                      <p:cBhvr>
+                                        <p:cTn id="10" dur="500"/>
+                                        <p:tgtEl>
+                                          <p:spTgt spid="26"/>
+                                        </p:tgtEl>
+                                      </p:cBhvr>
+                                    </p:animEffect>
+                                  </p:childTnLst>
+                                </p:cTn>
+                              </p:par>
+                              <p:par>
+                                <p:cTn id="11" presetID="10" presetClass="entr" presetSubtype="0" fill="hold" nodeType="withEffect">
+                                  <p:stCondLst>
+                                    <p:cond delay="600"/>
+                                  </p:stCondLst>
+                                  <p:childTnLst>
+                                    <p:set>
+                                      <p:cBhvr>
+                                        <p:cTn id="12" dur="1" fill="hold">
+                                          <p:stCondLst>
+                                            <p:cond delay="0"/>
+                                          </p:stCondLst>
+                                        </p:cTn>
+                                        <p:tgtEl>
+                                          <p:spTgt spid="27"/>
+                                        </p:tgtEl>
+                                        <p:attrNameLst>
+                                          <p:attrName>style.visibility</p:attrName>
+                                        </p:attrNameLst>
+                                      </p:cBhvr>
+                                      <p:to>
+                                        <p:strVal val="visible"/>
+                                      </p:to>
+                                    </p:set>
+                                    <p:animEffect transition="in" filter="fade">
+                                      <p:cBhvr>
+                                        <p:cTn id="13" dur="500"/>
+                                        <p:tgtEl>
+                                          <p:spTgt spid="27"/>
+                                        </p:tgtEl>
+                                      </p:cBhvr>
+                                    </p:animEffect>
+                                  </p:childTnLst>
+                                </p:cTn>
+                              </p:par>
+                              <p:par>
+                                <p:cTn id="14" presetID="10" presetClass="entr" presetSubtype="0" fill="hold" nodeType="withEffect">
+                                  <p:stCondLst>
+                                    <p:cond delay="900"/>
+                                  </p:stCondLst>
+                                  <p:childTnLst>
+                                    <p:set>
+                                      <p:cBhvr>
+                                        <p:cTn id="15" dur="1" fill="hold">
+                                          <p:stCondLst>
+                                            <p:cond delay="0"/>
+                                          </p:stCondLst>
+                                        </p:cTn>
+                                        <p:tgtEl>
+                                          <p:spTgt spid="28"/>
+                                        </p:tgtEl>
+                                        <p:attrNameLst>
+                                          <p:attrName>style.visibility</p:attrName>
+                                        </p:attrNameLst>
+                                      </p:cBhvr>
+                                      <p:to>
+                                        <p:strVal val="visible"/>
+                                      </p:to>
+                                    </p:set>
+                                    <p:animEffect transition="in" filter="fade">
+                                      <p:cBhvr>
+                                        <p:cTn id="16" dur="500"/>
+                                        <p:tgtEl>
+                                          <p:spTgt spid="28"/>
+                                        </p:tgtEl>
+                                      </p:cBhvr>
+                                    </p:animEffect>
+                                  </p:childTnLst>
+                                </p:cTn>
+                              </p:par>
+                              <p:par>
+                                <p:cTn id="17" presetID="10" presetClass="entr" presetSubtype="0" fill="hold" nodeType="withEffect">
+                                  <p:stCondLst>
+                                    <p:cond delay="1200"/>
+                                  </p:stCondLst>
+                                  <p:childTnLst>
+                                    <p:set>
+                                      <p:cBhvr>
+                                        <p:cTn id="18" dur="1" fill="hold">
+                                          <p:stCondLst>
+                                            <p:cond delay="0"/>
+                                          </p:stCondLst>
+                                        </p:cTn>
+                                        <p:tgtEl>
+                                          <p:spTgt spid="29"/>
+                                        </p:tgtEl>
+                                        <p:attrNameLst>
+                                          <p:attrName>style.visibility</p:attrName>
+                                        </p:attrNameLst>
+                                      </p:cBhvr>
+                                      <p:to>
+                                        <p:strVal val="visible"/>
+                                      </p:to>
+                                    </p:set>
+                                    <p:animEffect transition="in" filter="fade">
+                                      <p:cBhvr>
+                                        <p:cTn id="19" dur="500"/>
+                                        <p:tgtEl>
+                                          <p:spTgt spid="29"/>
+                                        </p:tgtEl>
+                                      </p:cBhvr>
+                                    </p:animEffect>
+                                  </p:childTnLst>
+                                </p:cTn>
+                              </p:par>
+                            </p:childTnLst>
+                          </p:cTn>
+                        </p:par>
+                      </p:childTnLst>
+                    </p:cTn>
+                  </p:par>
+                </p:childTnLst>
+              </p:cTn>
+              <p:prevCondLst>
+                <p:cond evt="onPrev" delay="0">
+                  <p:tgtEl>
+                    <p:sldTgt/>
+                  </p:tgtEl>
+                </p:cond>
+              </p:prevCondLst>
+              <p:nextCondLst>
+                <p:cond evt="onNext" delay="0">
+                  <p:tgtEl>
+                    <p:sldTgt/>
+                  </p:tgtEl>
+                </p:cond>
+              </p:nextCondLst>
+            </p:seq>
+          </p:childTnLst>
+        </p:cTn>
+      </p:par>
+    </p:tnLst>
+  </p:timing>
 </p:sld>
 </file>
 
@@ -11643,6 +13211,209 @@
   <p:clrMapOvr>
     <a:masterClrMapping/>
   </p:clrMapOvr>
+  <mc:AlternateContent xmlns:mc="http://schemas.openxmlformats.org/markup-compatibility/2006">
+    <mc:Choice xmlns:p14="http://schemas.microsoft.com/office/powerpoint/2010/main" Requires="p14">
+      <p:transition spd="med" p14:dur="700">
+        <p:fade/>
+      </p:transition>
+    </mc:Choice>
+    <mc:Fallback>
+      <p:transition spd="med">
+        <p:fade/>
+      </p:transition>
+    </mc:Fallback>
+  </mc:AlternateContent>
+  <p:timing>
+    <p:tnLst>
+      <p:par>
+        <p:cTn id="1" dur="indefinite" restart="never" nodeType="tmRoot">
+          <p:childTnLst>
+            <p:seq concurrent="1" nextAc="seek">
+              <p:cTn id="2" dur="indefinite" nodeType="mainSeq">
+                <p:childTnLst>
+                  <p:par>
+                    <p:cTn id="3" fill="hold">
+                      <p:stCondLst>
+                        <p:cond delay="indefinite"/>
+                        <p:cond evt="onBegin" delay="0">
+                          <p:tn val="2"/>
+                        </p:cond>
+                      </p:stCondLst>
+                      <p:childTnLst>
+                        <p:par>
+                          <p:cTn id="4" fill="hold">
+                            <p:stCondLst>
+                              <p:cond delay="0"/>
+                            </p:stCondLst>
+                            <p:childTnLst>
+                              <p:par>
+                                <p:cTn id="5" presetID="10" presetClass="entr" presetSubtype="0" fill="hold" nodeType="afterEffect">
+                                  <p:stCondLst>
+                                    <p:cond delay="0"/>
+                                  </p:stCondLst>
+                                  <p:childTnLst>
+                                    <p:set>
+                                      <p:cBhvr>
+                                        <p:cTn id="6" dur="1" fill="hold">
+                                          <p:stCondLst>
+                                            <p:cond delay="0"/>
+                                          </p:stCondLst>
+                                        </p:cTn>
+                                        <p:tgtEl>
+                                          <p:spTgt spid="4"/>
+                                        </p:tgtEl>
+                                        <p:attrNameLst>
+                                          <p:attrName>style.visibility</p:attrName>
+                                        </p:attrNameLst>
+                                      </p:cBhvr>
+                                      <p:to>
+                                        <p:strVal val="visible"/>
+                                      </p:to>
+                                    </p:set>
+                                    <p:animEffect transition="in" filter="fade">
+                                      <p:cBhvr>
+                                        <p:cTn id="7" dur="500"/>
+                                        <p:tgtEl>
+                                          <p:spTgt spid="4"/>
+                                        </p:tgtEl>
+                                      </p:cBhvr>
+                                    </p:animEffect>
+                                  </p:childTnLst>
+                                </p:cTn>
+                              </p:par>
+                              <p:par>
+                                <p:cTn id="8" presetID="10" presetClass="entr" presetSubtype="0" fill="hold" nodeType="withEffect">
+                                  <p:stCondLst>
+                                    <p:cond delay="300"/>
+                                  </p:stCondLst>
+                                  <p:childTnLst>
+                                    <p:set>
+                                      <p:cBhvr>
+                                        <p:cTn id="9" dur="1" fill="hold">
+                                          <p:stCondLst>
+                                            <p:cond delay="0"/>
+                                          </p:stCondLst>
+                                        </p:cTn>
+                                        <p:tgtEl>
+                                          <p:spTgt spid="32"/>
+                                        </p:tgtEl>
+                                        <p:attrNameLst>
+                                          <p:attrName>style.visibility</p:attrName>
+                                        </p:attrNameLst>
+                                      </p:cBhvr>
+                                      <p:to>
+                                        <p:strVal val="visible"/>
+                                      </p:to>
+                                    </p:set>
+                                    <p:animEffect transition="in" filter="fade">
+                                      <p:cBhvr>
+                                        <p:cTn id="10" dur="500"/>
+                                        <p:tgtEl>
+                                          <p:spTgt spid="32"/>
+                                        </p:tgtEl>
+                                      </p:cBhvr>
+                                    </p:animEffect>
+                                  </p:childTnLst>
+                                </p:cTn>
+                              </p:par>
+                              <p:par>
+                                <p:cTn id="11" presetID="10" presetClass="entr" presetSubtype="0" fill="hold" nodeType="withEffect">
+                                  <p:stCondLst>
+                                    <p:cond delay="600"/>
+                                  </p:stCondLst>
+                                  <p:childTnLst>
+                                    <p:set>
+                                      <p:cBhvr>
+                                        <p:cTn id="12" dur="1" fill="hold">
+                                          <p:stCondLst>
+                                            <p:cond delay="0"/>
+                                          </p:stCondLst>
+                                        </p:cTn>
+                                        <p:tgtEl>
+                                          <p:spTgt spid="33"/>
+                                        </p:tgtEl>
+                                        <p:attrNameLst>
+                                          <p:attrName>style.visibility</p:attrName>
+                                        </p:attrNameLst>
+                                      </p:cBhvr>
+                                      <p:to>
+                                        <p:strVal val="visible"/>
+                                      </p:to>
+                                    </p:set>
+                                    <p:animEffect transition="in" filter="fade">
+                                      <p:cBhvr>
+                                        <p:cTn id="13" dur="500"/>
+                                        <p:tgtEl>
+                                          <p:spTgt spid="33"/>
+                                        </p:tgtEl>
+                                      </p:cBhvr>
+                                    </p:animEffect>
+                                  </p:childTnLst>
+                                </p:cTn>
+                              </p:par>
+                              <p:par>
+                                <p:cTn id="14" presetID="10" presetClass="entr" presetSubtype="0" fill="hold" nodeType="withEffect">
+                                  <p:stCondLst>
+                                    <p:cond delay="900"/>
+                                  </p:stCondLst>
+                                  <p:childTnLst>
+                                    <p:set>
+                                      <p:cBhvr>
+                                        <p:cTn id="15" dur="1" fill="hold">
+                                          <p:stCondLst>
+                                            <p:cond delay="0"/>
+                                          </p:stCondLst>
+                                        </p:cTn>
+                                        <p:tgtEl>
+                                          <p:spTgt spid="34"/>
+                                        </p:tgtEl>
+                                        <p:attrNameLst>
+                                          <p:attrName>style.visibility</p:attrName>
+                                        </p:attrNameLst>
+                                      </p:cBhvr>
+                                      <p:to>
+                                        <p:strVal val="visible"/>
+                                      </p:to>
+                                    </p:set>
+                                    <p:animEffect transition="in" filter="fade">
+                                      <p:cBhvr>
+                                        <p:cTn id="16" dur="500"/>
+                                        <p:tgtEl>
+                                          <p:spTgt spid="34"/>
+                                        </p:tgtEl>
+                                      </p:cBhvr>
+                                    </p:animEffect>
+                                  </p:childTnLst>
+                                </p:cTn>
+                              </p:par>
+                            </p:childTnLst>
+                          </p:cTn>
+                        </p:par>
+                      </p:childTnLst>
+                    </p:cTn>
+                  </p:par>
+                </p:childTnLst>
+              </p:cTn>
+              <p:prevCondLst>
+                <p:cond evt="onPrev" delay="0">
+                  <p:tgtEl>
+                    <p:sldTgt/>
+                  </p:tgtEl>
+                </p:cond>
+              </p:prevCondLst>
+              <p:nextCondLst>
+                <p:cond evt="onNext" delay="0">
+                  <p:tgtEl>
+                    <p:sldTgt/>
+                  </p:tgtEl>
+                </p:cond>
+              </p:nextCondLst>
+            </p:seq>
+          </p:childTnLst>
+        </p:cTn>
+      </p:par>
+    </p:tnLst>
+  </p:timing>
 </p:sld>
 </file>
 
@@ -12473,6 +14244,244 @@
   <p:clrMapOvr>
     <a:masterClrMapping/>
   </p:clrMapOvr>
+  <mc:AlternateContent xmlns:mc="http://schemas.openxmlformats.org/markup-compatibility/2006">
+    <mc:Choice xmlns:p14="http://schemas.microsoft.com/office/powerpoint/2010/main" Requires="p14">
+      <p:transition spd="med" p14:dur="700">
+        <p:fade/>
+      </p:transition>
+    </mc:Choice>
+    <mc:Fallback>
+      <p:transition spd="med">
+        <p:fade/>
+      </p:transition>
+    </mc:Fallback>
+  </mc:AlternateContent>
+  <p:timing>
+    <p:tnLst>
+      <p:par>
+        <p:cTn id="1" dur="indefinite" restart="never" nodeType="tmRoot">
+          <p:childTnLst>
+            <p:seq concurrent="1" nextAc="seek">
+              <p:cTn id="2" dur="indefinite" nodeType="mainSeq">
+                <p:childTnLst>
+                  <p:par>
+                    <p:cTn id="3" fill="hold">
+                      <p:stCondLst>
+                        <p:cond delay="indefinite"/>
+                        <p:cond evt="onBegin" delay="0">
+                          <p:tn val="2"/>
+                        </p:cond>
+                      </p:stCondLst>
+                      <p:childTnLst>
+                        <p:par>
+                          <p:cTn id="4" fill="hold">
+                            <p:stCondLst>
+                              <p:cond delay="0"/>
+                            </p:stCondLst>
+                            <p:childTnLst>
+                              <p:par>
+                                <p:cTn id="5" presetID="10" presetClass="entr" presetSubtype="0" fill="hold" nodeType="afterEffect">
+                                  <p:stCondLst>
+                                    <p:cond delay="0"/>
+                                  </p:stCondLst>
+                                  <p:childTnLst>
+                                    <p:set>
+                                      <p:cBhvr>
+                                        <p:cTn id="6" dur="1" fill="hold">
+                                          <p:stCondLst>
+                                            <p:cond delay="0"/>
+                                          </p:stCondLst>
+                                        </p:cTn>
+                                        <p:tgtEl>
+                                          <p:spTgt spid="4"/>
+                                        </p:tgtEl>
+                                        <p:attrNameLst>
+                                          <p:attrName>style.visibility</p:attrName>
+                                        </p:attrNameLst>
+                                      </p:cBhvr>
+                                      <p:to>
+                                        <p:strVal val="visible"/>
+                                      </p:to>
+                                    </p:set>
+                                    <p:animEffect transition="in" filter="fade">
+                                      <p:cBhvr>
+                                        <p:cTn id="7" dur="500"/>
+                                        <p:tgtEl>
+                                          <p:spTgt spid="4"/>
+                                        </p:tgtEl>
+                                      </p:cBhvr>
+                                    </p:animEffect>
+                                  </p:childTnLst>
+                                </p:cTn>
+                              </p:par>
+                              <p:par>
+                                <p:cTn id="8" presetID="10" presetClass="entr" presetSubtype="0" fill="hold" nodeType="withEffect">
+                                  <p:stCondLst>
+                                    <p:cond delay="300"/>
+                                  </p:stCondLst>
+                                  <p:childTnLst>
+                                    <p:set>
+                                      <p:cBhvr>
+                                        <p:cTn id="9" dur="1" fill="hold">
+                                          <p:stCondLst>
+                                            <p:cond delay="0"/>
+                                          </p:stCondLst>
+                                        </p:cTn>
+                                        <p:tgtEl>
+                                          <p:spTgt spid="23"/>
+                                        </p:tgtEl>
+                                        <p:attrNameLst>
+                                          <p:attrName>style.visibility</p:attrName>
+                                        </p:attrNameLst>
+                                      </p:cBhvr>
+                                      <p:to>
+                                        <p:strVal val="visible"/>
+                                      </p:to>
+                                    </p:set>
+                                    <p:animEffect transition="in" filter="fade">
+                                      <p:cBhvr>
+                                        <p:cTn id="10" dur="500"/>
+                                        <p:tgtEl>
+                                          <p:spTgt spid="23"/>
+                                        </p:tgtEl>
+                                      </p:cBhvr>
+                                    </p:animEffect>
+                                  </p:childTnLst>
+                                </p:cTn>
+                              </p:par>
+                              <p:par>
+                                <p:cTn id="11" presetID="10" presetClass="entr" presetSubtype="0" fill="hold" nodeType="withEffect">
+                                  <p:stCondLst>
+                                    <p:cond delay="600"/>
+                                  </p:stCondLst>
+                                  <p:childTnLst>
+                                    <p:set>
+                                      <p:cBhvr>
+                                        <p:cTn id="12" dur="1" fill="hold">
+                                          <p:stCondLst>
+                                            <p:cond delay="0"/>
+                                          </p:stCondLst>
+                                        </p:cTn>
+                                        <p:tgtEl>
+                                          <p:spTgt spid="24"/>
+                                        </p:tgtEl>
+                                        <p:attrNameLst>
+                                          <p:attrName>style.visibility</p:attrName>
+                                        </p:attrNameLst>
+                                      </p:cBhvr>
+                                      <p:to>
+                                        <p:strVal val="visible"/>
+                                      </p:to>
+                                    </p:set>
+                                    <p:animEffect transition="in" filter="fade">
+                                      <p:cBhvr>
+                                        <p:cTn id="13" dur="500"/>
+                                        <p:tgtEl>
+                                          <p:spTgt spid="24"/>
+                                        </p:tgtEl>
+                                      </p:cBhvr>
+                                    </p:animEffect>
+                                  </p:childTnLst>
+                                </p:cTn>
+                              </p:par>
+                              <p:par>
+                                <p:cTn id="14" presetID="10" presetClass="entr" presetSubtype="0" fill="hold" nodeType="withEffect">
+                                  <p:stCondLst>
+                                    <p:cond delay="900"/>
+                                  </p:stCondLst>
+                                  <p:childTnLst>
+                                    <p:set>
+                                      <p:cBhvr>
+                                        <p:cTn id="15" dur="1" fill="hold">
+                                          <p:stCondLst>
+                                            <p:cond delay="0"/>
+                                          </p:stCondLst>
+                                        </p:cTn>
+                                        <p:tgtEl>
+                                          <p:spTgt spid="25"/>
+                                        </p:tgtEl>
+                                        <p:attrNameLst>
+                                          <p:attrName>style.visibility</p:attrName>
+                                        </p:attrNameLst>
+                                      </p:cBhvr>
+                                      <p:to>
+                                        <p:strVal val="visible"/>
+                                      </p:to>
+                                    </p:set>
+                                    <p:animEffect transition="in" filter="fade">
+                                      <p:cBhvr>
+                                        <p:cTn id="16" dur="500"/>
+                                        <p:tgtEl>
+                                          <p:spTgt spid="25"/>
+                                        </p:tgtEl>
+                                      </p:cBhvr>
+                                    </p:animEffect>
+                                  </p:childTnLst>
+                                </p:cTn>
+                              </p:par>
+                              <p:par>
+                                <p:cTn id="17" presetID="10" presetClass="entr" presetSubtype="0" fill="hold" nodeType="withEffect">
+                                  <p:stCondLst>
+                                    <p:cond delay="1200"/>
+                                  </p:stCondLst>
+                                  <p:childTnLst>
+                                    <p:set>
+                                      <p:cBhvr>
+                                        <p:cTn id="18" dur="1" fill="hold">
+                                          <p:stCondLst>
+                                            <p:cond delay="0"/>
+                                          </p:stCondLst>
+                                        </p:cTn>
+                                        <p:tgtEl>
+                                          <p:spTgt spid="26"/>
+                                        </p:tgtEl>
+                                        <p:attrNameLst>
+                                          <p:attrName>style.visibility</p:attrName>
+                                        </p:attrNameLst>
+                                      </p:cBhvr>
+                                      <p:to>
+                                        <p:strVal val="visible"/>
+                                      </p:to>
+                                    </p:set>
+                                    <p:animEffect transition="in" filter="fade">
+                                      <p:cBhvr>
+                                        <p:cTn id="19" dur="500"/>
+                                        <p:tgtEl>
+                                          <p:spTgt spid="26"/>
+                                        </p:tgtEl>
+                                      </p:cBhvr>
+                                    </p:animEffect>
+                                  </p:childTnLst>
+                                </p:cTn>
+                              </p:par>
+                            </p:childTnLst>
+                          </p:cTn>
+                        </p:par>
+                      </p:childTnLst>
+                    </p:cTn>
+                  </p:par>
+                </p:childTnLst>
+              </p:cTn>
+              <p:prevCondLst>
+                <p:cond evt="onPrev" delay="0">
+                  <p:tgtEl>
+                    <p:sldTgt/>
+                  </p:tgtEl>
+                </p:cond>
+              </p:prevCondLst>
+              <p:nextCondLst>
+                <p:cond evt="onNext" delay="0">
+                  <p:tgtEl>
+                    <p:sldTgt/>
+                  </p:tgtEl>
+                </p:cond>
+              </p:nextCondLst>
+            </p:seq>
+          </p:childTnLst>
+        </p:cTn>
+      </p:par>
+    </p:tnLst>
+  </p:timing>
 </p:sld>
 </file>
 
@@ -14062,6 +16071,244 @@
   <p:clrMapOvr>
     <a:masterClrMapping/>
   </p:clrMapOvr>
+  <mc:AlternateContent xmlns:mc="http://schemas.openxmlformats.org/markup-compatibility/2006">
+    <mc:Choice xmlns:p14="http://schemas.microsoft.com/office/powerpoint/2010/main" Requires="p14">
+      <p:transition spd="med" p14:dur="700">
+        <p:fade/>
+      </p:transition>
+    </mc:Choice>
+    <mc:Fallback>
+      <p:transition spd="med">
+        <p:fade/>
+      </p:transition>
+    </mc:Fallback>
+  </mc:AlternateContent>
+  <p:timing>
+    <p:tnLst>
+      <p:par>
+        <p:cTn id="1" dur="indefinite" restart="never" nodeType="tmRoot">
+          <p:childTnLst>
+            <p:seq concurrent="1" nextAc="seek">
+              <p:cTn id="2" dur="indefinite" nodeType="mainSeq">
+                <p:childTnLst>
+                  <p:par>
+                    <p:cTn id="3" fill="hold">
+                      <p:stCondLst>
+                        <p:cond delay="indefinite"/>
+                        <p:cond evt="onBegin" delay="0">
+                          <p:tn val="2"/>
+                        </p:cond>
+                      </p:stCondLst>
+                      <p:childTnLst>
+                        <p:par>
+                          <p:cTn id="4" fill="hold">
+                            <p:stCondLst>
+                              <p:cond delay="0"/>
+                            </p:stCondLst>
+                            <p:childTnLst>
+                              <p:par>
+                                <p:cTn id="5" presetID="10" presetClass="entr" presetSubtype="0" fill="hold" nodeType="afterEffect">
+                                  <p:stCondLst>
+                                    <p:cond delay="0"/>
+                                  </p:stCondLst>
+                                  <p:childTnLst>
+                                    <p:set>
+                                      <p:cBhvr>
+                                        <p:cTn id="6" dur="1" fill="hold">
+                                          <p:stCondLst>
+                                            <p:cond delay="0"/>
+                                          </p:stCondLst>
+                                        </p:cTn>
+                                        <p:tgtEl>
+                                          <p:spTgt spid="4"/>
+                                        </p:tgtEl>
+                                        <p:attrNameLst>
+                                          <p:attrName>style.visibility</p:attrName>
+                                        </p:attrNameLst>
+                                      </p:cBhvr>
+                                      <p:to>
+                                        <p:strVal val="visible"/>
+                                      </p:to>
+                                    </p:set>
+                                    <p:animEffect transition="in" filter="fade">
+                                      <p:cBhvr>
+                                        <p:cTn id="7" dur="500"/>
+                                        <p:tgtEl>
+                                          <p:spTgt spid="4"/>
+                                        </p:tgtEl>
+                                      </p:cBhvr>
+                                    </p:animEffect>
+                                  </p:childTnLst>
+                                </p:cTn>
+                              </p:par>
+                              <p:par>
+                                <p:cTn id="8" presetID="10" presetClass="entr" presetSubtype="0" fill="hold" nodeType="withEffect">
+                                  <p:stCondLst>
+                                    <p:cond delay="300"/>
+                                  </p:stCondLst>
+                                  <p:childTnLst>
+                                    <p:set>
+                                      <p:cBhvr>
+                                        <p:cTn id="9" dur="1" fill="hold">
+                                          <p:stCondLst>
+                                            <p:cond delay="0"/>
+                                          </p:stCondLst>
+                                        </p:cTn>
+                                        <p:tgtEl>
+                                          <p:spTgt spid="45"/>
+                                        </p:tgtEl>
+                                        <p:attrNameLst>
+                                          <p:attrName>style.visibility</p:attrName>
+                                        </p:attrNameLst>
+                                      </p:cBhvr>
+                                      <p:to>
+                                        <p:strVal val="visible"/>
+                                      </p:to>
+                                    </p:set>
+                                    <p:animEffect transition="in" filter="fade">
+                                      <p:cBhvr>
+                                        <p:cTn id="10" dur="500"/>
+                                        <p:tgtEl>
+                                          <p:spTgt spid="45"/>
+                                        </p:tgtEl>
+                                      </p:cBhvr>
+                                    </p:animEffect>
+                                  </p:childTnLst>
+                                </p:cTn>
+                              </p:par>
+                              <p:par>
+                                <p:cTn id="11" presetID="10" presetClass="entr" presetSubtype="0" fill="hold" nodeType="withEffect">
+                                  <p:stCondLst>
+                                    <p:cond delay="600"/>
+                                  </p:stCondLst>
+                                  <p:childTnLst>
+                                    <p:set>
+                                      <p:cBhvr>
+                                        <p:cTn id="12" dur="1" fill="hold">
+                                          <p:stCondLst>
+                                            <p:cond delay="0"/>
+                                          </p:stCondLst>
+                                        </p:cTn>
+                                        <p:tgtEl>
+                                          <p:spTgt spid="46"/>
+                                        </p:tgtEl>
+                                        <p:attrNameLst>
+                                          <p:attrName>style.visibility</p:attrName>
+                                        </p:attrNameLst>
+                                      </p:cBhvr>
+                                      <p:to>
+                                        <p:strVal val="visible"/>
+                                      </p:to>
+                                    </p:set>
+                                    <p:animEffect transition="in" filter="fade">
+                                      <p:cBhvr>
+                                        <p:cTn id="13" dur="500"/>
+                                        <p:tgtEl>
+                                          <p:spTgt spid="46"/>
+                                        </p:tgtEl>
+                                      </p:cBhvr>
+                                    </p:animEffect>
+                                  </p:childTnLst>
+                                </p:cTn>
+                              </p:par>
+                              <p:par>
+                                <p:cTn id="14" presetID="10" presetClass="entr" presetSubtype="0" fill="hold" nodeType="withEffect">
+                                  <p:stCondLst>
+                                    <p:cond delay="900"/>
+                                  </p:stCondLst>
+                                  <p:childTnLst>
+                                    <p:set>
+                                      <p:cBhvr>
+                                        <p:cTn id="15" dur="1" fill="hold">
+                                          <p:stCondLst>
+                                            <p:cond delay="0"/>
+                                          </p:stCondLst>
+                                        </p:cTn>
+                                        <p:tgtEl>
+                                          <p:spTgt spid="47"/>
+                                        </p:tgtEl>
+                                        <p:attrNameLst>
+                                          <p:attrName>style.visibility</p:attrName>
+                                        </p:attrNameLst>
+                                      </p:cBhvr>
+                                      <p:to>
+                                        <p:strVal val="visible"/>
+                                      </p:to>
+                                    </p:set>
+                                    <p:animEffect transition="in" filter="fade">
+                                      <p:cBhvr>
+                                        <p:cTn id="16" dur="500"/>
+                                        <p:tgtEl>
+                                          <p:spTgt spid="47"/>
+                                        </p:tgtEl>
+                                      </p:cBhvr>
+                                    </p:animEffect>
+                                  </p:childTnLst>
+                                </p:cTn>
+                              </p:par>
+                              <p:par>
+                                <p:cTn id="17" presetID="10" presetClass="entr" presetSubtype="0" fill="hold" nodeType="withEffect">
+                                  <p:stCondLst>
+                                    <p:cond delay="1200"/>
+                                  </p:stCondLst>
+                                  <p:childTnLst>
+                                    <p:set>
+                                      <p:cBhvr>
+                                        <p:cTn id="18" dur="1" fill="hold">
+                                          <p:stCondLst>
+                                            <p:cond delay="0"/>
+                                          </p:stCondLst>
+                                        </p:cTn>
+                                        <p:tgtEl>
+                                          <p:spTgt spid="48"/>
+                                        </p:tgtEl>
+                                        <p:attrNameLst>
+                                          <p:attrName>style.visibility</p:attrName>
+                                        </p:attrNameLst>
+                                      </p:cBhvr>
+                                      <p:to>
+                                        <p:strVal val="visible"/>
+                                      </p:to>
+                                    </p:set>
+                                    <p:animEffect transition="in" filter="fade">
+                                      <p:cBhvr>
+                                        <p:cTn id="19" dur="500"/>
+                                        <p:tgtEl>
+                                          <p:spTgt spid="48"/>
+                                        </p:tgtEl>
+                                      </p:cBhvr>
+                                    </p:animEffect>
+                                  </p:childTnLst>
+                                </p:cTn>
+                              </p:par>
+                            </p:childTnLst>
+                          </p:cTn>
+                        </p:par>
+                      </p:childTnLst>
+                    </p:cTn>
+                  </p:par>
+                </p:childTnLst>
+              </p:cTn>
+              <p:prevCondLst>
+                <p:cond evt="onPrev" delay="0">
+                  <p:tgtEl>
+                    <p:sldTgt/>
+                  </p:tgtEl>
+                </p:cond>
+              </p:prevCondLst>
+              <p:nextCondLst>
+                <p:cond evt="onNext" delay="0">
+                  <p:tgtEl>
+                    <p:sldTgt/>
+                  </p:tgtEl>
+                </p:cond>
+              </p:nextCondLst>
+            </p:seq>
+          </p:childTnLst>
+        </p:cTn>
+      </p:par>
+    </p:tnLst>
+  </p:timing>
 </p:sld>
 </file>
 
@@ -15787,6 +18034,209 @@
   <p:clrMapOvr>
     <a:masterClrMapping/>
   </p:clrMapOvr>
+  <mc:AlternateContent xmlns:mc="http://schemas.openxmlformats.org/markup-compatibility/2006">
+    <mc:Choice xmlns:p14="http://schemas.microsoft.com/office/powerpoint/2010/main" Requires="p14">
+      <p:transition spd="med" p14:dur="700">
+        <p:fade/>
+      </p:transition>
+    </mc:Choice>
+    <mc:Fallback>
+      <p:transition spd="med">
+        <p:fade/>
+      </p:transition>
+    </mc:Fallback>
+  </mc:AlternateContent>
+  <p:timing>
+    <p:tnLst>
+      <p:par>
+        <p:cTn id="1" dur="indefinite" restart="never" nodeType="tmRoot">
+          <p:childTnLst>
+            <p:seq concurrent="1" nextAc="seek">
+              <p:cTn id="2" dur="indefinite" nodeType="mainSeq">
+                <p:childTnLst>
+                  <p:par>
+                    <p:cTn id="3" fill="hold">
+                      <p:stCondLst>
+                        <p:cond delay="indefinite"/>
+                        <p:cond evt="onBegin" delay="0">
+                          <p:tn val="2"/>
+                        </p:cond>
+                      </p:stCondLst>
+                      <p:childTnLst>
+                        <p:par>
+                          <p:cTn id="4" fill="hold">
+                            <p:stCondLst>
+                              <p:cond delay="0"/>
+                            </p:stCondLst>
+                            <p:childTnLst>
+                              <p:par>
+                                <p:cTn id="5" presetID="10" presetClass="entr" presetSubtype="0" fill="hold" nodeType="afterEffect">
+                                  <p:stCondLst>
+                                    <p:cond delay="0"/>
+                                  </p:stCondLst>
+                                  <p:childTnLst>
+                                    <p:set>
+                                      <p:cBhvr>
+                                        <p:cTn id="6" dur="1" fill="hold">
+                                          <p:stCondLst>
+                                            <p:cond delay="0"/>
+                                          </p:stCondLst>
+                                        </p:cTn>
+                                        <p:tgtEl>
+                                          <p:spTgt spid="4"/>
+                                        </p:tgtEl>
+                                        <p:attrNameLst>
+                                          <p:attrName>style.visibility</p:attrName>
+                                        </p:attrNameLst>
+                                      </p:cBhvr>
+                                      <p:to>
+                                        <p:strVal val="visible"/>
+                                      </p:to>
+                                    </p:set>
+                                    <p:animEffect transition="in" filter="fade">
+                                      <p:cBhvr>
+                                        <p:cTn id="7" dur="500"/>
+                                        <p:tgtEl>
+                                          <p:spTgt spid="4"/>
+                                        </p:tgtEl>
+                                      </p:cBhvr>
+                                    </p:animEffect>
+                                  </p:childTnLst>
+                                </p:cTn>
+                              </p:par>
+                              <p:par>
+                                <p:cTn id="8" presetID="10" presetClass="entr" presetSubtype="0" fill="hold" nodeType="withEffect">
+                                  <p:stCondLst>
+                                    <p:cond delay="300"/>
+                                  </p:stCondLst>
+                                  <p:childTnLst>
+                                    <p:set>
+                                      <p:cBhvr>
+                                        <p:cTn id="9" dur="1" fill="hold">
+                                          <p:stCondLst>
+                                            <p:cond delay="0"/>
+                                          </p:stCondLst>
+                                        </p:cTn>
+                                        <p:tgtEl>
+                                          <p:spTgt spid="51"/>
+                                        </p:tgtEl>
+                                        <p:attrNameLst>
+                                          <p:attrName>style.visibility</p:attrName>
+                                        </p:attrNameLst>
+                                      </p:cBhvr>
+                                      <p:to>
+                                        <p:strVal val="visible"/>
+                                      </p:to>
+                                    </p:set>
+                                    <p:animEffect transition="in" filter="fade">
+                                      <p:cBhvr>
+                                        <p:cTn id="10" dur="500"/>
+                                        <p:tgtEl>
+                                          <p:spTgt spid="51"/>
+                                        </p:tgtEl>
+                                      </p:cBhvr>
+                                    </p:animEffect>
+                                  </p:childTnLst>
+                                </p:cTn>
+                              </p:par>
+                              <p:par>
+                                <p:cTn id="11" presetID="10" presetClass="entr" presetSubtype="0" fill="hold" nodeType="withEffect">
+                                  <p:stCondLst>
+                                    <p:cond delay="600"/>
+                                  </p:stCondLst>
+                                  <p:childTnLst>
+                                    <p:set>
+                                      <p:cBhvr>
+                                        <p:cTn id="12" dur="1" fill="hold">
+                                          <p:stCondLst>
+                                            <p:cond delay="0"/>
+                                          </p:stCondLst>
+                                        </p:cTn>
+                                        <p:tgtEl>
+                                          <p:spTgt spid="52"/>
+                                        </p:tgtEl>
+                                        <p:attrNameLst>
+                                          <p:attrName>style.visibility</p:attrName>
+                                        </p:attrNameLst>
+                                      </p:cBhvr>
+                                      <p:to>
+                                        <p:strVal val="visible"/>
+                                      </p:to>
+                                    </p:set>
+                                    <p:animEffect transition="in" filter="fade">
+                                      <p:cBhvr>
+                                        <p:cTn id="13" dur="500"/>
+                                        <p:tgtEl>
+                                          <p:spTgt spid="52"/>
+                                        </p:tgtEl>
+                                      </p:cBhvr>
+                                    </p:animEffect>
+                                  </p:childTnLst>
+                                </p:cTn>
+                              </p:par>
+                              <p:par>
+                                <p:cTn id="14" presetID="10" presetClass="entr" presetSubtype="0" fill="hold" nodeType="withEffect">
+                                  <p:stCondLst>
+                                    <p:cond delay="900"/>
+                                  </p:stCondLst>
+                                  <p:childTnLst>
+                                    <p:set>
+                                      <p:cBhvr>
+                                        <p:cTn id="15" dur="1" fill="hold">
+                                          <p:stCondLst>
+                                            <p:cond delay="0"/>
+                                          </p:stCondLst>
+                                        </p:cTn>
+                                        <p:tgtEl>
+                                          <p:spTgt spid="53"/>
+                                        </p:tgtEl>
+                                        <p:attrNameLst>
+                                          <p:attrName>style.visibility</p:attrName>
+                                        </p:attrNameLst>
+                                      </p:cBhvr>
+                                      <p:to>
+                                        <p:strVal val="visible"/>
+                                      </p:to>
+                                    </p:set>
+                                    <p:animEffect transition="in" filter="fade">
+                                      <p:cBhvr>
+                                        <p:cTn id="16" dur="500"/>
+                                        <p:tgtEl>
+                                          <p:spTgt spid="53"/>
+                                        </p:tgtEl>
+                                      </p:cBhvr>
+                                    </p:animEffect>
+                                  </p:childTnLst>
+                                </p:cTn>
+                              </p:par>
+                            </p:childTnLst>
+                          </p:cTn>
+                        </p:par>
+                      </p:childTnLst>
+                    </p:cTn>
+                  </p:par>
+                </p:childTnLst>
+              </p:cTn>
+              <p:prevCondLst>
+                <p:cond evt="onPrev" delay="0">
+                  <p:tgtEl>
+                    <p:sldTgt/>
+                  </p:tgtEl>
+                </p:cond>
+              </p:prevCondLst>
+              <p:nextCondLst>
+                <p:cond evt="onNext" delay="0">
+                  <p:tgtEl>
+                    <p:sldTgt/>
+                  </p:tgtEl>
+                </p:cond>
+              </p:nextCondLst>
+            </p:seq>
+          </p:childTnLst>
+        </p:cTn>
+      </p:par>
+    </p:tnLst>
+  </p:timing>
 </p:sld>
 </file>
 
@@ -16314,6 +18764,244 @@
   <p:clrMapOvr>
     <a:masterClrMapping/>
   </p:clrMapOvr>
+  <mc:AlternateContent xmlns:mc="http://schemas.openxmlformats.org/markup-compatibility/2006">
+    <mc:Choice xmlns:p14="http://schemas.microsoft.com/office/powerpoint/2010/main" Requires="p14">
+      <p:transition spd="med" p14:dur="700">
+        <p:fade/>
+      </p:transition>
+    </mc:Choice>
+    <mc:Fallback>
+      <p:transition spd="med">
+        <p:fade/>
+      </p:transition>
+    </mc:Fallback>
+  </mc:AlternateContent>
+  <p:timing>
+    <p:tnLst>
+      <p:par>
+        <p:cTn id="1" dur="indefinite" restart="never" nodeType="tmRoot">
+          <p:childTnLst>
+            <p:seq concurrent="1" nextAc="seek">
+              <p:cTn id="2" dur="indefinite" nodeType="mainSeq">
+                <p:childTnLst>
+                  <p:par>
+                    <p:cTn id="3" fill="hold">
+                      <p:stCondLst>
+                        <p:cond delay="indefinite"/>
+                        <p:cond evt="onBegin" delay="0">
+                          <p:tn val="2"/>
+                        </p:cond>
+                      </p:stCondLst>
+                      <p:childTnLst>
+                        <p:par>
+                          <p:cTn id="4" fill="hold">
+                            <p:stCondLst>
+                              <p:cond delay="0"/>
+                            </p:stCondLst>
+                            <p:childTnLst>
+                              <p:par>
+                                <p:cTn id="5" presetID="10" presetClass="entr" presetSubtype="0" fill="hold" nodeType="afterEffect">
+                                  <p:stCondLst>
+                                    <p:cond delay="0"/>
+                                  </p:stCondLst>
+                                  <p:childTnLst>
+                                    <p:set>
+                                      <p:cBhvr>
+                                        <p:cTn id="6" dur="1" fill="hold">
+                                          <p:stCondLst>
+                                            <p:cond delay="0"/>
+                                          </p:stCondLst>
+                                        </p:cTn>
+                                        <p:tgtEl>
+                                          <p:spTgt spid="4"/>
+                                        </p:tgtEl>
+                                        <p:attrNameLst>
+                                          <p:attrName>style.visibility</p:attrName>
+                                        </p:attrNameLst>
+                                      </p:cBhvr>
+                                      <p:to>
+                                        <p:strVal val="visible"/>
+                                      </p:to>
+                                    </p:set>
+                                    <p:animEffect transition="in" filter="fade">
+                                      <p:cBhvr>
+                                        <p:cTn id="7" dur="500"/>
+                                        <p:tgtEl>
+                                          <p:spTgt spid="4"/>
+                                        </p:tgtEl>
+                                      </p:cBhvr>
+                                    </p:animEffect>
+                                  </p:childTnLst>
+                                </p:cTn>
+                              </p:par>
+                              <p:par>
+                                <p:cTn id="8" presetID="10" presetClass="entr" presetSubtype="0" fill="hold" nodeType="withEffect">
+                                  <p:stCondLst>
+                                    <p:cond delay="300"/>
+                                  </p:stCondLst>
+                                  <p:childTnLst>
+                                    <p:set>
+                                      <p:cBhvr>
+                                        <p:cTn id="9" dur="1" fill="hold">
+                                          <p:stCondLst>
+                                            <p:cond delay="0"/>
+                                          </p:stCondLst>
+                                        </p:cTn>
+                                        <p:tgtEl>
+                                          <p:spTgt spid="12"/>
+                                        </p:tgtEl>
+                                        <p:attrNameLst>
+                                          <p:attrName>style.visibility</p:attrName>
+                                        </p:attrNameLst>
+                                      </p:cBhvr>
+                                      <p:to>
+                                        <p:strVal val="visible"/>
+                                      </p:to>
+                                    </p:set>
+                                    <p:animEffect transition="in" filter="fade">
+                                      <p:cBhvr>
+                                        <p:cTn id="10" dur="500"/>
+                                        <p:tgtEl>
+                                          <p:spTgt spid="12"/>
+                                        </p:tgtEl>
+                                      </p:cBhvr>
+                                    </p:animEffect>
+                                  </p:childTnLst>
+                                </p:cTn>
+                              </p:par>
+                              <p:par>
+                                <p:cTn id="11" presetID="10" presetClass="entr" presetSubtype="0" fill="hold" nodeType="withEffect">
+                                  <p:stCondLst>
+                                    <p:cond delay="600"/>
+                                  </p:stCondLst>
+                                  <p:childTnLst>
+                                    <p:set>
+                                      <p:cBhvr>
+                                        <p:cTn id="12" dur="1" fill="hold">
+                                          <p:stCondLst>
+                                            <p:cond delay="0"/>
+                                          </p:stCondLst>
+                                        </p:cTn>
+                                        <p:tgtEl>
+                                          <p:spTgt spid="13"/>
+                                        </p:tgtEl>
+                                        <p:attrNameLst>
+                                          <p:attrName>style.visibility</p:attrName>
+                                        </p:attrNameLst>
+                                      </p:cBhvr>
+                                      <p:to>
+                                        <p:strVal val="visible"/>
+                                      </p:to>
+                                    </p:set>
+                                    <p:animEffect transition="in" filter="fade">
+                                      <p:cBhvr>
+                                        <p:cTn id="13" dur="500"/>
+                                        <p:tgtEl>
+                                          <p:spTgt spid="13"/>
+                                        </p:tgtEl>
+                                      </p:cBhvr>
+                                    </p:animEffect>
+                                  </p:childTnLst>
+                                </p:cTn>
+                              </p:par>
+                              <p:par>
+                                <p:cTn id="14" presetID="10" presetClass="entr" presetSubtype="0" fill="hold" nodeType="withEffect">
+                                  <p:stCondLst>
+                                    <p:cond delay="900"/>
+                                  </p:stCondLst>
+                                  <p:childTnLst>
+                                    <p:set>
+                                      <p:cBhvr>
+                                        <p:cTn id="15" dur="1" fill="hold">
+                                          <p:stCondLst>
+                                            <p:cond delay="0"/>
+                                          </p:stCondLst>
+                                        </p:cTn>
+                                        <p:tgtEl>
+                                          <p:spTgt spid="14"/>
+                                        </p:tgtEl>
+                                        <p:attrNameLst>
+                                          <p:attrName>style.visibility</p:attrName>
+                                        </p:attrNameLst>
+                                      </p:cBhvr>
+                                      <p:to>
+                                        <p:strVal val="visible"/>
+                                      </p:to>
+                                    </p:set>
+                                    <p:animEffect transition="in" filter="fade">
+                                      <p:cBhvr>
+                                        <p:cTn id="16" dur="500"/>
+                                        <p:tgtEl>
+                                          <p:spTgt spid="14"/>
+                                        </p:tgtEl>
+                                      </p:cBhvr>
+                                    </p:animEffect>
+                                  </p:childTnLst>
+                                </p:cTn>
+                              </p:par>
+                              <p:par>
+                                <p:cTn id="17" presetID="10" presetClass="entr" presetSubtype="0" fill="hold" nodeType="withEffect">
+                                  <p:stCondLst>
+                                    <p:cond delay="1200"/>
+                                  </p:stCondLst>
+                                  <p:childTnLst>
+                                    <p:set>
+                                      <p:cBhvr>
+                                        <p:cTn id="18" dur="1" fill="hold">
+                                          <p:stCondLst>
+                                            <p:cond delay="0"/>
+                                          </p:stCondLst>
+                                        </p:cTn>
+                                        <p:tgtEl>
+                                          <p:spTgt spid="15"/>
+                                        </p:tgtEl>
+                                        <p:attrNameLst>
+                                          <p:attrName>style.visibility</p:attrName>
+                                        </p:attrNameLst>
+                                      </p:cBhvr>
+                                      <p:to>
+                                        <p:strVal val="visible"/>
+                                      </p:to>
+                                    </p:set>
+                                    <p:animEffect transition="in" filter="fade">
+                                      <p:cBhvr>
+                                        <p:cTn id="19" dur="500"/>
+                                        <p:tgtEl>
+                                          <p:spTgt spid="15"/>
+                                        </p:tgtEl>
+                                      </p:cBhvr>
+                                    </p:animEffect>
+                                  </p:childTnLst>
+                                </p:cTn>
+                              </p:par>
+                            </p:childTnLst>
+                          </p:cTn>
+                        </p:par>
+                      </p:childTnLst>
+                    </p:cTn>
+                  </p:par>
+                </p:childTnLst>
+              </p:cTn>
+              <p:prevCondLst>
+                <p:cond evt="onPrev" delay="0">
+                  <p:tgtEl>
+                    <p:sldTgt/>
+                  </p:tgtEl>
+                </p:cond>
+              </p:prevCondLst>
+              <p:nextCondLst>
+                <p:cond evt="onNext" delay="0">
+                  <p:tgtEl>
+                    <p:sldTgt/>
+                  </p:tgtEl>
+                </p:cond>
+              </p:nextCondLst>
+            </p:seq>
+          </p:childTnLst>
+        </p:cTn>
+      </p:par>
+    </p:tnLst>
+  </p:timing>
 </p:sld>
 </file>
 
@@ -17124,6 +19812,244 @@
   <p:clrMapOvr>
     <a:masterClrMapping/>
   </p:clrMapOvr>
+  <mc:AlternateContent xmlns:mc="http://schemas.openxmlformats.org/markup-compatibility/2006">
+    <mc:Choice xmlns:p14="http://schemas.microsoft.com/office/powerpoint/2010/main" Requires="p14">
+      <p:transition spd="med" p14:dur="700">
+        <p:fade/>
+      </p:transition>
+    </mc:Choice>
+    <mc:Fallback>
+      <p:transition spd="med">
+        <p:fade/>
+      </p:transition>
+    </mc:Fallback>
+  </mc:AlternateContent>
+  <p:timing>
+    <p:tnLst>
+      <p:par>
+        <p:cTn id="1" dur="indefinite" restart="never" nodeType="tmRoot">
+          <p:childTnLst>
+            <p:seq concurrent="1" nextAc="seek">
+              <p:cTn id="2" dur="indefinite" nodeType="mainSeq">
+                <p:childTnLst>
+                  <p:par>
+                    <p:cTn id="3" fill="hold">
+                      <p:stCondLst>
+                        <p:cond delay="indefinite"/>
+                        <p:cond evt="onBegin" delay="0">
+                          <p:tn val="2"/>
+                        </p:cond>
+                      </p:stCondLst>
+                      <p:childTnLst>
+                        <p:par>
+                          <p:cTn id="4" fill="hold">
+                            <p:stCondLst>
+                              <p:cond delay="0"/>
+                            </p:stCondLst>
+                            <p:childTnLst>
+                              <p:par>
+                                <p:cTn id="5" presetID="10" presetClass="entr" presetSubtype="0" fill="hold" nodeType="afterEffect">
+                                  <p:stCondLst>
+                                    <p:cond delay="0"/>
+                                  </p:stCondLst>
+                                  <p:childTnLst>
+                                    <p:set>
+                                      <p:cBhvr>
+                                        <p:cTn id="6" dur="1" fill="hold">
+                                          <p:stCondLst>
+                                            <p:cond delay="0"/>
+                                          </p:stCondLst>
+                                        </p:cTn>
+                                        <p:tgtEl>
+                                          <p:spTgt spid="3"/>
+                                        </p:tgtEl>
+                                        <p:attrNameLst>
+                                          <p:attrName>style.visibility</p:attrName>
+                                        </p:attrNameLst>
+                                      </p:cBhvr>
+                                      <p:to>
+                                        <p:strVal val="visible"/>
+                                      </p:to>
+                                    </p:set>
+                                    <p:animEffect transition="in" filter="fade">
+                                      <p:cBhvr>
+                                        <p:cTn id="7" dur="500"/>
+                                        <p:tgtEl>
+                                          <p:spTgt spid="3"/>
+                                        </p:tgtEl>
+                                      </p:cBhvr>
+                                    </p:animEffect>
+                                  </p:childTnLst>
+                                </p:cTn>
+                              </p:par>
+                              <p:par>
+                                <p:cTn id="8" presetID="10" presetClass="entr" presetSubtype="0" fill="hold" nodeType="withEffect">
+                                  <p:stCondLst>
+                                    <p:cond delay="300"/>
+                                  </p:stCondLst>
+                                  <p:childTnLst>
+                                    <p:set>
+                                      <p:cBhvr>
+                                        <p:cTn id="9" dur="1" fill="hold">
+                                          <p:stCondLst>
+                                            <p:cond delay="0"/>
+                                          </p:stCondLst>
+                                        </p:cTn>
+                                        <p:tgtEl>
+                                          <p:spTgt spid="15"/>
+                                        </p:tgtEl>
+                                        <p:attrNameLst>
+                                          <p:attrName>style.visibility</p:attrName>
+                                        </p:attrNameLst>
+                                      </p:cBhvr>
+                                      <p:to>
+                                        <p:strVal val="visible"/>
+                                      </p:to>
+                                    </p:set>
+                                    <p:animEffect transition="in" filter="fade">
+                                      <p:cBhvr>
+                                        <p:cTn id="10" dur="500"/>
+                                        <p:tgtEl>
+                                          <p:spTgt spid="15"/>
+                                        </p:tgtEl>
+                                      </p:cBhvr>
+                                    </p:animEffect>
+                                  </p:childTnLst>
+                                </p:cTn>
+                              </p:par>
+                              <p:par>
+                                <p:cTn id="11" presetID="10" presetClass="entr" presetSubtype="0" fill="hold" nodeType="withEffect">
+                                  <p:stCondLst>
+                                    <p:cond delay="600"/>
+                                  </p:stCondLst>
+                                  <p:childTnLst>
+                                    <p:set>
+                                      <p:cBhvr>
+                                        <p:cTn id="12" dur="1" fill="hold">
+                                          <p:stCondLst>
+                                            <p:cond delay="0"/>
+                                          </p:stCondLst>
+                                        </p:cTn>
+                                        <p:tgtEl>
+                                          <p:spTgt spid="22"/>
+                                        </p:tgtEl>
+                                        <p:attrNameLst>
+                                          <p:attrName>style.visibility</p:attrName>
+                                        </p:attrNameLst>
+                                      </p:cBhvr>
+                                      <p:to>
+                                        <p:strVal val="visible"/>
+                                      </p:to>
+                                    </p:set>
+                                    <p:animEffect transition="in" filter="fade">
+                                      <p:cBhvr>
+                                        <p:cTn id="13" dur="500"/>
+                                        <p:tgtEl>
+                                          <p:spTgt spid="22"/>
+                                        </p:tgtEl>
+                                      </p:cBhvr>
+                                    </p:animEffect>
+                                  </p:childTnLst>
+                                </p:cTn>
+                              </p:par>
+                              <p:par>
+                                <p:cTn id="14" presetID="10" presetClass="entr" presetSubtype="0" fill="hold" nodeType="withEffect">
+                                  <p:stCondLst>
+                                    <p:cond delay="900"/>
+                                  </p:stCondLst>
+                                  <p:childTnLst>
+                                    <p:set>
+                                      <p:cBhvr>
+                                        <p:cTn id="15" dur="1" fill="hold">
+                                          <p:stCondLst>
+                                            <p:cond delay="0"/>
+                                          </p:stCondLst>
+                                        </p:cTn>
+                                        <p:tgtEl>
+                                          <p:spTgt spid="23"/>
+                                        </p:tgtEl>
+                                        <p:attrNameLst>
+                                          <p:attrName>style.visibility</p:attrName>
+                                        </p:attrNameLst>
+                                      </p:cBhvr>
+                                      <p:to>
+                                        <p:strVal val="visible"/>
+                                      </p:to>
+                                    </p:set>
+                                    <p:animEffect transition="in" filter="fade">
+                                      <p:cBhvr>
+                                        <p:cTn id="16" dur="500"/>
+                                        <p:tgtEl>
+                                          <p:spTgt spid="23"/>
+                                        </p:tgtEl>
+                                      </p:cBhvr>
+                                    </p:animEffect>
+                                  </p:childTnLst>
+                                </p:cTn>
+                              </p:par>
+                              <p:par>
+                                <p:cTn id="17" presetID="10" presetClass="entr" presetSubtype="0" fill="hold" nodeType="withEffect">
+                                  <p:stCondLst>
+                                    <p:cond delay="1200"/>
+                                  </p:stCondLst>
+                                  <p:childTnLst>
+                                    <p:set>
+                                      <p:cBhvr>
+                                        <p:cTn id="18" dur="1" fill="hold">
+                                          <p:stCondLst>
+                                            <p:cond delay="0"/>
+                                          </p:stCondLst>
+                                        </p:cTn>
+                                        <p:tgtEl>
+                                          <p:spTgt spid="24"/>
+                                        </p:tgtEl>
+                                        <p:attrNameLst>
+                                          <p:attrName>style.visibility</p:attrName>
+                                        </p:attrNameLst>
+                                      </p:cBhvr>
+                                      <p:to>
+                                        <p:strVal val="visible"/>
+                                      </p:to>
+                                    </p:set>
+                                    <p:animEffect transition="in" filter="fade">
+                                      <p:cBhvr>
+                                        <p:cTn id="19" dur="500"/>
+                                        <p:tgtEl>
+                                          <p:spTgt spid="24"/>
+                                        </p:tgtEl>
+                                      </p:cBhvr>
+                                    </p:animEffect>
+                                  </p:childTnLst>
+                                </p:cTn>
+                              </p:par>
+                            </p:childTnLst>
+                          </p:cTn>
+                        </p:par>
+                      </p:childTnLst>
+                    </p:cTn>
+                  </p:par>
+                </p:childTnLst>
+              </p:cTn>
+              <p:prevCondLst>
+                <p:cond evt="onPrev" delay="0">
+                  <p:tgtEl>
+                    <p:sldTgt/>
+                  </p:tgtEl>
+                </p:cond>
+              </p:prevCondLst>
+              <p:nextCondLst>
+                <p:cond evt="onNext" delay="0">
+                  <p:tgtEl>
+                    <p:sldTgt/>
+                  </p:tgtEl>
+                </p:cond>
+              </p:nextCondLst>
+            </p:seq>
+          </p:childTnLst>
+        </p:cTn>
+      </p:par>
+    </p:tnLst>
+  </p:timing>
 </p:sld>
 </file>
 
@@ -18042,6 +20968,349 @@
   <p:clrMapOvr>
     <a:masterClrMapping/>
   </p:clrMapOvr>
+  <mc:AlternateContent xmlns:mc="http://schemas.openxmlformats.org/markup-compatibility/2006">
+    <mc:Choice xmlns:p14="http://schemas.microsoft.com/office/powerpoint/2010/main" Requires="p14">
+      <p:transition spd="med" p14:dur="700">
+        <p:fade/>
+      </p:transition>
+    </mc:Choice>
+    <mc:Fallback>
+      <p:transition spd="med">
+        <p:fade/>
+      </p:transition>
+    </mc:Fallback>
+  </mc:AlternateContent>
+  <p:timing>
+    <p:tnLst>
+      <p:par>
+        <p:cTn id="1" dur="indefinite" restart="never" nodeType="tmRoot">
+          <p:childTnLst>
+            <p:seq concurrent="1" nextAc="seek">
+              <p:cTn id="2" dur="indefinite" nodeType="mainSeq">
+                <p:childTnLst>
+                  <p:par>
+                    <p:cTn id="3" fill="hold">
+                      <p:stCondLst>
+                        <p:cond delay="indefinite"/>
+                        <p:cond evt="onBegin" delay="0">
+                          <p:tn val="2"/>
+                        </p:cond>
+                      </p:stCondLst>
+                      <p:childTnLst>
+                        <p:par>
+                          <p:cTn id="4" fill="hold">
+                            <p:stCondLst>
+                              <p:cond delay="0"/>
+                            </p:stCondLst>
+                            <p:childTnLst>
+                              <p:par>
+                                <p:cTn id="5" presetID="10" presetClass="entr" presetSubtype="0" fill="hold" nodeType="afterEffect">
+                                  <p:stCondLst>
+                                    <p:cond delay="0"/>
+                                  </p:stCondLst>
+                                  <p:childTnLst>
+                                    <p:set>
+                                      <p:cBhvr>
+                                        <p:cTn id="6" dur="1" fill="hold">
+                                          <p:stCondLst>
+                                            <p:cond delay="0"/>
+                                          </p:stCondLst>
+                                        </p:cTn>
+                                        <p:tgtEl>
+                                          <p:spTgt spid="4"/>
+                                        </p:tgtEl>
+                                        <p:attrNameLst>
+                                          <p:attrName>style.visibility</p:attrName>
+                                        </p:attrNameLst>
+                                      </p:cBhvr>
+                                      <p:to>
+                                        <p:strVal val="visible"/>
+                                      </p:to>
+                                    </p:set>
+                                    <p:animEffect transition="in" filter="fade">
+                                      <p:cBhvr>
+                                        <p:cTn id="7" dur="500"/>
+                                        <p:tgtEl>
+                                          <p:spTgt spid="4"/>
+                                        </p:tgtEl>
+                                      </p:cBhvr>
+                                    </p:animEffect>
+                                  </p:childTnLst>
+                                </p:cTn>
+                              </p:par>
+                              <p:par>
+                                <p:cTn id="8" presetID="10" presetClass="entr" presetSubtype="0" fill="hold" nodeType="withEffect">
+                                  <p:stCondLst>
+                                    <p:cond delay="225"/>
+                                  </p:stCondLst>
+                                  <p:childTnLst>
+                                    <p:set>
+                                      <p:cBhvr>
+                                        <p:cTn id="9" dur="1" fill="hold">
+                                          <p:stCondLst>
+                                            <p:cond delay="0"/>
+                                          </p:stCondLst>
+                                        </p:cTn>
+                                        <p:tgtEl>
+                                          <p:spTgt spid="13"/>
+                                        </p:tgtEl>
+                                        <p:attrNameLst>
+                                          <p:attrName>style.visibility</p:attrName>
+                                        </p:attrNameLst>
+                                      </p:cBhvr>
+                                      <p:to>
+                                        <p:strVal val="visible"/>
+                                      </p:to>
+                                    </p:set>
+                                    <p:animEffect transition="in" filter="fade">
+                                      <p:cBhvr>
+                                        <p:cTn id="10" dur="500"/>
+                                        <p:tgtEl>
+                                          <p:spTgt spid="13"/>
+                                        </p:tgtEl>
+                                      </p:cBhvr>
+                                    </p:animEffect>
+                                  </p:childTnLst>
+                                </p:cTn>
+                              </p:par>
+                              <p:par>
+                                <p:cTn id="11" presetID="10" presetClass="entr" presetSubtype="0" fill="hold" nodeType="withEffect">
+                                  <p:stCondLst>
+                                    <p:cond delay="450"/>
+                                  </p:stCondLst>
+                                  <p:childTnLst>
+                                    <p:set>
+                                      <p:cBhvr>
+                                        <p:cTn id="12" dur="1" fill="hold">
+                                          <p:stCondLst>
+                                            <p:cond delay="0"/>
+                                          </p:stCondLst>
+                                        </p:cTn>
+                                        <p:tgtEl>
+                                          <p:spTgt spid="14"/>
+                                        </p:tgtEl>
+                                        <p:attrNameLst>
+                                          <p:attrName>style.visibility</p:attrName>
+                                        </p:attrNameLst>
+                                      </p:cBhvr>
+                                      <p:to>
+                                        <p:strVal val="visible"/>
+                                      </p:to>
+                                    </p:set>
+                                    <p:animEffect transition="in" filter="fade">
+                                      <p:cBhvr>
+                                        <p:cTn id="13" dur="500"/>
+                                        <p:tgtEl>
+                                          <p:spTgt spid="14"/>
+                                        </p:tgtEl>
+                                      </p:cBhvr>
+                                    </p:animEffect>
+                                  </p:childTnLst>
+                                </p:cTn>
+                              </p:par>
+                              <p:par>
+                                <p:cTn id="14" presetID="10" presetClass="entr" presetSubtype="0" fill="hold" nodeType="withEffect">
+                                  <p:stCondLst>
+                                    <p:cond delay="675"/>
+                                  </p:stCondLst>
+                                  <p:childTnLst>
+                                    <p:set>
+                                      <p:cBhvr>
+                                        <p:cTn id="15" dur="1" fill="hold">
+                                          <p:stCondLst>
+                                            <p:cond delay="0"/>
+                                          </p:stCondLst>
+                                        </p:cTn>
+                                        <p:tgtEl>
+                                          <p:spTgt spid="15"/>
+                                        </p:tgtEl>
+                                        <p:attrNameLst>
+                                          <p:attrName>style.visibility</p:attrName>
+                                        </p:attrNameLst>
+                                      </p:cBhvr>
+                                      <p:to>
+                                        <p:strVal val="visible"/>
+                                      </p:to>
+                                    </p:set>
+                                    <p:animEffect transition="in" filter="fade">
+                                      <p:cBhvr>
+                                        <p:cTn id="16" dur="500"/>
+                                        <p:tgtEl>
+                                          <p:spTgt spid="15"/>
+                                        </p:tgtEl>
+                                      </p:cBhvr>
+                                    </p:animEffect>
+                                  </p:childTnLst>
+                                </p:cTn>
+                              </p:par>
+                              <p:par>
+                                <p:cTn id="17" presetID="10" presetClass="entr" presetSubtype="0" fill="hold" nodeType="withEffect">
+                                  <p:stCondLst>
+                                    <p:cond delay="900"/>
+                                  </p:stCondLst>
+                                  <p:childTnLst>
+                                    <p:set>
+                                      <p:cBhvr>
+                                        <p:cTn id="18" dur="1" fill="hold">
+                                          <p:stCondLst>
+                                            <p:cond delay="0"/>
+                                          </p:stCondLst>
+                                        </p:cTn>
+                                        <p:tgtEl>
+                                          <p:spTgt spid="16"/>
+                                        </p:tgtEl>
+                                        <p:attrNameLst>
+                                          <p:attrName>style.visibility</p:attrName>
+                                        </p:attrNameLst>
+                                      </p:cBhvr>
+                                      <p:to>
+                                        <p:strVal val="visible"/>
+                                      </p:to>
+                                    </p:set>
+                                    <p:animEffect transition="in" filter="fade">
+                                      <p:cBhvr>
+                                        <p:cTn id="19" dur="500"/>
+                                        <p:tgtEl>
+                                          <p:spTgt spid="16"/>
+                                        </p:tgtEl>
+                                      </p:cBhvr>
+                                    </p:animEffect>
+                                  </p:childTnLst>
+                                </p:cTn>
+                              </p:par>
+                              <p:par>
+                                <p:cTn id="20" presetID="10" presetClass="entr" presetSubtype="0" fill="hold" nodeType="withEffect">
+                                  <p:stCondLst>
+                                    <p:cond delay="1125"/>
+                                  </p:stCondLst>
+                                  <p:childTnLst>
+                                    <p:set>
+                                      <p:cBhvr>
+                                        <p:cTn id="21" dur="1" fill="hold">
+                                          <p:stCondLst>
+                                            <p:cond delay="0"/>
+                                          </p:stCondLst>
+                                        </p:cTn>
+                                        <p:tgtEl>
+                                          <p:spTgt spid="17"/>
+                                        </p:tgtEl>
+                                        <p:attrNameLst>
+                                          <p:attrName>style.visibility</p:attrName>
+                                        </p:attrNameLst>
+                                      </p:cBhvr>
+                                      <p:to>
+                                        <p:strVal val="visible"/>
+                                      </p:to>
+                                    </p:set>
+                                    <p:animEffect transition="in" filter="fade">
+                                      <p:cBhvr>
+                                        <p:cTn id="22" dur="500"/>
+                                        <p:tgtEl>
+                                          <p:spTgt spid="17"/>
+                                        </p:tgtEl>
+                                      </p:cBhvr>
+                                    </p:animEffect>
+                                  </p:childTnLst>
+                                </p:cTn>
+                              </p:par>
+                              <p:par>
+                                <p:cTn id="23" presetID="10" presetClass="entr" presetSubtype="0" fill="hold" nodeType="withEffect">
+                                  <p:stCondLst>
+                                    <p:cond delay="1350"/>
+                                  </p:stCondLst>
+                                  <p:childTnLst>
+                                    <p:set>
+                                      <p:cBhvr>
+                                        <p:cTn id="24" dur="1" fill="hold">
+                                          <p:stCondLst>
+                                            <p:cond delay="0"/>
+                                          </p:stCondLst>
+                                        </p:cTn>
+                                        <p:tgtEl>
+                                          <p:spTgt spid="18"/>
+                                        </p:tgtEl>
+                                        <p:attrNameLst>
+                                          <p:attrName>style.visibility</p:attrName>
+                                        </p:attrNameLst>
+                                      </p:cBhvr>
+                                      <p:to>
+                                        <p:strVal val="visible"/>
+                                      </p:to>
+                                    </p:set>
+                                    <p:animEffect transition="in" filter="fade">
+                                      <p:cBhvr>
+                                        <p:cTn id="25" dur="500"/>
+                                        <p:tgtEl>
+                                          <p:spTgt spid="18"/>
+                                        </p:tgtEl>
+                                      </p:cBhvr>
+                                    </p:animEffect>
+                                  </p:childTnLst>
+                                </p:cTn>
+                              </p:par>
+                              <p:par>
+                                <p:cTn id="26" presetID="10" presetClass="entr" presetSubtype="0" fill="hold" nodeType="withEffect">
+                                  <p:stCondLst>
+                                    <p:cond delay="1575"/>
+                                  </p:stCondLst>
+                                  <p:childTnLst>
+                                    <p:set>
+                                      <p:cBhvr>
+                                        <p:cTn id="27" dur="1" fill="hold">
+                                          <p:stCondLst>
+                                            <p:cond delay="0"/>
+                                          </p:stCondLst>
+                                        </p:cTn>
+                                        <p:tgtEl>
+                                          <p:spTgt spid="19"/>
+                                        </p:tgtEl>
+                                        <p:attrNameLst>
+                                          <p:attrName>style.visibility</p:attrName>
+                                        </p:attrNameLst>
+                                      </p:cBhvr>
+                                      <p:to>
+                                        <p:strVal val="visible"/>
+                                      </p:to>
+                                    </p:set>
+                                    <p:animEffect transition="in" filter="fade">
+                                      <p:cBhvr>
+                                        <p:cTn id="28" dur="500"/>
+                                        <p:tgtEl>
+                                          <p:spTgt spid="19"/>
+                                        </p:tgtEl>
+                                      </p:cBhvr>
+                                    </p:animEffect>
+                                  </p:childTnLst>
+                                </p:cTn>
+                              </p:par>
+                            </p:childTnLst>
+                          </p:cTn>
+                        </p:par>
+                      </p:childTnLst>
+                    </p:cTn>
+                  </p:par>
+                </p:childTnLst>
+              </p:cTn>
+              <p:prevCondLst>
+                <p:cond evt="onPrev" delay="0">
+                  <p:tgtEl>
+                    <p:sldTgt/>
+                  </p:tgtEl>
+                </p:cond>
+              </p:prevCondLst>
+              <p:nextCondLst>
+                <p:cond evt="onNext" delay="0">
+                  <p:tgtEl>
+                    <p:sldTgt/>
+                  </p:tgtEl>
+                </p:cond>
+              </p:nextCondLst>
+            </p:seq>
+          </p:childTnLst>
+        </p:cTn>
+      </p:par>
+    </p:tnLst>
+  </p:timing>
 </p:sld>
 </file>
 
@@ -19238,6 +22507,244 @@
   <p:clrMapOvr>
     <a:masterClrMapping/>
   </p:clrMapOvr>
+  <mc:AlternateContent xmlns:mc="http://schemas.openxmlformats.org/markup-compatibility/2006">
+    <mc:Choice xmlns:p14="http://schemas.microsoft.com/office/powerpoint/2010/main" Requires="p14">
+      <p:transition spd="med" p14:dur="700">
+        <p:fade/>
+      </p:transition>
+    </mc:Choice>
+    <mc:Fallback>
+      <p:transition spd="med">
+        <p:fade/>
+      </p:transition>
+    </mc:Fallback>
+  </mc:AlternateContent>
+  <p:timing>
+    <p:tnLst>
+      <p:par>
+        <p:cTn id="1" dur="indefinite" restart="never" nodeType="tmRoot">
+          <p:childTnLst>
+            <p:seq concurrent="1" nextAc="seek">
+              <p:cTn id="2" dur="indefinite" nodeType="mainSeq">
+                <p:childTnLst>
+                  <p:par>
+                    <p:cTn id="3" fill="hold">
+                      <p:stCondLst>
+                        <p:cond delay="indefinite"/>
+                        <p:cond evt="onBegin" delay="0">
+                          <p:tn val="2"/>
+                        </p:cond>
+                      </p:stCondLst>
+                      <p:childTnLst>
+                        <p:par>
+                          <p:cTn id="4" fill="hold">
+                            <p:stCondLst>
+                              <p:cond delay="0"/>
+                            </p:stCondLst>
+                            <p:childTnLst>
+                              <p:par>
+                                <p:cTn id="5" presetID="10" presetClass="entr" presetSubtype="0" fill="hold" nodeType="afterEffect">
+                                  <p:stCondLst>
+                                    <p:cond delay="0"/>
+                                  </p:stCondLst>
+                                  <p:childTnLst>
+                                    <p:set>
+                                      <p:cBhvr>
+                                        <p:cTn id="6" dur="1" fill="hold">
+                                          <p:stCondLst>
+                                            <p:cond delay="0"/>
+                                          </p:stCondLst>
+                                        </p:cTn>
+                                        <p:tgtEl>
+                                          <p:spTgt spid="4"/>
+                                        </p:tgtEl>
+                                        <p:attrNameLst>
+                                          <p:attrName>style.visibility</p:attrName>
+                                        </p:attrNameLst>
+                                      </p:cBhvr>
+                                      <p:to>
+                                        <p:strVal val="visible"/>
+                                      </p:to>
+                                    </p:set>
+                                    <p:animEffect transition="in" filter="fade">
+                                      <p:cBhvr>
+                                        <p:cTn id="7" dur="500"/>
+                                        <p:tgtEl>
+                                          <p:spTgt spid="4"/>
+                                        </p:tgtEl>
+                                      </p:cBhvr>
+                                    </p:animEffect>
+                                  </p:childTnLst>
+                                </p:cTn>
+                              </p:par>
+                              <p:par>
+                                <p:cTn id="8" presetID="10" presetClass="entr" presetSubtype="0" fill="hold" nodeType="withEffect">
+                                  <p:stCondLst>
+                                    <p:cond delay="300"/>
+                                  </p:stCondLst>
+                                  <p:childTnLst>
+                                    <p:set>
+                                      <p:cBhvr>
+                                        <p:cTn id="9" dur="1" fill="hold">
+                                          <p:stCondLst>
+                                            <p:cond delay="0"/>
+                                          </p:stCondLst>
+                                        </p:cTn>
+                                        <p:tgtEl>
+                                          <p:spTgt spid="33"/>
+                                        </p:tgtEl>
+                                        <p:attrNameLst>
+                                          <p:attrName>style.visibility</p:attrName>
+                                        </p:attrNameLst>
+                                      </p:cBhvr>
+                                      <p:to>
+                                        <p:strVal val="visible"/>
+                                      </p:to>
+                                    </p:set>
+                                    <p:animEffect transition="in" filter="fade">
+                                      <p:cBhvr>
+                                        <p:cTn id="10" dur="500"/>
+                                        <p:tgtEl>
+                                          <p:spTgt spid="33"/>
+                                        </p:tgtEl>
+                                      </p:cBhvr>
+                                    </p:animEffect>
+                                  </p:childTnLst>
+                                </p:cTn>
+                              </p:par>
+                              <p:par>
+                                <p:cTn id="11" presetID="10" presetClass="entr" presetSubtype="0" fill="hold" nodeType="withEffect">
+                                  <p:stCondLst>
+                                    <p:cond delay="600"/>
+                                  </p:stCondLst>
+                                  <p:childTnLst>
+                                    <p:set>
+                                      <p:cBhvr>
+                                        <p:cTn id="12" dur="1" fill="hold">
+                                          <p:stCondLst>
+                                            <p:cond delay="0"/>
+                                          </p:stCondLst>
+                                        </p:cTn>
+                                        <p:tgtEl>
+                                          <p:spTgt spid="34"/>
+                                        </p:tgtEl>
+                                        <p:attrNameLst>
+                                          <p:attrName>style.visibility</p:attrName>
+                                        </p:attrNameLst>
+                                      </p:cBhvr>
+                                      <p:to>
+                                        <p:strVal val="visible"/>
+                                      </p:to>
+                                    </p:set>
+                                    <p:animEffect transition="in" filter="fade">
+                                      <p:cBhvr>
+                                        <p:cTn id="13" dur="500"/>
+                                        <p:tgtEl>
+                                          <p:spTgt spid="34"/>
+                                        </p:tgtEl>
+                                      </p:cBhvr>
+                                    </p:animEffect>
+                                  </p:childTnLst>
+                                </p:cTn>
+                              </p:par>
+                              <p:par>
+                                <p:cTn id="14" presetID="10" presetClass="entr" presetSubtype="0" fill="hold" nodeType="withEffect">
+                                  <p:stCondLst>
+                                    <p:cond delay="900"/>
+                                  </p:stCondLst>
+                                  <p:childTnLst>
+                                    <p:set>
+                                      <p:cBhvr>
+                                        <p:cTn id="15" dur="1" fill="hold">
+                                          <p:stCondLst>
+                                            <p:cond delay="0"/>
+                                          </p:stCondLst>
+                                        </p:cTn>
+                                        <p:tgtEl>
+                                          <p:spTgt spid="35"/>
+                                        </p:tgtEl>
+                                        <p:attrNameLst>
+                                          <p:attrName>style.visibility</p:attrName>
+                                        </p:attrNameLst>
+                                      </p:cBhvr>
+                                      <p:to>
+                                        <p:strVal val="visible"/>
+                                      </p:to>
+                                    </p:set>
+                                    <p:animEffect transition="in" filter="fade">
+                                      <p:cBhvr>
+                                        <p:cTn id="16" dur="500"/>
+                                        <p:tgtEl>
+                                          <p:spTgt spid="35"/>
+                                        </p:tgtEl>
+                                      </p:cBhvr>
+                                    </p:animEffect>
+                                  </p:childTnLst>
+                                </p:cTn>
+                              </p:par>
+                              <p:par>
+                                <p:cTn id="17" presetID="10" presetClass="entr" presetSubtype="0" fill="hold" nodeType="withEffect">
+                                  <p:stCondLst>
+                                    <p:cond delay="1200"/>
+                                  </p:stCondLst>
+                                  <p:childTnLst>
+                                    <p:set>
+                                      <p:cBhvr>
+                                        <p:cTn id="18" dur="1" fill="hold">
+                                          <p:stCondLst>
+                                            <p:cond delay="0"/>
+                                          </p:stCondLst>
+                                        </p:cTn>
+                                        <p:tgtEl>
+                                          <p:spTgt spid="36"/>
+                                        </p:tgtEl>
+                                        <p:attrNameLst>
+                                          <p:attrName>style.visibility</p:attrName>
+                                        </p:attrNameLst>
+                                      </p:cBhvr>
+                                      <p:to>
+                                        <p:strVal val="visible"/>
+                                      </p:to>
+                                    </p:set>
+                                    <p:animEffect transition="in" filter="fade">
+                                      <p:cBhvr>
+                                        <p:cTn id="19" dur="500"/>
+                                        <p:tgtEl>
+                                          <p:spTgt spid="36"/>
+                                        </p:tgtEl>
+                                      </p:cBhvr>
+                                    </p:animEffect>
+                                  </p:childTnLst>
+                                </p:cTn>
+                              </p:par>
+                            </p:childTnLst>
+                          </p:cTn>
+                        </p:par>
+                      </p:childTnLst>
+                    </p:cTn>
+                  </p:par>
+                </p:childTnLst>
+              </p:cTn>
+              <p:prevCondLst>
+                <p:cond evt="onPrev" delay="0">
+                  <p:tgtEl>
+                    <p:sldTgt/>
+                  </p:tgtEl>
+                </p:cond>
+              </p:prevCondLst>
+              <p:nextCondLst>
+                <p:cond evt="onNext" delay="0">
+                  <p:tgtEl>
+                    <p:sldTgt/>
+                  </p:tgtEl>
+                </p:cond>
+              </p:nextCondLst>
+            </p:seq>
+          </p:childTnLst>
+        </p:cTn>
+      </p:par>
+    </p:tnLst>
+  </p:timing>
 </p:sld>
 </file>
 
@@ -20366,6 +23873,209 @@
   <p:clrMapOvr>
     <a:masterClrMapping/>
   </p:clrMapOvr>
+  <mc:AlternateContent xmlns:mc="http://schemas.openxmlformats.org/markup-compatibility/2006">
+    <mc:Choice xmlns:p14="http://schemas.microsoft.com/office/powerpoint/2010/main" Requires="p14">
+      <p:transition spd="med" p14:dur="700">
+        <p:fade/>
+      </p:transition>
+    </mc:Choice>
+    <mc:Fallback>
+      <p:transition spd="med">
+        <p:fade/>
+      </p:transition>
+    </mc:Fallback>
+  </mc:AlternateContent>
+  <p:timing>
+    <p:tnLst>
+      <p:par>
+        <p:cTn id="1" dur="indefinite" restart="never" nodeType="tmRoot">
+          <p:childTnLst>
+            <p:seq concurrent="1" nextAc="seek">
+              <p:cTn id="2" dur="indefinite" nodeType="mainSeq">
+                <p:childTnLst>
+                  <p:par>
+                    <p:cTn id="3" fill="hold">
+                      <p:stCondLst>
+                        <p:cond delay="indefinite"/>
+                        <p:cond evt="onBegin" delay="0">
+                          <p:tn val="2"/>
+                        </p:cond>
+                      </p:stCondLst>
+                      <p:childTnLst>
+                        <p:par>
+                          <p:cTn id="4" fill="hold">
+                            <p:stCondLst>
+                              <p:cond delay="0"/>
+                            </p:stCondLst>
+                            <p:childTnLst>
+                              <p:par>
+                                <p:cTn id="5" presetID="10" presetClass="entr" presetSubtype="0" fill="hold" nodeType="afterEffect">
+                                  <p:stCondLst>
+                                    <p:cond delay="0"/>
+                                  </p:stCondLst>
+                                  <p:childTnLst>
+                                    <p:set>
+                                      <p:cBhvr>
+                                        <p:cTn id="6" dur="1" fill="hold">
+                                          <p:stCondLst>
+                                            <p:cond delay="0"/>
+                                          </p:stCondLst>
+                                        </p:cTn>
+                                        <p:tgtEl>
+                                          <p:spTgt spid="4"/>
+                                        </p:tgtEl>
+                                        <p:attrNameLst>
+                                          <p:attrName>style.visibility</p:attrName>
+                                        </p:attrNameLst>
+                                      </p:cBhvr>
+                                      <p:to>
+                                        <p:strVal val="visible"/>
+                                      </p:to>
+                                    </p:set>
+                                    <p:animEffect transition="in" filter="fade">
+                                      <p:cBhvr>
+                                        <p:cTn id="7" dur="500"/>
+                                        <p:tgtEl>
+                                          <p:spTgt spid="4"/>
+                                        </p:tgtEl>
+                                      </p:cBhvr>
+                                    </p:animEffect>
+                                  </p:childTnLst>
+                                </p:cTn>
+                              </p:par>
+                              <p:par>
+                                <p:cTn id="8" presetID="10" presetClass="entr" presetSubtype="0" fill="hold" nodeType="withEffect">
+                                  <p:stCondLst>
+                                    <p:cond delay="300"/>
+                                  </p:stCondLst>
+                                  <p:childTnLst>
+                                    <p:set>
+                                      <p:cBhvr>
+                                        <p:cTn id="9" dur="1" fill="hold">
+                                          <p:stCondLst>
+                                            <p:cond delay="0"/>
+                                          </p:stCondLst>
+                                        </p:cTn>
+                                        <p:tgtEl>
+                                          <p:spTgt spid="29"/>
+                                        </p:tgtEl>
+                                        <p:attrNameLst>
+                                          <p:attrName>style.visibility</p:attrName>
+                                        </p:attrNameLst>
+                                      </p:cBhvr>
+                                      <p:to>
+                                        <p:strVal val="visible"/>
+                                      </p:to>
+                                    </p:set>
+                                    <p:animEffect transition="in" filter="fade">
+                                      <p:cBhvr>
+                                        <p:cTn id="10" dur="500"/>
+                                        <p:tgtEl>
+                                          <p:spTgt spid="29"/>
+                                        </p:tgtEl>
+                                      </p:cBhvr>
+                                    </p:animEffect>
+                                  </p:childTnLst>
+                                </p:cTn>
+                              </p:par>
+                              <p:par>
+                                <p:cTn id="11" presetID="10" presetClass="entr" presetSubtype="0" fill="hold" nodeType="withEffect">
+                                  <p:stCondLst>
+                                    <p:cond delay="600"/>
+                                  </p:stCondLst>
+                                  <p:childTnLst>
+                                    <p:set>
+                                      <p:cBhvr>
+                                        <p:cTn id="12" dur="1" fill="hold">
+                                          <p:stCondLst>
+                                            <p:cond delay="0"/>
+                                          </p:stCondLst>
+                                        </p:cTn>
+                                        <p:tgtEl>
+                                          <p:spTgt spid="30"/>
+                                        </p:tgtEl>
+                                        <p:attrNameLst>
+                                          <p:attrName>style.visibility</p:attrName>
+                                        </p:attrNameLst>
+                                      </p:cBhvr>
+                                      <p:to>
+                                        <p:strVal val="visible"/>
+                                      </p:to>
+                                    </p:set>
+                                    <p:animEffect transition="in" filter="fade">
+                                      <p:cBhvr>
+                                        <p:cTn id="13" dur="500"/>
+                                        <p:tgtEl>
+                                          <p:spTgt spid="30"/>
+                                        </p:tgtEl>
+                                      </p:cBhvr>
+                                    </p:animEffect>
+                                  </p:childTnLst>
+                                </p:cTn>
+                              </p:par>
+                              <p:par>
+                                <p:cTn id="14" presetID="10" presetClass="entr" presetSubtype="0" fill="hold" nodeType="withEffect">
+                                  <p:stCondLst>
+                                    <p:cond delay="900"/>
+                                  </p:stCondLst>
+                                  <p:childTnLst>
+                                    <p:set>
+                                      <p:cBhvr>
+                                        <p:cTn id="15" dur="1" fill="hold">
+                                          <p:stCondLst>
+                                            <p:cond delay="0"/>
+                                          </p:stCondLst>
+                                        </p:cTn>
+                                        <p:tgtEl>
+                                          <p:spTgt spid="31"/>
+                                        </p:tgtEl>
+                                        <p:attrNameLst>
+                                          <p:attrName>style.visibility</p:attrName>
+                                        </p:attrNameLst>
+                                      </p:cBhvr>
+                                      <p:to>
+                                        <p:strVal val="visible"/>
+                                      </p:to>
+                                    </p:set>
+                                    <p:animEffect transition="in" filter="fade">
+                                      <p:cBhvr>
+                                        <p:cTn id="16" dur="500"/>
+                                        <p:tgtEl>
+                                          <p:spTgt spid="31"/>
+                                        </p:tgtEl>
+                                      </p:cBhvr>
+                                    </p:animEffect>
+                                  </p:childTnLst>
+                                </p:cTn>
+                              </p:par>
+                            </p:childTnLst>
+                          </p:cTn>
+                        </p:par>
+                      </p:childTnLst>
+                    </p:cTn>
+                  </p:par>
+                </p:childTnLst>
+              </p:cTn>
+              <p:prevCondLst>
+                <p:cond evt="onPrev" delay="0">
+                  <p:tgtEl>
+                    <p:sldTgt/>
+                  </p:tgtEl>
+                </p:cond>
+              </p:prevCondLst>
+              <p:nextCondLst>
+                <p:cond evt="onNext" delay="0">
+                  <p:tgtEl>
+                    <p:sldTgt/>
+                  </p:tgtEl>
+                </p:cond>
+              </p:nextCondLst>
+            </p:seq>
+          </p:childTnLst>
+        </p:cTn>
+      </p:par>
+    </p:tnLst>
+  </p:timing>
 </p:sld>
 </file>
 
@@ -20623,6 +24333,244 @@
   <p:clrMapOvr>
     <a:masterClrMapping/>
   </p:clrMapOvr>
+  <mc:AlternateContent xmlns:mc="http://schemas.openxmlformats.org/markup-compatibility/2006">
+    <mc:Choice xmlns:p14="http://schemas.microsoft.com/office/powerpoint/2010/main" Requires="p14">
+      <p:transition spd="med" p14:dur="700">
+        <p:fade/>
+      </p:transition>
+    </mc:Choice>
+    <mc:Fallback>
+      <p:transition spd="med">
+        <p:fade/>
+      </p:transition>
+    </mc:Fallback>
+  </mc:AlternateContent>
+  <p:timing>
+    <p:tnLst>
+      <p:par>
+        <p:cTn id="1" dur="indefinite" restart="never" nodeType="tmRoot">
+          <p:childTnLst>
+            <p:seq concurrent="1" nextAc="seek">
+              <p:cTn id="2" dur="indefinite" nodeType="mainSeq">
+                <p:childTnLst>
+                  <p:par>
+                    <p:cTn id="3" fill="hold">
+                      <p:stCondLst>
+                        <p:cond delay="indefinite"/>
+                        <p:cond evt="onBegin" delay="0">
+                          <p:tn val="2"/>
+                        </p:cond>
+                      </p:stCondLst>
+                      <p:childTnLst>
+                        <p:par>
+                          <p:cTn id="4" fill="hold">
+                            <p:stCondLst>
+                              <p:cond delay="0"/>
+                            </p:stCondLst>
+                            <p:childTnLst>
+                              <p:par>
+                                <p:cTn id="5" presetID="10" presetClass="entr" presetSubtype="0" fill="hold" nodeType="afterEffect">
+                                  <p:stCondLst>
+                                    <p:cond delay="0"/>
+                                  </p:stCondLst>
+                                  <p:childTnLst>
+                                    <p:set>
+                                      <p:cBhvr>
+                                        <p:cTn id="6" dur="1" fill="hold">
+                                          <p:stCondLst>
+                                            <p:cond delay="0"/>
+                                          </p:stCondLst>
+                                        </p:cTn>
+                                        <p:tgtEl>
+                                          <p:spTgt spid="3"/>
+                                        </p:tgtEl>
+                                        <p:attrNameLst>
+                                          <p:attrName>style.visibility</p:attrName>
+                                        </p:attrNameLst>
+                                      </p:cBhvr>
+                                      <p:to>
+                                        <p:strVal val="visible"/>
+                                      </p:to>
+                                    </p:set>
+                                    <p:animEffect transition="in" filter="fade">
+                                      <p:cBhvr>
+                                        <p:cTn id="7" dur="500"/>
+                                        <p:tgtEl>
+                                          <p:spTgt spid="3"/>
+                                        </p:tgtEl>
+                                      </p:cBhvr>
+                                    </p:animEffect>
+                                  </p:childTnLst>
+                                </p:cTn>
+                              </p:par>
+                              <p:par>
+                                <p:cTn id="8" presetID="10" presetClass="entr" presetSubtype="0" fill="hold" nodeType="withEffect">
+                                  <p:stCondLst>
+                                    <p:cond delay="300"/>
+                                  </p:stCondLst>
+                                  <p:childTnLst>
+                                    <p:set>
+                                      <p:cBhvr>
+                                        <p:cTn id="9" dur="1" fill="hold">
+                                          <p:stCondLst>
+                                            <p:cond delay="0"/>
+                                          </p:stCondLst>
+                                        </p:cTn>
+                                        <p:tgtEl>
+                                          <p:spTgt spid="4"/>
+                                        </p:tgtEl>
+                                        <p:attrNameLst>
+                                          <p:attrName>style.visibility</p:attrName>
+                                        </p:attrNameLst>
+                                      </p:cBhvr>
+                                      <p:to>
+                                        <p:strVal val="visible"/>
+                                      </p:to>
+                                    </p:set>
+                                    <p:animEffect transition="in" filter="fade">
+                                      <p:cBhvr>
+                                        <p:cTn id="10" dur="500"/>
+                                        <p:tgtEl>
+                                          <p:spTgt spid="4"/>
+                                        </p:tgtEl>
+                                      </p:cBhvr>
+                                    </p:animEffect>
+                                  </p:childTnLst>
+                                </p:cTn>
+                              </p:par>
+                              <p:par>
+                                <p:cTn id="11" presetID="10" presetClass="entr" presetSubtype="0" fill="hold" nodeType="withEffect">
+                                  <p:stCondLst>
+                                    <p:cond delay="600"/>
+                                  </p:stCondLst>
+                                  <p:childTnLst>
+                                    <p:set>
+                                      <p:cBhvr>
+                                        <p:cTn id="12" dur="1" fill="hold">
+                                          <p:stCondLst>
+                                            <p:cond delay="0"/>
+                                          </p:stCondLst>
+                                        </p:cTn>
+                                        <p:tgtEl>
+                                          <p:spTgt spid="5"/>
+                                        </p:tgtEl>
+                                        <p:attrNameLst>
+                                          <p:attrName>style.visibility</p:attrName>
+                                        </p:attrNameLst>
+                                      </p:cBhvr>
+                                      <p:to>
+                                        <p:strVal val="visible"/>
+                                      </p:to>
+                                    </p:set>
+                                    <p:animEffect transition="in" filter="fade">
+                                      <p:cBhvr>
+                                        <p:cTn id="13" dur="500"/>
+                                        <p:tgtEl>
+                                          <p:spTgt spid="5"/>
+                                        </p:tgtEl>
+                                      </p:cBhvr>
+                                    </p:animEffect>
+                                  </p:childTnLst>
+                                </p:cTn>
+                              </p:par>
+                              <p:par>
+                                <p:cTn id="14" presetID="10" presetClass="entr" presetSubtype="0" fill="hold" nodeType="withEffect">
+                                  <p:stCondLst>
+                                    <p:cond delay="900"/>
+                                  </p:stCondLst>
+                                  <p:childTnLst>
+                                    <p:set>
+                                      <p:cBhvr>
+                                        <p:cTn id="15" dur="1" fill="hold">
+                                          <p:stCondLst>
+                                            <p:cond delay="0"/>
+                                          </p:stCondLst>
+                                        </p:cTn>
+                                        <p:tgtEl>
+                                          <p:spTgt spid="6"/>
+                                        </p:tgtEl>
+                                        <p:attrNameLst>
+                                          <p:attrName>style.visibility</p:attrName>
+                                        </p:attrNameLst>
+                                      </p:cBhvr>
+                                      <p:to>
+                                        <p:strVal val="visible"/>
+                                      </p:to>
+                                    </p:set>
+                                    <p:animEffect transition="in" filter="fade">
+                                      <p:cBhvr>
+                                        <p:cTn id="16" dur="500"/>
+                                        <p:tgtEl>
+                                          <p:spTgt spid="6"/>
+                                        </p:tgtEl>
+                                      </p:cBhvr>
+                                    </p:animEffect>
+                                  </p:childTnLst>
+                                </p:cTn>
+                              </p:par>
+                              <p:par>
+                                <p:cTn id="17" presetID="10" presetClass="entr" presetSubtype="0" fill="hold" nodeType="withEffect">
+                                  <p:stCondLst>
+                                    <p:cond delay="1200"/>
+                                  </p:stCondLst>
+                                  <p:childTnLst>
+                                    <p:set>
+                                      <p:cBhvr>
+                                        <p:cTn id="18" dur="1" fill="hold">
+                                          <p:stCondLst>
+                                            <p:cond delay="0"/>
+                                          </p:stCondLst>
+                                        </p:cTn>
+                                        <p:tgtEl>
+                                          <p:spTgt spid="7"/>
+                                        </p:tgtEl>
+                                        <p:attrNameLst>
+                                          <p:attrName>style.visibility</p:attrName>
+                                        </p:attrNameLst>
+                                      </p:cBhvr>
+                                      <p:to>
+                                        <p:strVal val="visible"/>
+                                      </p:to>
+                                    </p:set>
+                                    <p:animEffect transition="in" filter="fade">
+                                      <p:cBhvr>
+                                        <p:cTn id="19" dur="500"/>
+                                        <p:tgtEl>
+                                          <p:spTgt spid="7"/>
+                                        </p:tgtEl>
+                                      </p:cBhvr>
+                                    </p:animEffect>
+                                  </p:childTnLst>
+                                </p:cTn>
+                              </p:par>
+                            </p:childTnLst>
+                          </p:cTn>
+                        </p:par>
+                      </p:childTnLst>
+                    </p:cTn>
+                  </p:par>
+                </p:childTnLst>
+              </p:cTn>
+              <p:prevCondLst>
+                <p:cond evt="onPrev" delay="0">
+                  <p:tgtEl>
+                    <p:sldTgt/>
+                  </p:tgtEl>
+                </p:cond>
+              </p:prevCondLst>
+              <p:nextCondLst>
+                <p:cond evt="onNext" delay="0">
+                  <p:tgtEl>
+                    <p:sldTgt/>
+                  </p:tgtEl>
+                </p:cond>
+              </p:nextCondLst>
+            </p:seq>
+          </p:childTnLst>
+        </p:cTn>
+      </p:par>
+    </p:tnLst>
+  </p:timing>
 </p:sld>
 </file>
 
@@ -22029,6 +25977,384 @@
   <p:clrMapOvr>
     <a:masterClrMapping/>
   </p:clrMapOvr>
+  <mc:AlternateContent xmlns:mc="http://schemas.openxmlformats.org/markup-compatibility/2006">
+    <mc:Choice xmlns:p14="http://schemas.microsoft.com/office/powerpoint/2010/main" Requires="p14">
+      <p:transition spd="med" p14:dur="700">
+        <p:fade/>
+      </p:transition>
+    </mc:Choice>
+    <mc:Fallback>
+      <p:transition spd="med">
+        <p:fade/>
+      </p:transition>
+    </mc:Fallback>
+  </mc:AlternateContent>
+  <p:timing>
+    <p:tnLst>
+      <p:par>
+        <p:cTn id="1" dur="indefinite" restart="never" nodeType="tmRoot">
+          <p:childTnLst>
+            <p:seq concurrent="1" nextAc="seek">
+              <p:cTn id="2" dur="indefinite" nodeType="mainSeq">
+                <p:childTnLst>
+                  <p:par>
+                    <p:cTn id="3" fill="hold">
+                      <p:stCondLst>
+                        <p:cond delay="indefinite"/>
+                        <p:cond evt="onBegin" delay="0">
+                          <p:tn val="2"/>
+                        </p:cond>
+                      </p:stCondLst>
+                      <p:childTnLst>
+                        <p:par>
+                          <p:cTn id="4" fill="hold">
+                            <p:stCondLst>
+                              <p:cond delay="0"/>
+                            </p:stCondLst>
+                            <p:childTnLst>
+                              <p:par>
+                                <p:cTn id="5" presetID="10" presetClass="entr" presetSubtype="0" fill="hold" nodeType="afterEffect">
+                                  <p:stCondLst>
+                                    <p:cond delay="0"/>
+                                  </p:stCondLst>
+                                  <p:childTnLst>
+                                    <p:set>
+                                      <p:cBhvr>
+                                        <p:cTn id="6" dur="1" fill="hold">
+                                          <p:stCondLst>
+                                            <p:cond delay="0"/>
+                                          </p:stCondLst>
+                                        </p:cTn>
+                                        <p:tgtEl>
+                                          <p:spTgt spid="4"/>
+                                        </p:tgtEl>
+                                        <p:attrNameLst>
+                                          <p:attrName>style.visibility</p:attrName>
+                                        </p:attrNameLst>
+                                      </p:cBhvr>
+                                      <p:to>
+                                        <p:strVal val="visible"/>
+                                      </p:to>
+                                    </p:set>
+                                    <p:animEffect transition="in" filter="fade">
+                                      <p:cBhvr>
+                                        <p:cTn id="7" dur="500"/>
+                                        <p:tgtEl>
+                                          <p:spTgt spid="4"/>
+                                        </p:tgtEl>
+                                      </p:cBhvr>
+                                    </p:animEffect>
+                                  </p:childTnLst>
+                                </p:cTn>
+                              </p:par>
+                              <p:par>
+                                <p:cTn id="8" presetID="10" presetClass="entr" presetSubtype="0" fill="hold" nodeType="withEffect">
+                                  <p:stCondLst>
+                                    <p:cond delay="200"/>
+                                  </p:stCondLst>
+                                  <p:childTnLst>
+                                    <p:set>
+                                      <p:cBhvr>
+                                        <p:cTn id="9" dur="1" fill="hold">
+                                          <p:stCondLst>
+                                            <p:cond delay="0"/>
+                                          </p:stCondLst>
+                                        </p:cTn>
+                                        <p:tgtEl>
+                                          <p:spTgt spid="5"/>
+                                        </p:tgtEl>
+                                        <p:attrNameLst>
+                                          <p:attrName>style.visibility</p:attrName>
+                                        </p:attrNameLst>
+                                      </p:cBhvr>
+                                      <p:to>
+                                        <p:strVal val="visible"/>
+                                      </p:to>
+                                    </p:set>
+                                    <p:animEffect transition="in" filter="fade">
+                                      <p:cBhvr>
+                                        <p:cTn id="10" dur="500"/>
+                                        <p:tgtEl>
+                                          <p:spTgt spid="5"/>
+                                        </p:tgtEl>
+                                      </p:cBhvr>
+                                    </p:animEffect>
+                                  </p:childTnLst>
+                                </p:cTn>
+                              </p:par>
+                              <p:par>
+                                <p:cTn id="11" presetID="10" presetClass="entr" presetSubtype="0" fill="hold" nodeType="withEffect">
+                                  <p:stCondLst>
+                                    <p:cond delay="400"/>
+                                  </p:stCondLst>
+                                  <p:childTnLst>
+                                    <p:set>
+                                      <p:cBhvr>
+                                        <p:cTn id="12" dur="1" fill="hold">
+                                          <p:stCondLst>
+                                            <p:cond delay="0"/>
+                                          </p:stCondLst>
+                                        </p:cTn>
+                                        <p:tgtEl>
+                                          <p:spTgt spid="14"/>
+                                        </p:tgtEl>
+                                        <p:attrNameLst>
+                                          <p:attrName>style.visibility</p:attrName>
+                                        </p:attrNameLst>
+                                      </p:cBhvr>
+                                      <p:to>
+                                        <p:strVal val="visible"/>
+                                      </p:to>
+                                    </p:set>
+                                    <p:animEffect transition="in" filter="fade">
+                                      <p:cBhvr>
+                                        <p:cTn id="13" dur="500"/>
+                                        <p:tgtEl>
+                                          <p:spTgt spid="14"/>
+                                        </p:tgtEl>
+                                      </p:cBhvr>
+                                    </p:animEffect>
+                                  </p:childTnLst>
+                                </p:cTn>
+                              </p:par>
+                              <p:par>
+                                <p:cTn id="14" presetID="10" presetClass="entr" presetSubtype="0" fill="hold" nodeType="withEffect">
+                                  <p:stCondLst>
+                                    <p:cond delay="600"/>
+                                  </p:stCondLst>
+                                  <p:childTnLst>
+                                    <p:set>
+                                      <p:cBhvr>
+                                        <p:cTn id="15" dur="1" fill="hold">
+                                          <p:stCondLst>
+                                            <p:cond delay="0"/>
+                                          </p:stCondLst>
+                                        </p:cTn>
+                                        <p:tgtEl>
+                                          <p:spTgt spid="15"/>
+                                        </p:tgtEl>
+                                        <p:attrNameLst>
+                                          <p:attrName>style.visibility</p:attrName>
+                                        </p:attrNameLst>
+                                      </p:cBhvr>
+                                      <p:to>
+                                        <p:strVal val="visible"/>
+                                      </p:to>
+                                    </p:set>
+                                    <p:animEffect transition="in" filter="fade">
+                                      <p:cBhvr>
+                                        <p:cTn id="16" dur="500"/>
+                                        <p:tgtEl>
+                                          <p:spTgt spid="15"/>
+                                        </p:tgtEl>
+                                      </p:cBhvr>
+                                    </p:animEffect>
+                                  </p:childTnLst>
+                                </p:cTn>
+                              </p:par>
+                              <p:par>
+                                <p:cTn id="17" presetID="10" presetClass="entr" presetSubtype="0" fill="hold" nodeType="withEffect">
+                                  <p:stCondLst>
+                                    <p:cond delay="800"/>
+                                  </p:stCondLst>
+                                  <p:childTnLst>
+                                    <p:set>
+                                      <p:cBhvr>
+                                        <p:cTn id="18" dur="1" fill="hold">
+                                          <p:stCondLst>
+                                            <p:cond delay="0"/>
+                                          </p:stCondLst>
+                                        </p:cTn>
+                                        <p:tgtEl>
+                                          <p:spTgt spid="20"/>
+                                        </p:tgtEl>
+                                        <p:attrNameLst>
+                                          <p:attrName>style.visibility</p:attrName>
+                                        </p:attrNameLst>
+                                      </p:cBhvr>
+                                      <p:to>
+                                        <p:strVal val="visible"/>
+                                      </p:to>
+                                    </p:set>
+                                    <p:animEffect transition="in" filter="fade">
+                                      <p:cBhvr>
+                                        <p:cTn id="19" dur="500"/>
+                                        <p:tgtEl>
+                                          <p:spTgt spid="20"/>
+                                        </p:tgtEl>
+                                      </p:cBhvr>
+                                    </p:animEffect>
+                                  </p:childTnLst>
+                                </p:cTn>
+                              </p:par>
+                              <p:par>
+                                <p:cTn id="20" presetID="10" presetClass="entr" presetSubtype="0" fill="hold" nodeType="withEffect">
+                                  <p:stCondLst>
+                                    <p:cond delay="1000"/>
+                                  </p:stCondLst>
+                                  <p:childTnLst>
+                                    <p:set>
+                                      <p:cBhvr>
+                                        <p:cTn id="21" dur="1" fill="hold">
+                                          <p:stCondLst>
+                                            <p:cond delay="0"/>
+                                          </p:stCondLst>
+                                        </p:cTn>
+                                        <p:tgtEl>
+                                          <p:spTgt spid="27"/>
+                                        </p:tgtEl>
+                                        <p:attrNameLst>
+                                          <p:attrName>style.visibility</p:attrName>
+                                        </p:attrNameLst>
+                                      </p:cBhvr>
+                                      <p:to>
+                                        <p:strVal val="visible"/>
+                                      </p:to>
+                                    </p:set>
+                                    <p:animEffect transition="in" filter="fade">
+                                      <p:cBhvr>
+                                        <p:cTn id="22" dur="500"/>
+                                        <p:tgtEl>
+                                          <p:spTgt spid="27"/>
+                                        </p:tgtEl>
+                                      </p:cBhvr>
+                                    </p:animEffect>
+                                  </p:childTnLst>
+                                </p:cTn>
+                              </p:par>
+                              <p:par>
+                                <p:cTn id="23" presetID="10" presetClass="entr" presetSubtype="0" fill="hold" nodeType="withEffect">
+                                  <p:stCondLst>
+                                    <p:cond delay="1200"/>
+                                  </p:stCondLst>
+                                  <p:childTnLst>
+                                    <p:set>
+                                      <p:cBhvr>
+                                        <p:cTn id="24" dur="1" fill="hold">
+                                          <p:stCondLst>
+                                            <p:cond delay="0"/>
+                                          </p:stCondLst>
+                                        </p:cTn>
+                                        <p:tgtEl>
+                                          <p:spTgt spid="28"/>
+                                        </p:tgtEl>
+                                        <p:attrNameLst>
+                                          <p:attrName>style.visibility</p:attrName>
+                                        </p:attrNameLst>
+                                      </p:cBhvr>
+                                      <p:to>
+                                        <p:strVal val="visible"/>
+                                      </p:to>
+                                    </p:set>
+                                    <p:animEffect transition="in" filter="fade">
+                                      <p:cBhvr>
+                                        <p:cTn id="25" dur="500"/>
+                                        <p:tgtEl>
+                                          <p:spTgt spid="28"/>
+                                        </p:tgtEl>
+                                      </p:cBhvr>
+                                    </p:animEffect>
+                                  </p:childTnLst>
+                                </p:cTn>
+                              </p:par>
+                              <p:par>
+                                <p:cTn id="26" presetID="10" presetClass="entr" presetSubtype="0" fill="hold" nodeType="withEffect">
+                                  <p:stCondLst>
+                                    <p:cond delay="1400"/>
+                                  </p:stCondLst>
+                                  <p:childTnLst>
+                                    <p:set>
+                                      <p:cBhvr>
+                                        <p:cTn id="27" dur="1" fill="hold">
+                                          <p:stCondLst>
+                                            <p:cond delay="0"/>
+                                          </p:stCondLst>
+                                        </p:cTn>
+                                        <p:tgtEl>
+                                          <p:spTgt spid="29"/>
+                                        </p:tgtEl>
+                                        <p:attrNameLst>
+                                          <p:attrName>style.visibility</p:attrName>
+                                        </p:attrNameLst>
+                                      </p:cBhvr>
+                                      <p:to>
+                                        <p:strVal val="visible"/>
+                                      </p:to>
+                                    </p:set>
+                                    <p:animEffect transition="in" filter="fade">
+                                      <p:cBhvr>
+                                        <p:cTn id="28" dur="500"/>
+                                        <p:tgtEl>
+                                          <p:spTgt spid="29"/>
+                                        </p:tgtEl>
+                                      </p:cBhvr>
+                                    </p:animEffect>
+                                  </p:childTnLst>
+                                </p:cTn>
+                              </p:par>
+                              <p:par>
+                                <p:cTn id="29" presetID="10" presetClass="entr" presetSubtype="0" fill="hold" nodeType="withEffect">
+                                  <p:stCondLst>
+                                    <p:cond delay="1600"/>
+                                  </p:stCondLst>
+                                  <p:childTnLst>
+                                    <p:set>
+                                      <p:cBhvr>
+                                        <p:cTn id="30" dur="1" fill="hold">
+                                          <p:stCondLst>
+                                            <p:cond delay="0"/>
+                                          </p:stCondLst>
+                                        </p:cTn>
+                                        <p:tgtEl>
+                                          <p:spTgt spid="30"/>
+                                        </p:tgtEl>
+                                        <p:attrNameLst>
+                                          <p:attrName>style.visibility</p:attrName>
+                                        </p:attrNameLst>
+                                      </p:cBhvr>
+                                      <p:to>
+                                        <p:strVal val="visible"/>
+                                      </p:to>
+                                    </p:set>
+                                    <p:animEffect transition="in" filter="fade">
+                                      <p:cBhvr>
+                                        <p:cTn id="31" dur="500"/>
+                                        <p:tgtEl>
+                                          <p:spTgt spid="30"/>
+                                        </p:tgtEl>
+                                      </p:cBhvr>
+                                    </p:animEffect>
+                                  </p:childTnLst>
+                                </p:cTn>
+                              </p:par>
+                            </p:childTnLst>
+                          </p:cTn>
+                        </p:par>
+                      </p:childTnLst>
+                    </p:cTn>
+                  </p:par>
+                </p:childTnLst>
+              </p:cTn>
+              <p:prevCondLst>
+                <p:cond evt="onPrev" delay="0">
+                  <p:tgtEl>
+                    <p:sldTgt/>
+                  </p:tgtEl>
+                </p:cond>
+              </p:prevCondLst>
+              <p:nextCondLst>
+                <p:cond evt="onNext" delay="0">
+                  <p:tgtEl>
+                    <p:sldTgt/>
+                  </p:tgtEl>
+                </p:cond>
+              </p:nextCondLst>
+            </p:seq>
+          </p:childTnLst>
+        </p:cTn>
+      </p:par>
+    </p:tnLst>
+  </p:timing>
 </p:sld>
 </file>
 
@@ -22676,6 +27002,244 @@
   <p:clrMapOvr>
     <a:masterClrMapping/>
   </p:clrMapOvr>
+  <mc:AlternateContent xmlns:mc="http://schemas.openxmlformats.org/markup-compatibility/2006">
+    <mc:Choice xmlns:p14="http://schemas.microsoft.com/office/powerpoint/2010/main" Requires="p14">
+      <p:transition spd="med" p14:dur="700">
+        <p:fade/>
+      </p:transition>
+    </mc:Choice>
+    <mc:Fallback>
+      <p:transition spd="med">
+        <p:fade/>
+      </p:transition>
+    </mc:Fallback>
+  </mc:AlternateContent>
+  <p:timing>
+    <p:tnLst>
+      <p:par>
+        <p:cTn id="1" dur="indefinite" restart="never" nodeType="tmRoot">
+          <p:childTnLst>
+            <p:seq concurrent="1" nextAc="seek">
+              <p:cTn id="2" dur="indefinite" nodeType="mainSeq">
+                <p:childTnLst>
+                  <p:par>
+                    <p:cTn id="3" fill="hold">
+                      <p:stCondLst>
+                        <p:cond delay="indefinite"/>
+                        <p:cond evt="onBegin" delay="0">
+                          <p:tn val="2"/>
+                        </p:cond>
+                      </p:stCondLst>
+                      <p:childTnLst>
+                        <p:par>
+                          <p:cTn id="4" fill="hold">
+                            <p:stCondLst>
+                              <p:cond delay="0"/>
+                            </p:stCondLst>
+                            <p:childTnLst>
+                              <p:par>
+                                <p:cTn id="5" presetID="10" presetClass="entr" presetSubtype="0" fill="hold" nodeType="afterEffect">
+                                  <p:stCondLst>
+                                    <p:cond delay="0"/>
+                                  </p:stCondLst>
+                                  <p:childTnLst>
+                                    <p:set>
+                                      <p:cBhvr>
+                                        <p:cTn id="6" dur="1" fill="hold">
+                                          <p:stCondLst>
+                                            <p:cond delay="0"/>
+                                          </p:stCondLst>
+                                        </p:cTn>
+                                        <p:tgtEl>
+                                          <p:spTgt spid="4"/>
+                                        </p:tgtEl>
+                                        <p:attrNameLst>
+                                          <p:attrName>style.visibility</p:attrName>
+                                        </p:attrNameLst>
+                                      </p:cBhvr>
+                                      <p:to>
+                                        <p:strVal val="visible"/>
+                                      </p:to>
+                                    </p:set>
+                                    <p:animEffect transition="in" filter="fade">
+                                      <p:cBhvr>
+                                        <p:cTn id="7" dur="500"/>
+                                        <p:tgtEl>
+                                          <p:spTgt spid="4"/>
+                                        </p:tgtEl>
+                                      </p:cBhvr>
+                                    </p:animEffect>
+                                  </p:childTnLst>
+                                </p:cTn>
+                              </p:par>
+                              <p:par>
+                                <p:cTn id="8" presetID="10" presetClass="entr" presetSubtype="0" fill="hold" nodeType="withEffect">
+                                  <p:stCondLst>
+                                    <p:cond delay="300"/>
+                                  </p:stCondLst>
+                                  <p:childTnLst>
+                                    <p:set>
+                                      <p:cBhvr>
+                                        <p:cTn id="9" dur="1" fill="hold">
+                                          <p:stCondLst>
+                                            <p:cond delay="0"/>
+                                          </p:stCondLst>
+                                        </p:cTn>
+                                        <p:tgtEl>
+                                          <p:spTgt spid="16"/>
+                                        </p:tgtEl>
+                                        <p:attrNameLst>
+                                          <p:attrName>style.visibility</p:attrName>
+                                        </p:attrNameLst>
+                                      </p:cBhvr>
+                                      <p:to>
+                                        <p:strVal val="visible"/>
+                                      </p:to>
+                                    </p:set>
+                                    <p:animEffect transition="in" filter="fade">
+                                      <p:cBhvr>
+                                        <p:cTn id="10" dur="500"/>
+                                        <p:tgtEl>
+                                          <p:spTgt spid="16"/>
+                                        </p:tgtEl>
+                                      </p:cBhvr>
+                                    </p:animEffect>
+                                  </p:childTnLst>
+                                </p:cTn>
+                              </p:par>
+                              <p:par>
+                                <p:cTn id="11" presetID="10" presetClass="entr" presetSubtype="0" fill="hold" nodeType="withEffect">
+                                  <p:stCondLst>
+                                    <p:cond delay="600"/>
+                                  </p:stCondLst>
+                                  <p:childTnLst>
+                                    <p:set>
+                                      <p:cBhvr>
+                                        <p:cTn id="12" dur="1" fill="hold">
+                                          <p:stCondLst>
+                                            <p:cond delay="0"/>
+                                          </p:stCondLst>
+                                        </p:cTn>
+                                        <p:tgtEl>
+                                          <p:spTgt spid="17"/>
+                                        </p:tgtEl>
+                                        <p:attrNameLst>
+                                          <p:attrName>style.visibility</p:attrName>
+                                        </p:attrNameLst>
+                                      </p:cBhvr>
+                                      <p:to>
+                                        <p:strVal val="visible"/>
+                                      </p:to>
+                                    </p:set>
+                                    <p:animEffect transition="in" filter="fade">
+                                      <p:cBhvr>
+                                        <p:cTn id="13" dur="500"/>
+                                        <p:tgtEl>
+                                          <p:spTgt spid="17"/>
+                                        </p:tgtEl>
+                                      </p:cBhvr>
+                                    </p:animEffect>
+                                  </p:childTnLst>
+                                </p:cTn>
+                              </p:par>
+                              <p:par>
+                                <p:cTn id="14" presetID="10" presetClass="entr" presetSubtype="0" fill="hold" nodeType="withEffect">
+                                  <p:stCondLst>
+                                    <p:cond delay="900"/>
+                                  </p:stCondLst>
+                                  <p:childTnLst>
+                                    <p:set>
+                                      <p:cBhvr>
+                                        <p:cTn id="15" dur="1" fill="hold">
+                                          <p:stCondLst>
+                                            <p:cond delay="0"/>
+                                          </p:stCondLst>
+                                        </p:cTn>
+                                        <p:tgtEl>
+                                          <p:spTgt spid="18"/>
+                                        </p:tgtEl>
+                                        <p:attrNameLst>
+                                          <p:attrName>style.visibility</p:attrName>
+                                        </p:attrNameLst>
+                                      </p:cBhvr>
+                                      <p:to>
+                                        <p:strVal val="visible"/>
+                                      </p:to>
+                                    </p:set>
+                                    <p:animEffect transition="in" filter="fade">
+                                      <p:cBhvr>
+                                        <p:cTn id="16" dur="500"/>
+                                        <p:tgtEl>
+                                          <p:spTgt spid="18"/>
+                                        </p:tgtEl>
+                                      </p:cBhvr>
+                                    </p:animEffect>
+                                  </p:childTnLst>
+                                </p:cTn>
+                              </p:par>
+                              <p:par>
+                                <p:cTn id="17" presetID="10" presetClass="entr" presetSubtype="0" fill="hold" nodeType="withEffect">
+                                  <p:stCondLst>
+                                    <p:cond delay="1200"/>
+                                  </p:stCondLst>
+                                  <p:childTnLst>
+                                    <p:set>
+                                      <p:cBhvr>
+                                        <p:cTn id="18" dur="1" fill="hold">
+                                          <p:stCondLst>
+                                            <p:cond delay="0"/>
+                                          </p:stCondLst>
+                                        </p:cTn>
+                                        <p:tgtEl>
+                                          <p:spTgt spid="19"/>
+                                        </p:tgtEl>
+                                        <p:attrNameLst>
+                                          <p:attrName>style.visibility</p:attrName>
+                                        </p:attrNameLst>
+                                      </p:cBhvr>
+                                      <p:to>
+                                        <p:strVal val="visible"/>
+                                      </p:to>
+                                    </p:set>
+                                    <p:animEffect transition="in" filter="fade">
+                                      <p:cBhvr>
+                                        <p:cTn id="19" dur="500"/>
+                                        <p:tgtEl>
+                                          <p:spTgt spid="19"/>
+                                        </p:tgtEl>
+                                      </p:cBhvr>
+                                    </p:animEffect>
+                                  </p:childTnLst>
+                                </p:cTn>
+                              </p:par>
+                            </p:childTnLst>
+                          </p:cTn>
+                        </p:par>
+                      </p:childTnLst>
+                    </p:cTn>
+                  </p:par>
+                </p:childTnLst>
+              </p:cTn>
+              <p:prevCondLst>
+                <p:cond evt="onPrev" delay="0">
+                  <p:tgtEl>
+                    <p:sldTgt/>
+                  </p:tgtEl>
+                </p:cond>
+              </p:prevCondLst>
+              <p:nextCondLst>
+                <p:cond evt="onNext" delay="0">
+                  <p:tgtEl>
+                    <p:sldTgt/>
+                  </p:tgtEl>
+                </p:cond>
+              </p:nextCondLst>
+            </p:seq>
+          </p:childTnLst>
+        </p:cTn>
+      </p:par>
+    </p:tnLst>
+  </p:timing>
 </p:sld>
 </file>
 
@@ -25089,6 +29653,209 @@
   <p:clrMapOvr>
     <a:masterClrMapping/>
   </p:clrMapOvr>
+  <mc:AlternateContent xmlns:mc="http://schemas.openxmlformats.org/markup-compatibility/2006">
+    <mc:Choice xmlns:p14="http://schemas.microsoft.com/office/powerpoint/2010/main" Requires="p14">
+      <p:transition spd="med" p14:dur="700">
+        <p:fade/>
+      </p:transition>
+    </mc:Choice>
+    <mc:Fallback>
+      <p:transition spd="med">
+        <p:fade/>
+      </p:transition>
+    </mc:Fallback>
+  </mc:AlternateContent>
+  <p:timing>
+    <p:tnLst>
+      <p:par>
+        <p:cTn id="1" dur="indefinite" restart="never" nodeType="tmRoot">
+          <p:childTnLst>
+            <p:seq concurrent="1" nextAc="seek">
+              <p:cTn id="2" dur="indefinite" nodeType="mainSeq">
+                <p:childTnLst>
+                  <p:par>
+                    <p:cTn id="3" fill="hold">
+                      <p:stCondLst>
+                        <p:cond delay="indefinite"/>
+                        <p:cond evt="onBegin" delay="0">
+                          <p:tn val="2"/>
+                        </p:cond>
+                      </p:stCondLst>
+                      <p:childTnLst>
+                        <p:par>
+                          <p:cTn id="4" fill="hold">
+                            <p:stCondLst>
+                              <p:cond delay="0"/>
+                            </p:stCondLst>
+                            <p:childTnLst>
+                              <p:par>
+                                <p:cTn id="5" presetID="10" presetClass="entr" presetSubtype="0" fill="hold" nodeType="afterEffect">
+                                  <p:stCondLst>
+                                    <p:cond delay="0"/>
+                                  </p:stCondLst>
+                                  <p:childTnLst>
+                                    <p:set>
+                                      <p:cBhvr>
+                                        <p:cTn id="6" dur="1" fill="hold">
+                                          <p:stCondLst>
+                                            <p:cond delay="0"/>
+                                          </p:stCondLst>
+                                        </p:cTn>
+                                        <p:tgtEl>
+                                          <p:spTgt spid="4"/>
+                                        </p:tgtEl>
+                                        <p:attrNameLst>
+                                          <p:attrName>style.visibility</p:attrName>
+                                        </p:attrNameLst>
+                                      </p:cBhvr>
+                                      <p:to>
+                                        <p:strVal val="visible"/>
+                                      </p:to>
+                                    </p:set>
+                                    <p:animEffect transition="in" filter="fade">
+                                      <p:cBhvr>
+                                        <p:cTn id="7" dur="500"/>
+                                        <p:tgtEl>
+                                          <p:spTgt spid="4"/>
+                                        </p:tgtEl>
+                                      </p:cBhvr>
+                                    </p:animEffect>
+                                  </p:childTnLst>
+                                </p:cTn>
+                              </p:par>
+                              <p:par>
+                                <p:cTn id="8" presetID="10" presetClass="entr" presetSubtype="0" fill="hold" nodeType="withEffect">
+                                  <p:stCondLst>
+                                    <p:cond delay="300"/>
+                                  </p:stCondLst>
+                                  <p:childTnLst>
+                                    <p:set>
+                                      <p:cBhvr>
+                                        <p:cTn id="9" dur="1" fill="hold">
+                                          <p:stCondLst>
+                                            <p:cond delay="0"/>
+                                          </p:stCondLst>
+                                        </p:cTn>
+                                        <p:tgtEl>
+                                          <p:spTgt spid="79"/>
+                                        </p:tgtEl>
+                                        <p:attrNameLst>
+                                          <p:attrName>style.visibility</p:attrName>
+                                        </p:attrNameLst>
+                                      </p:cBhvr>
+                                      <p:to>
+                                        <p:strVal val="visible"/>
+                                      </p:to>
+                                    </p:set>
+                                    <p:animEffect transition="in" filter="fade">
+                                      <p:cBhvr>
+                                        <p:cTn id="10" dur="500"/>
+                                        <p:tgtEl>
+                                          <p:spTgt spid="79"/>
+                                        </p:tgtEl>
+                                      </p:cBhvr>
+                                    </p:animEffect>
+                                  </p:childTnLst>
+                                </p:cTn>
+                              </p:par>
+                              <p:par>
+                                <p:cTn id="11" presetID="10" presetClass="entr" presetSubtype="0" fill="hold" nodeType="withEffect">
+                                  <p:stCondLst>
+                                    <p:cond delay="600"/>
+                                  </p:stCondLst>
+                                  <p:childTnLst>
+                                    <p:set>
+                                      <p:cBhvr>
+                                        <p:cTn id="12" dur="1" fill="hold">
+                                          <p:stCondLst>
+                                            <p:cond delay="0"/>
+                                          </p:stCondLst>
+                                        </p:cTn>
+                                        <p:tgtEl>
+                                          <p:spTgt spid="80"/>
+                                        </p:tgtEl>
+                                        <p:attrNameLst>
+                                          <p:attrName>style.visibility</p:attrName>
+                                        </p:attrNameLst>
+                                      </p:cBhvr>
+                                      <p:to>
+                                        <p:strVal val="visible"/>
+                                      </p:to>
+                                    </p:set>
+                                    <p:animEffect transition="in" filter="fade">
+                                      <p:cBhvr>
+                                        <p:cTn id="13" dur="500"/>
+                                        <p:tgtEl>
+                                          <p:spTgt spid="80"/>
+                                        </p:tgtEl>
+                                      </p:cBhvr>
+                                    </p:animEffect>
+                                  </p:childTnLst>
+                                </p:cTn>
+                              </p:par>
+                              <p:par>
+                                <p:cTn id="14" presetID="10" presetClass="entr" presetSubtype="0" fill="hold" nodeType="withEffect">
+                                  <p:stCondLst>
+                                    <p:cond delay="900"/>
+                                  </p:stCondLst>
+                                  <p:childTnLst>
+                                    <p:set>
+                                      <p:cBhvr>
+                                        <p:cTn id="15" dur="1" fill="hold">
+                                          <p:stCondLst>
+                                            <p:cond delay="0"/>
+                                          </p:stCondLst>
+                                        </p:cTn>
+                                        <p:tgtEl>
+                                          <p:spTgt spid="81"/>
+                                        </p:tgtEl>
+                                        <p:attrNameLst>
+                                          <p:attrName>style.visibility</p:attrName>
+                                        </p:attrNameLst>
+                                      </p:cBhvr>
+                                      <p:to>
+                                        <p:strVal val="visible"/>
+                                      </p:to>
+                                    </p:set>
+                                    <p:animEffect transition="in" filter="fade">
+                                      <p:cBhvr>
+                                        <p:cTn id="16" dur="500"/>
+                                        <p:tgtEl>
+                                          <p:spTgt spid="81"/>
+                                        </p:tgtEl>
+                                      </p:cBhvr>
+                                    </p:animEffect>
+                                  </p:childTnLst>
+                                </p:cTn>
+                              </p:par>
+                            </p:childTnLst>
+                          </p:cTn>
+                        </p:par>
+                      </p:childTnLst>
+                    </p:cTn>
+                  </p:par>
+                </p:childTnLst>
+              </p:cTn>
+              <p:prevCondLst>
+                <p:cond evt="onPrev" delay="0">
+                  <p:tgtEl>
+                    <p:sldTgt/>
+                  </p:tgtEl>
+                </p:cond>
+              </p:prevCondLst>
+              <p:nextCondLst>
+                <p:cond evt="onNext" delay="0">
+                  <p:tgtEl>
+                    <p:sldTgt/>
+                  </p:tgtEl>
+                </p:cond>
+              </p:nextCondLst>
+            </p:seq>
+          </p:childTnLst>
+        </p:cTn>
+      </p:par>
+    </p:tnLst>
+  </p:timing>
 </p:sld>
 </file>
 
@@ -25734,6 +30501,209 @@
   <p:clrMapOvr>
     <a:masterClrMapping/>
   </p:clrMapOvr>
+  <mc:AlternateContent xmlns:mc="http://schemas.openxmlformats.org/markup-compatibility/2006">
+    <mc:Choice xmlns:p14="http://schemas.microsoft.com/office/powerpoint/2010/main" Requires="p14">
+      <p:transition spd="med" p14:dur="700">
+        <p:fade/>
+      </p:transition>
+    </mc:Choice>
+    <mc:Fallback>
+      <p:transition spd="med">
+        <p:fade/>
+      </p:transition>
+    </mc:Fallback>
+  </mc:AlternateContent>
+  <p:timing>
+    <p:tnLst>
+      <p:par>
+        <p:cTn id="1" dur="indefinite" restart="never" nodeType="tmRoot">
+          <p:childTnLst>
+            <p:seq concurrent="1" nextAc="seek">
+              <p:cTn id="2" dur="indefinite" nodeType="mainSeq">
+                <p:childTnLst>
+                  <p:par>
+                    <p:cTn id="3" fill="hold">
+                      <p:stCondLst>
+                        <p:cond delay="indefinite"/>
+                        <p:cond evt="onBegin" delay="0">
+                          <p:tn val="2"/>
+                        </p:cond>
+                      </p:stCondLst>
+                      <p:childTnLst>
+                        <p:par>
+                          <p:cTn id="4" fill="hold">
+                            <p:stCondLst>
+                              <p:cond delay="0"/>
+                            </p:stCondLst>
+                            <p:childTnLst>
+                              <p:par>
+                                <p:cTn id="5" presetID="10" presetClass="entr" presetSubtype="0" fill="hold" nodeType="afterEffect">
+                                  <p:stCondLst>
+                                    <p:cond delay="0"/>
+                                  </p:stCondLst>
+                                  <p:childTnLst>
+                                    <p:set>
+                                      <p:cBhvr>
+                                        <p:cTn id="6" dur="1" fill="hold">
+                                          <p:stCondLst>
+                                            <p:cond delay="0"/>
+                                          </p:stCondLst>
+                                        </p:cTn>
+                                        <p:tgtEl>
+                                          <p:spTgt spid="4"/>
+                                        </p:tgtEl>
+                                        <p:attrNameLst>
+                                          <p:attrName>style.visibility</p:attrName>
+                                        </p:attrNameLst>
+                                      </p:cBhvr>
+                                      <p:to>
+                                        <p:strVal val="visible"/>
+                                      </p:to>
+                                    </p:set>
+                                    <p:animEffect transition="in" filter="fade">
+                                      <p:cBhvr>
+                                        <p:cTn id="7" dur="500"/>
+                                        <p:tgtEl>
+                                          <p:spTgt spid="4"/>
+                                        </p:tgtEl>
+                                      </p:cBhvr>
+                                    </p:animEffect>
+                                  </p:childTnLst>
+                                </p:cTn>
+                              </p:par>
+                              <p:par>
+                                <p:cTn id="8" presetID="10" presetClass="entr" presetSubtype="0" fill="hold" nodeType="withEffect">
+                                  <p:stCondLst>
+                                    <p:cond delay="300"/>
+                                  </p:stCondLst>
+                                  <p:childTnLst>
+                                    <p:set>
+                                      <p:cBhvr>
+                                        <p:cTn id="9" dur="1" fill="hold">
+                                          <p:stCondLst>
+                                            <p:cond delay="0"/>
+                                          </p:stCondLst>
+                                        </p:cTn>
+                                        <p:tgtEl>
+                                          <p:spTgt spid="17"/>
+                                        </p:tgtEl>
+                                        <p:attrNameLst>
+                                          <p:attrName>style.visibility</p:attrName>
+                                        </p:attrNameLst>
+                                      </p:cBhvr>
+                                      <p:to>
+                                        <p:strVal val="visible"/>
+                                      </p:to>
+                                    </p:set>
+                                    <p:animEffect transition="in" filter="fade">
+                                      <p:cBhvr>
+                                        <p:cTn id="10" dur="500"/>
+                                        <p:tgtEl>
+                                          <p:spTgt spid="17"/>
+                                        </p:tgtEl>
+                                      </p:cBhvr>
+                                    </p:animEffect>
+                                  </p:childTnLst>
+                                </p:cTn>
+                              </p:par>
+                              <p:par>
+                                <p:cTn id="11" presetID="10" presetClass="entr" presetSubtype="0" fill="hold" nodeType="withEffect">
+                                  <p:stCondLst>
+                                    <p:cond delay="600"/>
+                                  </p:stCondLst>
+                                  <p:childTnLst>
+                                    <p:set>
+                                      <p:cBhvr>
+                                        <p:cTn id="12" dur="1" fill="hold">
+                                          <p:stCondLst>
+                                            <p:cond delay="0"/>
+                                          </p:stCondLst>
+                                        </p:cTn>
+                                        <p:tgtEl>
+                                          <p:spTgt spid="18"/>
+                                        </p:tgtEl>
+                                        <p:attrNameLst>
+                                          <p:attrName>style.visibility</p:attrName>
+                                        </p:attrNameLst>
+                                      </p:cBhvr>
+                                      <p:to>
+                                        <p:strVal val="visible"/>
+                                      </p:to>
+                                    </p:set>
+                                    <p:animEffect transition="in" filter="fade">
+                                      <p:cBhvr>
+                                        <p:cTn id="13" dur="500"/>
+                                        <p:tgtEl>
+                                          <p:spTgt spid="18"/>
+                                        </p:tgtEl>
+                                      </p:cBhvr>
+                                    </p:animEffect>
+                                  </p:childTnLst>
+                                </p:cTn>
+                              </p:par>
+                              <p:par>
+                                <p:cTn id="14" presetID="10" presetClass="entr" presetSubtype="0" fill="hold" nodeType="withEffect">
+                                  <p:stCondLst>
+                                    <p:cond delay="900"/>
+                                  </p:stCondLst>
+                                  <p:childTnLst>
+                                    <p:set>
+                                      <p:cBhvr>
+                                        <p:cTn id="15" dur="1" fill="hold">
+                                          <p:stCondLst>
+                                            <p:cond delay="0"/>
+                                          </p:stCondLst>
+                                        </p:cTn>
+                                        <p:tgtEl>
+                                          <p:spTgt spid="19"/>
+                                        </p:tgtEl>
+                                        <p:attrNameLst>
+                                          <p:attrName>style.visibility</p:attrName>
+                                        </p:attrNameLst>
+                                      </p:cBhvr>
+                                      <p:to>
+                                        <p:strVal val="visible"/>
+                                      </p:to>
+                                    </p:set>
+                                    <p:animEffect transition="in" filter="fade">
+                                      <p:cBhvr>
+                                        <p:cTn id="16" dur="500"/>
+                                        <p:tgtEl>
+                                          <p:spTgt spid="19"/>
+                                        </p:tgtEl>
+                                      </p:cBhvr>
+                                    </p:animEffect>
+                                  </p:childTnLst>
+                                </p:cTn>
+                              </p:par>
+                            </p:childTnLst>
+                          </p:cTn>
+                        </p:par>
+                      </p:childTnLst>
+                    </p:cTn>
+                  </p:par>
+                </p:childTnLst>
+              </p:cTn>
+              <p:prevCondLst>
+                <p:cond evt="onPrev" delay="0">
+                  <p:tgtEl>
+                    <p:sldTgt/>
+                  </p:tgtEl>
+                </p:cond>
+              </p:prevCondLst>
+              <p:nextCondLst>
+                <p:cond evt="onNext" delay="0">
+                  <p:tgtEl>
+                    <p:sldTgt/>
+                  </p:tgtEl>
+                </p:cond>
+              </p:nextCondLst>
+            </p:seq>
+          </p:childTnLst>
+        </p:cTn>
+      </p:par>
+    </p:tnLst>
+  </p:timing>
 </p:sld>
 </file>
 
@@ -28231,6 +33201,244 @@
   <p:clrMapOvr>
     <a:masterClrMapping/>
   </p:clrMapOvr>
+  <mc:AlternateContent xmlns:mc="http://schemas.openxmlformats.org/markup-compatibility/2006">
+    <mc:Choice xmlns:p14="http://schemas.microsoft.com/office/powerpoint/2010/main" Requires="p14">
+      <p:transition spd="med" p14:dur="700">
+        <p:fade/>
+      </p:transition>
+    </mc:Choice>
+    <mc:Fallback>
+      <p:transition spd="med">
+        <p:fade/>
+      </p:transition>
+    </mc:Fallback>
+  </mc:AlternateContent>
+  <p:timing>
+    <p:tnLst>
+      <p:par>
+        <p:cTn id="1" dur="indefinite" restart="never" nodeType="tmRoot">
+          <p:childTnLst>
+            <p:seq concurrent="1" nextAc="seek">
+              <p:cTn id="2" dur="indefinite" nodeType="mainSeq">
+                <p:childTnLst>
+                  <p:par>
+                    <p:cTn id="3" fill="hold">
+                      <p:stCondLst>
+                        <p:cond delay="indefinite"/>
+                        <p:cond evt="onBegin" delay="0">
+                          <p:tn val="2"/>
+                        </p:cond>
+                      </p:stCondLst>
+                      <p:childTnLst>
+                        <p:par>
+                          <p:cTn id="4" fill="hold">
+                            <p:stCondLst>
+                              <p:cond delay="0"/>
+                            </p:stCondLst>
+                            <p:childTnLst>
+                              <p:par>
+                                <p:cTn id="5" presetID="10" presetClass="entr" presetSubtype="0" fill="hold" nodeType="afterEffect">
+                                  <p:stCondLst>
+                                    <p:cond delay="0"/>
+                                  </p:stCondLst>
+                                  <p:childTnLst>
+                                    <p:set>
+                                      <p:cBhvr>
+                                        <p:cTn id="6" dur="1" fill="hold">
+                                          <p:stCondLst>
+                                            <p:cond delay="0"/>
+                                          </p:stCondLst>
+                                        </p:cTn>
+                                        <p:tgtEl>
+                                          <p:spTgt spid="4"/>
+                                        </p:tgtEl>
+                                        <p:attrNameLst>
+                                          <p:attrName>style.visibility</p:attrName>
+                                        </p:attrNameLst>
+                                      </p:cBhvr>
+                                      <p:to>
+                                        <p:strVal val="visible"/>
+                                      </p:to>
+                                    </p:set>
+                                    <p:animEffect transition="in" filter="fade">
+                                      <p:cBhvr>
+                                        <p:cTn id="7" dur="500"/>
+                                        <p:tgtEl>
+                                          <p:spTgt spid="4"/>
+                                        </p:tgtEl>
+                                      </p:cBhvr>
+                                    </p:animEffect>
+                                  </p:childTnLst>
+                                </p:cTn>
+                              </p:par>
+                              <p:par>
+                                <p:cTn id="8" presetID="10" presetClass="entr" presetSubtype="0" fill="hold" nodeType="withEffect">
+                                  <p:stCondLst>
+                                    <p:cond delay="300"/>
+                                  </p:stCondLst>
+                                  <p:childTnLst>
+                                    <p:set>
+                                      <p:cBhvr>
+                                        <p:cTn id="9" dur="1" fill="hold">
+                                          <p:stCondLst>
+                                            <p:cond delay="0"/>
+                                          </p:stCondLst>
+                                        </p:cTn>
+                                        <p:tgtEl>
+                                          <p:spTgt spid="57"/>
+                                        </p:tgtEl>
+                                        <p:attrNameLst>
+                                          <p:attrName>style.visibility</p:attrName>
+                                        </p:attrNameLst>
+                                      </p:cBhvr>
+                                      <p:to>
+                                        <p:strVal val="visible"/>
+                                      </p:to>
+                                    </p:set>
+                                    <p:animEffect transition="in" filter="fade">
+                                      <p:cBhvr>
+                                        <p:cTn id="10" dur="500"/>
+                                        <p:tgtEl>
+                                          <p:spTgt spid="57"/>
+                                        </p:tgtEl>
+                                      </p:cBhvr>
+                                    </p:animEffect>
+                                  </p:childTnLst>
+                                </p:cTn>
+                              </p:par>
+                              <p:par>
+                                <p:cTn id="11" presetID="10" presetClass="entr" presetSubtype="0" fill="hold" nodeType="withEffect">
+                                  <p:stCondLst>
+                                    <p:cond delay="600"/>
+                                  </p:stCondLst>
+                                  <p:childTnLst>
+                                    <p:set>
+                                      <p:cBhvr>
+                                        <p:cTn id="12" dur="1" fill="hold">
+                                          <p:stCondLst>
+                                            <p:cond delay="0"/>
+                                          </p:stCondLst>
+                                        </p:cTn>
+                                        <p:tgtEl>
+                                          <p:spTgt spid="62"/>
+                                        </p:tgtEl>
+                                        <p:attrNameLst>
+                                          <p:attrName>style.visibility</p:attrName>
+                                        </p:attrNameLst>
+                                      </p:cBhvr>
+                                      <p:to>
+                                        <p:strVal val="visible"/>
+                                      </p:to>
+                                    </p:set>
+                                    <p:animEffect transition="in" filter="fade">
+                                      <p:cBhvr>
+                                        <p:cTn id="13" dur="500"/>
+                                        <p:tgtEl>
+                                          <p:spTgt spid="62"/>
+                                        </p:tgtEl>
+                                      </p:cBhvr>
+                                    </p:animEffect>
+                                  </p:childTnLst>
+                                </p:cTn>
+                              </p:par>
+                              <p:par>
+                                <p:cTn id="14" presetID="10" presetClass="entr" presetSubtype="0" fill="hold" nodeType="withEffect">
+                                  <p:stCondLst>
+                                    <p:cond delay="900"/>
+                                  </p:stCondLst>
+                                  <p:childTnLst>
+                                    <p:set>
+                                      <p:cBhvr>
+                                        <p:cTn id="15" dur="1" fill="hold">
+                                          <p:stCondLst>
+                                            <p:cond delay="0"/>
+                                          </p:stCondLst>
+                                        </p:cTn>
+                                        <p:tgtEl>
+                                          <p:spTgt spid="63"/>
+                                        </p:tgtEl>
+                                        <p:attrNameLst>
+                                          <p:attrName>style.visibility</p:attrName>
+                                        </p:attrNameLst>
+                                      </p:cBhvr>
+                                      <p:to>
+                                        <p:strVal val="visible"/>
+                                      </p:to>
+                                    </p:set>
+                                    <p:animEffect transition="in" filter="fade">
+                                      <p:cBhvr>
+                                        <p:cTn id="16" dur="500"/>
+                                        <p:tgtEl>
+                                          <p:spTgt spid="63"/>
+                                        </p:tgtEl>
+                                      </p:cBhvr>
+                                    </p:animEffect>
+                                  </p:childTnLst>
+                                </p:cTn>
+                              </p:par>
+                              <p:par>
+                                <p:cTn id="17" presetID="10" presetClass="entr" presetSubtype="0" fill="hold" nodeType="withEffect">
+                                  <p:stCondLst>
+                                    <p:cond delay="1200"/>
+                                  </p:stCondLst>
+                                  <p:childTnLst>
+                                    <p:set>
+                                      <p:cBhvr>
+                                        <p:cTn id="18" dur="1" fill="hold">
+                                          <p:stCondLst>
+                                            <p:cond delay="0"/>
+                                          </p:stCondLst>
+                                        </p:cTn>
+                                        <p:tgtEl>
+                                          <p:spTgt spid="64"/>
+                                        </p:tgtEl>
+                                        <p:attrNameLst>
+                                          <p:attrName>style.visibility</p:attrName>
+                                        </p:attrNameLst>
+                                      </p:cBhvr>
+                                      <p:to>
+                                        <p:strVal val="visible"/>
+                                      </p:to>
+                                    </p:set>
+                                    <p:animEffect transition="in" filter="fade">
+                                      <p:cBhvr>
+                                        <p:cTn id="19" dur="500"/>
+                                        <p:tgtEl>
+                                          <p:spTgt spid="64"/>
+                                        </p:tgtEl>
+                                      </p:cBhvr>
+                                    </p:animEffect>
+                                  </p:childTnLst>
+                                </p:cTn>
+                              </p:par>
+                            </p:childTnLst>
+                          </p:cTn>
+                        </p:par>
+                      </p:childTnLst>
+                    </p:cTn>
+                  </p:par>
+                </p:childTnLst>
+              </p:cTn>
+              <p:prevCondLst>
+                <p:cond evt="onPrev" delay="0">
+                  <p:tgtEl>
+                    <p:sldTgt/>
+                  </p:tgtEl>
+                </p:cond>
+              </p:prevCondLst>
+              <p:nextCondLst>
+                <p:cond evt="onNext" delay="0">
+                  <p:tgtEl>
+                    <p:sldTgt/>
+                  </p:tgtEl>
+                </p:cond>
+              </p:nextCondLst>
+            </p:seq>
+          </p:childTnLst>
+        </p:cTn>
+      </p:par>
+    </p:tnLst>
+  </p:timing>
 </p:sld>
 </file>
 
@@ -30676,6 +35884,209 @@
   <p:clrMapOvr>
     <a:masterClrMapping/>
   </p:clrMapOvr>
+  <mc:AlternateContent xmlns:mc="http://schemas.openxmlformats.org/markup-compatibility/2006">
+    <mc:Choice xmlns:p14="http://schemas.microsoft.com/office/powerpoint/2010/main" Requires="p14">
+      <p:transition spd="med" p14:dur="700">
+        <p:fade/>
+      </p:transition>
+    </mc:Choice>
+    <mc:Fallback>
+      <p:transition spd="med">
+        <p:fade/>
+      </p:transition>
+    </mc:Fallback>
+  </mc:AlternateContent>
+  <p:timing>
+    <p:tnLst>
+      <p:par>
+        <p:cTn id="1" dur="indefinite" restart="never" nodeType="tmRoot">
+          <p:childTnLst>
+            <p:seq concurrent="1" nextAc="seek">
+              <p:cTn id="2" dur="indefinite" nodeType="mainSeq">
+                <p:childTnLst>
+                  <p:par>
+                    <p:cTn id="3" fill="hold">
+                      <p:stCondLst>
+                        <p:cond delay="indefinite"/>
+                        <p:cond evt="onBegin" delay="0">
+                          <p:tn val="2"/>
+                        </p:cond>
+                      </p:stCondLst>
+                      <p:childTnLst>
+                        <p:par>
+                          <p:cTn id="4" fill="hold">
+                            <p:stCondLst>
+                              <p:cond delay="0"/>
+                            </p:stCondLst>
+                            <p:childTnLst>
+                              <p:par>
+                                <p:cTn id="5" presetID="10" presetClass="entr" presetSubtype="0" fill="hold" nodeType="afterEffect">
+                                  <p:stCondLst>
+                                    <p:cond delay="0"/>
+                                  </p:stCondLst>
+                                  <p:childTnLst>
+                                    <p:set>
+                                      <p:cBhvr>
+                                        <p:cTn id="6" dur="1" fill="hold">
+                                          <p:stCondLst>
+                                            <p:cond delay="0"/>
+                                          </p:stCondLst>
+                                        </p:cTn>
+                                        <p:tgtEl>
+                                          <p:spTgt spid="4"/>
+                                        </p:tgtEl>
+                                        <p:attrNameLst>
+                                          <p:attrName>style.visibility</p:attrName>
+                                        </p:attrNameLst>
+                                      </p:cBhvr>
+                                      <p:to>
+                                        <p:strVal val="visible"/>
+                                      </p:to>
+                                    </p:set>
+                                    <p:animEffect transition="in" filter="fade">
+                                      <p:cBhvr>
+                                        <p:cTn id="7" dur="500"/>
+                                        <p:tgtEl>
+                                          <p:spTgt spid="4"/>
+                                        </p:tgtEl>
+                                      </p:cBhvr>
+                                    </p:animEffect>
+                                  </p:childTnLst>
+                                </p:cTn>
+                              </p:par>
+                              <p:par>
+                                <p:cTn id="8" presetID="10" presetClass="entr" presetSubtype="0" fill="hold" nodeType="withEffect">
+                                  <p:stCondLst>
+                                    <p:cond delay="300"/>
+                                  </p:stCondLst>
+                                  <p:childTnLst>
+                                    <p:set>
+                                      <p:cBhvr>
+                                        <p:cTn id="9" dur="1" fill="hold">
+                                          <p:stCondLst>
+                                            <p:cond delay="0"/>
+                                          </p:stCondLst>
+                                        </p:cTn>
+                                        <p:tgtEl>
+                                          <p:spTgt spid="76"/>
+                                        </p:tgtEl>
+                                        <p:attrNameLst>
+                                          <p:attrName>style.visibility</p:attrName>
+                                        </p:attrNameLst>
+                                      </p:cBhvr>
+                                      <p:to>
+                                        <p:strVal val="visible"/>
+                                      </p:to>
+                                    </p:set>
+                                    <p:animEffect transition="in" filter="fade">
+                                      <p:cBhvr>
+                                        <p:cTn id="10" dur="500"/>
+                                        <p:tgtEl>
+                                          <p:spTgt spid="76"/>
+                                        </p:tgtEl>
+                                      </p:cBhvr>
+                                    </p:animEffect>
+                                  </p:childTnLst>
+                                </p:cTn>
+                              </p:par>
+                              <p:par>
+                                <p:cTn id="11" presetID="10" presetClass="entr" presetSubtype="0" fill="hold" nodeType="withEffect">
+                                  <p:stCondLst>
+                                    <p:cond delay="600"/>
+                                  </p:stCondLst>
+                                  <p:childTnLst>
+                                    <p:set>
+                                      <p:cBhvr>
+                                        <p:cTn id="12" dur="1" fill="hold">
+                                          <p:stCondLst>
+                                            <p:cond delay="0"/>
+                                          </p:stCondLst>
+                                        </p:cTn>
+                                        <p:tgtEl>
+                                          <p:spTgt spid="77"/>
+                                        </p:tgtEl>
+                                        <p:attrNameLst>
+                                          <p:attrName>style.visibility</p:attrName>
+                                        </p:attrNameLst>
+                                      </p:cBhvr>
+                                      <p:to>
+                                        <p:strVal val="visible"/>
+                                      </p:to>
+                                    </p:set>
+                                    <p:animEffect transition="in" filter="fade">
+                                      <p:cBhvr>
+                                        <p:cTn id="13" dur="500"/>
+                                        <p:tgtEl>
+                                          <p:spTgt spid="77"/>
+                                        </p:tgtEl>
+                                      </p:cBhvr>
+                                    </p:animEffect>
+                                  </p:childTnLst>
+                                </p:cTn>
+                              </p:par>
+                              <p:par>
+                                <p:cTn id="14" presetID="10" presetClass="entr" presetSubtype="0" fill="hold" nodeType="withEffect">
+                                  <p:stCondLst>
+                                    <p:cond delay="900"/>
+                                  </p:stCondLst>
+                                  <p:childTnLst>
+                                    <p:set>
+                                      <p:cBhvr>
+                                        <p:cTn id="15" dur="1" fill="hold">
+                                          <p:stCondLst>
+                                            <p:cond delay="0"/>
+                                          </p:stCondLst>
+                                        </p:cTn>
+                                        <p:tgtEl>
+                                          <p:spTgt spid="78"/>
+                                        </p:tgtEl>
+                                        <p:attrNameLst>
+                                          <p:attrName>style.visibility</p:attrName>
+                                        </p:attrNameLst>
+                                      </p:cBhvr>
+                                      <p:to>
+                                        <p:strVal val="visible"/>
+                                      </p:to>
+                                    </p:set>
+                                    <p:animEffect transition="in" filter="fade">
+                                      <p:cBhvr>
+                                        <p:cTn id="16" dur="500"/>
+                                        <p:tgtEl>
+                                          <p:spTgt spid="78"/>
+                                        </p:tgtEl>
+                                      </p:cBhvr>
+                                    </p:animEffect>
+                                  </p:childTnLst>
+                                </p:cTn>
+                              </p:par>
+                            </p:childTnLst>
+                          </p:cTn>
+                        </p:par>
+                      </p:childTnLst>
+                    </p:cTn>
+                  </p:par>
+                </p:childTnLst>
+              </p:cTn>
+              <p:prevCondLst>
+                <p:cond evt="onPrev" delay="0">
+                  <p:tgtEl>
+                    <p:sldTgt/>
+                  </p:tgtEl>
+                </p:cond>
+              </p:prevCondLst>
+              <p:nextCondLst>
+                <p:cond evt="onNext" delay="0">
+                  <p:tgtEl>
+                    <p:sldTgt/>
+                  </p:tgtEl>
+                </p:cond>
+              </p:nextCondLst>
+            </p:seq>
+          </p:childTnLst>
+        </p:cTn>
+      </p:par>
+    </p:tnLst>
+  </p:timing>
 </p:sld>
 </file>
 
@@ -33857,6 +39268,244 @@
   <p:clrMapOvr>
     <a:masterClrMapping/>
   </p:clrMapOvr>
+  <mc:AlternateContent xmlns:mc="http://schemas.openxmlformats.org/markup-compatibility/2006">
+    <mc:Choice xmlns:p14="http://schemas.microsoft.com/office/powerpoint/2010/main" Requires="p14">
+      <p:transition spd="med" p14:dur="700">
+        <p:fade/>
+      </p:transition>
+    </mc:Choice>
+    <mc:Fallback>
+      <p:transition spd="med">
+        <p:fade/>
+      </p:transition>
+    </mc:Fallback>
+  </mc:AlternateContent>
+  <p:timing>
+    <p:tnLst>
+      <p:par>
+        <p:cTn id="1" dur="indefinite" restart="never" nodeType="tmRoot">
+          <p:childTnLst>
+            <p:seq concurrent="1" nextAc="seek">
+              <p:cTn id="2" dur="indefinite" nodeType="mainSeq">
+                <p:childTnLst>
+                  <p:par>
+                    <p:cTn id="3" fill="hold">
+                      <p:stCondLst>
+                        <p:cond delay="indefinite"/>
+                        <p:cond evt="onBegin" delay="0">
+                          <p:tn val="2"/>
+                        </p:cond>
+                      </p:stCondLst>
+                      <p:childTnLst>
+                        <p:par>
+                          <p:cTn id="4" fill="hold">
+                            <p:stCondLst>
+                              <p:cond delay="0"/>
+                            </p:stCondLst>
+                            <p:childTnLst>
+                              <p:par>
+                                <p:cTn id="5" presetID="10" presetClass="entr" presetSubtype="0" fill="hold" nodeType="afterEffect">
+                                  <p:stCondLst>
+                                    <p:cond delay="0"/>
+                                  </p:stCondLst>
+                                  <p:childTnLst>
+                                    <p:set>
+                                      <p:cBhvr>
+                                        <p:cTn id="6" dur="1" fill="hold">
+                                          <p:stCondLst>
+                                            <p:cond delay="0"/>
+                                          </p:stCondLst>
+                                        </p:cTn>
+                                        <p:tgtEl>
+                                          <p:spTgt spid="4"/>
+                                        </p:tgtEl>
+                                        <p:attrNameLst>
+                                          <p:attrName>style.visibility</p:attrName>
+                                        </p:attrNameLst>
+                                      </p:cBhvr>
+                                      <p:to>
+                                        <p:strVal val="visible"/>
+                                      </p:to>
+                                    </p:set>
+                                    <p:animEffect transition="in" filter="fade">
+                                      <p:cBhvr>
+                                        <p:cTn id="7" dur="500"/>
+                                        <p:tgtEl>
+                                          <p:spTgt spid="4"/>
+                                        </p:tgtEl>
+                                      </p:cBhvr>
+                                    </p:animEffect>
+                                  </p:childTnLst>
+                                </p:cTn>
+                              </p:par>
+                              <p:par>
+                                <p:cTn id="8" presetID="10" presetClass="entr" presetSubtype="0" fill="hold" nodeType="withEffect">
+                                  <p:stCondLst>
+                                    <p:cond delay="300"/>
+                                  </p:stCondLst>
+                                  <p:childTnLst>
+                                    <p:set>
+                                      <p:cBhvr>
+                                        <p:cTn id="9" dur="1" fill="hold">
+                                          <p:stCondLst>
+                                            <p:cond delay="0"/>
+                                          </p:stCondLst>
+                                        </p:cTn>
+                                        <p:tgtEl>
+                                          <p:spTgt spid="95"/>
+                                        </p:tgtEl>
+                                        <p:attrNameLst>
+                                          <p:attrName>style.visibility</p:attrName>
+                                        </p:attrNameLst>
+                                      </p:cBhvr>
+                                      <p:to>
+                                        <p:strVal val="visible"/>
+                                      </p:to>
+                                    </p:set>
+                                    <p:animEffect transition="in" filter="fade">
+                                      <p:cBhvr>
+                                        <p:cTn id="10" dur="500"/>
+                                        <p:tgtEl>
+                                          <p:spTgt spid="95"/>
+                                        </p:tgtEl>
+                                      </p:cBhvr>
+                                    </p:animEffect>
+                                  </p:childTnLst>
+                                </p:cTn>
+                              </p:par>
+                              <p:par>
+                                <p:cTn id="11" presetID="10" presetClass="entr" presetSubtype="0" fill="hold" nodeType="withEffect">
+                                  <p:stCondLst>
+                                    <p:cond delay="600"/>
+                                  </p:stCondLst>
+                                  <p:childTnLst>
+                                    <p:set>
+                                      <p:cBhvr>
+                                        <p:cTn id="12" dur="1" fill="hold">
+                                          <p:stCondLst>
+                                            <p:cond delay="0"/>
+                                          </p:stCondLst>
+                                        </p:cTn>
+                                        <p:tgtEl>
+                                          <p:spTgt spid="96"/>
+                                        </p:tgtEl>
+                                        <p:attrNameLst>
+                                          <p:attrName>style.visibility</p:attrName>
+                                        </p:attrNameLst>
+                                      </p:cBhvr>
+                                      <p:to>
+                                        <p:strVal val="visible"/>
+                                      </p:to>
+                                    </p:set>
+                                    <p:animEffect transition="in" filter="fade">
+                                      <p:cBhvr>
+                                        <p:cTn id="13" dur="500"/>
+                                        <p:tgtEl>
+                                          <p:spTgt spid="96"/>
+                                        </p:tgtEl>
+                                      </p:cBhvr>
+                                    </p:animEffect>
+                                  </p:childTnLst>
+                                </p:cTn>
+                              </p:par>
+                              <p:par>
+                                <p:cTn id="14" presetID="10" presetClass="entr" presetSubtype="0" fill="hold" nodeType="withEffect">
+                                  <p:stCondLst>
+                                    <p:cond delay="900"/>
+                                  </p:stCondLst>
+                                  <p:childTnLst>
+                                    <p:set>
+                                      <p:cBhvr>
+                                        <p:cTn id="15" dur="1" fill="hold">
+                                          <p:stCondLst>
+                                            <p:cond delay="0"/>
+                                          </p:stCondLst>
+                                        </p:cTn>
+                                        <p:tgtEl>
+                                          <p:spTgt spid="97"/>
+                                        </p:tgtEl>
+                                        <p:attrNameLst>
+                                          <p:attrName>style.visibility</p:attrName>
+                                        </p:attrNameLst>
+                                      </p:cBhvr>
+                                      <p:to>
+                                        <p:strVal val="visible"/>
+                                      </p:to>
+                                    </p:set>
+                                    <p:animEffect transition="in" filter="fade">
+                                      <p:cBhvr>
+                                        <p:cTn id="16" dur="500"/>
+                                        <p:tgtEl>
+                                          <p:spTgt spid="97"/>
+                                        </p:tgtEl>
+                                      </p:cBhvr>
+                                    </p:animEffect>
+                                  </p:childTnLst>
+                                </p:cTn>
+                              </p:par>
+                              <p:par>
+                                <p:cTn id="17" presetID="10" presetClass="entr" presetSubtype="0" fill="hold" nodeType="withEffect">
+                                  <p:stCondLst>
+                                    <p:cond delay="1200"/>
+                                  </p:stCondLst>
+                                  <p:childTnLst>
+                                    <p:set>
+                                      <p:cBhvr>
+                                        <p:cTn id="18" dur="1" fill="hold">
+                                          <p:stCondLst>
+                                            <p:cond delay="0"/>
+                                          </p:stCondLst>
+                                        </p:cTn>
+                                        <p:tgtEl>
+                                          <p:spTgt spid="98"/>
+                                        </p:tgtEl>
+                                        <p:attrNameLst>
+                                          <p:attrName>style.visibility</p:attrName>
+                                        </p:attrNameLst>
+                                      </p:cBhvr>
+                                      <p:to>
+                                        <p:strVal val="visible"/>
+                                      </p:to>
+                                    </p:set>
+                                    <p:animEffect transition="in" filter="fade">
+                                      <p:cBhvr>
+                                        <p:cTn id="19" dur="500"/>
+                                        <p:tgtEl>
+                                          <p:spTgt spid="98"/>
+                                        </p:tgtEl>
+                                      </p:cBhvr>
+                                    </p:animEffect>
+                                  </p:childTnLst>
+                                </p:cTn>
+                              </p:par>
+                            </p:childTnLst>
+                          </p:cTn>
+                        </p:par>
+                      </p:childTnLst>
+                    </p:cTn>
+                  </p:par>
+                </p:childTnLst>
+              </p:cTn>
+              <p:prevCondLst>
+                <p:cond evt="onPrev" delay="0">
+                  <p:tgtEl>
+                    <p:sldTgt/>
+                  </p:tgtEl>
+                </p:cond>
+              </p:prevCondLst>
+              <p:nextCondLst>
+                <p:cond evt="onNext" delay="0">
+                  <p:tgtEl>
+                    <p:sldTgt/>
+                  </p:tgtEl>
+                </p:cond>
+              </p:nextCondLst>
+            </p:seq>
+          </p:childTnLst>
+        </p:cTn>
+      </p:par>
+    </p:tnLst>
+  </p:timing>
 </p:sld>
 </file>
 
